--- a/deck/Stride_Pitch_Deck.pptx
+++ b/deck/Stride_Pitch_Deck.pptx
@@ -5,7 +5,7 @@
     <p:sldMasterId id="2147483648" r:id="rId1"/>
   </p:sldMasterIdLst>
   <p:notesMasterIdLst>
-    <p:notesMasterId r:id="rId29"/>
+    <p:notesMasterId r:id="rId30"/>
   </p:notesMasterIdLst>
   <p:sldIdLst>
     <p:sldId id="256" r:id="rId2"/>
@@ -35,17 +35,18 @@
     <p:sldId id="280" r:id="rId26"/>
     <p:sldId id="281" r:id="rId27"/>
     <p:sldId id="282" r:id="rId28"/>
+    <p:sldId id="283" r:id="rId29"/>
   </p:sldIdLst>
   <p:sldSz cx="12192000" cy="6858000"/>
   <p:notesSz cx="6858000" cy="12192000"/>
   <p:embeddedFontLst>
     <p:embeddedFont>
       <p:font typeface="Barlow" panose="00000500000000000000" pitchFamily="2" charset="0"/>
-      <p:regular r:id="rId30"/>
+      <p:regular r:id="rId31"/>
     </p:embeddedFont>
     <p:embeddedFont>
       <p:font typeface="Barlow Condensed" panose="00000806000000000000" pitchFamily="2" charset="0"/>
-      <p:bold r:id="rId31"/>
+      <p:bold r:id="rId32"/>
     </p:embeddedFont>
   </p:embeddedFontLst>
   <p:defaultTextStyle>
@@ -143,12 +144,12 @@
   <p:extLst>
     <p:ext uri="{521415D9-36F7-43E2-AB2F-B90AF26B5E84}">
       <p14:sectionLst xmlns:p14="http://schemas.microsoft.com/office/powerpoint/2010/main">
-        <p14:section name="Open" id="{5AFAEAA7-0E11-9B9B-D6FC-D40C057405F9}">
+        <p14:section name="Open" id="{FC121F50-C1B5-289B-6D5A-6B10971B3FA1}">
           <p14:sldIdLst>
             <p14:sldId id="256"/>
           </p14:sldIdLst>
         </p14:section>
-        <p14:section name="Problem" id="{894FFFA6-D47F-5ACD-3C72-7D97D7E16A05}">
+        <p14:section name="Problem" id="{7BC4583A-C2A5-20C9-ADFB-994746B9F0A1}">
           <p14:sldIdLst>
             <p14:sldId id="257"/>
             <p14:sldId id="258"/>
@@ -156,7 +157,7 @@
             <p14:sldId id="260"/>
           </p14:sldIdLst>
         </p14:section>
-        <p14:section name="Product" id="{2F2F7561-A02C-27EB-DEF5-B7CBC3D327EC}">
+        <p14:section name="Product" id="{F8A729DE-0063-B2A9-2889-DF62B9B39A4C}">
           <p14:sldIdLst>
             <p14:sldId id="261"/>
             <p14:sldId id="262"/>
@@ -165,28 +166,28 @@
             <p14:sldId id="265"/>
           </p14:sldIdLst>
         </p14:section>
-        <p14:section name="Market" id="{A1734E31-234B-AEA6-8F25-9EE6FAEF1723}">
+        <p14:section name="Market" id="{28817DDF-ED90-6096-F014-AC52C0FE8CDF}">
           <p14:sldIdLst>
             <p14:sldId id="266"/>
             <p14:sldId id="267"/>
             <p14:sldId id="268"/>
           </p14:sldIdLst>
         </p14:section>
-        <p14:section name="Model" id="{2938542C-7FAE-62FB-FCA0-864DE7A6550C}">
+        <p14:section name="Model" id="{D5ECA1C3-03D1-BC53-D620-CDB0BD97118A}">
           <p14:sldIdLst>
             <p14:sldId id="269"/>
             <p14:sldId id="270"/>
             <p14:sldId id="271"/>
           </p14:sldIdLst>
         </p14:section>
-        <p14:section name="Money" id="{AC221B98-6402-EED2-9B4D-88E76BA1E3CD}">
+        <p14:section name="Money" id="{77454514-3043-95CF-DB77-0191458A3FC3}">
           <p14:sldIdLst>
             <p14:sldId id="272"/>
             <p14:sldId id="273"/>
             <p14:sldId id="274"/>
           </p14:sldIdLst>
         </p14:section>
-        <p14:section name="Backup" id="{0825EE85-7604-0F84-9CEA-4116B6ECA0CF}">
+        <p14:section name="Backup" id="{81F8E7DF-8387-21EE-21B7-674BE97A5FAA}">
           <p14:sldIdLst>
             <p14:sldId id="275"/>
             <p14:sldId id="276"/>
@@ -196,6 +197,7 @@
             <p14:sldId id="280"/>
             <p14:sldId id="281"/>
             <p14:sldId id="282"/>
+            <p14:sldId id="283"/>
           </p14:sldIdLst>
         </p14:section>
       </p14:sectionLst>
@@ -303,7 +305,7 @@
           </c:val>
           <c:extLst>
             <c:ext xmlns:c16="http://schemas.microsoft.com/office/drawing/2014/chart" uri="{C3380CC4-5D6E-409C-BE32-E72D297353CC}">
-              <c16:uniqueId val="{00000000-109E-4D39-82FF-4F1F6C86FB72}"/>
+              <c16:uniqueId val="{00000000-AE57-4646-9CC9-B5A1A45B734B}"/>
             </c:ext>
           </c:extLst>
         </c:ser>
@@ -389,7 +391,7 @@
           </c:val>
           <c:extLst>
             <c:ext xmlns:c16="http://schemas.microsoft.com/office/drawing/2014/chart" uri="{C3380CC4-5D6E-409C-BE32-E72D297353CC}">
-              <c16:uniqueId val="{00000001-109E-4D39-82FF-4F1F6C86FB72}"/>
+              <c16:uniqueId val="{00000001-AE57-4646-9CC9-B5A1A45B734B}"/>
             </c:ext>
           </c:extLst>
         </c:ser>
@@ -475,7 +477,7 @@
           </c:val>
           <c:extLst>
             <c:ext xmlns:c16="http://schemas.microsoft.com/office/drawing/2014/chart" uri="{C3380CC4-5D6E-409C-BE32-E72D297353CC}">
-              <c16:uniqueId val="{00000002-109E-4D39-82FF-4F1F6C86FB72}"/>
+              <c16:uniqueId val="{00000002-AE57-4646-9CC9-B5A1A45B734B}"/>
             </c:ext>
           </c:extLst>
         </c:ser>
@@ -733,7 +735,7 @@
           </c:val>
           <c:extLst>
             <c:ext xmlns:c16="http://schemas.microsoft.com/office/drawing/2014/chart" uri="{C3380CC4-5D6E-409C-BE32-E72D297353CC}">
-              <c16:uniqueId val="{00000000-E479-4C9F-BC12-FBFE110C85FD}"/>
+              <c16:uniqueId val="{00000000-747B-4944-8727-444FB280A0D2}"/>
             </c:ext>
           </c:extLst>
         </c:ser>
@@ -855,7 +857,7 @@
           <c:smooth val="0"/>
           <c:extLst>
             <c:ext xmlns:c16="http://schemas.microsoft.com/office/drawing/2014/chart" uri="{C3380CC4-5D6E-409C-BE32-E72D297353CC}">
-              <c16:uniqueId val="{00000001-E479-4C9F-BC12-FBFE110C85FD}"/>
+              <c16:uniqueId val="{00000001-747B-4944-8727-444FB280A0D2}"/>
             </c:ext>
           </c:extLst>
         </c:ser>
@@ -1131,7 +1133,7 @@
           <c:smooth val="0"/>
           <c:extLst>
             <c:ext xmlns:c16="http://schemas.microsoft.com/office/drawing/2014/chart" uri="{C3380CC4-5D6E-409C-BE32-E72D297353CC}">
-              <c16:uniqueId val="{00000000-4C8D-4F1F-82A7-5EFC757CAB15}"/>
+              <c16:uniqueId val="{00000000-133D-4801-844A-6A253C6673B5}"/>
             </c:ext>
           </c:extLst>
         </c:ser>
@@ -1296,7 +1298,7 @@
     </p:spTree>
     <p:extLst>
       <p:ext uri="{BB962C8B-B14F-4D97-AF65-F5344CB8AC3E}">
-        <p14:creationId xmlns:p14="http://schemas.microsoft.com/office/powerpoint/2010/main" val="421062243"/>
+        <p14:creationId xmlns:p14="http://schemas.microsoft.com/office/powerpoint/2010/main" val="3716834216"/>
       </p:ext>
     </p:extLst>
   </p:cSld>
@@ -2768,7 +2770,14 @@
           <a:bodyPr/>
           <a:lstStyle/>
           <a:p>
-            <a:endParaRPr lang="en-US" dirty="0"/>
+            <a:r>
+              <a:rPr lang="en-US" dirty="0"/>
+              <a:t>This is the question I would ask, so let me answer it directly. SponsorUnited has 355 people and has raised nearly 39 million euros. What is left for me.
+They sell a database. It tells a large brand or an agency what the sponsorship market is doing: who sponsors whom, what the activations look like, what a property is worth. It is genuinely good, and it is bought on enterprise seats by organisations with a sponsorship department.
+What it cannot tell you is whether your own deal delivered what was promised, and the reason is structural rather than technical. We write the projected reach onto the deal row at the moment the offer is made, before the athlete has even accepted. The variance you saw on slide nine is that projection against what actually landed. A company that was not in the transaction never saw the promise, so there is nothing for it to reconcile against. They can tell you what the market did. Only the platform that brokered the deal can tell you what your money did.
+And their data is scraped from public posts. Ours comes through the connector the athlete linked in order to get paid by their fans, which is the flywheel slide again: consented, first party, and free to acquire because the athlete came for a different reason.
+One honest point. I am not beating SponsorUnited. If a brand is big enough to buy them, we are not in that conversation. Their 355 people are the cost of an enterprise sales motion, and that motion cannot be run at a two thousand euro deal. Their size is the reason the bottom of this market is still empty.</a:t>
+            </a:r>
           </a:p>
         </p:txBody>
       </p:sp>
@@ -3126,6 +3135,90 @@
             <a:fld id="{F7021451-1387-4CA6-816F-3879F97B5CBC}" type="slidenum">
               <a:rPr lang="en-US"/>
               <a:t>27</a:t>
+            </a:fld>
+            <a:endParaRPr lang="en-US"/>
+          </a:p>
+        </p:txBody>
+      </p:sp>
+    </p:spTree>
+    <p:extLst>
+      <p:ext uri="{BB962C8B-B14F-4D97-AF65-F5344CB8AC3E}">
+        <p14:creationId xmlns:p14="http://schemas.microsoft.com/office/powerpoint/2010/main" val="1024086991"/>
+      </p:ext>
+    </p:extLst>
+  </p:cSld>
+  <p:clrMapOvr>
+    <a:masterClrMapping/>
+  </p:clrMapOvr>
+</p:notes>
+</file>
+
+<file path=ppt/notesSlides/notesSlide28.xml><?xml version="1.0" encoding="utf-8"?>
+<p:notes xmlns:a="http://schemas.openxmlformats.org/drawingml/2006/main" xmlns:r="http://schemas.openxmlformats.org/officeDocument/2006/relationships" xmlns:p="http://schemas.openxmlformats.org/presentationml/2006/main">
+  <p:cSld>
+    <p:spTree>
+      <p:nvGrpSpPr>
+        <p:cNvPr id="1" name=""/>
+        <p:cNvGrpSpPr/>
+        <p:nvPr/>
+      </p:nvGrpSpPr>
+      <p:grpSpPr>
+        <a:xfrm>
+          <a:off x="0" y="0"/>
+          <a:ext cx="0" cy="0"/>
+          <a:chOff x="0" y="0"/>
+          <a:chExt cx="0" cy="0"/>
+        </a:xfrm>
+      </p:grpSpPr>
+      <p:sp>
+        <p:nvSpPr>
+          <p:cNvPr id="2" name="Slide Image Placeholder 1"/>
+          <p:cNvSpPr>
+            <a:spLocks noGrp="1" noRot="1" noChangeAspect="1"/>
+          </p:cNvSpPr>
+          <p:nvPr>
+            <p:ph type="sldImg"/>
+          </p:nvPr>
+        </p:nvSpPr>
+        <p:spPr/>
+      </p:sp>
+      <p:sp>
+        <p:nvSpPr>
+          <p:cNvPr id="3" name="Notes Placeholder 2"/>
+          <p:cNvSpPr>
+            <a:spLocks noGrp="1"/>
+          </p:cNvSpPr>
+          <p:nvPr>
+            <p:ph type="body" idx="1"/>
+          </p:nvPr>
+        </p:nvSpPr>
+        <p:spPr/>
+        <p:txBody>
+          <a:bodyPr/>
+          <a:lstStyle/>
+          <a:p>
+            <a:endParaRPr lang="en-US" dirty="0"/>
+          </a:p>
+        </p:txBody>
+      </p:sp>
+      <p:sp>
+        <p:nvSpPr>
+          <p:cNvPr id="4" name="Slide Number Placeholder 3"/>
+          <p:cNvSpPr>
+            <a:spLocks noGrp="1"/>
+          </p:cNvSpPr>
+          <p:nvPr>
+            <p:ph type="sldNum" sz="quarter" idx="10"/>
+          </p:nvPr>
+        </p:nvSpPr>
+        <p:spPr/>
+        <p:txBody>
+          <a:bodyPr/>
+          <a:lstStyle/>
+          <a:p>
+            <a:fld id="{F7021451-1387-4CA6-816F-3879F97B5CBC}" type="slidenum">
+              <a:rPr lang="en-US"/>
+              <a:t>28</a:t>
             </a:fld>
             <a:endParaRPr lang="en-US"/>
           </a:p>
@@ -13627,7 +13720,7 @@
         <p:spPr>
           <a:xfrm>
             <a:off x="713232" y="3977640"/>
-            <a:ext cx="7863840" cy="365760"/>
+            <a:ext cx="9509760" cy="640080"/>
           </a:xfrm>
           <a:prstGeom prst="rect">
             <a:avLst/>
@@ -13654,7 +13747,7 @@
                 <a:ea typeface="Barlow" pitchFamily="34" charset="-122"/>
                 <a:cs typeface="Barlow" pitchFamily="34" charset="-120"/>
               </a:rPr>
-              <a:t>The four steps, the matching arithmetic, pricing, scenarios, risk, valuation and the admission gate.</a:t>
+              <a:t>The four steps, the matching arithmetic, how we differ from the data companies, pricing, scenarios, risk, valuation and the admission gate.</a:t>
             </a:r>
             <a:endParaRPr lang="en-US" sz="1400" dirty="0"/>
           </a:p>
@@ -15112,7 +15205,7 @@
                 <a:ea typeface="Barlow Condensed" pitchFamily="34" charset="-122"/>
                 <a:cs typeface="Barlow Condensed" pitchFamily="34" charset="-120"/>
               </a:rPr>
-              <a:t>BACKUP, PRICING</a:t>
+              <a:t>BACKUP, THE COMPARABLE THAT GOT LARGE</a:t>
             </a:r>
             <a:endParaRPr lang="en-US" sz="1250" dirty="0"/>
           </a:p>
@@ -15154,7 +15247,7 @@
                 <a:ea typeface="Barlow Condensed" pitchFamily="34" charset="-122"/>
                 <a:cs typeface="Barlow Condensed" pitchFamily="34" charset="-120"/>
               </a:rPr>
-              <a:t>15% sits between the only two published rates in the market</a:t>
+              <a:t>They sell what the market did. We measure what your money did</a:t>
             </a:r>
             <a:endParaRPr lang="en-US" sz="3200" dirty="0"/>
           </a:p>
@@ -15196,7 +15289,7 @@
                 <a:ea typeface="Barlow" pitchFamily="34" charset="-122"/>
                 <a:cs typeface="Barlow" pitchFamily="34" charset="-120"/>
               </a:rPr>
-              <a:t>Both ends of the corridor are real competitor economics, derived from filed accounts.</a:t>
+              <a:t>Slide 13 split the set two and two. This is what the split means to a brand with €2,000 to spend.</a:t>
             </a:r>
             <a:endParaRPr lang="en-US" sz="1400" dirty="0"/>
           </a:p>
@@ -15210,12 +15303,12 @@
         </p:nvSpPr>
         <p:spPr>
           <a:xfrm>
-            <a:off x="713232" y="2194560"/>
-            <a:ext cx="3405530" cy="1783080"/>
+            <a:off x="8421624" y="1956816"/>
+            <a:ext cx="3163824" cy="3255264"/>
           </a:xfrm>
           <a:prstGeom prst="roundRect">
             <a:avLst>
-              <a:gd name="adj" fmla="val 2051"/>
+              <a:gd name="adj" fmla="val 1156"/>
             </a:avLst>
           </a:prstGeom>
           <a:solidFill>
@@ -15237,66 +15330,47 @@
         </p:nvSpPr>
         <p:spPr>
           <a:xfrm>
-            <a:off x="987552" y="2395728"/>
-            <a:ext cx="2856890" cy="237744"/>
-          </a:xfrm>
-          <a:prstGeom prst="rect">
-            <a:avLst/>
-          </a:prstGeom>
-          <a:noFill/>
-          <a:ln/>
-        </p:spPr>
-        <p:txBody>
-          <a:bodyPr wrap="square" lIns="0" tIns="0" rIns="0" bIns="0" rtlCol="0" anchor="t"/>
-          <a:lstStyle/>
-          <a:p>
-            <a:pPr marL="0" indent="0">
-              <a:buNone/>
-            </a:pPr>
-            <a:r>
-              <a:rPr lang="en-US" sz="1300" kern="0" spc="240" dirty="0">
-                <a:solidFill>
-                  <a:srgbClr val="828C9A"/>
+            <a:off x="2404872" y="2066544"/>
+            <a:ext cx="2834640" cy="475488"/>
+          </a:xfrm>
+          <a:prstGeom prst="rect">
+            <a:avLst/>
+          </a:prstGeom>
+          <a:noFill/>
+          <a:ln/>
+        </p:spPr>
+        <p:txBody>
+          <a:bodyPr wrap="square" lIns="0" tIns="0" rIns="0" bIns="0" rtlCol="0" anchor="t"/>
+          <a:lstStyle/>
+          <a:p>
+            <a:pPr marL="0" indent="0">
+              <a:lnSpc>
+                <a:spcPts val="1800"/>
+              </a:lnSpc>
+              <a:buNone/>
+            </a:pPr>
+            <a:r>
+              <a:rPr lang="en-US" sz="1600" kern="0" spc="120" dirty="0">
+                <a:solidFill>
+                  <a:srgbClr val="AEB6C2"/>
                 </a:solidFill>
                 <a:latin typeface="Barlow Condensed" pitchFamily="34" charset="0"/>
                 <a:ea typeface="Barlow Condensed" pitchFamily="34" charset="-122"/>
                 <a:cs typeface="Barlow Condensed" pitchFamily="34" charset="-120"/>
               </a:rPr>
-              <a:t>PATREON</a:t>
-            </a:r>
-            <a:endParaRPr lang="en-US" sz="1300" dirty="0"/>
-          </a:p>
-        </p:txBody>
-      </p:sp>
-      <p:sp>
-        <p:nvSpPr>
-          <p:cNvPr id="7" name="Text 5"/>
-          <p:cNvSpPr txBox="1"/>
-          <p:nvPr/>
-        </p:nvSpPr>
-        <p:spPr>
-          <a:xfrm>
-            <a:off x="987552" y="2670048"/>
-            <a:ext cx="2856890" cy="731520"/>
-          </a:xfrm>
-          <a:prstGeom prst="rect">
-            <a:avLst/>
-          </a:prstGeom>
-          <a:noFill/>
-          <a:ln/>
-        </p:spPr>
-        <p:txBody>
-          <a:bodyPr wrap="square" lIns="0" tIns="0" rIns="0" bIns="0" rtlCol="0" anchor="t"/>
-          <a:lstStyle/>
+              <a:t>Sponsoo,</a:t>
+            </a:r>
+            <a:endParaRPr lang="en-US" sz="1600" dirty="0"/>
+          </a:p>
           <a:p>
             <a:pPr marL="0" indent="0">
               <a:lnSpc>
-                <a:spcPts val="5000"/>
+                <a:spcPts val="1800"/>
               </a:lnSpc>
               <a:buNone/>
             </a:pPr>
             <a:r>
-              <a:rPr lang="en-US" sz="5000" dirty="0">
+              <a:rPr lang="en-US" sz="1600" kern="0" spc="120" dirty="0">
                 <a:solidFill>
                   <a:srgbClr val="AEB6C2"/>
                 </a:solidFill>
@@ -15304,9 +15378,48 @@
                 <a:ea typeface="Barlow Condensed" pitchFamily="34" charset="-122"/>
                 <a:cs typeface="Barlow Condensed" pitchFamily="34" charset="-120"/>
               </a:rPr>
-              <a:t>10%</a:t>
-            </a:r>
-            <a:endParaRPr lang="en-US" sz="5000" dirty="0"/>
+              <a:t>OpenSponsorship</a:t>
+            </a:r>
+            <a:endParaRPr lang="en-US" sz="1600" dirty="0"/>
+          </a:p>
+        </p:txBody>
+      </p:sp>
+      <p:sp>
+        <p:nvSpPr>
+          <p:cNvPr id="7" name="Text 5"/>
+          <p:cNvSpPr txBox="1"/>
+          <p:nvPr/>
+        </p:nvSpPr>
+        <p:spPr>
+          <a:xfrm>
+            <a:off x="2404872" y="2560320"/>
+            <a:ext cx="2834640" cy="219456"/>
+          </a:xfrm>
+          <a:prstGeom prst="rect">
+            <a:avLst/>
+          </a:prstGeom>
+          <a:noFill/>
+          <a:ln/>
+        </p:spPr>
+        <p:txBody>
+          <a:bodyPr wrap="square" lIns="0" tIns="0" rIns="0" bIns="0" rtlCol="0" anchor="t"/>
+          <a:lstStyle/>
+          <a:p>
+            <a:pPr marL="0" indent="0">
+              <a:buNone/>
+            </a:pPr>
+            <a:r>
+              <a:rPr lang="en-US" sz="1050" kern="0" spc="200" dirty="0">
+                <a:solidFill>
+                  <a:srgbClr val="828C9A"/>
+                </a:solidFill>
+                <a:latin typeface="Barlow Condensed" pitchFamily="34" charset="0"/>
+                <a:ea typeface="Barlow Condensed" pitchFamily="34" charset="-122"/>
+                <a:cs typeface="Barlow Condensed" pitchFamily="34" charset="-120"/>
+              </a:rPr>
+              <a:t>THE MARKETPLACES</a:t>
+            </a:r>
+            <a:endParaRPr lang="en-US" sz="1050" dirty="0"/>
           </a:p>
         </p:txBody>
       </p:sp>
@@ -15318,8 +15431,8 @@
         </p:nvSpPr>
         <p:spPr>
           <a:xfrm>
-            <a:off x="987552" y="3438144"/>
-            <a:ext cx="2856890" cy="457200"/>
+            <a:off x="5495544" y="2066544"/>
+            <a:ext cx="2834640" cy="475488"/>
           </a:xfrm>
           <a:prstGeom prst="rect">
             <a:avLst/>
@@ -15333,12 +15446,258 @@
           <a:p>
             <a:pPr marL="0" indent="0">
               <a:lnSpc>
-                <a:spcPts val="1600"/>
+                <a:spcPts val="1800"/>
               </a:lnSpc>
               <a:buNone/>
             </a:pPr>
             <a:r>
-              <a:rPr lang="en-US" sz="1200" dirty="0">
+              <a:rPr lang="en-US" sz="1600" kern="0" spc="120" dirty="0">
+                <a:solidFill>
+                  <a:srgbClr val="AEB6C2"/>
+                </a:solidFill>
+                <a:latin typeface="Barlow Condensed" pitchFamily="34" charset="0"/>
+                <a:ea typeface="Barlow Condensed" pitchFamily="34" charset="-122"/>
+                <a:cs typeface="Barlow Condensed" pitchFamily="34" charset="-120"/>
+              </a:rPr>
+              <a:t>Hookit,</a:t>
+            </a:r>
+            <a:endParaRPr lang="en-US" sz="1600" dirty="0"/>
+          </a:p>
+          <a:p>
+            <a:pPr marL="0" indent="0">
+              <a:lnSpc>
+                <a:spcPts val="1800"/>
+              </a:lnSpc>
+              <a:buNone/>
+            </a:pPr>
+            <a:r>
+              <a:rPr lang="en-US" sz="1600" kern="0" spc="120" dirty="0">
+                <a:solidFill>
+                  <a:srgbClr val="AEB6C2"/>
+                </a:solidFill>
+                <a:latin typeface="Barlow Condensed" pitchFamily="34" charset="0"/>
+                <a:ea typeface="Barlow Condensed" pitchFamily="34" charset="-122"/>
+                <a:cs typeface="Barlow Condensed" pitchFamily="34" charset="-120"/>
+              </a:rPr>
+              <a:t>SponsorUnited</a:t>
+            </a:r>
+            <a:endParaRPr lang="en-US" sz="1600" dirty="0"/>
+          </a:p>
+        </p:txBody>
+      </p:sp>
+      <p:sp>
+        <p:nvSpPr>
+          <p:cNvPr id="9" name="Text 7"/>
+          <p:cNvSpPr txBox="1"/>
+          <p:nvPr/>
+        </p:nvSpPr>
+        <p:spPr>
+          <a:xfrm>
+            <a:off x="5495544" y="2560320"/>
+            <a:ext cx="2834640" cy="219456"/>
+          </a:xfrm>
+          <a:prstGeom prst="rect">
+            <a:avLst/>
+          </a:prstGeom>
+          <a:noFill/>
+          <a:ln/>
+        </p:spPr>
+        <p:txBody>
+          <a:bodyPr wrap="square" lIns="0" tIns="0" rIns="0" bIns="0" rtlCol="0" anchor="t"/>
+          <a:lstStyle/>
+          <a:p>
+            <a:pPr marL="0" indent="0">
+              <a:buNone/>
+            </a:pPr>
+            <a:r>
+              <a:rPr lang="en-US" sz="1050" kern="0" spc="200" dirty="0">
+                <a:solidFill>
+                  <a:srgbClr val="828C9A"/>
+                </a:solidFill>
+                <a:latin typeface="Barlow Condensed" pitchFamily="34" charset="0"/>
+                <a:ea typeface="Barlow Condensed" pitchFamily="34" charset="-122"/>
+                <a:cs typeface="Barlow Condensed" pitchFamily="34" charset="-120"/>
+              </a:rPr>
+              <a:t>THE DATA COMPANIES</a:t>
+            </a:r>
+            <a:endParaRPr lang="en-US" sz="1050" dirty="0"/>
+          </a:p>
+        </p:txBody>
+      </p:sp>
+      <p:sp>
+        <p:nvSpPr>
+          <p:cNvPr id="10" name="Text 8"/>
+          <p:cNvSpPr txBox="1"/>
+          <p:nvPr/>
+        </p:nvSpPr>
+        <p:spPr>
+          <a:xfrm>
+            <a:off x="8586216" y="2066544"/>
+            <a:ext cx="2834640" cy="475488"/>
+          </a:xfrm>
+          <a:prstGeom prst="rect">
+            <a:avLst/>
+          </a:prstGeom>
+          <a:noFill/>
+          <a:ln/>
+        </p:spPr>
+        <p:txBody>
+          <a:bodyPr wrap="square" lIns="0" tIns="0" rIns="0" bIns="0" rtlCol="0" anchor="t"/>
+          <a:lstStyle/>
+          <a:p>
+            <a:pPr marL="0" indent="0">
+              <a:lnSpc>
+                <a:spcPts val="1800"/>
+              </a:lnSpc>
+              <a:buNone/>
+            </a:pPr>
+            <a:r>
+              <a:rPr lang="en-US" sz="1600" kern="0" spc="120" dirty="0">
+                <a:solidFill>
+                  <a:srgbClr val="F2F4F7"/>
+                </a:solidFill>
+                <a:latin typeface="Barlow Condensed" pitchFamily="34" charset="0"/>
+                <a:ea typeface="Barlow Condensed" pitchFamily="34" charset="-122"/>
+                <a:cs typeface="Barlow Condensed" pitchFamily="34" charset="-120"/>
+              </a:rPr>
+              <a:t>Stride</a:t>
+            </a:r>
+            <a:endParaRPr lang="en-US" sz="1600" dirty="0"/>
+          </a:p>
+        </p:txBody>
+      </p:sp>
+      <p:sp>
+        <p:nvSpPr>
+          <p:cNvPr id="11" name="Text 9"/>
+          <p:cNvSpPr txBox="1"/>
+          <p:nvPr/>
+        </p:nvSpPr>
+        <p:spPr>
+          <a:xfrm>
+            <a:off x="8586216" y="2560320"/>
+            <a:ext cx="2834640" cy="219456"/>
+          </a:xfrm>
+          <a:prstGeom prst="rect">
+            <a:avLst/>
+          </a:prstGeom>
+          <a:noFill/>
+          <a:ln/>
+        </p:spPr>
+        <p:txBody>
+          <a:bodyPr wrap="square" lIns="0" tIns="0" rIns="0" bIns="0" rtlCol="0" anchor="t"/>
+          <a:lstStyle/>
+          <a:p>
+            <a:pPr marL="0" indent="0">
+              <a:buNone/>
+            </a:pPr>
+            <a:r>
+              <a:rPr lang="en-US" sz="1050" kern="0" spc="200" dirty="0">
+                <a:solidFill>
+                  <a:srgbClr val="FFB020"/>
+                </a:solidFill>
+                <a:latin typeface="Barlow Condensed" pitchFamily="34" charset="0"/>
+                <a:ea typeface="Barlow Condensed" pitchFamily="34" charset="-122"/>
+                <a:cs typeface="Barlow Condensed" pitchFamily="34" charset="-120"/>
+              </a:rPr>
+              <a:t>BOTH HALVES, ONE LOOP</a:t>
+            </a:r>
+            <a:endParaRPr lang="en-US" sz="1050" dirty="0"/>
+          </a:p>
+        </p:txBody>
+      </p:sp>
+      <p:sp>
+        <p:nvSpPr>
+          <p:cNvPr id="12" name="Shape 10"/>
+          <p:cNvSpPr/>
+          <p:nvPr/>
+        </p:nvSpPr>
+        <p:spPr>
+          <a:xfrm>
+            <a:off x="713232" y="2871216"/>
+            <a:ext cx="10765231" cy="12802"/>
+          </a:xfrm>
+          <a:prstGeom prst="rect">
+            <a:avLst/>
+          </a:prstGeom>
+          <a:solidFill>
+            <a:srgbClr val="262C35"/>
+          </a:solidFill>
+          <a:ln w="12700">
+            <a:solidFill>
+              <a:srgbClr val="333333"/>
+            </a:solidFill>
+            <a:prstDash val="solid"/>
+          </a:ln>
+        </p:spPr>
+      </p:sp>
+      <p:sp>
+        <p:nvSpPr>
+          <p:cNvPr id="13" name="Text 11"/>
+          <p:cNvSpPr txBox="1"/>
+          <p:nvPr/>
+        </p:nvSpPr>
+        <p:spPr>
+          <a:xfrm>
+            <a:off x="713232" y="2999232"/>
+            <a:ext cx="1645920" cy="274320"/>
+          </a:xfrm>
+          <a:prstGeom prst="rect">
+            <a:avLst/>
+          </a:prstGeom>
+          <a:noFill/>
+          <a:ln/>
+        </p:spPr>
+        <p:txBody>
+          <a:bodyPr wrap="square" lIns="0" tIns="0" rIns="0" bIns="0" rtlCol="0" anchor="t"/>
+          <a:lstStyle/>
+          <a:p>
+            <a:pPr marL="0" indent="0">
+              <a:buNone/>
+            </a:pPr>
+            <a:r>
+              <a:rPr lang="en-US" sz="1250" kern="0" spc="220" dirty="0">
+                <a:solidFill>
+                  <a:srgbClr val="828C9A"/>
+                </a:solidFill>
+                <a:latin typeface="Barlow Condensed" pitchFamily="34" charset="0"/>
+                <a:ea typeface="Barlow Condensed" pitchFamily="34" charset="-122"/>
+                <a:cs typeface="Barlow Condensed" pitchFamily="34" charset="-120"/>
+              </a:rPr>
+              <a:t>CHOOSE</a:t>
+            </a:r>
+            <a:endParaRPr lang="en-US" sz="1250" dirty="0"/>
+          </a:p>
+        </p:txBody>
+      </p:sp>
+      <p:sp>
+        <p:nvSpPr>
+          <p:cNvPr id="14" name="Text 12"/>
+          <p:cNvSpPr txBox="1"/>
+          <p:nvPr/>
+        </p:nvSpPr>
+        <p:spPr>
+          <a:xfrm>
+            <a:off x="2404872" y="2980944"/>
+            <a:ext cx="2834640" cy="402336"/>
+          </a:xfrm>
+          <a:prstGeom prst="rect">
+            <a:avLst/>
+          </a:prstGeom>
+          <a:noFill/>
+          <a:ln/>
+        </p:spPr>
+        <p:txBody>
+          <a:bodyPr wrap="square" lIns="0" tIns="0" rIns="0" bIns="0" rtlCol="0" anchor="t"/>
+          <a:lstStyle/>
+          <a:p>
+            <a:pPr marL="0" indent="0">
+              <a:lnSpc>
+                <a:spcPts val="1500"/>
+              </a:lnSpc>
+              <a:buNone/>
+            </a:pPr>
+            <a:r>
+              <a:rPr lang="en-US" sz="1150" dirty="0">
                 <a:solidFill>
                   <a:srgbClr val="828C9A"/>
                 </a:solidFill>
@@ -15346,26 +15705,770 @@
                 <a:ea typeface="Barlow" pitchFamily="34" charset="-122"/>
                 <a:cs typeface="Barlow" pitchFamily="34" charset="-120"/>
               </a:rPr>
-              <a:t>all-in, on filed accounts</a:t>
-            </a:r>
-            <a:endParaRPr lang="en-US" sz="1200" dirty="0"/>
-          </a:p>
-        </p:txBody>
-      </p:sp>
-      <p:sp>
-        <p:nvSpPr>
-          <p:cNvPr id="9" name="Shape 7"/>
+              <a:t>Browse a roster. Follower counts, self reported</a:t>
+            </a:r>
+            <a:endParaRPr lang="en-US" sz="1150" dirty="0"/>
+          </a:p>
+        </p:txBody>
+      </p:sp>
+      <p:sp>
+        <p:nvSpPr>
+          <p:cNvPr id="15" name="Text 13"/>
+          <p:cNvSpPr txBox="1"/>
+          <p:nvPr/>
+        </p:nvSpPr>
+        <p:spPr>
+          <a:xfrm>
+            <a:off x="5495544" y="2980944"/>
+            <a:ext cx="2834640" cy="402336"/>
+          </a:xfrm>
+          <a:prstGeom prst="rect">
+            <a:avLst/>
+          </a:prstGeom>
+          <a:noFill/>
+          <a:ln/>
+        </p:spPr>
+        <p:txBody>
+          <a:bodyPr wrap="square" lIns="0" tIns="0" rIns="0" bIns="0" rtlCol="0" anchor="t"/>
+          <a:lstStyle/>
+          <a:p>
+            <a:pPr marL="0" indent="0">
+              <a:lnSpc>
+                <a:spcPts val="1500"/>
+              </a:lnSpc>
+              <a:buNone/>
+            </a:pPr>
+            <a:r>
+              <a:rPr lang="en-US" sz="1150" dirty="0">
+                <a:solidFill>
+                  <a:srgbClr val="828C9A"/>
+                </a:solidFill>
+                <a:latin typeface="Barlow" pitchFamily="34" charset="0"/>
+                <a:ea typeface="Barlow" pitchFamily="34" charset="-122"/>
+                <a:cs typeface="Barlow" pitchFamily="34" charset="-120"/>
+              </a:rPr>
+              <a:t>Market intelligence: who sponsors whom, at scale</a:t>
+            </a:r>
+            <a:endParaRPr lang="en-US" sz="1150" dirty="0"/>
+          </a:p>
+        </p:txBody>
+      </p:sp>
+      <p:sp>
+        <p:nvSpPr>
+          <p:cNvPr id="16" name="Text 14"/>
+          <p:cNvSpPr txBox="1"/>
+          <p:nvPr/>
+        </p:nvSpPr>
+        <p:spPr>
+          <a:xfrm>
+            <a:off x="8586216" y="2980944"/>
+            <a:ext cx="2834640" cy="402336"/>
+          </a:xfrm>
+          <a:prstGeom prst="rect">
+            <a:avLst/>
+          </a:prstGeom>
+          <a:noFill/>
+          <a:ln/>
+        </p:spPr>
+        <p:txBody>
+          <a:bodyPr wrap="square" lIns="0" tIns="0" rIns="0" bIns="0" rtlCol="0" anchor="t"/>
+          <a:lstStyle/>
+          <a:p>
+            <a:pPr marL="0" indent="0">
+              <a:lnSpc>
+                <a:spcPts val="1500"/>
+              </a:lnSpc>
+              <a:buNone/>
+            </a:pPr>
+            <a:r>
+              <a:rPr lang="en-US" sz="1150" dirty="0">
+                <a:solidFill>
+                  <a:srgbClr val="F2F4F7"/>
+                </a:solidFill>
+                <a:latin typeface="Barlow" pitchFamily="34" charset="0"/>
+                <a:ea typeface="Barlow" pitchFamily="34" charset="-122"/>
+                <a:cs typeface="Barlow" pitchFamily="34" charset="-120"/>
+              </a:rPr>
+              <a:t>Ranked against your brief, every score decomposed</a:t>
+            </a:r>
+            <a:endParaRPr lang="en-US" sz="1150" dirty="0"/>
+          </a:p>
+        </p:txBody>
+      </p:sp>
+      <p:sp>
+        <p:nvSpPr>
+          <p:cNvPr id="17" name="Text 15"/>
+          <p:cNvSpPr txBox="1"/>
+          <p:nvPr/>
+        </p:nvSpPr>
+        <p:spPr>
+          <a:xfrm>
+            <a:off x="713232" y="3447288"/>
+            <a:ext cx="1645920" cy="274320"/>
+          </a:xfrm>
+          <a:prstGeom prst="rect">
+            <a:avLst/>
+          </a:prstGeom>
+          <a:noFill/>
+          <a:ln/>
+        </p:spPr>
+        <p:txBody>
+          <a:bodyPr wrap="square" lIns="0" tIns="0" rIns="0" bIns="0" rtlCol="0" anchor="t"/>
+          <a:lstStyle/>
+          <a:p>
+            <a:pPr marL="0" indent="0">
+              <a:buNone/>
+            </a:pPr>
+            <a:r>
+              <a:rPr lang="en-US" sz="1250" kern="0" spc="220" dirty="0">
+                <a:solidFill>
+                  <a:srgbClr val="828C9A"/>
+                </a:solidFill>
+                <a:latin typeface="Barlow Condensed" pitchFamily="34" charset="0"/>
+                <a:ea typeface="Barlow Condensed" pitchFamily="34" charset="-122"/>
+                <a:cs typeface="Barlow Condensed" pitchFamily="34" charset="-120"/>
+              </a:rPr>
+              <a:t>PRICE</a:t>
+            </a:r>
+            <a:endParaRPr lang="en-US" sz="1250" dirty="0"/>
+          </a:p>
+        </p:txBody>
+      </p:sp>
+      <p:sp>
+        <p:nvSpPr>
+          <p:cNvPr id="18" name="Text 16"/>
+          <p:cNvSpPr txBox="1"/>
+          <p:nvPr/>
+        </p:nvSpPr>
+        <p:spPr>
+          <a:xfrm>
+            <a:off x="2404872" y="3429000"/>
+            <a:ext cx="2834640" cy="402336"/>
+          </a:xfrm>
+          <a:prstGeom prst="rect">
+            <a:avLst/>
+          </a:prstGeom>
+          <a:noFill/>
+          <a:ln/>
+        </p:spPr>
+        <p:txBody>
+          <a:bodyPr wrap="square" lIns="0" tIns="0" rIns="0" bIns="0" rtlCol="0" anchor="t"/>
+          <a:lstStyle/>
+          <a:p>
+            <a:pPr marL="0" indent="0">
+              <a:lnSpc>
+                <a:spcPts val="1500"/>
+              </a:lnSpc>
+              <a:buNone/>
+            </a:pPr>
+            <a:r>
+              <a:rPr lang="en-US" sz="1150" dirty="0">
+                <a:solidFill>
+                  <a:srgbClr val="828C9A"/>
+                </a:solidFill>
+                <a:latin typeface="Barlow" pitchFamily="34" charset="0"/>
+                <a:ea typeface="Barlow" pitchFamily="34" charset="-122"/>
+                <a:cs typeface="Barlow" pitchFamily="34" charset="-120"/>
+              </a:rPr>
+              <a:t>You negotiate. No benchmark</a:t>
+            </a:r>
+            <a:endParaRPr lang="en-US" sz="1150" dirty="0"/>
+          </a:p>
+        </p:txBody>
+      </p:sp>
+      <p:sp>
+        <p:nvSpPr>
+          <p:cNvPr id="19" name="Text 17"/>
+          <p:cNvSpPr txBox="1"/>
+          <p:nvPr/>
+        </p:nvSpPr>
+        <p:spPr>
+          <a:xfrm>
+            <a:off x="5495544" y="3429000"/>
+            <a:ext cx="2834640" cy="402336"/>
+          </a:xfrm>
+          <a:prstGeom prst="rect">
+            <a:avLst/>
+          </a:prstGeom>
+          <a:noFill/>
+          <a:ln/>
+        </p:spPr>
+        <p:txBody>
+          <a:bodyPr wrap="square" lIns="0" tIns="0" rIns="0" bIns="0" rtlCol="0" anchor="t"/>
+          <a:lstStyle/>
+          <a:p>
+            <a:pPr marL="0" indent="0">
+              <a:lnSpc>
+                <a:spcPts val="1500"/>
+              </a:lnSpc>
+              <a:buNone/>
+            </a:pPr>
+            <a:r>
+              <a:rPr lang="en-US" sz="1150" dirty="0">
+                <a:solidFill>
+                  <a:srgbClr val="828C9A"/>
+                </a:solidFill>
+                <a:latin typeface="Barlow" pitchFamily="34" charset="0"/>
+                <a:ea typeface="Barlow" pitchFamily="34" charset="-122"/>
+                <a:cs typeface="Barlow" pitchFamily="34" charset="-120"/>
+              </a:rPr>
+              <a:t>A media value estimate for a property</a:t>
+            </a:r>
+            <a:endParaRPr lang="en-US" sz="1150" dirty="0"/>
+          </a:p>
+        </p:txBody>
+      </p:sp>
+      <p:sp>
+        <p:nvSpPr>
+          <p:cNvPr id="20" name="Text 18"/>
+          <p:cNvSpPr txBox="1"/>
+          <p:nvPr/>
+        </p:nvSpPr>
+        <p:spPr>
+          <a:xfrm>
+            <a:off x="8586216" y="3429000"/>
+            <a:ext cx="2834640" cy="402336"/>
+          </a:xfrm>
+          <a:prstGeom prst="rect">
+            <a:avLst/>
+          </a:prstGeom>
+          <a:noFill/>
+          <a:ln/>
+        </p:spPr>
+        <p:txBody>
+          <a:bodyPr wrap="square" lIns="0" tIns="0" rIns="0" bIns="0" rtlCol="0" anchor="t"/>
+          <a:lstStyle/>
+          <a:p>
+            <a:pPr marL="0" indent="0">
+              <a:lnSpc>
+                <a:spcPts val="1500"/>
+              </a:lnSpc>
+              <a:buNone/>
+            </a:pPr>
+            <a:r>
+              <a:rPr lang="en-US" sz="1150" dirty="0">
+                <a:solidFill>
+                  <a:srgbClr val="F2F4F7"/>
+                </a:solidFill>
+                <a:latin typeface="Barlow" pitchFamily="34" charset="0"/>
+                <a:ea typeface="Barlow" pitchFamily="34" charset="-122"/>
+                <a:cs typeface="Barlow" pitchFamily="34" charset="-120"/>
+              </a:rPr>
+              <a:t>A reach projection attached to the offer itself</a:t>
+            </a:r>
+            <a:endParaRPr lang="en-US" sz="1150" dirty="0"/>
+          </a:p>
+        </p:txBody>
+      </p:sp>
+      <p:sp>
+        <p:nvSpPr>
+          <p:cNvPr id="21" name="Text 19"/>
+          <p:cNvSpPr txBox="1"/>
+          <p:nvPr/>
+        </p:nvSpPr>
+        <p:spPr>
+          <a:xfrm>
+            <a:off x="713232" y="3895344"/>
+            <a:ext cx="1645920" cy="274320"/>
+          </a:xfrm>
+          <a:prstGeom prst="rect">
+            <a:avLst/>
+          </a:prstGeom>
+          <a:noFill/>
+          <a:ln/>
+        </p:spPr>
+        <p:txBody>
+          <a:bodyPr wrap="square" lIns="0" tIns="0" rIns="0" bIns="0" rtlCol="0" anchor="t"/>
+          <a:lstStyle/>
+          <a:p>
+            <a:pPr marL="0" indent="0">
+              <a:buNone/>
+            </a:pPr>
+            <a:r>
+              <a:rPr lang="en-US" sz="1250" kern="0" spc="220" dirty="0">
+                <a:solidFill>
+                  <a:srgbClr val="828C9A"/>
+                </a:solidFill>
+                <a:latin typeface="Barlow Condensed" pitchFamily="34" charset="0"/>
+                <a:ea typeface="Barlow Condensed" pitchFamily="34" charset="-122"/>
+                <a:cs typeface="Barlow Condensed" pitchFamily="34" charset="-120"/>
+              </a:rPr>
+              <a:t>VERIFY</a:t>
+            </a:r>
+            <a:endParaRPr lang="en-US" sz="1250" dirty="0"/>
+          </a:p>
+        </p:txBody>
+      </p:sp>
+      <p:sp>
+        <p:nvSpPr>
+          <p:cNvPr id="22" name="Text 20"/>
+          <p:cNvSpPr txBox="1"/>
+          <p:nvPr/>
+        </p:nvSpPr>
+        <p:spPr>
+          <a:xfrm>
+            <a:off x="2404872" y="3877056"/>
+            <a:ext cx="2834640" cy="402336"/>
+          </a:xfrm>
+          <a:prstGeom prst="rect">
+            <a:avLst/>
+          </a:prstGeom>
+          <a:noFill/>
+          <a:ln/>
+        </p:spPr>
+        <p:txBody>
+          <a:bodyPr wrap="square" lIns="0" tIns="0" rIns="0" bIns="0" rtlCol="0" anchor="t"/>
+          <a:lstStyle/>
+          <a:p>
+            <a:pPr marL="0" indent="0">
+              <a:lnSpc>
+                <a:spcPts val="1500"/>
+              </a:lnSpc>
+              <a:buNone/>
+            </a:pPr>
+            <a:r>
+              <a:rPr lang="en-US" sz="1150" dirty="0">
+                <a:solidFill>
+                  <a:srgbClr val="828C9A"/>
+                </a:solidFill>
+                <a:latin typeface="Barlow" pitchFamily="34" charset="0"/>
+                <a:ea typeface="Barlow" pitchFamily="34" charset="-122"/>
+                <a:cs typeface="Barlow" pitchFamily="34" charset="-120"/>
+              </a:rPr>
+              <a:t>Screenshots from the athlete</a:t>
+            </a:r>
+            <a:endParaRPr lang="en-US" sz="1150" dirty="0"/>
+          </a:p>
+        </p:txBody>
+      </p:sp>
+      <p:sp>
+        <p:nvSpPr>
+          <p:cNvPr id="23" name="Text 21"/>
+          <p:cNvSpPr txBox="1"/>
+          <p:nvPr/>
+        </p:nvSpPr>
+        <p:spPr>
+          <a:xfrm>
+            <a:off x="5495544" y="3877056"/>
+            <a:ext cx="2834640" cy="402336"/>
+          </a:xfrm>
+          <a:prstGeom prst="rect">
+            <a:avLst/>
+          </a:prstGeom>
+          <a:noFill/>
+          <a:ln/>
+        </p:spPr>
+        <p:txBody>
+          <a:bodyPr wrap="square" lIns="0" tIns="0" rIns="0" bIns="0" rtlCol="0" anchor="t"/>
+          <a:lstStyle/>
+          <a:p>
+            <a:pPr marL="0" indent="0">
+              <a:lnSpc>
+                <a:spcPts val="1500"/>
+              </a:lnSpc>
+              <a:buNone/>
+            </a:pPr>
+            <a:r>
+              <a:rPr lang="en-US" sz="1150" dirty="0">
+                <a:solidFill>
+                  <a:srgbClr val="828C9A"/>
+                </a:solidFill>
+                <a:latin typeface="Barlow" pitchFamily="34" charset="0"/>
+                <a:ea typeface="Barlow" pitchFamily="34" charset="-122"/>
+                <a:cs typeface="Barlow" pitchFamily="34" charset="-120"/>
+              </a:rPr>
+              <a:t>What the market did, from public posts</a:t>
+            </a:r>
+            <a:endParaRPr lang="en-US" sz="1150" dirty="0"/>
+          </a:p>
+        </p:txBody>
+      </p:sp>
+      <p:sp>
+        <p:nvSpPr>
+          <p:cNvPr id="24" name="Text 22"/>
+          <p:cNvSpPr txBox="1"/>
+          <p:nvPr/>
+        </p:nvSpPr>
+        <p:spPr>
+          <a:xfrm>
+            <a:off x="8586216" y="3877056"/>
+            <a:ext cx="2834640" cy="402336"/>
+          </a:xfrm>
+          <a:prstGeom prst="rect">
+            <a:avLst/>
+          </a:prstGeom>
+          <a:noFill/>
+          <a:ln/>
+        </p:spPr>
+        <p:txBody>
+          <a:bodyPr wrap="square" lIns="0" tIns="0" rIns="0" bIns="0" rtlCol="0" anchor="t"/>
+          <a:lstStyle/>
+          <a:p>
+            <a:pPr marL="0" indent="0">
+              <a:lnSpc>
+                <a:spcPts val="1500"/>
+              </a:lnSpc>
+              <a:buNone/>
+            </a:pPr>
+            <a:r>
+              <a:rPr lang="en-US" sz="1150" dirty="0">
+                <a:solidFill>
+                  <a:srgbClr val="F2F4F7"/>
+                </a:solidFill>
+                <a:latin typeface="Barlow" pitchFamily="34" charset="0"/>
+                <a:ea typeface="Barlow" pitchFamily="34" charset="-122"/>
+                <a:cs typeface="Barlow" pitchFamily="34" charset="-120"/>
+              </a:rPr>
+              <a:t>Delivered against that projection, per athlete</a:t>
+            </a:r>
+            <a:endParaRPr lang="en-US" sz="1150" dirty="0"/>
+          </a:p>
+        </p:txBody>
+      </p:sp>
+      <p:sp>
+        <p:nvSpPr>
+          <p:cNvPr id="25" name="Text 23"/>
+          <p:cNvSpPr txBox="1"/>
+          <p:nvPr/>
+        </p:nvSpPr>
+        <p:spPr>
+          <a:xfrm>
+            <a:off x="713232" y="4343400"/>
+            <a:ext cx="1645920" cy="274320"/>
+          </a:xfrm>
+          <a:prstGeom prst="rect">
+            <a:avLst/>
+          </a:prstGeom>
+          <a:noFill/>
+          <a:ln/>
+        </p:spPr>
+        <p:txBody>
+          <a:bodyPr wrap="square" lIns="0" tIns="0" rIns="0" bIns="0" rtlCol="0" anchor="t"/>
+          <a:lstStyle/>
+          <a:p>
+            <a:pPr marL="0" indent="0">
+              <a:buNone/>
+            </a:pPr>
+            <a:r>
+              <a:rPr lang="en-US" sz="1250" kern="0" spc="220" dirty="0">
+                <a:solidFill>
+                  <a:srgbClr val="828C9A"/>
+                </a:solidFill>
+                <a:latin typeface="Barlow Condensed" pitchFamily="34" charset="0"/>
+                <a:ea typeface="Barlow Condensed" pitchFamily="34" charset="-122"/>
+                <a:cs typeface="Barlow Condensed" pitchFamily="34" charset="-120"/>
+              </a:rPr>
+              <a:t>THE DATA</a:t>
+            </a:r>
+            <a:endParaRPr lang="en-US" sz="1250" dirty="0"/>
+          </a:p>
+        </p:txBody>
+      </p:sp>
+      <p:sp>
+        <p:nvSpPr>
+          <p:cNvPr id="26" name="Text 24"/>
+          <p:cNvSpPr txBox="1"/>
+          <p:nvPr/>
+        </p:nvSpPr>
+        <p:spPr>
+          <a:xfrm>
+            <a:off x="2404872" y="4325112"/>
+            <a:ext cx="2834640" cy="402336"/>
+          </a:xfrm>
+          <a:prstGeom prst="rect">
+            <a:avLst/>
+          </a:prstGeom>
+          <a:noFill/>
+          <a:ln/>
+        </p:spPr>
+        <p:txBody>
+          <a:bodyPr wrap="square" lIns="0" tIns="0" rIns="0" bIns="0" rtlCol="0" anchor="t"/>
+          <a:lstStyle/>
+          <a:p>
+            <a:pPr marL="0" indent="0">
+              <a:lnSpc>
+                <a:spcPts val="1500"/>
+              </a:lnSpc>
+              <a:buNone/>
+            </a:pPr>
+            <a:r>
+              <a:rPr lang="en-US" sz="1150" dirty="0">
+                <a:solidFill>
+                  <a:srgbClr val="828C9A"/>
+                </a:solidFill>
+                <a:latin typeface="Barlow" pitchFamily="34" charset="0"/>
+                <a:ea typeface="Barlow" pitchFamily="34" charset="-122"/>
+                <a:cs typeface="Barlow" pitchFamily="34" charset="-120"/>
+              </a:rPr>
+              <a:t>The athlete's own claim</a:t>
+            </a:r>
+            <a:endParaRPr lang="en-US" sz="1150" dirty="0"/>
+          </a:p>
+        </p:txBody>
+      </p:sp>
+      <p:sp>
+        <p:nvSpPr>
+          <p:cNvPr id="27" name="Text 25"/>
+          <p:cNvSpPr txBox="1"/>
+          <p:nvPr/>
+        </p:nvSpPr>
+        <p:spPr>
+          <a:xfrm>
+            <a:off x="5495544" y="4325112"/>
+            <a:ext cx="2834640" cy="402336"/>
+          </a:xfrm>
+          <a:prstGeom prst="rect">
+            <a:avLst/>
+          </a:prstGeom>
+          <a:noFill/>
+          <a:ln/>
+        </p:spPr>
+        <p:txBody>
+          <a:bodyPr wrap="square" lIns="0" tIns="0" rIns="0" bIns="0" rtlCol="0" anchor="t"/>
+          <a:lstStyle/>
+          <a:p>
+            <a:pPr marL="0" indent="0">
+              <a:lnSpc>
+                <a:spcPts val="1500"/>
+              </a:lnSpc>
+              <a:buNone/>
+            </a:pPr>
+            <a:r>
+              <a:rPr lang="en-US" sz="1150" dirty="0">
+                <a:solidFill>
+                  <a:srgbClr val="828C9A"/>
+                </a:solidFill>
+                <a:latin typeface="Barlow" pitchFamily="34" charset="0"/>
+                <a:ea typeface="Barlow" pitchFamily="34" charset="-122"/>
+                <a:cs typeface="Barlow" pitchFamily="34" charset="-120"/>
+              </a:rPr>
+              <a:t>Scraped, public, third party</a:t>
+            </a:r>
+            <a:endParaRPr lang="en-US" sz="1150" dirty="0"/>
+          </a:p>
+        </p:txBody>
+      </p:sp>
+      <p:sp>
+        <p:nvSpPr>
+          <p:cNvPr id="28" name="Text 26"/>
+          <p:cNvSpPr txBox="1"/>
+          <p:nvPr/>
+        </p:nvSpPr>
+        <p:spPr>
+          <a:xfrm>
+            <a:off x="8586216" y="4325112"/>
+            <a:ext cx="2834640" cy="402336"/>
+          </a:xfrm>
+          <a:prstGeom prst="rect">
+            <a:avLst/>
+          </a:prstGeom>
+          <a:noFill/>
+          <a:ln/>
+        </p:spPr>
+        <p:txBody>
+          <a:bodyPr wrap="square" lIns="0" tIns="0" rIns="0" bIns="0" rtlCol="0" anchor="t"/>
+          <a:lstStyle/>
+          <a:p>
+            <a:pPr marL="0" indent="0">
+              <a:lnSpc>
+                <a:spcPts val="1500"/>
+              </a:lnSpc>
+              <a:buNone/>
+            </a:pPr>
+            <a:r>
+              <a:rPr lang="en-US" sz="1150" dirty="0">
+                <a:solidFill>
+                  <a:srgbClr val="F2F4F7"/>
+                </a:solidFill>
+                <a:latin typeface="Barlow" pitchFamily="34" charset="0"/>
+                <a:ea typeface="Barlow" pitchFamily="34" charset="-122"/>
+                <a:cs typeface="Barlow" pitchFamily="34" charset="-120"/>
+              </a:rPr>
+              <a:t>The connector the athlete linked to get paid</a:t>
+            </a:r>
+            <a:endParaRPr lang="en-US" sz="1150" dirty="0"/>
+          </a:p>
+        </p:txBody>
+      </p:sp>
+      <p:sp>
+        <p:nvSpPr>
+          <p:cNvPr id="29" name="Text 27"/>
+          <p:cNvSpPr txBox="1"/>
+          <p:nvPr/>
+        </p:nvSpPr>
+        <p:spPr>
+          <a:xfrm>
+            <a:off x="713232" y="4791456"/>
+            <a:ext cx="1645920" cy="274320"/>
+          </a:xfrm>
+          <a:prstGeom prst="rect">
+            <a:avLst/>
+          </a:prstGeom>
+          <a:noFill/>
+          <a:ln/>
+        </p:spPr>
+        <p:txBody>
+          <a:bodyPr wrap="square" lIns="0" tIns="0" rIns="0" bIns="0" rtlCol="0" anchor="t"/>
+          <a:lstStyle/>
+          <a:p>
+            <a:pPr marL="0" indent="0">
+              <a:buNone/>
+            </a:pPr>
+            <a:r>
+              <a:rPr lang="en-US" sz="1250" kern="0" spc="220" dirty="0">
+                <a:solidFill>
+                  <a:srgbClr val="828C9A"/>
+                </a:solidFill>
+                <a:latin typeface="Barlow Condensed" pitchFamily="34" charset="0"/>
+                <a:ea typeface="Barlow Condensed" pitchFamily="34" charset="-122"/>
+                <a:cs typeface="Barlow Condensed" pitchFamily="34" charset="-120"/>
+              </a:rPr>
+              <a:t>THE BUYER</a:t>
+            </a:r>
+            <a:endParaRPr lang="en-US" sz="1250" dirty="0"/>
+          </a:p>
+        </p:txBody>
+      </p:sp>
+      <p:sp>
+        <p:nvSpPr>
+          <p:cNvPr id="30" name="Text 28"/>
+          <p:cNvSpPr txBox="1"/>
+          <p:nvPr/>
+        </p:nvSpPr>
+        <p:spPr>
+          <a:xfrm>
+            <a:off x="2404872" y="4773168"/>
+            <a:ext cx="2834640" cy="402336"/>
+          </a:xfrm>
+          <a:prstGeom prst="rect">
+            <a:avLst/>
+          </a:prstGeom>
+          <a:noFill/>
+          <a:ln/>
+        </p:spPr>
+        <p:txBody>
+          <a:bodyPr wrap="square" lIns="0" tIns="0" rIns="0" bIns="0" rtlCol="0" anchor="t"/>
+          <a:lstStyle/>
+          <a:p>
+            <a:pPr marL="0" indent="0">
+              <a:lnSpc>
+                <a:spcPts val="1500"/>
+              </a:lnSpc>
+              <a:buNone/>
+            </a:pPr>
+            <a:r>
+              <a:rPr lang="en-US" sz="1150" dirty="0">
+                <a:solidFill>
+                  <a:srgbClr val="828C9A"/>
+                </a:solidFill>
+                <a:latin typeface="Barlow" pitchFamily="34" charset="0"/>
+                <a:ea typeface="Barlow" pitchFamily="34" charset="-122"/>
+                <a:cs typeface="Barlow" pitchFamily="34" charset="-120"/>
+              </a:rPr>
+              <a:t>Brands of any size, thin support</a:t>
+            </a:r>
+            <a:endParaRPr lang="en-US" sz="1150" dirty="0"/>
+          </a:p>
+        </p:txBody>
+      </p:sp>
+      <p:sp>
+        <p:nvSpPr>
+          <p:cNvPr id="31" name="Text 29"/>
+          <p:cNvSpPr txBox="1"/>
+          <p:nvPr/>
+        </p:nvSpPr>
+        <p:spPr>
+          <a:xfrm>
+            <a:off x="5495544" y="4773168"/>
+            <a:ext cx="2834640" cy="402336"/>
+          </a:xfrm>
+          <a:prstGeom prst="rect">
+            <a:avLst/>
+          </a:prstGeom>
+          <a:noFill/>
+          <a:ln/>
+        </p:spPr>
+        <p:txBody>
+          <a:bodyPr wrap="square" lIns="0" tIns="0" rIns="0" bIns="0" rtlCol="0" anchor="t"/>
+          <a:lstStyle/>
+          <a:p>
+            <a:pPr marL="0" indent="0">
+              <a:lnSpc>
+                <a:spcPts val="1500"/>
+              </a:lnSpc>
+              <a:buNone/>
+            </a:pPr>
+            <a:r>
+              <a:rPr lang="en-US" sz="1150" dirty="0">
+                <a:solidFill>
+                  <a:srgbClr val="828C9A"/>
+                </a:solidFill>
+                <a:latin typeface="Barlow" pitchFamily="34" charset="0"/>
+                <a:ea typeface="Barlow" pitchFamily="34" charset="-122"/>
+                <a:cs typeface="Barlow" pitchFamily="34" charset="-120"/>
+              </a:rPr>
+              <a:t>Rights holders, agencies, enterprise seats</a:t>
+            </a:r>
+            <a:endParaRPr lang="en-US" sz="1150" dirty="0"/>
+          </a:p>
+        </p:txBody>
+      </p:sp>
+      <p:sp>
+        <p:nvSpPr>
+          <p:cNvPr id="32" name="Text 30"/>
+          <p:cNvSpPr txBox="1"/>
+          <p:nvPr/>
+        </p:nvSpPr>
+        <p:spPr>
+          <a:xfrm>
+            <a:off x="8586216" y="4773168"/>
+            <a:ext cx="2834640" cy="402336"/>
+          </a:xfrm>
+          <a:prstGeom prst="rect">
+            <a:avLst/>
+          </a:prstGeom>
+          <a:noFill/>
+          <a:ln/>
+        </p:spPr>
+        <p:txBody>
+          <a:bodyPr wrap="square" lIns="0" tIns="0" rIns="0" bIns="0" rtlCol="0" anchor="t"/>
+          <a:lstStyle/>
+          <a:p>
+            <a:pPr marL="0" indent="0">
+              <a:lnSpc>
+                <a:spcPts val="1500"/>
+              </a:lnSpc>
+              <a:buNone/>
+            </a:pPr>
+            <a:r>
+              <a:rPr lang="en-US" sz="1150" dirty="0">
+                <a:solidFill>
+                  <a:srgbClr val="F2F4F7"/>
+                </a:solidFill>
+                <a:latin typeface="Barlow" pitchFamily="34" charset="0"/>
+                <a:ea typeface="Barlow" pitchFamily="34" charset="-122"/>
+                <a:cs typeface="Barlow" pitchFamily="34" charset="-120"/>
+              </a:rPr>
+              <a:t>The clinic, the gym, the dealer</a:t>
+            </a:r>
+            <a:endParaRPr lang="en-US" sz="1150" dirty="0"/>
+          </a:p>
+        </p:txBody>
+      </p:sp>
+      <p:sp>
+        <p:nvSpPr>
+          <p:cNvPr id="33" name="Shape 31"/>
           <p:cNvSpPr/>
           <p:nvPr/>
         </p:nvSpPr>
         <p:spPr>
           <a:xfrm>
-            <a:off x="4393082" y="2194560"/>
-            <a:ext cx="3405530" cy="1783080"/>
+            <a:off x="713232" y="5394960"/>
+            <a:ext cx="10765231" cy="841248"/>
           </a:xfrm>
           <a:prstGeom prst="roundRect">
             <a:avLst>
-              <a:gd name="adj" fmla="val 2051"/>
+              <a:gd name="adj" fmla="val 4348"/>
             </a:avLst>
           </a:prstGeom>
           <a:solidFill>
@@ -15381,53 +16484,53 @@
       </p:sp>
       <p:sp>
         <p:nvSpPr>
-          <p:cNvPr id="10" name="Text 8"/>
-          <p:cNvSpPr txBox="1"/>
-          <p:nvPr/>
-        </p:nvSpPr>
-        <p:spPr>
-          <a:xfrm>
-            <a:off x="4667402" y="2395728"/>
-            <a:ext cx="2856890" cy="237744"/>
-          </a:xfrm>
-          <a:prstGeom prst="rect">
-            <a:avLst/>
-          </a:prstGeom>
-          <a:noFill/>
-          <a:ln/>
-        </p:spPr>
-        <p:txBody>
-          <a:bodyPr wrap="square" lIns="0" tIns="0" rIns="0" bIns="0" rtlCol="0" anchor="t"/>
-          <a:lstStyle/>
-          <a:p>
-            <a:pPr marL="0" indent="0">
-              <a:buNone/>
-            </a:pPr>
-            <a:r>
-              <a:rPr lang="en-US" sz="1300" kern="0" spc="240" dirty="0">
-                <a:solidFill>
-                  <a:srgbClr val="828C9A"/>
+          <p:cNvPr id="34" name="Text 32"/>
+          <p:cNvSpPr txBox="1"/>
+          <p:nvPr/>
+        </p:nvSpPr>
+        <p:spPr>
+          <a:xfrm>
+            <a:off x="987552" y="5577840"/>
+            <a:ext cx="2743200" cy="237744"/>
+          </a:xfrm>
+          <a:prstGeom prst="rect">
+            <a:avLst/>
+          </a:prstGeom>
+          <a:noFill/>
+          <a:ln/>
+        </p:spPr>
+        <p:txBody>
+          <a:bodyPr wrap="square" lIns="0" tIns="0" rIns="0" bIns="0" rtlCol="0" anchor="t"/>
+          <a:lstStyle/>
+          <a:p>
+            <a:pPr marL="0" indent="0">
+              <a:buNone/>
+            </a:pPr>
+            <a:r>
+              <a:rPr lang="en-US" sz="1400" kern="0" spc="240" dirty="0">
+                <a:solidFill>
+                  <a:srgbClr val="FFB020"/>
                 </a:solidFill>
                 <a:latin typeface="Barlow Condensed" pitchFamily="34" charset="0"/>
                 <a:ea typeface="Barlow Condensed" pitchFamily="34" charset="-122"/>
                 <a:cs typeface="Barlow Condensed" pitchFamily="34" charset="-120"/>
               </a:rPr>
-              <a:t>STRIDE</a:t>
-            </a:r>
-            <a:endParaRPr lang="en-US" sz="1300" dirty="0"/>
-          </a:p>
-        </p:txBody>
-      </p:sp>
-      <p:sp>
-        <p:nvSpPr>
-          <p:cNvPr id="11" name="Text 9"/>
-          <p:cNvSpPr txBox="1"/>
-          <p:nvPr/>
-        </p:nvSpPr>
-        <p:spPr>
-          <a:xfrm>
-            <a:off x="4667402" y="2670048"/>
-            <a:ext cx="2856890" cy="731520"/>
+              <a:t>WHY THEY CANNOT FOLLOW</a:t>
+            </a:r>
+            <a:endParaRPr lang="en-US" sz="1400" dirty="0"/>
+          </a:p>
+        </p:txBody>
+      </p:sp>
+      <p:sp>
+        <p:nvSpPr>
+          <p:cNvPr id="35" name="Text 33"/>
+          <p:cNvSpPr txBox="1"/>
+          <p:nvPr/>
+        </p:nvSpPr>
+        <p:spPr>
+          <a:xfrm>
+            <a:off x="3913632" y="5559552"/>
+            <a:ext cx="7290511" cy="548640"/>
           </a:xfrm>
           <a:prstGeom prst="rect">
             <a:avLst/>
@@ -15441,204 +16544,51 @@
           <a:p>
             <a:pPr marL="0" indent="0">
               <a:lnSpc>
-                <a:spcPts val="5000"/>
+                <a:spcPts val="1800"/>
               </a:lnSpc>
               <a:buNone/>
             </a:pPr>
             <a:r>
-              <a:rPr lang="en-US" sz="5000" dirty="0">
-                <a:solidFill>
-                  <a:srgbClr val="FFB020"/>
-                </a:solidFill>
-                <a:latin typeface="Barlow Condensed" pitchFamily="34" charset="0"/>
-                <a:ea typeface="Barlow Condensed" pitchFamily="34" charset="-122"/>
-                <a:cs typeface="Barlow Condensed" pitchFamily="34" charset="-120"/>
-              </a:rPr>
-              <a:t>15%</a:t>
-            </a:r>
-            <a:endParaRPr lang="en-US" sz="5000" dirty="0"/>
-          </a:p>
-        </p:txBody>
-      </p:sp>
-      <p:sp>
-        <p:nvSpPr>
-          <p:cNvPr id="12" name="Text 10"/>
-          <p:cNvSpPr txBox="1"/>
-          <p:nvPr/>
-        </p:nvSpPr>
-        <p:spPr>
-          <a:xfrm>
-            <a:off x="4667402" y="3438144"/>
-            <a:ext cx="2856890" cy="457200"/>
-          </a:xfrm>
-          <a:prstGeom prst="rect">
-            <a:avLst/>
-          </a:prstGeom>
-          <a:noFill/>
-          <a:ln/>
-        </p:spPr>
-        <p:txBody>
-          <a:bodyPr wrap="square" lIns="0" tIns="0" rIns="0" bIns="0" rtlCol="0" anchor="t"/>
-          <a:lstStyle/>
-          <a:p>
-            <a:pPr marL="0" indent="0">
-              <a:lnSpc>
-                <a:spcPts val="1600"/>
-              </a:lnSpc>
-              <a:buNone/>
-            </a:pPr>
-            <a:r>
-              <a:rPr lang="en-US" sz="1200" dirty="0">
-                <a:solidFill>
-                  <a:srgbClr val="828C9A"/>
+              <a:rPr lang="en-US" sz="1350" dirty="0">
+                <a:solidFill>
+                  <a:srgbClr val="AEB6C2"/>
                 </a:solidFill>
                 <a:latin typeface="Barlow" pitchFamily="34" charset="0"/>
                 <a:ea typeface="Barlow" pitchFamily="34" charset="-122"/>
                 <a:cs typeface="Barlow" pitchFamily="34" charset="-120"/>
               </a:rPr>
-              <a:t>flat, and no monthly athlete fee</a:t>
-            </a:r>
-            <a:endParaRPr lang="en-US" sz="1200" dirty="0"/>
-          </a:p>
-        </p:txBody>
-      </p:sp>
-      <p:sp>
-        <p:nvSpPr>
-          <p:cNvPr id="13" name="Shape 11"/>
-          <p:cNvSpPr/>
-          <p:nvPr/>
-        </p:nvSpPr>
-        <p:spPr>
-          <a:xfrm>
-            <a:off x="8072933" y="2194560"/>
-            <a:ext cx="3405530" cy="1783080"/>
-          </a:xfrm>
-          <a:prstGeom prst="roundRect">
-            <a:avLst>
-              <a:gd name="adj" fmla="val 2051"/>
-            </a:avLst>
-          </a:prstGeom>
-          <a:solidFill>
-            <a:srgbClr val="171A20"/>
-          </a:solidFill>
-          <a:ln w="9525">
-            <a:solidFill>
-              <a:srgbClr val="262C35"/>
-            </a:solidFill>
-            <a:prstDash val="solid"/>
-          </a:ln>
-        </p:spPr>
-      </p:sp>
-      <p:sp>
-        <p:nvSpPr>
-          <p:cNvPr id="14" name="Text 12"/>
-          <p:cNvSpPr txBox="1"/>
-          <p:nvPr/>
-        </p:nvSpPr>
-        <p:spPr>
-          <a:xfrm>
-            <a:off x="8347253" y="2395728"/>
-            <a:ext cx="2856890" cy="237744"/>
-          </a:xfrm>
-          <a:prstGeom prst="rect">
-            <a:avLst/>
-          </a:prstGeom>
-          <a:noFill/>
-          <a:ln/>
-        </p:spPr>
-        <p:txBody>
-          <a:bodyPr wrap="square" lIns="0" tIns="0" rIns="0" bIns="0" rtlCol="0" anchor="t"/>
-          <a:lstStyle/>
-          <a:p>
-            <a:pPr marL="0" indent="0">
-              <a:buNone/>
-            </a:pPr>
-            <a:r>
-              <a:rPr lang="en-US" sz="1300" kern="0" spc="240" dirty="0">
-                <a:solidFill>
-                  <a:srgbClr val="828C9A"/>
-                </a:solidFill>
-                <a:latin typeface="Barlow Condensed" pitchFamily="34" charset="0"/>
-                <a:ea typeface="Barlow Condensed" pitchFamily="34" charset="-122"/>
-                <a:cs typeface="Barlow Condensed" pitchFamily="34" charset="-120"/>
-              </a:rPr>
-              <a:t>ONLYFANS</a:t>
-            </a:r>
-            <a:endParaRPr lang="en-US" sz="1300" dirty="0"/>
-          </a:p>
-        </p:txBody>
-      </p:sp>
-      <p:sp>
-        <p:nvSpPr>
-          <p:cNvPr id="15" name="Text 13"/>
-          <p:cNvSpPr txBox="1"/>
-          <p:nvPr/>
-        </p:nvSpPr>
-        <p:spPr>
-          <a:xfrm>
-            <a:off x="8347253" y="2670048"/>
-            <a:ext cx="2856890" cy="731520"/>
-          </a:xfrm>
-          <a:prstGeom prst="rect">
-            <a:avLst/>
-          </a:prstGeom>
-          <a:noFill/>
-          <a:ln/>
-        </p:spPr>
-        <p:txBody>
-          <a:bodyPr wrap="square" lIns="0" tIns="0" rIns="0" bIns="0" rtlCol="0" anchor="t"/>
-          <a:lstStyle/>
-          <a:p>
-            <a:pPr marL="0" indent="0">
-              <a:lnSpc>
-                <a:spcPts val="5000"/>
-              </a:lnSpc>
-              <a:buNone/>
-            </a:pPr>
-            <a:r>
-              <a:rPr lang="en-US" sz="5000" dirty="0">
-                <a:solidFill>
-                  <a:srgbClr val="AEB6C2"/>
-                </a:solidFill>
-                <a:latin typeface="Barlow Condensed" pitchFamily="34" charset="0"/>
-                <a:ea typeface="Barlow Condensed" pitchFamily="34" charset="-122"/>
-                <a:cs typeface="Barlow Condensed" pitchFamily="34" charset="-120"/>
-              </a:rPr>
-              <a:t>20%</a:t>
-            </a:r>
-            <a:endParaRPr lang="en-US" sz="5000" dirty="0"/>
-          </a:p>
-        </p:txBody>
-      </p:sp>
-      <p:sp>
-        <p:nvSpPr>
-          <p:cNvPr id="16" name="Text 14"/>
-          <p:cNvSpPr txBox="1"/>
-          <p:nvPr/>
-        </p:nvSpPr>
-        <p:spPr>
-          <a:xfrm>
-            <a:off x="8347253" y="3438144"/>
-            <a:ext cx="2856890" cy="457200"/>
-          </a:xfrm>
-          <a:prstGeom prst="rect">
-            <a:avLst/>
-          </a:prstGeom>
-          <a:noFill/>
-          <a:ln/>
-        </p:spPr>
-        <p:txBody>
-          <a:bodyPr wrap="square" lIns="0" tIns="0" rIns="0" bIns="0" rtlCol="0" anchor="t"/>
-          <a:lstStyle/>
-          <a:p>
-            <a:pPr marL="0" indent="0">
-              <a:lnSpc>
-                <a:spcPts val="1600"/>
-              </a:lnSpc>
-              <a:buNone/>
-            </a:pPr>
-            <a:r>
-              <a:rPr lang="en-US" sz="1200" dirty="0">
+              <a:t>Delivery is measured against a projection written onto the deal at the moment the offer is made. A company that was not in the transaction never saw the promise, so it has nothing to reconcile against. That is a position, not a feature.</a:t>
+            </a:r>
+            <a:endParaRPr lang="en-US" sz="1350" dirty="0"/>
+          </a:p>
+        </p:txBody>
+      </p:sp>
+      <p:sp>
+        <p:nvSpPr>
+          <p:cNvPr id="36" name="Text 34"/>
+          <p:cNvSpPr txBox="1"/>
+          <p:nvPr/>
+        </p:nvSpPr>
+        <p:spPr>
+          <a:xfrm>
+            <a:off x="713232" y="6382512"/>
+            <a:ext cx="9667951" cy="274320"/>
+          </a:xfrm>
+          <a:prstGeom prst="rect">
+            <a:avLst/>
+          </a:prstGeom>
+          <a:noFill/>
+          <a:ln/>
+        </p:spPr>
+        <p:txBody>
+          <a:bodyPr wrap="square" lIns="0" tIns="0" rIns="0" bIns="0" rtlCol="0" anchor="t"/>
+          <a:lstStyle/>
+          <a:p>
+            <a:pPr marL="0" indent="0">
+              <a:buNone/>
+            </a:pPr>
+            <a:r>
+              <a:rPr lang="en-US" sz="950" dirty="0">
                 <a:solidFill>
                   <a:srgbClr val="828C9A"/>
                 </a:solidFill>
@@ -15646,88 +16596,7 @@
                 <a:ea typeface="Barlow" pitchFamily="34" charset="-122"/>
                 <a:cs typeface="Barlow" pitchFamily="34" charset="-120"/>
               </a:rPr>
-              <a:t>and agencies take 20 to 50% on top</a:t>
-            </a:r>
-            <a:endParaRPr lang="en-US" sz="1200" dirty="0"/>
-          </a:p>
-        </p:txBody>
-      </p:sp>
-      <p:sp>
-        <p:nvSpPr>
-          <p:cNvPr id="17" name="Text 15"/>
-          <p:cNvSpPr txBox="1"/>
-          <p:nvPr/>
-        </p:nvSpPr>
-        <p:spPr>
-          <a:xfrm>
-            <a:off x="713232" y="4224528"/>
-            <a:ext cx="10765231" cy="822960"/>
-          </a:xfrm>
-          <a:prstGeom prst="rect">
-            <a:avLst/>
-          </a:prstGeom>
-          <a:noFill/>
-          <a:ln/>
-        </p:spPr>
-        <p:txBody>
-          <a:bodyPr wrap="square" lIns="0" tIns="0" rIns="0" bIns="0" rtlCol="0" anchor="t"/>
-          <a:lstStyle/>
-          <a:p>
-            <a:pPr marL="0" indent="0">
-              <a:lnSpc>
-                <a:spcPts val="2000"/>
-              </a:lnSpc>
-              <a:buNone/>
-            </a:pPr>
-            <a:r>
-              <a:rPr lang="en-US" sz="1400" dirty="0">
-                <a:solidFill>
-                  <a:srgbClr val="AEB6C2"/>
-                </a:solidFill>
-                <a:latin typeface="Barlow" pitchFamily="34" charset="0"/>
-                <a:ea typeface="Barlow" pitchFamily="34" charset="-122"/>
-                <a:cs typeface="Barlow" pitchFamily="34" charset="-120"/>
-              </a:rPr>
-              <a:t>At 15% we undercut the nearest comparable for any athlete earning under €1,380 a month, which is the entire long tail we are built for. The decision forfeits €0.5M of Y7 revenue against a 20% take, and buys a pricing argument that survives contact with the exact athlete we target.</a:t>
-            </a:r>
-            <a:endParaRPr lang="en-US" sz="1400" dirty="0"/>
-          </a:p>
-        </p:txBody>
-      </p:sp>
-      <p:sp>
-        <p:nvSpPr>
-          <p:cNvPr id="18" name="Text 16"/>
-          <p:cNvSpPr txBox="1"/>
-          <p:nvPr/>
-        </p:nvSpPr>
-        <p:spPr>
-          <a:xfrm>
-            <a:off x="713232" y="6382512"/>
-            <a:ext cx="9667951" cy="274320"/>
-          </a:xfrm>
-          <a:prstGeom prst="rect">
-            <a:avLst/>
-          </a:prstGeom>
-          <a:noFill/>
-          <a:ln/>
-        </p:spPr>
-        <p:txBody>
-          <a:bodyPr wrap="square" lIns="0" tIns="0" rIns="0" bIns="0" rtlCol="0" anchor="t"/>
-          <a:lstStyle/>
-          <a:p>
-            <a:pPr marL="0" indent="0">
-              <a:buNone/>
-            </a:pPr>
-            <a:r>
-              <a:rPr lang="en-US" sz="950" dirty="0">
-                <a:solidFill>
-                  <a:srgbClr val="828C9A"/>
-                </a:solidFill>
-                <a:latin typeface="Barlow" pitchFamily="34" charset="0"/>
-                <a:ea typeface="Barlow" pitchFamily="34" charset="-122"/>
-                <a:cs typeface="Barlow" pitchFamily="34" charset="-120"/>
-              </a:rPr>
-              <a:t>Patreon and OnlyFans published terms and filed accounts; agency rates from published commission guides.</a:t>
+              <a:t>Plan section 3.2.2 on the competitive set and section 4.6 on the buyer. Neither data company executes a deal.</a:t>
             </a:r>
             <a:endParaRPr lang="en-US" sz="950" dirty="0"/>
           </a:p>
@@ -15735,7 +16604,7 @@
       </p:sp>
       <p:sp>
         <p:nvSpPr>
-          <p:cNvPr id="25" name="Slide Number Placeholder 0"/>
+          <p:cNvPr id="37" name="Slide Number Placeholder 0"/>
           <p:cNvSpPr>
             <a:spLocks noGrp="1"/>
           </p:cNvSpPr>
@@ -15839,7 +16708,7 @@
                 <a:ea typeface="Barlow Condensed" pitchFamily="34" charset="-122"/>
                 <a:cs typeface="Barlow Condensed" pitchFamily="34" charset="-120"/>
               </a:rPr>
-              <a:t>BACKUP, SCENARIOS</a:t>
+              <a:t>BACKUP, PRICING</a:t>
             </a:r>
             <a:endParaRPr lang="en-US" sz="1250" dirty="0"/>
           </a:p>
@@ -15881,7 +16750,7 @@
                 <a:ea typeface="Barlow Condensed" pitchFamily="34" charset="-122"/>
                 <a:cs typeface="Barlow Condensed" pitchFamily="34" charset="-120"/>
               </a:rPr>
-              <a:t>The plan survives its own pessimistic case</a:t>
+              <a:t>15% sits between the only two published rates in the market</a:t>
             </a:r>
             <a:endParaRPr lang="en-US" sz="3200" dirty="0"/>
           </a:p>
@@ -15923,7 +16792,7 @@
                 <a:ea typeface="Barlow" pitchFamily="34" charset="-122"/>
                 <a:cs typeface="Barlow" pitchFamily="34" charset="-120"/>
               </a:rPr>
-              <a:t>Each case re-runs the whole model on changed drivers rather than adjusting the base result.</a:t>
+              <a:t>Both ends of the corridor are real competitor economics, derived from filed accounts.</a:t>
             </a:r>
             <a:endParaRPr lang="en-US" sz="1400" dirty="0"/>
           </a:p>
@@ -15931,30 +16800,57 @@
       </p:sp>
       <p:sp>
         <p:nvSpPr>
-          <p:cNvPr id="5" name="Text 3"/>
-          <p:cNvSpPr txBox="1"/>
+          <p:cNvPr id="5" name="Shape 3"/>
+          <p:cNvSpPr/>
           <p:nvPr/>
         </p:nvSpPr>
         <p:spPr>
           <a:xfrm>
             <a:off x="713232" y="2194560"/>
-            <a:ext cx="1645920" cy="237744"/>
-          </a:xfrm>
-          <a:prstGeom prst="rect">
-            <a:avLst/>
-          </a:prstGeom>
-          <a:noFill/>
-          <a:ln/>
-        </p:spPr>
-        <p:txBody>
-          <a:bodyPr wrap="square" lIns="0" tIns="0" rIns="0" bIns="0" rtlCol="0" anchor="t"/>
-          <a:lstStyle/>
-          <a:p>
-            <a:pPr marL="0" indent="0">
-              <a:buNone/>
-            </a:pPr>
-            <a:r>
-              <a:rPr lang="en-US" sz="1100" kern="0" spc="200" dirty="0">
+            <a:ext cx="3405530" cy="1783080"/>
+          </a:xfrm>
+          <a:prstGeom prst="roundRect">
+            <a:avLst>
+              <a:gd name="adj" fmla="val 2051"/>
+            </a:avLst>
+          </a:prstGeom>
+          <a:solidFill>
+            <a:srgbClr val="171A20"/>
+          </a:solidFill>
+          <a:ln w="9525">
+            <a:solidFill>
+              <a:srgbClr val="262C35"/>
+            </a:solidFill>
+            <a:prstDash val="solid"/>
+          </a:ln>
+        </p:spPr>
+      </p:sp>
+      <p:sp>
+        <p:nvSpPr>
+          <p:cNvPr id="6" name="Text 4"/>
+          <p:cNvSpPr txBox="1"/>
+          <p:nvPr/>
+        </p:nvSpPr>
+        <p:spPr>
+          <a:xfrm>
+            <a:off x="987552" y="2395728"/>
+            <a:ext cx="2856890" cy="237744"/>
+          </a:xfrm>
+          <a:prstGeom prst="rect">
+            <a:avLst/>
+          </a:prstGeom>
+          <a:noFill/>
+          <a:ln/>
+        </p:spPr>
+        <p:txBody>
+          <a:bodyPr wrap="square" lIns="0" tIns="0" rIns="0" bIns="0" rtlCol="0" anchor="t"/>
+          <a:lstStyle/>
+          <a:p>
+            <a:pPr marL="0" indent="0">
+              <a:buNone/>
+            </a:pPr>
+            <a:r>
+              <a:rPr lang="en-US" sz="1300" kern="0" spc="240" dirty="0">
                 <a:solidFill>
                   <a:srgbClr val="828C9A"/>
                 </a:solidFill>
@@ -15962,77 +16858,149 @@
                 <a:ea typeface="Barlow Condensed" pitchFamily="34" charset="-122"/>
                 <a:cs typeface="Barlow Condensed" pitchFamily="34" charset="-120"/>
               </a:rPr>
-              <a:t>CASE</a:t>
-            </a:r>
-            <a:endParaRPr lang="en-US" sz="1100" dirty="0"/>
-          </a:p>
-        </p:txBody>
-      </p:sp>
-      <p:sp>
-        <p:nvSpPr>
-          <p:cNvPr id="6" name="Text 4"/>
-          <p:cNvSpPr txBox="1"/>
-          <p:nvPr/>
-        </p:nvSpPr>
-        <p:spPr>
-          <a:xfrm>
-            <a:off x="2450592" y="2194560"/>
-            <a:ext cx="3017520" cy="237744"/>
-          </a:xfrm>
-          <a:prstGeom prst="rect">
-            <a:avLst/>
-          </a:prstGeom>
-          <a:noFill/>
-          <a:ln/>
-        </p:spPr>
-        <p:txBody>
-          <a:bodyPr wrap="square" lIns="0" tIns="0" rIns="0" bIns="0" rtlCol="0" anchor="t"/>
-          <a:lstStyle/>
-          <a:p>
-            <a:pPr marL="0" indent="0">
-              <a:buNone/>
-            </a:pPr>
-            <a:r>
-              <a:rPr lang="en-US" sz="1100" kern="0" spc="200" dirty="0">
-                <a:solidFill>
-                  <a:srgbClr val="828C9A"/>
+              <a:t>PATREON</a:t>
+            </a:r>
+            <a:endParaRPr lang="en-US" sz="1300" dirty="0"/>
+          </a:p>
+        </p:txBody>
+      </p:sp>
+      <p:sp>
+        <p:nvSpPr>
+          <p:cNvPr id="7" name="Text 5"/>
+          <p:cNvSpPr txBox="1"/>
+          <p:nvPr/>
+        </p:nvSpPr>
+        <p:spPr>
+          <a:xfrm>
+            <a:off x="987552" y="2670048"/>
+            <a:ext cx="2856890" cy="731520"/>
+          </a:xfrm>
+          <a:prstGeom prst="rect">
+            <a:avLst/>
+          </a:prstGeom>
+          <a:noFill/>
+          <a:ln/>
+        </p:spPr>
+        <p:txBody>
+          <a:bodyPr wrap="square" lIns="0" tIns="0" rIns="0" bIns="0" rtlCol="0" anchor="t"/>
+          <a:lstStyle/>
+          <a:p>
+            <a:pPr marL="0" indent="0">
+              <a:lnSpc>
+                <a:spcPts val="5000"/>
+              </a:lnSpc>
+              <a:buNone/>
+            </a:pPr>
+            <a:r>
+              <a:rPr lang="en-US" sz="5000" dirty="0">
+                <a:solidFill>
+                  <a:srgbClr val="AEB6C2"/>
                 </a:solidFill>
                 <a:latin typeface="Barlow Condensed" pitchFamily="34" charset="0"/>
                 <a:ea typeface="Barlow Condensed" pitchFamily="34" charset="-122"/>
                 <a:cs typeface="Barlow Condensed" pitchFamily="34" charset="-120"/>
               </a:rPr>
-              <a:t>WHAT CHANGES</a:t>
-            </a:r>
-            <a:endParaRPr lang="en-US" sz="1100" dirty="0"/>
-          </a:p>
-        </p:txBody>
-      </p:sp>
-      <p:sp>
-        <p:nvSpPr>
-          <p:cNvPr id="7" name="Text 5"/>
-          <p:cNvSpPr txBox="1"/>
-          <p:nvPr/>
-        </p:nvSpPr>
-        <p:spPr>
-          <a:xfrm>
-            <a:off x="5559552" y="2194560"/>
-            <a:ext cx="1463040" cy="237744"/>
-          </a:xfrm>
-          <a:prstGeom prst="rect">
-            <a:avLst/>
-          </a:prstGeom>
-          <a:noFill/>
-          <a:ln/>
-        </p:spPr>
-        <p:txBody>
-          <a:bodyPr wrap="square" lIns="0" tIns="0" rIns="0" bIns="0" rtlCol="0" anchor="t"/>
-          <a:lstStyle/>
-          <a:p>
-            <a:pPr marL="0" indent="0">
-              <a:buNone/>
-            </a:pPr>
-            <a:r>
-              <a:rPr lang="en-US" sz="1100" kern="0" spc="200" dirty="0">
+              <a:t>10%</a:t>
+            </a:r>
+            <a:endParaRPr lang="en-US" sz="5000" dirty="0"/>
+          </a:p>
+        </p:txBody>
+      </p:sp>
+      <p:sp>
+        <p:nvSpPr>
+          <p:cNvPr id="8" name="Text 6"/>
+          <p:cNvSpPr txBox="1"/>
+          <p:nvPr/>
+        </p:nvSpPr>
+        <p:spPr>
+          <a:xfrm>
+            <a:off x="987552" y="3438144"/>
+            <a:ext cx="2856890" cy="457200"/>
+          </a:xfrm>
+          <a:prstGeom prst="rect">
+            <a:avLst/>
+          </a:prstGeom>
+          <a:noFill/>
+          <a:ln/>
+        </p:spPr>
+        <p:txBody>
+          <a:bodyPr wrap="square" lIns="0" tIns="0" rIns="0" bIns="0" rtlCol="0" anchor="t"/>
+          <a:lstStyle/>
+          <a:p>
+            <a:pPr marL="0" indent="0">
+              <a:lnSpc>
+                <a:spcPts val="1600"/>
+              </a:lnSpc>
+              <a:buNone/>
+            </a:pPr>
+            <a:r>
+              <a:rPr lang="en-US" sz="1200" dirty="0">
+                <a:solidFill>
+                  <a:srgbClr val="828C9A"/>
+                </a:solidFill>
+                <a:latin typeface="Barlow" pitchFamily="34" charset="0"/>
+                <a:ea typeface="Barlow" pitchFamily="34" charset="-122"/>
+                <a:cs typeface="Barlow" pitchFamily="34" charset="-120"/>
+              </a:rPr>
+              <a:t>all-in, on filed accounts</a:t>
+            </a:r>
+            <a:endParaRPr lang="en-US" sz="1200" dirty="0"/>
+          </a:p>
+        </p:txBody>
+      </p:sp>
+      <p:sp>
+        <p:nvSpPr>
+          <p:cNvPr id="9" name="Shape 7"/>
+          <p:cNvSpPr/>
+          <p:nvPr/>
+        </p:nvSpPr>
+        <p:spPr>
+          <a:xfrm>
+            <a:off x="4393082" y="2194560"/>
+            <a:ext cx="3405530" cy="1783080"/>
+          </a:xfrm>
+          <a:prstGeom prst="roundRect">
+            <a:avLst>
+              <a:gd name="adj" fmla="val 2051"/>
+            </a:avLst>
+          </a:prstGeom>
+          <a:solidFill>
+            <a:srgbClr val="1F242C"/>
+          </a:solidFill>
+          <a:ln w="9525">
+            <a:solidFill>
+              <a:srgbClr val="262C35"/>
+            </a:solidFill>
+            <a:prstDash val="solid"/>
+          </a:ln>
+        </p:spPr>
+      </p:sp>
+      <p:sp>
+        <p:nvSpPr>
+          <p:cNvPr id="10" name="Text 8"/>
+          <p:cNvSpPr txBox="1"/>
+          <p:nvPr/>
+        </p:nvSpPr>
+        <p:spPr>
+          <a:xfrm>
+            <a:off x="4667402" y="2395728"/>
+            <a:ext cx="2856890" cy="237744"/>
+          </a:xfrm>
+          <a:prstGeom prst="rect">
+            <a:avLst/>
+          </a:prstGeom>
+          <a:noFill/>
+          <a:ln/>
+        </p:spPr>
+        <p:txBody>
+          <a:bodyPr wrap="square" lIns="0" tIns="0" rIns="0" bIns="0" rtlCol="0" anchor="t"/>
+          <a:lstStyle/>
+          <a:p>
+            <a:pPr marL="0" indent="0">
+              <a:buNone/>
+            </a:pPr>
+            <a:r>
+              <a:rPr lang="en-US" sz="1300" kern="0" spc="240" dirty="0">
                 <a:solidFill>
                   <a:srgbClr val="828C9A"/>
                 </a:solidFill>
@@ -16040,77 +17008,149 @@
                 <a:ea typeface="Barlow Condensed" pitchFamily="34" charset="-122"/>
                 <a:cs typeface="Barlow Condensed" pitchFamily="34" charset="-120"/>
               </a:rPr>
-              <a:t>Y7 REVENUE</a:t>
-            </a:r>
-            <a:endParaRPr lang="en-US" sz="1100" dirty="0"/>
-          </a:p>
-        </p:txBody>
-      </p:sp>
-      <p:sp>
-        <p:nvSpPr>
-          <p:cNvPr id="8" name="Text 6"/>
-          <p:cNvSpPr txBox="1"/>
-          <p:nvPr/>
-        </p:nvSpPr>
-        <p:spPr>
-          <a:xfrm>
-            <a:off x="7114032" y="2194560"/>
-            <a:ext cx="1463040" cy="237744"/>
-          </a:xfrm>
-          <a:prstGeom prst="rect">
-            <a:avLst/>
-          </a:prstGeom>
-          <a:noFill/>
-          <a:ln/>
-        </p:spPr>
-        <p:txBody>
-          <a:bodyPr wrap="square" lIns="0" tIns="0" rIns="0" bIns="0" rtlCol="0" anchor="t"/>
-          <a:lstStyle/>
-          <a:p>
-            <a:pPr marL="0" indent="0">
-              <a:buNone/>
-            </a:pPr>
-            <a:r>
-              <a:rPr lang="en-US" sz="1100" kern="0" spc="200" dirty="0">
-                <a:solidFill>
-                  <a:srgbClr val="828C9A"/>
+              <a:t>STRIDE</a:t>
+            </a:r>
+            <a:endParaRPr lang="en-US" sz="1300" dirty="0"/>
+          </a:p>
+        </p:txBody>
+      </p:sp>
+      <p:sp>
+        <p:nvSpPr>
+          <p:cNvPr id="11" name="Text 9"/>
+          <p:cNvSpPr txBox="1"/>
+          <p:nvPr/>
+        </p:nvSpPr>
+        <p:spPr>
+          <a:xfrm>
+            <a:off x="4667402" y="2670048"/>
+            <a:ext cx="2856890" cy="731520"/>
+          </a:xfrm>
+          <a:prstGeom prst="rect">
+            <a:avLst/>
+          </a:prstGeom>
+          <a:noFill/>
+          <a:ln/>
+        </p:spPr>
+        <p:txBody>
+          <a:bodyPr wrap="square" lIns="0" tIns="0" rIns="0" bIns="0" rtlCol="0" anchor="t"/>
+          <a:lstStyle/>
+          <a:p>
+            <a:pPr marL="0" indent="0">
+              <a:lnSpc>
+                <a:spcPts val="5000"/>
+              </a:lnSpc>
+              <a:buNone/>
+            </a:pPr>
+            <a:r>
+              <a:rPr lang="en-US" sz="5000" dirty="0">
+                <a:solidFill>
+                  <a:srgbClr val="FFB020"/>
                 </a:solidFill>
                 <a:latin typeface="Barlow Condensed" pitchFamily="34" charset="0"/>
                 <a:ea typeface="Barlow Condensed" pitchFamily="34" charset="-122"/>
                 <a:cs typeface="Barlow Condensed" pitchFamily="34" charset="-120"/>
               </a:rPr>
-              <a:t>Y7 EBITDA</a:t>
-            </a:r>
-            <a:endParaRPr lang="en-US" sz="1100" dirty="0"/>
-          </a:p>
-        </p:txBody>
-      </p:sp>
-      <p:sp>
-        <p:nvSpPr>
-          <p:cNvPr id="9" name="Text 7"/>
-          <p:cNvSpPr txBox="1"/>
-          <p:nvPr/>
-        </p:nvSpPr>
-        <p:spPr>
-          <a:xfrm>
-            <a:off x="8668512" y="2194560"/>
-            <a:ext cx="1463040" cy="237744"/>
-          </a:xfrm>
-          <a:prstGeom prst="rect">
-            <a:avLst/>
-          </a:prstGeom>
-          <a:noFill/>
-          <a:ln/>
-        </p:spPr>
-        <p:txBody>
-          <a:bodyPr wrap="square" lIns="0" tIns="0" rIns="0" bIns="0" rtlCol="0" anchor="t"/>
-          <a:lstStyle/>
-          <a:p>
-            <a:pPr marL="0" indent="0">
-              <a:buNone/>
-            </a:pPr>
-            <a:r>
-              <a:rPr lang="en-US" sz="1100" kern="0" spc="200" dirty="0">
+              <a:t>15%</a:t>
+            </a:r>
+            <a:endParaRPr lang="en-US" sz="5000" dirty="0"/>
+          </a:p>
+        </p:txBody>
+      </p:sp>
+      <p:sp>
+        <p:nvSpPr>
+          <p:cNvPr id="12" name="Text 10"/>
+          <p:cNvSpPr txBox="1"/>
+          <p:nvPr/>
+        </p:nvSpPr>
+        <p:spPr>
+          <a:xfrm>
+            <a:off x="4667402" y="3438144"/>
+            <a:ext cx="2856890" cy="457200"/>
+          </a:xfrm>
+          <a:prstGeom prst="rect">
+            <a:avLst/>
+          </a:prstGeom>
+          <a:noFill/>
+          <a:ln/>
+        </p:spPr>
+        <p:txBody>
+          <a:bodyPr wrap="square" lIns="0" tIns="0" rIns="0" bIns="0" rtlCol="0" anchor="t"/>
+          <a:lstStyle/>
+          <a:p>
+            <a:pPr marL="0" indent="0">
+              <a:lnSpc>
+                <a:spcPts val="1600"/>
+              </a:lnSpc>
+              <a:buNone/>
+            </a:pPr>
+            <a:r>
+              <a:rPr lang="en-US" sz="1200" dirty="0">
+                <a:solidFill>
+                  <a:srgbClr val="828C9A"/>
+                </a:solidFill>
+                <a:latin typeface="Barlow" pitchFamily="34" charset="0"/>
+                <a:ea typeface="Barlow" pitchFamily="34" charset="-122"/>
+                <a:cs typeface="Barlow" pitchFamily="34" charset="-120"/>
+              </a:rPr>
+              <a:t>flat, and no monthly athlete fee</a:t>
+            </a:r>
+            <a:endParaRPr lang="en-US" sz="1200" dirty="0"/>
+          </a:p>
+        </p:txBody>
+      </p:sp>
+      <p:sp>
+        <p:nvSpPr>
+          <p:cNvPr id="13" name="Shape 11"/>
+          <p:cNvSpPr/>
+          <p:nvPr/>
+        </p:nvSpPr>
+        <p:spPr>
+          <a:xfrm>
+            <a:off x="8072933" y="2194560"/>
+            <a:ext cx="3405530" cy="1783080"/>
+          </a:xfrm>
+          <a:prstGeom prst="roundRect">
+            <a:avLst>
+              <a:gd name="adj" fmla="val 2051"/>
+            </a:avLst>
+          </a:prstGeom>
+          <a:solidFill>
+            <a:srgbClr val="171A20"/>
+          </a:solidFill>
+          <a:ln w="9525">
+            <a:solidFill>
+              <a:srgbClr val="262C35"/>
+            </a:solidFill>
+            <a:prstDash val="solid"/>
+          </a:ln>
+        </p:spPr>
+      </p:sp>
+      <p:sp>
+        <p:nvSpPr>
+          <p:cNvPr id="14" name="Text 12"/>
+          <p:cNvSpPr txBox="1"/>
+          <p:nvPr/>
+        </p:nvSpPr>
+        <p:spPr>
+          <a:xfrm>
+            <a:off x="8347253" y="2395728"/>
+            <a:ext cx="2856890" cy="237744"/>
+          </a:xfrm>
+          <a:prstGeom prst="rect">
+            <a:avLst/>
+          </a:prstGeom>
+          <a:noFill/>
+          <a:ln/>
+        </p:spPr>
+        <p:txBody>
+          <a:bodyPr wrap="square" lIns="0" tIns="0" rIns="0" bIns="0" rtlCol="0" anchor="t"/>
+          <a:lstStyle/>
+          <a:p>
+            <a:pPr marL="0" indent="0">
+              <a:buNone/>
+            </a:pPr>
+            <a:r>
+              <a:rPr lang="en-US" sz="1300" kern="0" spc="240" dirty="0">
                 <a:solidFill>
                   <a:srgbClr val="828C9A"/>
                 </a:solidFill>
@@ -16118,141 +17158,83 @@
                 <a:ea typeface="Barlow Condensed" pitchFamily="34" charset="-122"/>
                 <a:cs typeface="Barlow Condensed" pitchFamily="34" charset="-120"/>
               </a:rPr>
-              <a:t>CAPITAL NEED</a:t>
-            </a:r>
-            <a:endParaRPr lang="en-US" sz="1100" dirty="0"/>
-          </a:p>
-        </p:txBody>
-      </p:sp>
-      <p:sp>
-        <p:nvSpPr>
-          <p:cNvPr id="10" name="Text 8"/>
-          <p:cNvSpPr txBox="1"/>
-          <p:nvPr/>
-        </p:nvSpPr>
-        <p:spPr>
-          <a:xfrm>
-            <a:off x="10222992" y="2194560"/>
-            <a:ext cx="1234440" cy="237744"/>
-          </a:xfrm>
-          <a:prstGeom prst="rect">
-            <a:avLst/>
-          </a:prstGeom>
-          <a:noFill/>
-          <a:ln/>
-        </p:spPr>
-        <p:txBody>
-          <a:bodyPr wrap="square" lIns="0" tIns="0" rIns="0" bIns="0" rtlCol="0" anchor="t"/>
-          <a:lstStyle/>
-          <a:p>
-            <a:pPr marL="0" indent="0">
-              <a:buNone/>
-            </a:pPr>
-            <a:r>
-              <a:rPr lang="en-US" sz="1100" kern="0" spc="200" dirty="0">
-                <a:solidFill>
-                  <a:srgbClr val="828C9A"/>
+              <a:t>ONLYFANS</a:t>
+            </a:r>
+            <a:endParaRPr lang="en-US" sz="1300" dirty="0"/>
+          </a:p>
+        </p:txBody>
+      </p:sp>
+      <p:sp>
+        <p:nvSpPr>
+          <p:cNvPr id="15" name="Text 13"/>
+          <p:cNvSpPr txBox="1"/>
+          <p:nvPr/>
+        </p:nvSpPr>
+        <p:spPr>
+          <a:xfrm>
+            <a:off x="8347253" y="2670048"/>
+            <a:ext cx="2856890" cy="731520"/>
+          </a:xfrm>
+          <a:prstGeom prst="rect">
+            <a:avLst/>
+          </a:prstGeom>
+          <a:noFill/>
+          <a:ln/>
+        </p:spPr>
+        <p:txBody>
+          <a:bodyPr wrap="square" lIns="0" tIns="0" rIns="0" bIns="0" rtlCol="0" anchor="t"/>
+          <a:lstStyle/>
+          <a:p>
+            <a:pPr marL="0" indent="0">
+              <a:lnSpc>
+                <a:spcPts val="5000"/>
+              </a:lnSpc>
+              <a:buNone/>
+            </a:pPr>
+            <a:r>
+              <a:rPr lang="en-US" sz="5000" dirty="0">
+                <a:solidFill>
+                  <a:srgbClr val="AEB6C2"/>
                 </a:solidFill>
                 <a:latin typeface="Barlow Condensed" pitchFamily="34" charset="0"/>
                 <a:ea typeface="Barlow Condensed" pitchFamily="34" charset="-122"/>
                 <a:cs typeface="Barlow Condensed" pitchFamily="34" charset="-120"/>
               </a:rPr>
-              <a:t>PROFIT FROM</a:t>
-            </a:r>
-            <a:endParaRPr lang="en-US" sz="1100" dirty="0"/>
-          </a:p>
-        </p:txBody>
-      </p:sp>
-      <p:sp>
-        <p:nvSpPr>
-          <p:cNvPr id="11" name="Shape 9"/>
-          <p:cNvSpPr/>
-          <p:nvPr/>
-        </p:nvSpPr>
-        <p:spPr>
-          <a:xfrm>
-            <a:off x="713232" y="2468880"/>
-            <a:ext cx="10765231" cy="12802"/>
-          </a:xfrm>
-          <a:prstGeom prst="rect">
-            <a:avLst/>
-          </a:prstGeom>
-          <a:solidFill>
-            <a:srgbClr val="262C35"/>
-          </a:solidFill>
-          <a:ln w="12700">
-            <a:solidFill>
-              <a:srgbClr val="333333"/>
-            </a:solidFill>
-            <a:prstDash val="solid"/>
-          </a:ln>
-        </p:spPr>
-      </p:sp>
-      <p:sp>
-        <p:nvSpPr>
-          <p:cNvPr id="12" name="Text 10"/>
-          <p:cNvSpPr txBox="1"/>
-          <p:nvPr/>
-        </p:nvSpPr>
-        <p:spPr>
-          <a:xfrm>
-            <a:off x="713232" y="2596896"/>
-            <a:ext cx="1645920" cy="329184"/>
-          </a:xfrm>
-          <a:prstGeom prst="rect">
-            <a:avLst/>
-          </a:prstGeom>
-          <a:noFill/>
-          <a:ln/>
-        </p:spPr>
-        <p:txBody>
-          <a:bodyPr wrap="square" lIns="0" tIns="0" rIns="0" bIns="0" rtlCol="0" anchor="t"/>
-          <a:lstStyle/>
-          <a:p>
-            <a:pPr marL="0" indent="0">
-              <a:buNone/>
-            </a:pPr>
-            <a:r>
-              <a:rPr lang="en-US" sz="1700" dirty="0">
-                <a:solidFill>
-                  <a:srgbClr val="F2F4F7"/>
-                </a:solidFill>
-                <a:latin typeface="Barlow Condensed" pitchFamily="34" charset="0"/>
-                <a:ea typeface="Barlow Condensed" pitchFamily="34" charset="-122"/>
-                <a:cs typeface="Barlow Condensed" pitchFamily="34" charset="-120"/>
-              </a:rPr>
-              <a:t>Pessimistic</a:t>
-            </a:r>
-            <a:endParaRPr lang="en-US" sz="1700" dirty="0"/>
-          </a:p>
-        </p:txBody>
-      </p:sp>
-      <p:sp>
-        <p:nvSpPr>
-          <p:cNvPr id="13" name="Text 11"/>
-          <p:cNvSpPr txBox="1"/>
-          <p:nvPr/>
-        </p:nvSpPr>
-        <p:spPr>
-          <a:xfrm>
-            <a:off x="2450592" y="2596896"/>
-            <a:ext cx="3017520" cy="329184"/>
-          </a:xfrm>
-          <a:prstGeom prst="rect">
-            <a:avLst/>
-          </a:prstGeom>
-          <a:noFill/>
-          <a:ln/>
-        </p:spPr>
-        <p:txBody>
-          <a:bodyPr wrap="square" lIns="0" tIns="0" rIns="0" bIns="0" rtlCol="0" anchor="t"/>
-          <a:lstStyle/>
-          <a:p>
-            <a:pPr marL="0" indent="0">
-              <a:buNone/>
-            </a:pPr>
-            <a:r>
-              <a:rPr lang="en-US" sz="1250" dirty="0">
+              <a:t>20%</a:t>
+            </a:r>
+            <a:endParaRPr lang="en-US" sz="5000" dirty="0"/>
+          </a:p>
+        </p:txBody>
+      </p:sp>
+      <p:sp>
+        <p:nvSpPr>
+          <p:cNvPr id="16" name="Text 14"/>
+          <p:cNvSpPr txBox="1"/>
+          <p:nvPr/>
+        </p:nvSpPr>
+        <p:spPr>
+          <a:xfrm>
+            <a:off x="8347253" y="3438144"/>
+            <a:ext cx="2856890" cy="457200"/>
+          </a:xfrm>
+          <a:prstGeom prst="rect">
+            <a:avLst/>
+          </a:prstGeom>
+          <a:noFill/>
+          <a:ln/>
+        </p:spPr>
+        <p:txBody>
+          <a:bodyPr wrap="square" lIns="0" tIns="0" rIns="0" bIns="0" rtlCol="0" anchor="t"/>
+          <a:lstStyle/>
+          <a:p>
+            <a:pPr marL="0" indent="0">
+              <a:lnSpc>
+                <a:spcPts val="1600"/>
+              </a:lnSpc>
+              <a:buNone/>
+            </a:pPr>
+            <a:r>
+              <a:rPr lang="en-US" sz="1200" dirty="0">
                 <a:solidFill>
                   <a:srgbClr val="828C9A"/>
                 </a:solidFill>
@@ -16260,126 +17242,9 @@
                 <a:ea typeface="Barlow" pitchFamily="34" charset="-122"/>
                 <a:cs typeface="Barlow" pitchFamily="34" charset="-120"/>
               </a:rPr>
-              <a:t>Fans/athlete −25%, monetise −20%</a:t>
-            </a:r>
-            <a:endParaRPr lang="en-US" sz="1250" dirty="0"/>
-          </a:p>
-        </p:txBody>
-      </p:sp>
-      <p:sp>
-        <p:nvSpPr>
-          <p:cNvPr id="14" name="Text 12"/>
-          <p:cNvSpPr txBox="1"/>
-          <p:nvPr/>
-        </p:nvSpPr>
-        <p:spPr>
-          <a:xfrm>
-            <a:off x="5559552" y="2596896"/>
-            <a:ext cx="1463040" cy="329184"/>
-          </a:xfrm>
-          <a:prstGeom prst="rect">
-            <a:avLst/>
-          </a:prstGeom>
-          <a:noFill/>
-          <a:ln/>
-        </p:spPr>
-        <p:txBody>
-          <a:bodyPr wrap="square" lIns="0" tIns="0" rIns="0" bIns="0" rtlCol="0" anchor="t"/>
-          <a:lstStyle/>
-          <a:p>
-            <a:pPr marL="0" indent="0">
-              <a:buNone/>
-            </a:pPr>
-            <a:r>
-              <a:rPr lang="en-US" sz="1700" dirty="0">
-                <a:solidFill>
-                  <a:srgbClr val="F2F4F7"/>
-                </a:solidFill>
-                <a:latin typeface="Barlow Condensed" pitchFamily="34" charset="0"/>
-                <a:ea typeface="Barlow Condensed" pitchFamily="34" charset="-122"/>
-                <a:cs typeface="Barlow Condensed" pitchFamily="34" charset="-120"/>
-              </a:rPr>
-              <a:t>€2.34M</a:t>
-            </a:r>
-            <a:endParaRPr lang="en-US" sz="1700" dirty="0"/>
-          </a:p>
-        </p:txBody>
-      </p:sp>
-      <p:sp>
-        <p:nvSpPr>
-          <p:cNvPr id="15" name="Text 13"/>
-          <p:cNvSpPr txBox="1"/>
-          <p:nvPr/>
-        </p:nvSpPr>
-        <p:spPr>
-          <a:xfrm>
-            <a:off x="7114032" y="2596896"/>
-            <a:ext cx="1463040" cy="329184"/>
-          </a:xfrm>
-          <a:prstGeom prst="rect">
-            <a:avLst/>
-          </a:prstGeom>
-          <a:noFill/>
-          <a:ln/>
-        </p:spPr>
-        <p:txBody>
-          <a:bodyPr wrap="square" lIns="0" tIns="0" rIns="0" bIns="0" rtlCol="0" anchor="t"/>
-          <a:lstStyle/>
-          <a:p>
-            <a:pPr marL="0" indent="0">
-              <a:buNone/>
-            </a:pPr>
-            <a:r>
-              <a:rPr lang="en-US" sz="1700" dirty="0">
-                <a:solidFill>
-                  <a:srgbClr val="F2F4F7"/>
-                </a:solidFill>
-                <a:latin typeface="Barlow Condensed" pitchFamily="34" charset="0"/>
-                <a:ea typeface="Barlow Condensed" pitchFamily="34" charset="-122"/>
-                <a:cs typeface="Barlow Condensed" pitchFamily="34" charset="-120"/>
-              </a:rPr>
-              <a:t>€399k</a:t>
-            </a:r>
-            <a:endParaRPr lang="en-US" sz="1700" dirty="0"/>
-          </a:p>
-        </p:txBody>
-      </p:sp>
-      <p:sp>
-        <p:nvSpPr>
-          <p:cNvPr id="16" name="Text 14"/>
-          <p:cNvSpPr txBox="1"/>
-          <p:nvPr/>
-        </p:nvSpPr>
-        <p:spPr>
-          <a:xfrm>
-            <a:off x="8668512" y="2596896"/>
-            <a:ext cx="1463040" cy="329184"/>
-          </a:xfrm>
-          <a:prstGeom prst="rect">
-            <a:avLst/>
-          </a:prstGeom>
-          <a:noFill/>
-          <a:ln/>
-        </p:spPr>
-        <p:txBody>
-          <a:bodyPr wrap="square" lIns="0" tIns="0" rIns="0" bIns="0" rtlCol="0" anchor="t"/>
-          <a:lstStyle/>
-          <a:p>
-            <a:pPr marL="0" indent="0">
-              <a:buNone/>
-            </a:pPr>
-            <a:r>
-              <a:rPr lang="en-US" sz="1700" dirty="0">
-                <a:solidFill>
-                  <a:srgbClr val="F2F4F7"/>
-                </a:solidFill>
-                <a:latin typeface="Barlow Condensed" pitchFamily="34" charset="0"/>
-                <a:ea typeface="Barlow Condensed" pitchFamily="34" charset="-122"/>
-                <a:cs typeface="Barlow Condensed" pitchFamily="34" charset="-120"/>
-              </a:rPr>
-              <a:t>€541k</a:t>
-            </a:r>
-            <a:endParaRPr lang="en-US" sz="1700" dirty="0"/>
+              <a:t>and agencies take 20 to 50% on top</a:t>
+            </a:r>
+            <a:endParaRPr lang="en-US" sz="1200" dirty="0"/>
           </a:p>
         </p:txBody>
       </p:sp>
@@ -16391,361 +17256,66 @@
         </p:nvSpPr>
         <p:spPr>
           <a:xfrm>
-            <a:off x="10222992" y="2596896"/>
-            <a:ext cx="1234440" cy="329184"/>
-          </a:xfrm>
-          <a:prstGeom prst="rect">
-            <a:avLst/>
-          </a:prstGeom>
-          <a:noFill/>
-          <a:ln/>
-        </p:spPr>
-        <p:txBody>
-          <a:bodyPr wrap="square" lIns="0" tIns="0" rIns="0" bIns="0" rtlCol="0" anchor="t"/>
-          <a:lstStyle/>
-          <a:p>
-            <a:pPr marL="0" indent="0">
-              <a:buNone/>
-            </a:pPr>
-            <a:r>
-              <a:rPr lang="en-US" sz="1700" dirty="0">
-                <a:solidFill>
-                  <a:srgbClr val="F2F4F7"/>
-                </a:solidFill>
-                <a:latin typeface="Barlow Condensed" pitchFamily="34" charset="0"/>
-                <a:ea typeface="Barlow Condensed" pitchFamily="34" charset="-122"/>
-                <a:cs typeface="Barlow Condensed" pitchFamily="34" charset="-120"/>
-              </a:rPr>
-              <a:t>Y5</a:t>
-            </a:r>
-            <a:endParaRPr lang="en-US" sz="1700" dirty="0"/>
-          </a:p>
-        </p:txBody>
-      </p:sp>
-      <p:sp>
-        <p:nvSpPr>
-          <p:cNvPr id="18" name="Shape 16"/>
-          <p:cNvSpPr/>
-          <p:nvPr/>
-        </p:nvSpPr>
-        <p:spPr>
-          <a:xfrm>
-            <a:off x="603504" y="3090672"/>
-            <a:ext cx="10984687" cy="512064"/>
-          </a:xfrm>
-          <a:prstGeom prst="rect">
-            <a:avLst/>
-          </a:prstGeom>
-          <a:solidFill>
-            <a:srgbClr val="1F242C"/>
-          </a:solidFill>
-          <a:ln w="12700">
-            <a:solidFill>
-              <a:srgbClr val="333333"/>
-            </a:solidFill>
-            <a:prstDash val="solid"/>
-          </a:ln>
-        </p:spPr>
-      </p:sp>
-      <p:sp>
-        <p:nvSpPr>
-          <p:cNvPr id="19" name="Text 17"/>
-          <p:cNvSpPr txBox="1"/>
-          <p:nvPr/>
-        </p:nvSpPr>
-        <p:spPr>
-          <a:xfrm>
-            <a:off x="713232" y="3163824"/>
-            <a:ext cx="1645920" cy="329184"/>
-          </a:xfrm>
-          <a:prstGeom prst="rect">
-            <a:avLst/>
-          </a:prstGeom>
-          <a:noFill/>
-          <a:ln/>
-        </p:spPr>
-        <p:txBody>
-          <a:bodyPr wrap="square" lIns="0" tIns="0" rIns="0" bIns="0" rtlCol="0" anchor="t"/>
-          <a:lstStyle/>
-          <a:p>
-            <a:pPr marL="0" indent="0">
-              <a:buNone/>
-            </a:pPr>
-            <a:r>
-              <a:rPr lang="en-US" sz="1700" dirty="0">
-                <a:solidFill>
-                  <a:srgbClr val="FFB020"/>
-                </a:solidFill>
-                <a:latin typeface="Barlow Condensed" pitchFamily="34" charset="0"/>
-                <a:ea typeface="Barlow Condensed" pitchFamily="34" charset="-122"/>
-                <a:cs typeface="Barlow Condensed" pitchFamily="34" charset="-120"/>
-              </a:rPr>
-              <a:t>Base</a:t>
-            </a:r>
-            <a:endParaRPr lang="en-US" sz="1700" dirty="0"/>
-          </a:p>
-        </p:txBody>
-      </p:sp>
-      <p:sp>
-        <p:nvSpPr>
-          <p:cNvPr id="20" name="Text 18"/>
-          <p:cNvSpPr txBox="1"/>
-          <p:nvPr/>
-        </p:nvSpPr>
-        <p:spPr>
-          <a:xfrm>
-            <a:off x="2450592" y="3163824"/>
-            <a:ext cx="3017520" cy="329184"/>
-          </a:xfrm>
-          <a:prstGeom prst="rect">
-            <a:avLst/>
-          </a:prstGeom>
-          <a:noFill/>
-          <a:ln/>
-        </p:spPr>
-        <p:txBody>
-          <a:bodyPr wrap="square" lIns="0" tIns="0" rIns="0" bIns="0" rtlCol="0" anchor="t"/>
-          <a:lstStyle/>
-          <a:p>
-            <a:pPr marL="0" indent="0">
-              <a:buNone/>
-            </a:pPr>
-            <a:r>
-              <a:rPr lang="en-US" sz="1250" dirty="0">
-                <a:solidFill>
-                  <a:srgbClr val="828C9A"/>
+            <a:off x="713232" y="4224528"/>
+            <a:ext cx="10765231" cy="822960"/>
+          </a:xfrm>
+          <a:prstGeom prst="rect">
+            <a:avLst/>
+          </a:prstGeom>
+          <a:noFill/>
+          <a:ln/>
+        </p:spPr>
+        <p:txBody>
+          <a:bodyPr wrap="square" lIns="0" tIns="0" rIns="0" bIns="0" rtlCol="0" anchor="t"/>
+          <a:lstStyle/>
+          <a:p>
+            <a:pPr marL="0" indent="0">
+              <a:lnSpc>
+                <a:spcPts val="2000"/>
+              </a:lnSpc>
+              <a:buNone/>
+            </a:pPr>
+            <a:r>
+              <a:rPr lang="en-US" sz="1400" dirty="0">
+                <a:solidFill>
+                  <a:srgbClr val="AEB6C2"/>
                 </a:solidFill>
                 <a:latin typeface="Barlow" pitchFamily="34" charset="0"/>
                 <a:ea typeface="Barlow" pitchFamily="34" charset="-122"/>
                 <a:cs typeface="Barlow" pitchFamily="34" charset="-120"/>
               </a:rPr>
-              <a:t>As modelled</a:t>
-            </a:r>
-            <a:endParaRPr lang="en-US" sz="1250" dirty="0"/>
-          </a:p>
-        </p:txBody>
-      </p:sp>
-      <p:sp>
-        <p:nvSpPr>
-          <p:cNvPr id="21" name="Text 19"/>
-          <p:cNvSpPr txBox="1"/>
-          <p:nvPr/>
-        </p:nvSpPr>
-        <p:spPr>
-          <a:xfrm>
-            <a:off x="5559552" y="3163824"/>
-            <a:ext cx="1463040" cy="329184"/>
-          </a:xfrm>
-          <a:prstGeom prst="rect">
-            <a:avLst/>
-          </a:prstGeom>
-          <a:noFill/>
-          <a:ln/>
-        </p:spPr>
-        <p:txBody>
-          <a:bodyPr wrap="square" lIns="0" tIns="0" rIns="0" bIns="0" rtlCol="0" anchor="t"/>
-          <a:lstStyle/>
-          <a:p>
-            <a:pPr marL="0" indent="0">
-              <a:buNone/>
-            </a:pPr>
-            <a:r>
-              <a:rPr lang="en-US" sz="1700" dirty="0">
-                <a:solidFill>
-                  <a:srgbClr val="FFB020"/>
-                </a:solidFill>
-                <a:latin typeface="Barlow Condensed" pitchFamily="34" charset="0"/>
-                <a:ea typeface="Barlow Condensed" pitchFamily="34" charset="-122"/>
-                <a:cs typeface="Barlow Condensed" pitchFamily="34" charset="-120"/>
-              </a:rPr>
-              <a:t>€3.01M</a:t>
-            </a:r>
-            <a:endParaRPr lang="en-US" sz="1700" dirty="0"/>
-          </a:p>
-        </p:txBody>
-      </p:sp>
-      <p:sp>
-        <p:nvSpPr>
-          <p:cNvPr id="22" name="Text 20"/>
-          <p:cNvSpPr txBox="1"/>
-          <p:nvPr/>
-        </p:nvSpPr>
-        <p:spPr>
-          <a:xfrm>
-            <a:off x="7114032" y="3163824"/>
-            <a:ext cx="1463040" cy="329184"/>
-          </a:xfrm>
-          <a:prstGeom prst="rect">
-            <a:avLst/>
-          </a:prstGeom>
-          <a:noFill/>
-          <a:ln/>
-        </p:spPr>
-        <p:txBody>
-          <a:bodyPr wrap="square" lIns="0" tIns="0" rIns="0" bIns="0" rtlCol="0" anchor="t"/>
-          <a:lstStyle/>
-          <a:p>
-            <a:pPr marL="0" indent="0">
-              <a:buNone/>
-            </a:pPr>
-            <a:r>
-              <a:rPr lang="en-US" sz="1700" dirty="0">
-                <a:solidFill>
-                  <a:srgbClr val="FFB020"/>
-                </a:solidFill>
-                <a:latin typeface="Barlow Condensed" pitchFamily="34" charset="0"/>
-                <a:ea typeface="Barlow Condensed" pitchFamily="34" charset="-122"/>
-                <a:cs typeface="Barlow Condensed" pitchFamily="34" charset="-120"/>
-              </a:rPr>
-              <a:t>€743k</a:t>
-            </a:r>
-            <a:endParaRPr lang="en-US" sz="1700" dirty="0"/>
-          </a:p>
-        </p:txBody>
-      </p:sp>
-      <p:sp>
-        <p:nvSpPr>
-          <p:cNvPr id="23" name="Text 21"/>
-          <p:cNvSpPr txBox="1"/>
-          <p:nvPr/>
-        </p:nvSpPr>
-        <p:spPr>
-          <a:xfrm>
-            <a:off x="8668512" y="3163824"/>
-            <a:ext cx="1463040" cy="329184"/>
-          </a:xfrm>
-          <a:prstGeom prst="rect">
-            <a:avLst/>
-          </a:prstGeom>
-          <a:noFill/>
-          <a:ln/>
-        </p:spPr>
-        <p:txBody>
-          <a:bodyPr wrap="square" lIns="0" tIns="0" rIns="0" bIns="0" rtlCol="0" anchor="t"/>
-          <a:lstStyle/>
-          <a:p>
-            <a:pPr marL="0" indent="0">
-              <a:buNone/>
-            </a:pPr>
-            <a:r>
-              <a:rPr lang="en-US" sz="1700" dirty="0">
-                <a:solidFill>
-                  <a:srgbClr val="FFB020"/>
-                </a:solidFill>
-                <a:latin typeface="Barlow Condensed" pitchFamily="34" charset="0"/>
-                <a:ea typeface="Barlow Condensed" pitchFamily="34" charset="-122"/>
-                <a:cs typeface="Barlow Condensed" pitchFamily="34" charset="-120"/>
-              </a:rPr>
-              <a:t>€414k</a:t>
-            </a:r>
-            <a:endParaRPr lang="en-US" sz="1700" dirty="0"/>
-          </a:p>
-        </p:txBody>
-      </p:sp>
-      <p:sp>
-        <p:nvSpPr>
-          <p:cNvPr id="24" name="Text 22"/>
-          <p:cNvSpPr txBox="1"/>
-          <p:nvPr/>
-        </p:nvSpPr>
-        <p:spPr>
-          <a:xfrm>
-            <a:off x="10222992" y="3163824"/>
-            <a:ext cx="1234440" cy="329184"/>
-          </a:xfrm>
-          <a:prstGeom prst="rect">
-            <a:avLst/>
-          </a:prstGeom>
-          <a:noFill/>
-          <a:ln/>
-        </p:spPr>
-        <p:txBody>
-          <a:bodyPr wrap="square" lIns="0" tIns="0" rIns="0" bIns="0" rtlCol="0" anchor="t"/>
-          <a:lstStyle/>
-          <a:p>
-            <a:pPr marL="0" indent="0">
-              <a:buNone/>
-            </a:pPr>
-            <a:r>
-              <a:rPr lang="en-US" sz="1700" dirty="0">
-                <a:solidFill>
-                  <a:srgbClr val="FFB020"/>
-                </a:solidFill>
-                <a:latin typeface="Barlow Condensed" pitchFamily="34" charset="0"/>
-                <a:ea typeface="Barlow Condensed" pitchFamily="34" charset="-122"/>
-                <a:cs typeface="Barlow Condensed" pitchFamily="34" charset="-120"/>
-              </a:rPr>
-              <a:t>Y4</a:t>
-            </a:r>
-            <a:endParaRPr lang="en-US" sz="1700" dirty="0"/>
-          </a:p>
-        </p:txBody>
-      </p:sp>
-      <p:sp>
-        <p:nvSpPr>
-          <p:cNvPr id="25" name="Text 23"/>
-          <p:cNvSpPr txBox="1"/>
-          <p:nvPr/>
-        </p:nvSpPr>
-        <p:spPr>
-          <a:xfrm>
-            <a:off x="713232" y="3730752"/>
-            <a:ext cx="1645920" cy="329184"/>
-          </a:xfrm>
-          <a:prstGeom prst="rect">
-            <a:avLst/>
-          </a:prstGeom>
-          <a:noFill/>
-          <a:ln/>
-        </p:spPr>
-        <p:txBody>
-          <a:bodyPr wrap="square" lIns="0" tIns="0" rIns="0" bIns="0" rtlCol="0" anchor="t"/>
-          <a:lstStyle/>
-          <a:p>
-            <a:pPr marL="0" indent="0">
-              <a:buNone/>
-            </a:pPr>
-            <a:r>
-              <a:rPr lang="en-US" sz="1700" dirty="0">
-                <a:solidFill>
-                  <a:srgbClr val="F2F4F7"/>
-                </a:solidFill>
-                <a:latin typeface="Barlow Condensed" pitchFamily="34" charset="0"/>
-                <a:ea typeface="Barlow Condensed" pitchFamily="34" charset="-122"/>
-                <a:cs typeface="Barlow Condensed" pitchFamily="34" charset="-120"/>
-              </a:rPr>
-              <a:t>Optimistic</a:t>
-            </a:r>
-            <a:endParaRPr lang="en-US" sz="1700" dirty="0"/>
-          </a:p>
-        </p:txBody>
-      </p:sp>
-      <p:sp>
-        <p:nvSpPr>
-          <p:cNvPr id="26" name="Text 24"/>
-          <p:cNvSpPr txBox="1"/>
-          <p:nvPr/>
-        </p:nvSpPr>
-        <p:spPr>
-          <a:xfrm>
-            <a:off x="2450592" y="3730752"/>
-            <a:ext cx="3017520" cy="329184"/>
-          </a:xfrm>
-          <a:prstGeom prst="rect">
-            <a:avLst/>
-          </a:prstGeom>
-          <a:noFill/>
-          <a:ln/>
-        </p:spPr>
-        <p:txBody>
-          <a:bodyPr wrap="square" lIns="0" tIns="0" rIns="0" bIns="0" rtlCol="0" anchor="t"/>
-          <a:lstStyle/>
-          <a:p>
-            <a:pPr marL="0" indent="0">
-              <a:buNone/>
-            </a:pPr>
-            <a:r>
-              <a:rPr lang="en-US" sz="1250" dirty="0">
+              <a:t>At 15% we undercut the nearest comparable for any athlete earning under €1,380 a month, which is the entire long tail we are built for. The decision forfeits €0.5M of Y7 revenue against a 20% take, and buys a pricing argument that survives contact with the exact athlete we target.</a:t>
+            </a:r>
+            <a:endParaRPr lang="en-US" sz="1400" dirty="0"/>
+          </a:p>
+        </p:txBody>
+      </p:sp>
+      <p:sp>
+        <p:nvSpPr>
+          <p:cNvPr id="18" name="Text 16"/>
+          <p:cNvSpPr txBox="1"/>
+          <p:nvPr/>
+        </p:nvSpPr>
+        <p:spPr>
+          <a:xfrm>
+            <a:off x="713232" y="6382512"/>
+            <a:ext cx="9667951" cy="274320"/>
+          </a:xfrm>
+          <a:prstGeom prst="rect">
+            <a:avLst/>
+          </a:prstGeom>
+          <a:noFill/>
+          <a:ln/>
+        </p:spPr>
+        <p:txBody>
+          <a:bodyPr wrap="square" lIns="0" tIns="0" rIns="0" bIns="0" rtlCol="0" anchor="t"/>
+          <a:lstStyle/>
+          <a:p>
+            <a:pPr marL="0" indent="0">
+              <a:buNone/>
+            </a:pPr>
+            <a:r>
+              <a:rPr lang="en-US" sz="950" dirty="0">
                 <a:solidFill>
                   <a:srgbClr val="828C9A"/>
                 </a:solidFill>
@@ -16753,244 +17323,7 @@
                 <a:ea typeface="Barlow" pitchFamily="34" charset="-122"/>
                 <a:cs typeface="Barlow" pitchFamily="34" charset="-120"/>
               </a:rPr>
-              <a:t>Fans/athlete +25%, monetise +20%</a:t>
-            </a:r>
-            <a:endParaRPr lang="en-US" sz="1250" dirty="0"/>
-          </a:p>
-        </p:txBody>
-      </p:sp>
-      <p:sp>
-        <p:nvSpPr>
-          <p:cNvPr id="27" name="Text 25"/>
-          <p:cNvSpPr txBox="1"/>
-          <p:nvPr/>
-        </p:nvSpPr>
-        <p:spPr>
-          <a:xfrm>
-            <a:off x="5559552" y="3730752"/>
-            <a:ext cx="1463040" cy="329184"/>
-          </a:xfrm>
-          <a:prstGeom prst="rect">
-            <a:avLst/>
-          </a:prstGeom>
-          <a:noFill/>
-          <a:ln/>
-        </p:spPr>
-        <p:txBody>
-          <a:bodyPr wrap="square" lIns="0" tIns="0" rIns="0" bIns="0" rtlCol="0" anchor="t"/>
-          <a:lstStyle/>
-          <a:p>
-            <a:pPr marL="0" indent="0">
-              <a:buNone/>
-            </a:pPr>
-            <a:r>
-              <a:rPr lang="en-US" sz="1700" dirty="0">
-                <a:solidFill>
-                  <a:srgbClr val="F2F4F7"/>
-                </a:solidFill>
-                <a:latin typeface="Barlow Condensed" pitchFamily="34" charset="0"/>
-                <a:ea typeface="Barlow Condensed" pitchFamily="34" charset="-122"/>
-                <a:cs typeface="Barlow Condensed" pitchFamily="34" charset="-120"/>
-              </a:rPr>
-              <a:t>€3.59M</a:t>
-            </a:r>
-            <a:endParaRPr lang="en-US" sz="1700" dirty="0"/>
-          </a:p>
-        </p:txBody>
-      </p:sp>
-      <p:sp>
-        <p:nvSpPr>
-          <p:cNvPr id="28" name="Text 26"/>
-          <p:cNvSpPr txBox="1"/>
-          <p:nvPr/>
-        </p:nvSpPr>
-        <p:spPr>
-          <a:xfrm>
-            <a:off x="7114032" y="3730752"/>
-            <a:ext cx="1463040" cy="329184"/>
-          </a:xfrm>
-          <a:prstGeom prst="rect">
-            <a:avLst/>
-          </a:prstGeom>
-          <a:noFill/>
-          <a:ln/>
-        </p:spPr>
-        <p:txBody>
-          <a:bodyPr wrap="square" lIns="0" tIns="0" rIns="0" bIns="0" rtlCol="0" anchor="t"/>
-          <a:lstStyle/>
-          <a:p>
-            <a:pPr marL="0" indent="0">
-              <a:buNone/>
-            </a:pPr>
-            <a:r>
-              <a:rPr lang="en-US" sz="1700" dirty="0">
-                <a:solidFill>
-                  <a:srgbClr val="F2F4F7"/>
-                </a:solidFill>
-                <a:latin typeface="Barlow Condensed" pitchFamily="34" charset="0"/>
-                <a:ea typeface="Barlow Condensed" pitchFamily="34" charset="-122"/>
-                <a:cs typeface="Barlow Condensed" pitchFamily="34" charset="-120"/>
-              </a:rPr>
-              <a:t>€1.04M</a:t>
-            </a:r>
-            <a:endParaRPr lang="en-US" sz="1700" dirty="0"/>
-          </a:p>
-        </p:txBody>
-      </p:sp>
-      <p:sp>
-        <p:nvSpPr>
-          <p:cNvPr id="29" name="Text 27"/>
-          <p:cNvSpPr txBox="1"/>
-          <p:nvPr/>
-        </p:nvSpPr>
-        <p:spPr>
-          <a:xfrm>
-            <a:off x="8668512" y="3730752"/>
-            <a:ext cx="1463040" cy="329184"/>
-          </a:xfrm>
-          <a:prstGeom prst="rect">
-            <a:avLst/>
-          </a:prstGeom>
-          <a:noFill/>
-          <a:ln/>
-        </p:spPr>
-        <p:txBody>
-          <a:bodyPr wrap="square" lIns="0" tIns="0" rIns="0" bIns="0" rtlCol="0" anchor="t"/>
-          <a:lstStyle/>
-          <a:p>
-            <a:pPr marL="0" indent="0">
-              <a:buNone/>
-            </a:pPr>
-            <a:r>
-              <a:rPr lang="en-US" sz="1700" dirty="0">
-                <a:solidFill>
-                  <a:srgbClr val="F2F4F7"/>
-                </a:solidFill>
-                <a:latin typeface="Barlow Condensed" pitchFamily="34" charset="0"/>
-                <a:ea typeface="Barlow Condensed" pitchFamily="34" charset="-122"/>
-                <a:cs typeface="Barlow Condensed" pitchFamily="34" charset="-120"/>
-              </a:rPr>
-              <a:t>€347k</a:t>
-            </a:r>
-            <a:endParaRPr lang="en-US" sz="1700" dirty="0"/>
-          </a:p>
-        </p:txBody>
-      </p:sp>
-      <p:sp>
-        <p:nvSpPr>
-          <p:cNvPr id="30" name="Text 28"/>
-          <p:cNvSpPr txBox="1"/>
-          <p:nvPr/>
-        </p:nvSpPr>
-        <p:spPr>
-          <a:xfrm>
-            <a:off x="10222992" y="3730752"/>
-            <a:ext cx="1234440" cy="329184"/>
-          </a:xfrm>
-          <a:prstGeom prst="rect">
-            <a:avLst/>
-          </a:prstGeom>
-          <a:noFill/>
-          <a:ln/>
-        </p:spPr>
-        <p:txBody>
-          <a:bodyPr wrap="square" lIns="0" tIns="0" rIns="0" bIns="0" rtlCol="0" anchor="t"/>
-          <a:lstStyle/>
-          <a:p>
-            <a:pPr marL="0" indent="0">
-              <a:buNone/>
-            </a:pPr>
-            <a:r>
-              <a:rPr lang="en-US" sz="1700" dirty="0">
-                <a:solidFill>
-                  <a:srgbClr val="F2F4F7"/>
-                </a:solidFill>
-                <a:latin typeface="Barlow Condensed" pitchFamily="34" charset="0"/>
-                <a:ea typeface="Barlow Condensed" pitchFamily="34" charset="-122"/>
-                <a:cs typeface="Barlow Condensed" pitchFamily="34" charset="-120"/>
-              </a:rPr>
-              <a:t>Y4</a:t>
-            </a:r>
-            <a:endParaRPr lang="en-US" sz="1700" dirty="0"/>
-          </a:p>
-        </p:txBody>
-      </p:sp>
-      <p:sp>
-        <p:nvSpPr>
-          <p:cNvPr id="31" name="Text 29"/>
-          <p:cNvSpPr txBox="1"/>
-          <p:nvPr/>
-        </p:nvSpPr>
-        <p:spPr>
-          <a:xfrm>
-            <a:off x="713232" y="4572000"/>
-            <a:ext cx="10765231" cy="731520"/>
-          </a:xfrm>
-          <a:prstGeom prst="rect">
-            <a:avLst/>
-          </a:prstGeom>
-          <a:noFill/>
-          <a:ln/>
-        </p:spPr>
-        <p:txBody>
-          <a:bodyPr wrap="square" lIns="0" tIns="0" rIns="0" bIns="0" rtlCol="0" anchor="t"/>
-          <a:lstStyle/>
-          <a:p>
-            <a:pPr marL="0" indent="0">
-              <a:lnSpc>
-                <a:spcPts val="1900"/>
-              </a:lnSpc>
-              <a:buNone/>
-            </a:pPr>
-            <a:r>
-              <a:rPr lang="en-US" sz="1400" dirty="0">
-                <a:solidFill>
-                  <a:srgbClr val="AEB6C2"/>
-                </a:solidFill>
-                <a:latin typeface="Barlow" pitchFamily="34" charset="0"/>
-                <a:ea typeface="Barlow" pitchFamily="34" charset="-122"/>
-                <a:cs typeface="Barlow" pitchFamily="34" charset="-120"/>
-              </a:rPr>
-              <a:t>Even the pessimistic case breaks even, one year later and on €541k instead of €414k. The downside here is a slower, smaller company rather than a failed one, and that is the property the staged raise is designed to protect.</a:t>
-            </a:r>
-            <a:endParaRPr lang="en-US" sz="1400" dirty="0"/>
-          </a:p>
-        </p:txBody>
-      </p:sp>
-      <p:sp>
-        <p:nvSpPr>
-          <p:cNvPr id="32" name="Text 30"/>
-          <p:cNvSpPr txBox="1"/>
-          <p:nvPr/>
-        </p:nvSpPr>
-        <p:spPr>
-          <a:xfrm>
-            <a:off x="713232" y="6382512"/>
-            <a:ext cx="9667951" cy="274320"/>
-          </a:xfrm>
-          <a:prstGeom prst="rect">
-            <a:avLst/>
-          </a:prstGeom>
-          <a:noFill/>
-          <a:ln/>
-        </p:spPr>
-        <p:txBody>
-          <a:bodyPr wrap="square" lIns="0" tIns="0" rIns="0" bIns="0" rtlCol="0" anchor="t"/>
-          <a:lstStyle/>
-          <a:p>
-            <a:pPr marL="0" indent="0">
-              <a:buNone/>
-            </a:pPr>
-            <a:r>
-              <a:rPr lang="en-US" sz="950" dirty="0">
-                <a:solidFill>
-                  <a:srgbClr val="828C9A"/>
-                </a:solidFill>
-                <a:latin typeface="Barlow" pitchFamily="34" charset="0"/>
-                <a:ea typeface="Barlow" pitchFamily="34" charset="-122"/>
-                <a:cs typeface="Barlow" pitchFamily="34" charset="-120"/>
-              </a:rPr>
-              <a:t>Stride financial model, scenario table.</a:t>
+              <a:t>Patreon and OnlyFans published terms and filed accounts; agency rates from published commission guides.</a:t>
             </a:r>
             <a:endParaRPr lang="en-US" sz="950" dirty="0"/>
           </a:p>
@@ -16998,7 +17331,7 @@
       </p:sp>
       <p:sp>
         <p:nvSpPr>
-          <p:cNvPr id="33" name="Slide Number Placeholder 0"/>
+          <p:cNvPr id="25" name="Slide Number Placeholder 0"/>
           <p:cNvSpPr>
             <a:spLocks noGrp="1"/>
           </p:cNvSpPr>
@@ -17102,7 +17435,7 @@
                 <a:ea typeface="Barlow Condensed" pitchFamily="34" charset="-122"/>
                 <a:cs typeface="Barlow Condensed" pitchFamily="34" charset="-120"/>
               </a:rPr>
-              <a:t>BACKUP, RISK</a:t>
+              <a:t>BACKUP, SCENARIOS</a:t>
             </a:r>
             <a:endParaRPr lang="en-US" sz="1250" dirty="0"/>
           </a:p>
@@ -17144,7 +17477,7 @@
                 <a:ea typeface="Barlow Condensed" pitchFamily="34" charset="-122"/>
                 <a:cs typeface="Barlow Condensed" pitchFamily="34" charset="-120"/>
               </a:rPr>
-              <a:t>Eleven risks scored, and one of them is the thesis</a:t>
+              <a:t>The plan survives its own pessimistic case</a:t>
             </a:r>
             <a:endParaRPr lang="en-US" sz="3200" dirty="0"/>
           </a:p>
@@ -17186,7 +17519,7 @@
                 <a:ea typeface="Barlow" pitchFamily="34" charset="-122"/>
                 <a:cs typeface="Barlow" pitchFamily="34" charset="-120"/>
               </a:rPr>
-              <a:t>Probability × impact, both on a 1 to 5 scale. Nothing is rated more likely than 3.</a:t>
+              <a:t>Each case re-runs the whole model on changed drivers rather than adjusting the base result.</a:t>
             </a:r>
             <a:endParaRPr lang="en-US" sz="1400" dirty="0"/>
           </a:p>
@@ -17194,26 +17527,258 @@
       </p:sp>
       <p:sp>
         <p:nvSpPr>
-          <p:cNvPr id="5" name="Shape 3"/>
+          <p:cNvPr id="5" name="Text 3"/>
+          <p:cNvSpPr txBox="1"/>
+          <p:nvPr/>
+        </p:nvSpPr>
+        <p:spPr>
+          <a:xfrm>
+            <a:off x="713232" y="2194560"/>
+            <a:ext cx="1645920" cy="237744"/>
+          </a:xfrm>
+          <a:prstGeom prst="rect">
+            <a:avLst/>
+          </a:prstGeom>
+          <a:noFill/>
+          <a:ln/>
+        </p:spPr>
+        <p:txBody>
+          <a:bodyPr wrap="square" lIns="0" tIns="0" rIns="0" bIns="0" rtlCol="0" anchor="t"/>
+          <a:lstStyle/>
+          <a:p>
+            <a:pPr marL="0" indent="0">
+              <a:buNone/>
+            </a:pPr>
+            <a:r>
+              <a:rPr lang="en-US" sz="1100" kern="0" spc="200" dirty="0">
+                <a:solidFill>
+                  <a:srgbClr val="828C9A"/>
+                </a:solidFill>
+                <a:latin typeface="Barlow Condensed" pitchFamily="34" charset="0"/>
+                <a:ea typeface="Barlow Condensed" pitchFamily="34" charset="-122"/>
+                <a:cs typeface="Barlow Condensed" pitchFamily="34" charset="-120"/>
+              </a:rPr>
+              <a:t>CASE</a:t>
+            </a:r>
+            <a:endParaRPr lang="en-US" sz="1100" dirty="0"/>
+          </a:p>
+        </p:txBody>
+      </p:sp>
+      <p:sp>
+        <p:nvSpPr>
+          <p:cNvPr id="6" name="Text 4"/>
+          <p:cNvSpPr txBox="1"/>
+          <p:nvPr/>
+        </p:nvSpPr>
+        <p:spPr>
+          <a:xfrm>
+            <a:off x="2450592" y="2194560"/>
+            <a:ext cx="3017520" cy="237744"/>
+          </a:xfrm>
+          <a:prstGeom prst="rect">
+            <a:avLst/>
+          </a:prstGeom>
+          <a:noFill/>
+          <a:ln/>
+        </p:spPr>
+        <p:txBody>
+          <a:bodyPr wrap="square" lIns="0" tIns="0" rIns="0" bIns="0" rtlCol="0" anchor="t"/>
+          <a:lstStyle/>
+          <a:p>
+            <a:pPr marL="0" indent="0">
+              <a:buNone/>
+            </a:pPr>
+            <a:r>
+              <a:rPr lang="en-US" sz="1100" kern="0" spc="200" dirty="0">
+                <a:solidFill>
+                  <a:srgbClr val="828C9A"/>
+                </a:solidFill>
+                <a:latin typeface="Barlow Condensed" pitchFamily="34" charset="0"/>
+                <a:ea typeface="Barlow Condensed" pitchFamily="34" charset="-122"/>
+                <a:cs typeface="Barlow Condensed" pitchFamily="34" charset="-120"/>
+              </a:rPr>
+              <a:t>WHAT CHANGES</a:t>
+            </a:r>
+            <a:endParaRPr lang="en-US" sz="1100" dirty="0"/>
+          </a:p>
+        </p:txBody>
+      </p:sp>
+      <p:sp>
+        <p:nvSpPr>
+          <p:cNvPr id="7" name="Text 5"/>
+          <p:cNvSpPr txBox="1"/>
+          <p:nvPr/>
+        </p:nvSpPr>
+        <p:spPr>
+          <a:xfrm>
+            <a:off x="5559552" y="2194560"/>
+            <a:ext cx="1463040" cy="237744"/>
+          </a:xfrm>
+          <a:prstGeom prst="rect">
+            <a:avLst/>
+          </a:prstGeom>
+          <a:noFill/>
+          <a:ln/>
+        </p:spPr>
+        <p:txBody>
+          <a:bodyPr wrap="square" lIns="0" tIns="0" rIns="0" bIns="0" rtlCol="0" anchor="t"/>
+          <a:lstStyle/>
+          <a:p>
+            <a:pPr marL="0" indent="0">
+              <a:buNone/>
+            </a:pPr>
+            <a:r>
+              <a:rPr lang="en-US" sz="1100" kern="0" spc="200" dirty="0">
+                <a:solidFill>
+                  <a:srgbClr val="828C9A"/>
+                </a:solidFill>
+                <a:latin typeface="Barlow Condensed" pitchFamily="34" charset="0"/>
+                <a:ea typeface="Barlow Condensed" pitchFamily="34" charset="-122"/>
+                <a:cs typeface="Barlow Condensed" pitchFamily="34" charset="-120"/>
+              </a:rPr>
+              <a:t>Y7 REVENUE</a:t>
+            </a:r>
+            <a:endParaRPr lang="en-US" sz="1100" dirty="0"/>
+          </a:p>
+        </p:txBody>
+      </p:sp>
+      <p:sp>
+        <p:nvSpPr>
+          <p:cNvPr id="8" name="Text 6"/>
+          <p:cNvSpPr txBox="1"/>
+          <p:nvPr/>
+        </p:nvSpPr>
+        <p:spPr>
+          <a:xfrm>
+            <a:off x="7114032" y="2194560"/>
+            <a:ext cx="1463040" cy="237744"/>
+          </a:xfrm>
+          <a:prstGeom prst="rect">
+            <a:avLst/>
+          </a:prstGeom>
+          <a:noFill/>
+          <a:ln/>
+        </p:spPr>
+        <p:txBody>
+          <a:bodyPr wrap="square" lIns="0" tIns="0" rIns="0" bIns="0" rtlCol="0" anchor="t"/>
+          <a:lstStyle/>
+          <a:p>
+            <a:pPr marL="0" indent="0">
+              <a:buNone/>
+            </a:pPr>
+            <a:r>
+              <a:rPr lang="en-US" sz="1100" kern="0" spc="200" dirty="0">
+                <a:solidFill>
+                  <a:srgbClr val="828C9A"/>
+                </a:solidFill>
+                <a:latin typeface="Barlow Condensed" pitchFamily="34" charset="0"/>
+                <a:ea typeface="Barlow Condensed" pitchFamily="34" charset="-122"/>
+                <a:cs typeface="Barlow Condensed" pitchFamily="34" charset="-120"/>
+              </a:rPr>
+              <a:t>Y7 EBITDA</a:t>
+            </a:r>
+            <a:endParaRPr lang="en-US" sz="1100" dirty="0"/>
+          </a:p>
+        </p:txBody>
+      </p:sp>
+      <p:sp>
+        <p:nvSpPr>
+          <p:cNvPr id="9" name="Text 7"/>
+          <p:cNvSpPr txBox="1"/>
+          <p:nvPr/>
+        </p:nvSpPr>
+        <p:spPr>
+          <a:xfrm>
+            <a:off x="8668512" y="2194560"/>
+            <a:ext cx="1463040" cy="237744"/>
+          </a:xfrm>
+          <a:prstGeom prst="rect">
+            <a:avLst/>
+          </a:prstGeom>
+          <a:noFill/>
+          <a:ln/>
+        </p:spPr>
+        <p:txBody>
+          <a:bodyPr wrap="square" lIns="0" tIns="0" rIns="0" bIns="0" rtlCol="0" anchor="t"/>
+          <a:lstStyle/>
+          <a:p>
+            <a:pPr marL="0" indent="0">
+              <a:buNone/>
+            </a:pPr>
+            <a:r>
+              <a:rPr lang="en-US" sz="1100" kern="0" spc="200" dirty="0">
+                <a:solidFill>
+                  <a:srgbClr val="828C9A"/>
+                </a:solidFill>
+                <a:latin typeface="Barlow Condensed" pitchFamily="34" charset="0"/>
+                <a:ea typeface="Barlow Condensed" pitchFamily="34" charset="-122"/>
+                <a:cs typeface="Barlow Condensed" pitchFamily="34" charset="-120"/>
+              </a:rPr>
+              <a:t>CAPITAL NEED</a:t>
+            </a:r>
+            <a:endParaRPr lang="en-US" sz="1100" dirty="0"/>
+          </a:p>
+        </p:txBody>
+      </p:sp>
+      <p:sp>
+        <p:nvSpPr>
+          <p:cNvPr id="10" name="Text 8"/>
+          <p:cNvSpPr txBox="1"/>
+          <p:nvPr/>
+        </p:nvSpPr>
+        <p:spPr>
+          <a:xfrm>
+            <a:off x="10222992" y="2194560"/>
+            <a:ext cx="1234440" cy="237744"/>
+          </a:xfrm>
+          <a:prstGeom prst="rect">
+            <a:avLst/>
+          </a:prstGeom>
+          <a:noFill/>
+          <a:ln/>
+        </p:spPr>
+        <p:txBody>
+          <a:bodyPr wrap="square" lIns="0" tIns="0" rIns="0" bIns="0" rtlCol="0" anchor="t"/>
+          <a:lstStyle/>
+          <a:p>
+            <a:pPr marL="0" indent="0">
+              <a:buNone/>
+            </a:pPr>
+            <a:r>
+              <a:rPr lang="en-US" sz="1100" kern="0" spc="200" dirty="0">
+                <a:solidFill>
+                  <a:srgbClr val="828C9A"/>
+                </a:solidFill>
+                <a:latin typeface="Barlow Condensed" pitchFamily="34" charset="0"/>
+                <a:ea typeface="Barlow Condensed" pitchFamily="34" charset="-122"/>
+                <a:cs typeface="Barlow Condensed" pitchFamily="34" charset="-120"/>
+              </a:rPr>
+              <a:t>PROFIT FROM</a:t>
+            </a:r>
+            <a:endParaRPr lang="en-US" sz="1100" dirty="0"/>
+          </a:p>
+        </p:txBody>
+      </p:sp>
+      <p:sp>
+        <p:nvSpPr>
+          <p:cNvPr id="11" name="Shape 9"/>
           <p:cNvSpPr/>
           <p:nvPr/>
         </p:nvSpPr>
         <p:spPr>
           <a:xfrm>
-            <a:off x="713232" y="2194560"/>
-            <a:ext cx="10765231" cy="896112"/>
-          </a:xfrm>
-          <a:prstGeom prst="roundRect">
-            <a:avLst>
-              <a:gd name="adj" fmla="val 4082"/>
-            </a:avLst>
+            <a:off x="713232" y="2468880"/>
+            <a:ext cx="10765231" cy="12802"/>
+          </a:xfrm>
+          <a:prstGeom prst="rect">
+            <a:avLst/>
           </a:prstGeom>
           <a:solidFill>
-            <a:srgbClr val="171A20"/>
+            <a:srgbClr val="262C35"/>
           </a:solidFill>
-          <a:ln w="9525">
+          <a:ln w="12700">
             <a:solidFill>
-              <a:srgbClr val="262C35"/>
+              <a:srgbClr val="333333"/>
             </a:solidFill>
             <a:prstDash val="solid"/>
           </a:ln>
@@ -17221,153 +17786,328 @@
       </p:sp>
       <p:sp>
         <p:nvSpPr>
-          <p:cNvPr id="6" name="Text 4"/>
-          <p:cNvSpPr txBox="1"/>
-          <p:nvPr/>
-        </p:nvSpPr>
-        <p:spPr>
-          <a:xfrm>
-            <a:off x="969264" y="2432304"/>
-            <a:ext cx="548640" cy="365760"/>
-          </a:xfrm>
-          <a:prstGeom prst="rect">
-            <a:avLst/>
-          </a:prstGeom>
-          <a:noFill/>
-          <a:ln/>
-        </p:spPr>
-        <p:txBody>
-          <a:bodyPr wrap="square" lIns="0" tIns="0" rIns="0" bIns="0" rtlCol="0" anchor="t"/>
-          <a:lstStyle/>
-          <a:p>
-            <a:pPr marL="0" indent="0">
-              <a:buNone/>
-            </a:pPr>
-            <a:r>
-              <a:rPr lang="en-US" sz="2400" dirty="0">
-                <a:solidFill>
-                  <a:srgbClr val="F2555A"/>
+          <p:cNvPr id="12" name="Text 10"/>
+          <p:cNvSpPr txBox="1"/>
+          <p:nvPr/>
+        </p:nvSpPr>
+        <p:spPr>
+          <a:xfrm>
+            <a:off x="713232" y="2596896"/>
+            <a:ext cx="1645920" cy="329184"/>
+          </a:xfrm>
+          <a:prstGeom prst="rect">
+            <a:avLst/>
+          </a:prstGeom>
+          <a:noFill/>
+          <a:ln/>
+        </p:spPr>
+        <p:txBody>
+          <a:bodyPr wrap="square" lIns="0" tIns="0" rIns="0" bIns="0" rtlCol="0" anchor="t"/>
+          <a:lstStyle/>
+          <a:p>
+            <a:pPr marL="0" indent="0">
+              <a:buNone/>
+            </a:pPr>
+            <a:r>
+              <a:rPr lang="en-US" sz="1700" dirty="0">
+                <a:solidFill>
+                  <a:srgbClr val="F2F4F7"/>
                 </a:solidFill>
                 <a:latin typeface="Barlow Condensed" pitchFamily="34" charset="0"/>
                 <a:ea typeface="Barlow Condensed" pitchFamily="34" charset="-122"/>
                 <a:cs typeface="Barlow Condensed" pitchFamily="34" charset="-120"/>
               </a:rPr>
-              <a:t>R1</a:t>
-            </a:r>
-            <a:endParaRPr lang="en-US" sz="2400" dirty="0"/>
-          </a:p>
-        </p:txBody>
-      </p:sp>
-      <p:sp>
-        <p:nvSpPr>
-          <p:cNvPr id="7" name="Text 5"/>
-          <p:cNvSpPr txBox="1"/>
-          <p:nvPr/>
-        </p:nvSpPr>
-        <p:spPr>
-          <a:xfrm>
-            <a:off x="1627632" y="2350008"/>
-            <a:ext cx="3749040" cy="548640"/>
-          </a:xfrm>
-          <a:prstGeom prst="rect">
-            <a:avLst/>
-          </a:prstGeom>
-          <a:noFill/>
-          <a:ln/>
-        </p:spPr>
-        <p:txBody>
-          <a:bodyPr wrap="square" lIns="0" tIns="0" rIns="0" bIns="0" rtlCol="0" anchor="t"/>
-          <a:lstStyle/>
-          <a:p>
-            <a:pPr marL="0" indent="0">
-              <a:lnSpc>
-                <a:spcPts val="1800"/>
-              </a:lnSpc>
-              <a:buNone/>
-            </a:pPr>
-            <a:r>
-              <a:rPr lang="en-US" sz="1400" dirty="0">
-                <a:solidFill>
-                  <a:srgbClr val="F2F4F7"/>
+              <a:t>Pessimistic</a:t>
+            </a:r>
+            <a:endParaRPr lang="en-US" sz="1700" dirty="0"/>
+          </a:p>
+        </p:txBody>
+      </p:sp>
+      <p:sp>
+        <p:nvSpPr>
+          <p:cNvPr id="13" name="Text 11"/>
+          <p:cNvSpPr txBox="1"/>
+          <p:nvPr/>
+        </p:nvSpPr>
+        <p:spPr>
+          <a:xfrm>
+            <a:off x="2450592" y="2596896"/>
+            <a:ext cx="3017520" cy="329184"/>
+          </a:xfrm>
+          <a:prstGeom prst="rect">
+            <a:avLst/>
+          </a:prstGeom>
+          <a:noFill/>
+          <a:ln/>
+        </p:spPr>
+        <p:txBody>
+          <a:bodyPr wrap="square" lIns="0" tIns="0" rIns="0" bIns="0" rtlCol="0" anchor="t"/>
+          <a:lstStyle/>
+          <a:p>
+            <a:pPr marL="0" indent="0">
+              <a:buNone/>
+            </a:pPr>
+            <a:r>
+              <a:rPr lang="en-US" sz="1250" dirty="0">
+                <a:solidFill>
+                  <a:srgbClr val="828C9A"/>
                 </a:solidFill>
                 <a:latin typeface="Barlow" pitchFamily="34" charset="0"/>
                 <a:ea typeface="Barlow" pitchFamily="34" charset="-122"/>
                 <a:cs typeface="Barlow" pitchFamily="34" charset="-120"/>
               </a:rPr>
-              <a:t>Fans do not pay for niche-athlete content</a:t>
-            </a:r>
-            <a:endParaRPr lang="en-US" sz="1400" dirty="0"/>
-          </a:p>
-        </p:txBody>
-      </p:sp>
-      <p:sp>
-        <p:nvSpPr>
-          <p:cNvPr id="8" name="Text 6"/>
-          <p:cNvSpPr txBox="1"/>
-          <p:nvPr/>
-        </p:nvSpPr>
-        <p:spPr>
-          <a:xfrm>
-            <a:off x="5468112" y="2468880"/>
-            <a:ext cx="1371600" cy="274320"/>
-          </a:xfrm>
-          <a:prstGeom prst="rect">
-            <a:avLst/>
-          </a:prstGeom>
-          <a:noFill/>
-          <a:ln/>
-        </p:spPr>
-        <p:txBody>
-          <a:bodyPr wrap="square" lIns="0" tIns="0" rIns="0" bIns="0" rtlCol="0" anchor="t"/>
-          <a:lstStyle/>
-          <a:p>
-            <a:pPr marL="0" indent="0">
-              <a:buNone/>
-            </a:pPr>
-            <a:r>
-              <a:rPr lang="en-US" sz="1600" dirty="0">
-                <a:solidFill>
-                  <a:srgbClr val="F2555A"/>
+              <a:t>Fans/athlete −25%, monetise −20%</a:t>
+            </a:r>
+            <a:endParaRPr lang="en-US" sz="1250" dirty="0"/>
+          </a:p>
+        </p:txBody>
+      </p:sp>
+      <p:sp>
+        <p:nvSpPr>
+          <p:cNvPr id="14" name="Text 12"/>
+          <p:cNvSpPr txBox="1"/>
+          <p:nvPr/>
+        </p:nvSpPr>
+        <p:spPr>
+          <a:xfrm>
+            <a:off x="5559552" y="2596896"/>
+            <a:ext cx="1463040" cy="329184"/>
+          </a:xfrm>
+          <a:prstGeom prst="rect">
+            <a:avLst/>
+          </a:prstGeom>
+          <a:noFill/>
+          <a:ln/>
+        </p:spPr>
+        <p:txBody>
+          <a:bodyPr wrap="square" lIns="0" tIns="0" rIns="0" bIns="0" rtlCol="0" anchor="t"/>
+          <a:lstStyle/>
+          <a:p>
+            <a:pPr marL="0" indent="0">
+              <a:buNone/>
+            </a:pPr>
+            <a:r>
+              <a:rPr lang="en-US" sz="1700" dirty="0">
+                <a:solidFill>
+                  <a:srgbClr val="F2F4F7"/>
                 </a:solidFill>
                 <a:latin typeface="Barlow Condensed" pitchFamily="34" charset="0"/>
                 <a:ea typeface="Barlow Condensed" pitchFamily="34" charset="-122"/>
                 <a:cs typeface="Barlow Condensed" pitchFamily="34" charset="-120"/>
               </a:rPr>
-              <a:t>3 × 5 = 15</a:t>
-            </a:r>
-            <a:endParaRPr lang="en-US" sz="1600" dirty="0"/>
-          </a:p>
-        </p:txBody>
-      </p:sp>
-      <p:sp>
-        <p:nvSpPr>
-          <p:cNvPr id="9" name="Text 7"/>
-          <p:cNvSpPr txBox="1"/>
-          <p:nvPr/>
-        </p:nvSpPr>
-        <p:spPr>
-          <a:xfrm>
-            <a:off x="7022592" y="2377440"/>
-            <a:ext cx="4181551" cy="566928"/>
-          </a:xfrm>
-          <a:prstGeom prst="rect">
-            <a:avLst/>
-          </a:prstGeom>
-          <a:noFill/>
-          <a:ln/>
-        </p:spPr>
-        <p:txBody>
-          <a:bodyPr wrap="square" lIns="0" tIns="0" rIns="0" bIns="0" rtlCol="0" anchor="t"/>
-          <a:lstStyle/>
-          <a:p>
-            <a:pPr marL="0" indent="0">
-              <a:lnSpc>
-                <a:spcPts val="1600"/>
-              </a:lnSpc>
-              <a:buNone/>
-            </a:pPr>
-            <a:r>
-              <a:rPr lang="en-US" sz="1200" dirty="0">
+              <a:t>€2.34M</a:t>
+            </a:r>
+            <a:endParaRPr lang="en-US" sz="1700" dirty="0"/>
+          </a:p>
+        </p:txBody>
+      </p:sp>
+      <p:sp>
+        <p:nvSpPr>
+          <p:cNvPr id="15" name="Text 13"/>
+          <p:cNvSpPr txBox="1"/>
+          <p:nvPr/>
+        </p:nvSpPr>
+        <p:spPr>
+          <a:xfrm>
+            <a:off x="7114032" y="2596896"/>
+            <a:ext cx="1463040" cy="329184"/>
+          </a:xfrm>
+          <a:prstGeom prst="rect">
+            <a:avLst/>
+          </a:prstGeom>
+          <a:noFill/>
+          <a:ln/>
+        </p:spPr>
+        <p:txBody>
+          <a:bodyPr wrap="square" lIns="0" tIns="0" rIns="0" bIns="0" rtlCol="0" anchor="t"/>
+          <a:lstStyle/>
+          <a:p>
+            <a:pPr marL="0" indent="0">
+              <a:buNone/>
+            </a:pPr>
+            <a:r>
+              <a:rPr lang="en-US" sz="1700" dirty="0">
+                <a:solidFill>
+                  <a:srgbClr val="F2F4F7"/>
+                </a:solidFill>
+                <a:latin typeface="Barlow Condensed" pitchFamily="34" charset="0"/>
+                <a:ea typeface="Barlow Condensed" pitchFamily="34" charset="-122"/>
+                <a:cs typeface="Barlow Condensed" pitchFamily="34" charset="-120"/>
+              </a:rPr>
+              <a:t>€399k</a:t>
+            </a:r>
+            <a:endParaRPr lang="en-US" sz="1700" dirty="0"/>
+          </a:p>
+        </p:txBody>
+      </p:sp>
+      <p:sp>
+        <p:nvSpPr>
+          <p:cNvPr id="16" name="Text 14"/>
+          <p:cNvSpPr txBox="1"/>
+          <p:nvPr/>
+        </p:nvSpPr>
+        <p:spPr>
+          <a:xfrm>
+            <a:off x="8668512" y="2596896"/>
+            <a:ext cx="1463040" cy="329184"/>
+          </a:xfrm>
+          <a:prstGeom prst="rect">
+            <a:avLst/>
+          </a:prstGeom>
+          <a:noFill/>
+          <a:ln/>
+        </p:spPr>
+        <p:txBody>
+          <a:bodyPr wrap="square" lIns="0" tIns="0" rIns="0" bIns="0" rtlCol="0" anchor="t"/>
+          <a:lstStyle/>
+          <a:p>
+            <a:pPr marL="0" indent="0">
+              <a:buNone/>
+            </a:pPr>
+            <a:r>
+              <a:rPr lang="en-US" sz="1700" dirty="0">
+                <a:solidFill>
+                  <a:srgbClr val="F2F4F7"/>
+                </a:solidFill>
+                <a:latin typeface="Barlow Condensed" pitchFamily="34" charset="0"/>
+                <a:ea typeface="Barlow Condensed" pitchFamily="34" charset="-122"/>
+                <a:cs typeface="Barlow Condensed" pitchFamily="34" charset="-120"/>
+              </a:rPr>
+              <a:t>€541k</a:t>
+            </a:r>
+            <a:endParaRPr lang="en-US" sz="1700" dirty="0"/>
+          </a:p>
+        </p:txBody>
+      </p:sp>
+      <p:sp>
+        <p:nvSpPr>
+          <p:cNvPr id="17" name="Text 15"/>
+          <p:cNvSpPr txBox="1"/>
+          <p:nvPr/>
+        </p:nvSpPr>
+        <p:spPr>
+          <a:xfrm>
+            <a:off x="10222992" y="2596896"/>
+            <a:ext cx="1234440" cy="329184"/>
+          </a:xfrm>
+          <a:prstGeom prst="rect">
+            <a:avLst/>
+          </a:prstGeom>
+          <a:noFill/>
+          <a:ln/>
+        </p:spPr>
+        <p:txBody>
+          <a:bodyPr wrap="square" lIns="0" tIns="0" rIns="0" bIns="0" rtlCol="0" anchor="t"/>
+          <a:lstStyle/>
+          <a:p>
+            <a:pPr marL="0" indent="0">
+              <a:buNone/>
+            </a:pPr>
+            <a:r>
+              <a:rPr lang="en-US" sz="1700" dirty="0">
+                <a:solidFill>
+                  <a:srgbClr val="F2F4F7"/>
+                </a:solidFill>
+                <a:latin typeface="Barlow Condensed" pitchFamily="34" charset="0"/>
+                <a:ea typeface="Barlow Condensed" pitchFamily="34" charset="-122"/>
+                <a:cs typeface="Barlow Condensed" pitchFamily="34" charset="-120"/>
+              </a:rPr>
+              <a:t>Y5</a:t>
+            </a:r>
+            <a:endParaRPr lang="en-US" sz="1700" dirty="0"/>
+          </a:p>
+        </p:txBody>
+      </p:sp>
+      <p:sp>
+        <p:nvSpPr>
+          <p:cNvPr id="18" name="Shape 16"/>
+          <p:cNvSpPr/>
+          <p:nvPr/>
+        </p:nvSpPr>
+        <p:spPr>
+          <a:xfrm>
+            <a:off x="603504" y="3090672"/>
+            <a:ext cx="10984687" cy="512064"/>
+          </a:xfrm>
+          <a:prstGeom prst="rect">
+            <a:avLst/>
+          </a:prstGeom>
+          <a:solidFill>
+            <a:srgbClr val="1F242C"/>
+          </a:solidFill>
+          <a:ln w="12700">
+            <a:solidFill>
+              <a:srgbClr val="333333"/>
+            </a:solidFill>
+            <a:prstDash val="solid"/>
+          </a:ln>
+        </p:spPr>
+      </p:sp>
+      <p:sp>
+        <p:nvSpPr>
+          <p:cNvPr id="19" name="Text 17"/>
+          <p:cNvSpPr txBox="1"/>
+          <p:nvPr/>
+        </p:nvSpPr>
+        <p:spPr>
+          <a:xfrm>
+            <a:off x="713232" y="3163824"/>
+            <a:ext cx="1645920" cy="329184"/>
+          </a:xfrm>
+          <a:prstGeom prst="rect">
+            <a:avLst/>
+          </a:prstGeom>
+          <a:noFill/>
+          <a:ln/>
+        </p:spPr>
+        <p:txBody>
+          <a:bodyPr wrap="square" lIns="0" tIns="0" rIns="0" bIns="0" rtlCol="0" anchor="t"/>
+          <a:lstStyle/>
+          <a:p>
+            <a:pPr marL="0" indent="0">
+              <a:buNone/>
+            </a:pPr>
+            <a:r>
+              <a:rPr lang="en-US" sz="1700" dirty="0">
+                <a:solidFill>
+                  <a:srgbClr val="FFB020"/>
+                </a:solidFill>
+                <a:latin typeface="Barlow Condensed" pitchFamily="34" charset="0"/>
+                <a:ea typeface="Barlow Condensed" pitchFamily="34" charset="-122"/>
+                <a:cs typeface="Barlow Condensed" pitchFamily="34" charset="-120"/>
+              </a:rPr>
+              <a:t>Base</a:t>
+            </a:r>
+            <a:endParaRPr lang="en-US" sz="1700" dirty="0"/>
+          </a:p>
+        </p:txBody>
+      </p:sp>
+      <p:sp>
+        <p:nvSpPr>
+          <p:cNvPr id="20" name="Text 18"/>
+          <p:cNvSpPr txBox="1"/>
+          <p:nvPr/>
+        </p:nvSpPr>
+        <p:spPr>
+          <a:xfrm>
+            <a:off x="2450592" y="3163824"/>
+            <a:ext cx="3017520" cy="329184"/>
+          </a:xfrm>
+          <a:prstGeom prst="rect">
+            <a:avLst/>
+          </a:prstGeom>
+          <a:noFill/>
+          <a:ln/>
+        </p:spPr>
+        <p:txBody>
+          <a:bodyPr wrap="square" lIns="0" tIns="0" rIns="0" bIns="0" rtlCol="0" anchor="t"/>
+          <a:lstStyle/>
+          <a:p>
+            <a:pPr marL="0" indent="0">
+              <a:buNone/>
+            </a:pPr>
+            <a:r>
+              <a:rPr lang="en-US" sz="1250" dirty="0">
                 <a:solidFill>
                   <a:srgbClr val="828C9A"/>
                 </a:solidFill>
@@ -17375,169 +18115,412 @@
                 <a:ea typeface="Barlow" pitchFamily="34" charset="-122"/>
                 <a:cs typeface="Barlow" pitchFamily="34" charset="-120"/>
               </a:rPr>
-              <a:t>Three months of real revenue from one anchor athlete, before the second tranche</a:t>
-            </a:r>
-            <a:endParaRPr lang="en-US" sz="1200" dirty="0"/>
-          </a:p>
-        </p:txBody>
-      </p:sp>
-      <p:sp>
-        <p:nvSpPr>
-          <p:cNvPr id="10" name="Shape 8"/>
-          <p:cNvSpPr/>
-          <p:nvPr/>
-        </p:nvSpPr>
-        <p:spPr>
-          <a:xfrm>
-            <a:off x="713232" y="3218688"/>
-            <a:ext cx="10765231" cy="896112"/>
-          </a:xfrm>
-          <a:prstGeom prst="roundRect">
-            <a:avLst>
-              <a:gd name="adj" fmla="val 4082"/>
-            </a:avLst>
-          </a:prstGeom>
-          <a:solidFill>
-            <a:srgbClr val="171A20"/>
-          </a:solidFill>
-          <a:ln w="9525">
-            <a:solidFill>
-              <a:srgbClr val="262C35"/>
-            </a:solidFill>
-            <a:prstDash val="solid"/>
-          </a:ln>
-        </p:spPr>
-      </p:sp>
-      <p:sp>
-        <p:nvSpPr>
-          <p:cNvPr id="11" name="Text 9"/>
-          <p:cNvSpPr txBox="1"/>
-          <p:nvPr/>
-        </p:nvSpPr>
-        <p:spPr>
-          <a:xfrm>
-            <a:off x="969264" y="3456432"/>
-            <a:ext cx="548640" cy="365760"/>
-          </a:xfrm>
-          <a:prstGeom prst="rect">
-            <a:avLst/>
-          </a:prstGeom>
-          <a:noFill/>
-          <a:ln/>
-        </p:spPr>
-        <p:txBody>
-          <a:bodyPr wrap="square" lIns="0" tIns="0" rIns="0" bIns="0" rtlCol="0" anchor="t"/>
-          <a:lstStyle/>
-          <a:p>
-            <a:pPr marL="0" indent="0">
-              <a:buNone/>
-            </a:pPr>
-            <a:r>
-              <a:rPr lang="en-US" sz="2400" dirty="0">
-                <a:solidFill>
-                  <a:srgbClr val="FF8A3D"/>
+              <a:t>As modelled</a:t>
+            </a:r>
+            <a:endParaRPr lang="en-US" sz="1250" dirty="0"/>
+          </a:p>
+        </p:txBody>
+      </p:sp>
+      <p:sp>
+        <p:nvSpPr>
+          <p:cNvPr id="21" name="Text 19"/>
+          <p:cNvSpPr txBox="1"/>
+          <p:nvPr/>
+        </p:nvSpPr>
+        <p:spPr>
+          <a:xfrm>
+            <a:off x="5559552" y="3163824"/>
+            <a:ext cx="1463040" cy="329184"/>
+          </a:xfrm>
+          <a:prstGeom prst="rect">
+            <a:avLst/>
+          </a:prstGeom>
+          <a:noFill/>
+          <a:ln/>
+        </p:spPr>
+        <p:txBody>
+          <a:bodyPr wrap="square" lIns="0" tIns="0" rIns="0" bIns="0" rtlCol="0" anchor="t"/>
+          <a:lstStyle/>
+          <a:p>
+            <a:pPr marL="0" indent="0">
+              <a:buNone/>
+            </a:pPr>
+            <a:r>
+              <a:rPr lang="en-US" sz="1700" dirty="0">
+                <a:solidFill>
+                  <a:srgbClr val="FFB020"/>
                 </a:solidFill>
                 <a:latin typeface="Barlow Condensed" pitchFamily="34" charset="0"/>
                 <a:ea typeface="Barlow Condensed" pitchFamily="34" charset="-122"/>
                 <a:cs typeface="Barlow Condensed" pitchFamily="34" charset="-120"/>
               </a:rPr>
-              <a:t>R4</a:t>
-            </a:r>
-            <a:endParaRPr lang="en-US" sz="2400" dirty="0"/>
-          </a:p>
-        </p:txBody>
-      </p:sp>
-      <p:sp>
-        <p:nvSpPr>
-          <p:cNvPr id="12" name="Text 10"/>
-          <p:cNvSpPr txBox="1"/>
-          <p:nvPr/>
-        </p:nvSpPr>
-        <p:spPr>
-          <a:xfrm>
-            <a:off x="1627632" y="3374136"/>
-            <a:ext cx="3749040" cy="548640"/>
-          </a:xfrm>
-          <a:prstGeom prst="rect">
-            <a:avLst/>
-          </a:prstGeom>
-          <a:noFill/>
-          <a:ln/>
-        </p:spPr>
-        <p:txBody>
-          <a:bodyPr wrap="square" lIns="0" tIns="0" rIns="0" bIns="0" rtlCol="0" anchor="t"/>
-          <a:lstStyle/>
-          <a:p>
-            <a:pPr marL="0" indent="0">
-              <a:lnSpc>
-                <a:spcPts val="1800"/>
-              </a:lnSpc>
-              <a:buNone/>
-            </a:pPr>
-            <a:r>
-              <a:rPr lang="en-US" sz="1400" dirty="0">
+              <a:t>€3.01M</a:t>
+            </a:r>
+            <a:endParaRPr lang="en-US" sz="1700" dirty="0"/>
+          </a:p>
+        </p:txBody>
+      </p:sp>
+      <p:sp>
+        <p:nvSpPr>
+          <p:cNvPr id="22" name="Text 20"/>
+          <p:cNvSpPr txBox="1"/>
+          <p:nvPr/>
+        </p:nvSpPr>
+        <p:spPr>
+          <a:xfrm>
+            <a:off x="7114032" y="3163824"/>
+            <a:ext cx="1463040" cy="329184"/>
+          </a:xfrm>
+          <a:prstGeom prst="rect">
+            <a:avLst/>
+          </a:prstGeom>
+          <a:noFill/>
+          <a:ln/>
+        </p:spPr>
+        <p:txBody>
+          <a:bodyPr wrap="square" lIns="0" tIns="0" rIns="0" bIns="0" rtlCol="0" anchor="t"/>
+          <a:lstStyle/>
+          <a:p>
+            <a:pPr marL="0" indent="0">
+              <a:buNone/>
+            </a:pPr>
+            <a:r>
+              <a:rPr lang="en-US" sz="1700" dirty="0">
+                <a:solidFill>
+                  <a:srgbClr val="FFB020"/>
+                </a:solidFill>
+                <a:latin typeface="Barlow Condensed" pitchFamily="34" charset="0"/>
+                <a:ea typeface="Barlow Condensed" pitchFamily="34" charset="-122"/>
+                <a:cs typeface="Barlow Condensed" pitchFamily="34" charset="-120"/>
+              </a:rPr>
+              <a:t>€743k</a:t>
+            </a:r>
+            <a:endParaRPr lang="en-US" sz="1700" dirty="0"/>
+          </a:p>
+        </p:txBody>
+      </p:sp>
+      <p:sp>
+        <p:nvSpPr>
+          <p:cNvPr id="23" name="Text 21"/>
+          <p:cNvSpPr txBox="1"/>
+          <p:nvPr/>
+        </p:nvSpPr>
+        <p:spPr>
+          <a:xfrm>
+            <a:off x="8668512" y="3163824"/>
+            <a:ext cx="1463040" cy="329184"/>
+          </a:xfrm>
+          <a:prstGeom prst="rect">
+            <a:avLst/>
+          </a:prstGeom>
+          <a:noFill/>
+          <a:ln/>
+        </p:spPr>
+        <p:txBody>
+          <a:bodyPr wrap="square" lIns="0" tIns="0" rIns="0" bIns="0" rtlCol="0" anchor="t"/>
+          <a:lstStyle/>
+          <a:p>
+            <a:pPr marL="0" indent="0">
+              <a:buNone/>
+            </a:pPr>
+            <a:r>
+              <a:rPr lang="en-US" sz="1700" dirty="0">
+                <a:solidFill>
+                  <a:srgbClr val="FFB020"/>
+                </a:solidFill>
+                <a:latin typeface="Barlow Condensed" pitchFamily="34" charset="0"/>
+                <a:ea typeface="Barlow Condensed" pitchFamily="34" charset="-122"/>
+                <a:cs typeface="Barlow Condensed" pitchFamily="34" charset="-120"/>
+              </a:rPr>
+              <a:t>€414k</a:t>
+            </a:r>
+            <a:endParaRPr lang="en-US" sz="1700" dirty="0"/>
+          </a:p>
+        </p:txBody>
+      </p:sp>
+      <p:sp>
+        <p:nvSpPr>
+          <p:cNvPr id="24" name="Text 22"/>
+          <p:cNvSpPr txBox="1"/>
+          <p:nvPr/>
+        </p:nvSpPr>
+        <p:spPr>
+          <a:xfrm>
+            <a:off x="10222992" y="3163824"/>
+            <a:ext cx="1234440" cy="329184"/>
+          </a:xfrm>
+          <a:prstGeom prst="rect">
+            <a:avLst/>
+          </a:prstGeom>
+          <a:noFill/>
+          <a:ln/>
+        </p:spPr>
+        <p:txBody>
+          <a:bodyPr wrap="square" lIns="0" tIns="0" rIns="0" bIns="0" rtlCol="0" anchor="t"/>
+          <a:lstStyle/>
+          <a:p>
+            <a:pPr marL="0" indent="0">
+              <a:buNone/>
+            </a:pPr>
+            <a:r>
+              <a:rPr lang="en-US" sz="1700" dirty="0">
+                <a:solidFill>
+                  <a:srgbClr val="FFB020"/>
+                </a:solidFill>
+                <a:latin typeface="Barlow Condensed" pitchFamily="34" charset="0"/>
+                <a:ea typeface="Barlow Condensed" pitchFamily="34" charset="-122"/>
+                <a:cs typeface="Barlow Condensed" pitchFamily="34" charset="-120"/>
+              </a:rPr>
+              <a:t>Y4</a:t>
+            </a:r>
+            <a:endParaRPr lang="en-US" sz="1700" dirty="0"/>
+          </a:p>
+        </p:txBody>
+      </p:sp>
+      <p:sp>
+        <p:nvSpPr>
+          <p:cNvPr id="25" name="Text 23"/>
+          <p:cNvSpPr txBox="1"/>
+          <p:nvPr/>
+        </p:nvSpPr>
+        <p:spPr>
+          <a:xfrm>
+            <a:off x="713232" y="3730752"/>
+            <a:ext cx="1645920" cy="329184"/>
+          </a:xfrm>
+          <a:prstGeom prst="rect">
+            <a:avLst/>
+          </a:prstGeom>
+          <a:noFill/>
+          <a:ln/>
+        </p:spPr>
+        <p:txBody>
+          <a:bodyPr wrap="square" lIns="0" tIns="0" rIns="0" bIns="0" rtlCol="0" anchor="t"/>
+          <a:lstStyle/>
+          <a:p>
+            <a:pPr marL="0" indent="0">
+              <a:buNone/>
+            </a:pPr>
+            <a:r>
+              <a:rPr lang="en-US" sz="1700" dirty="0">
                 <a:solidFill>
                   <a:srgbClr val="F2F4F7"/>
+                </a:solidFill>
+                <a:latin typeface="Barlow Condensed" pitchFamily="34" charset="0"/>
+                <a:ea typeface="Barlow Condensed" pitchFamily="34" charset="-122"/>
+                <a:cs typeface="Barlow Condensed" pitchFamily="34" charset="-120"/>
+              </a:rPr>
+              <a:t>Optimistic</a:t>
+            </a:r>
+            <a:endParaRPr lang="en-US" sz="1700" dirty="0"/>
+          </a:p>
+        </p:txBody>
+      </p:sp>
+      <p:sp>
+        <p:nvSpPr>
+          <p:cNvPr id="26" name="Text 24"/>
+          <p:cNvSpPr txBox="1"/>
+          <p:nvPr/>
+        </p:nvSpPr>
+        <p:spPr>
+          <a:xfrm>
+            <a:off x="2450592" y="3730752"/>
+            <a:ext cx="3017520" cy="329184"/>
+          </a:xfrm>
+          <a:prstGeom prst="rect">
+            <a:avLst/>
+          </a:prstGeom>
+          <a:noFill/>
+          <a:ln/>
+        </p:spPr>
+        <p:txBody>
+          <a:bodyPr wrap="square" lIns="0" tIns="0" rIns="0" bIns="0" rtlCol="0" anchor="t"/>
+          <a:lstStyle/>
+          <a:p>
+            <a:pPr marL="0" indent="0">
+              <a:buNone/>
+            </a:pPr>
+            <a:r>
+              <a:rPr lang="en-US" sz="1250" dirty="0">
+                <a:solidFill>
+                  <a:srgbClr val="828C9A"/>
                 </a:solidFill>
                 <a:latin typeface="Barlow" pitchFamily="34" charset="0"/>
                 <a:ea typeface="Barlow" pitchFamily="34" charset="-122"/>
                 <a:cs typeface="Barlow" pitchFamily="34" charset="-120"/>
               </a:rPr>
-              <a:t>A funded entrant copies the model</a:t>
-            </a:r>
-            <a:endParaRPr lang="en-US" sz="1400" dirty="0"/>
-          </a:p>
-        </p:txBody>
-      </p:sp>
-      <p:sp>
-        <p:nvSpPr>
-          <p:cNvPr id="13" name="Text 11"/>
-          <p:cNvSpPr txBox="1"/>
-          <p:nvPr/>
-        </p:nvSpPr>
-        <p:spPr>
-          <a:xfrm>
-            <a:off x="5468112" y="3493008"/>
-            <a:ext cx="1371600" cy="274320"/>
-          </a:xfrm>
-          <a:prstGeom prst="rect">
-            <a:avLst/>
-          </a:prstGeom>
-          <a:noFill/>
-          <a:ln/>
-        </p:spPr>
-        <p:txBody>
-          <a:bodyPr wrap="square" lIns="0" tIns="0" rIns="0" bIns="0" rtlCol="0" anchor="t"/>
-          <a:lstStyle/>
-          <a:p>
-            <a:pPr marL="0" indent="0">
-              <a:buNone/>
-            </a:pPr>
-            <a:r>
-              <a:rPr lang="en-US" sz="1600" dirty="0">
-                <a:solidFill>
-                  <a:srgbClr val="FF8A3D"/>
+              <a:t>Fans/athlete +25%, monetise +20%</a:t>
+            </a:r>
+            <a:endParaRPr lang="en-US" sz="1250" dirty="0"/>
+          </a:p>
+        </p:txBody>
+      </p:sp>
+      <p:sp>
+        <p:nvSpPr>
+          <p:cNvPr id="27" name="Text 25"/>
+          <p:cNvSpPr txBox="1"/>
+          <p:nvPr/>
+        </p:nvSpPr>
+        <p:spPr>
+          <a:xfrm>
+            <a:off x="5559552" y="3730752"/>
+            <a:ext cx="1463040" cy="329184"/>
+          </a:xfrm>
+          <a:prstGeom prst="rect">
+            <a:avLst/>
+          </a:prstGeom>
+          <a:noFill/>
+          <a:ln/>
+        </p:spPr>
+        <p:txBody>
+          <a:bodyPr wrap="square" lIns="0" tIns="0" rIns="0" bIns="0" rtlCol="0" anchor="t"/>
+          <a:lstStyle/>
+          <a:p>
+            <a:pPr marL="0" indent="0">
+              <a:buNone/>
+            </a:pPr>
+            <a:r>
+              <a:rPr lang="en-US" sz="1700" dirty="0">
+                <a:solidFill>
+                  <a:srgbClr val="F2F4F7"/>
                 </a:solidFill>
                 <a:latin typeface="Barlow Condensed" pitchFamily="34" charset="0"/>
                 <a:ea typeface="Barlow Condensed" pitchFamily="34" charset="-122"/>
                 <a:cs typeface="Barlow Condensed" pitchFamily="34" charset="-120"/>
               </a:rPr>
-              <a:t>3 × 4 = 12</a:t>
-            </a:r>
-            <a:endParaRPr lang="en-US" sz="1600" dirty="0"/>
-          </a:p>
-        </p:txBody>
-      </p:sp>
-      <p:sp>
-        <p:nvSpPr>
-          <p:cNvPr id="14" name="Text 12"/>
-          <p:cNvSpPr txBox="1"/>
-          <p:nvPr/>
-        </p:nvSpPr>
-        <p:spPr>
-          <a:xfrm>
-            <a:off x="7022592" y="3401568"/>
-            <a:ext cx="4181551" cy="566928"/>
+              <a:t>€3.59M</a:t>
+            </a:r>
+            <a:endParaRPr lang="en-US" sz="1700" dirty="0"/>
+          </a:p>
+        </p:txBody>
+      </p:sp>
+      <p:sp>
+        <p:nvSpPr>
+          <p:cNvPr id="28" name="Text 26"/>
+          <p:cNvSpPr txBox="1"/>
+          <p:nvPr/>
+        </p:nvSpPr>
+        <p:spPr>
+          <a:xfrm>
+            <a:off x="7114032" y="3730752"/>
+            <a:ext cx="1463040" cy="329184"/>
+          </a:xfrm>
+          <a:prstGeom prst="rect">
+            <a:avLst/>
+          </a:prstGeom>
+          <a:noFill/>
+          <a:ln/>
+        </p:spPr>
+        <p:txBody>
+          <a:bodyPr wrap="square" lIns="0" tIns="0" rIns="0" bIns="0" rtlCol="0" anchor="t"/>
+          <a:lstStyle/>
+          <a:p>
+            <a:pPr marL="0" indent="0">
+              <a:buNone/>
+            </a:pPr>
+            <a:r>
+              <a:rPr lang="en-US" sz="1700" dirty="0">
+                <a:solidFill>
+                  <a:srgbClr val="F2F4F7"/>
+                </a:solidFill>
+                <a:latin typeface="Barlow Condensed" pitchFamily="34" charset="0"/>
+                <a:ea typeface="Barlow Condensed" pitchFamily="34" charset="-122"/>
+                <a:cs typeface="Barlow Condensed" pitchFamily="34" charset="-120"/>
+              </a:rPr>
+              <a:t>€1.04M</a:t>
+            </a:r>
+            <a:endParaRPr lang="en-US" sz="1700" dirty="0"/>
+          </a:p>
+        </p:txBody>
+      </p:sp>
+      <p:sp>
+        <p:nvSpPr>
+          <p:cNvPr id="29" name="Text 27"/>
+          <p:cNvSpPr txBox="1"/>
+          <p:nvPr/>
+        </p:nvSpPr>
+        <p:spPr>
+          <a:xfrm>
+            <a:off x="8668512" y="3730752"/>
+            <a:ext cx="1463040" cy="329184"/>
+          </a:xfrm>
+          <a:prstGeom prst="rect">
+            <a:avLst/>
+          </a:prstGeom>
+          <a:noFill/>
+          <a:ln/>
+        </p:spPr>
+        <p:txBody>
+          <a:bodyPr wrap="square" lIns="0" tIns="0" rIns="0" bIns="0" rtlCol="0" anchor="t"/>
+          <a:lstStyle/>
+          <a:p>
+            <a:pPr marL="0" indent="0">
+              <a:buNone/>
+            </a:pPr>
+            <a:r>
+              <a:rPr lang="en-US" sz="1700" dirty="0">
+                <a:solidFill>
+                  <a:srgbClr val="F2F4F7"/>
+                </a:solidFill>
+                <a:latin typeface="Barlow Condensed" pitchFamily="34" charset="0"/>
+                <a:ea typeface="Barlow Condensed" pitchFamily="34" charset="-122"/>
+                <a:cs typeface="Barlow Condensed" pitchFamily="34" charset="-120"/>
+              </a:rPr>
+              <a:t>€347k</a:t>
+            </a:r>
+            <a:endParaRPr lang="en-US" sz="1700" dirty="0"/>
+          </a:p>
+        </p:txBody>
+      </p:sp>
+      <p:sp>
+        <p:nvSpPr>
+          <p:cNvPr id="30" name="Text 28"/>
+          <p:cNvSpPr txBox="1"/>
+          <p:nvPr/>
+        </p:nvSpPr>
+        <p:spPr>
+          <a:xfrm>
+            <a:off x="10222992" y="3730752"/>
+            <a:ext cx="1234440" cy="329184"/>
+          </a:xfrm>
+          <a:prstGeom prst="rect">
+            <a:avLst/>
+          </a:prstGeom>
+          <a:noFill/>
+          <a:ln/>
+        </p:spPr>
+        <p:txBody>
+          <a:bodyPr wrap="square" lIns="0" tIns="0" rIns="0" bIns="0" rtlCol="0" anchor="t"/>
+          <a:lstStyle/>
+          <a:p>
+            <a:pPr marL="0" indent="0">
+              <a:buNone/>
+            </a:pPr>
+            <a:r>
+              <a:rPr lang="en-US" sz="1700" dirty="0">
+                <a:solidFill>
+                  <a:srgbClr val="F2F4F7"/>
+                </a:solidFill>
+                <a:latin typeface="Barlow Condensed" pitchFamily="34" charset="0"/>
+                <a:ea typeface="Barlow Condensed" pitchFamily="34" charset="-122"/>
+                <a:cs typeface="Barlow Condensed" pitchFamily="34" charset="-120"/>
+              </a:rPr>
+              <a:t>Y4</a:t>
+            </a:r>
+            <a:endParaRPr lang="en-US" sz="1700" dirty="0"/>
+          </a:p>
+        </p:txBody>
+      </p:sp>
+      <p:sp>
+        <p:nvSpPr>
+          <p:cNvPr id="31" name="Text 29"/>
+          <p:cNvSpPr txBox="1"/>
+          <p:nvPr/>
+        </p:nvSpPr>
+        <p:spPr>
+          <a:xfrm>
+            <a:off x="713232" y="4572000"/>
+            <a:ext cx="10765231" cy="731520"/>
           </a:xfrm>
           <a:prstGeom prst="rect">
             <a:avLst/>
@@ -17551,259 +18534,67 @@
           <a:p>
             <a:pPr marL="0" indent="0">
               <a:lnSpc>
-                <a:spcPts val="1600"/>
+                <a:spcPts val="1900"/>
               </a:lnSpc>
               <a:buNone/>
             </a:pPr>
             <a:r>
-              <a:rPr lang="en-US" sz="1200" dirty="0">
-                <a:solidFill>
-                  <a:srgbClr val="828C9A"/>
+              <a:rPr lang="en-US" sz="1400" dirty="0">
+                <a:solidFill>
+                  <a:srgbClr val="AEB6C2"/>
                 </a:solidFill>
                 <a:latin typeface="Barlow" pitchFamily="34" charset="0"/>
                 <a:ea typeface="Barlow" pitchFamily="34" charset="-122"/>
                 <a:cs typeface="Barlow" pitchFamily="34" charset="-120"/>
               </a:rPr>
-              <a:t>The defence is scoring history and athlete relationships, which take time nobody can buy</a:t>
-            </a:r>
-            <a:endParaRPr lang="en-US" sz="1200" dirty="0"/>
-          </a:p>
-        </p:txBody>
-      </p:sp>
-      <p:sp>
-        <p:nvSpPr>
-          <p:cNvPr id="15" name="Shape 13"/>
-          <p:cNvSpPr/>
-          <p:nvPr/>
-        </p:nvSpPr>
-        <p:spPr>
-          <a:xfrm>
-            <a:off x="713232" y="4242816"/>
-            <a:ext cx="10765231" cy="896112"/>
-          </a:xfrm>
-          <a:prstGeom prst="roundRect">
-            <a:avLst>
-              <a:gd name="adj" fmla="val 4082"/>
-            </a:avLst>
-          </a:prstGeom>
-          <a:solidFill>
-            <a:srgbClr val="171A20"/>
-          </a:solidFill>
-          <a:ln w="9525">
-            <a:solidFill>
-              <a:srgbClr val="262C35"/>
-            </a:solidFill>
-            <a:prstDash val="solid"/>
-          </a:ln>
-        </p:spPr>
-      </p:sp>
-      <p:sp>
-        <p:nvSpPr>
-          <p:cNvPr id="16" name="Text 14"/>
-          <p:cNvSpPr txBox="1"/>
-          <p:nvPr/>
-        </p:nvSpPr>
-        <p:spPr>
-          <a:xfrm>
-            <a:off x="969264" y="4480560"/>
-            <a:ext cx="548640" cy="365760"/>
-          </a:xfrm>
-          <a:prstGeom prst="rect">
-            <a:avLst/>
-          </a:prstGeom>
-          <a:noFill/>
-          <a:ln/>
-        </p:spPr>
-        <p:txBody>
-          <a:bodyPr wrap="square" lIns="0" tIns="0" rIns="0" bIns="0" rtlCol="0" anchor="t"/>
-          <a:lstStyle/>
-          <a:p>
-            <a:pPr marL="0" indent="0">
-              <a:buNone/>
-            </a:pPr>
-            <a:r>
-              <a:rPr lang="en-US" sz="2400" dirty="0">
-                <a:solidFill>
-                  <a:srgbClr val="FF8A3D"/>
-                </a:solidFill>
-                <a:latin typeface="Barlow Condensed" pitchFamily="34" charset="0"/>
-                <a:ea typeface="Barlow Condensed" pitchFamily="34" charset="-122"/>
-                <a:cs typeface="Barlow Condensed" pitchFamily="34" charset="-120"/>
-              </a:rPr>
-              <a:t>R5</a:t>
-            </a:r>
-            <a:endParaRPr lang="en-US" sz="2400" dirty="0"/>
-          </a:p>
-        </p:txBody>
-      </p:sp>
-      <p:sp>
-        <p:nvSpPr>
-          <p:cNvPr id="17" name="Text 15"/>
-          <p:cNvSpPr txBox="1"/>
-          <p:nvPr/>
-        </p:nvSpPr>
-        <p:spPr>
-          <a:xfrm>
-            <a:off x="1627632" y="4398264"/>
-            <a:ext cx="3749040" cy="548640"/>
-          </a:xfrm>
-          <a:prstGeom prst="rect">
-            <a:avLst/>
-          </a:prstGeom>
-          <a:noFill/>
-          <a:ln/>
-        </p:spPr>
-        <p:txBody>
-          <a:bodyPr wrap="square" lIns="0" tIns="0" rIns="0" bIns="0" rtlCol="0" anchor="t"/>
-          <a:lstStyle/>
-          <a:p>
-            <a:pPr marL="0" indent="0">
-              <a:lnSpc>
-                <a:spcPts val="1800"/>
-              </a:lnSpc>
-              <a:buNone/>
-            </a:pPr>
-            <a:r>
-              <a:rPr lang="en-US" sz="1400" dirty="0">
-                <a:solidFill>
-                  <a:srgbClr val="F2F4F7"/>
+              <a:t>Even the pessimistic case breaks even, one year later and on €541k instead of €414k. The downside here is a slower, smaller company rather than a failed one, and that is the property the staged raise is designed to protect.</a:t>
+            </a:r>
+            <a:endParaRPr lang="en-US" sz="1400" dirty="0"/>
+          </a:p>
+        </p:txBody>
+      </p:sp>
+      <p:sp>
+        <p:nvSpPr>
+          <p:cNvPr id="32" name="Text 30"/>
+          <p:cNvSpPr txBox="1"/>
+          <p:nvPr/>
+        </p:nvSpPr>
+        <p:spPr>
+          <a:xfrm>
+            <a:off x="713232" y="6382512"/>
+            <a:ext cx="9667951" cy="274320"/>
+          </a:xfrm>
+          <a:prstGeom prst="rect">
+            <a:avLst/>
+          </a:prstGeom>
+          <a:noFill/>
+          <a:ln/>
+        </p:spPr>
+        <p:txBody>
+          <a:bodyPr wrap="square" lIns="0" tIns="0" rIns="0" bIns="0" rtlCol="0" anchor="t"/>
+          <a:lstStyle/>
+          <a:p>
+            <a:pPr marL="0" indent="0">
+              <a:buNone/>
+            </a:pPr>
+            <a:r>
+              <a:rPr lang="en-US" sz="950" dirty="0">
+                <a:solidFill>
+                  <a:srgbClr val="828C9A"/>
                 </a:solidFill>
                 <a:latin typeface="Barlow" pitchFamily="34" charset="0"/>
                 <a:ea typeface="Barlow" pitchFamily="34" charset="-122"/>
                 <a:cs typeface="Barlow" pitchFamily="34" charset="-120"/>
               </a:rPr>
-              <a:t>Regulatory: DAC7, age assurance, startup law</a:t>
-            </a:r>
-            <a:endParaRPr lang="en-US" sz="1400" dirty="0"/>
-          </a:p>
-        </p:txBody>
-      </p:sp>
-      <p:sp>
-        <p:nvSpPr>
-          <p:cNvPr id="18" name="Text 16"/>
-          <p:cNvSpPr txBox="1"/>
-          <p:nvPr/>
-        </p:nvSpPr>
-        <p:spPr>
-          <a:xfrm>
-            <a:off x="5468112" y="4517136"/>
-            <a:ext cx="1371600" cy="274320"/>
-          </a:xfrm>
-          <a:prstGeom prst="rect">
-            <a:avLst/>
-          </a:prstGeom>
-          <a:noFill/>
-          <a:ln/>
-        </p:spPr>
-        <p:txBody>
-          <a:bodyPr wrap="square" lIns="0" tIns="0" rIns="0" bIns="0" rtlCol="0" anchor="t"/>
-          <a:lstStyle/>
-          <a:p>
-            <a:pPr marL="0" indent="0">
-              <a:buNone/>
-            </a:pPr>
-            <a:r>
-              <a:rPr lang="en-US" sz="1600" dirty="0">
-                <a:solidFill>
-                  <a:srgbClr val="FF8A3D"/>
-                </a:solidFill>
-                <a:latin typeface="Barlow Condensed" pitchFamily="34" charset="0"/>
-                <a:ea typeface="Barlow Condensed" pitchFamily="34" charset="-122"/>
-                <a:cs typeface="Barlow Condensed" pitchFamily="34" charset="-120"/>
-              </a:rPr>
-              <a:t>3 × 4 = 12</a:t>
-            </a:r>
-            <a:endParaRPr lang="en-US" sz="1600" dirty="0"/>
-          </a:p>
-        </p:txBody>
-      </p:sp>
-      <p:sp>
-        <p:nvSpPr>
-          <p:cNvPr id="19" name="Text 17"/>
-          <p:cNvSpPr txBox="1"/>
-          <p:nvPr/>
-        </p:nvSpPr>
-        <p:spPr>
-          <a:xfrm>
-            <a:off x="7022592" y="4425696"/>
-            <a:ext cx="4181551" cy="566928"/>
-          </a:xfrm>
-          <a:prstGeom prst="rect">
-            <a:avLst/>
-          </a:prstGeom>
-          <a:noFill/>
-          <a:ln/>
-        </p:spPr>
-        <p:txBody>
-          <a:bodyPr wrap="square" lIns="0" tIns="0" rIns="0" bIns="0" rtlCol="0" anchor="t"/>
-          <a:lstStyle/>
-          <a:p>
-            <a:pPr marL="0" indent="0">
-              <a:lnSpc>
-                <a:spcPts val="1600"/>
-              </a:lnSpc>
-              <a:buNone/>
-            </a:pPr>
-            <a:r>
-              <a:rPr lang="en-US" sz="1200" dirty="0">
-                <a:solidFill>
-                  <a:srgbClr val="828C9A"/>
-                </a:solidFill>
-                <a:latin typeface="Barlow" pitchFamily="34" charset="0"/>
-                <a:ea typeface="Barlow" pitchFamily="34" charset="-122"/>
-                <a:cs typeface="Barlow" pitchFamily="34" charset="-120"/>
-              </a:rPr>
-              <a:t>Compliance built in rather than retrofitted; reporting is a product feature</a:t>
-            </a:r>
-            <a:endParaRPr lang="en-US" sz="1200" dirty="0"/>
-          </a:p>
-        </p:txBody>
-      </p:sp>
-      <p:sp>
-        <p:nvSpPr>
-          <p:cNvPr id="20" name="Text 18"/>
-          <p:cNvSpPr txBox="1"/>
-          <p:nvPr/>
-        </p:nvSpPr>
-        <p:spPr>
-          <a:xfrm>
-            <a:off x="713232" y="5394960"/>
-            <a:ext cx="10765231" cy="457200"/>
-          </a:xfrm>
-          <a:prstGeom prst="rect">
-            <a:avLst/>
-          </a:prstGeom>
-          <a:noFill/>
-          <a:ln/>
-        </p:spPr>
-        <p:txBody>
-          <a:bodyPr wrap="square" lIns="0" tIns="0" rIns="0" bIns="0" rtlCol="0" anchor="t"/>
-          <a:lstStyle/>
-          <a:p>
-            <a:pPr marL="0" indent="0">
-              <a:lnSpc>
-                <a:spcPts val="2200"/>
-              </a:lnSpc>
-              <a:buNone/>
-            </a:pPr>
-            <a:r>
-              <a:rPr lang="en-US" sz="1350" dirty="0">
-                <a:solidFill>
-                  <a:srgbClr val="AEB6C2"/>
-                </a:solidFill>
-                <a:latin typeface="Barlow" pitchFamily="34" charset="0"/>
-                <a:ea typeface="Barlow" pitchFamily="34" charset="-122"/>
-                <a:cs typeface="Barlow" pitchFamily="34" charset="-120"/>
-              </a:rPr>
-              <a:t>A risk map that is evenly scattered has not identified which risk is the real one. R1 is the thesis, and the entire financing structure exists to buy it down cheaply.</a:t>
-            </a:r>
-            <a:endParaRPr lang="en-US" sz="1350" dirty="0"/>
-          </a:p>
-        </p:txBody>
-      </p:sp>
-      <p:sp>
-        <p:nvSpPr>
-          <p:cNvPr id="25" name="Slide Number Placeholder 0"/>
+              <a:t>Stride financial model, scenario table.</a:t>
+            </a:r>
+            <a:endParaRPr lang="en-US" sz="950" dirty="0"/>
+          </a:p>
+        </p:txBody>
+      </p:sp>
+      <p:sp>
+        <p:nvSpPr>
+          <p:cNvPr id="33" name="Slide Number Placeholder 0"/>
           <p:cNvSpPr>
             <a:spLocks noGrp="1"/>
           </p:cNvSpPr>
@@ -17907,7 +18698,7 @@
                 <a:ea typeface="Barlow Condensed" pitchFamily="34" charset="-122"/>
                 <a:cs typeface="Barlow Condensed" pitchFamily="34" charset="-120"/>
               </a:rPr>
-              <a:t>BACKUP, VALUATION</a:t>
+              <a:t>BACKUP, RISK</a:t>
             </a:r>
             <a:endParaRPr lang="en-US" sz="1250" dirty="0"/>
           </a:p>
@@ -17949,7 +18740,7 @@
                 <a:ea typeface="Barlow Condensed" pitchFamily="34" charset="-122"/>
                 <a:cs typeface="Barlow Condensed" pitchFamily="34" charset="-120"/>
               </a:rPr>
-              <a:t>Where the €1.8M pre-money comes from</a:t>
+              <a:t>Eleven risks scored, and one of them is the thesis</a:t>
             </a:r>
             <a:endParaRPr lang="en-US" sz="3200" dirty="0"/>
           </a:p>
@@ -17991,7 +18782,7 @@
                 <a:ea typeface="Barlow" pitchFamily="34" charset="-122"/>
                 <a:cs typeface="Barlow" pitchFamily="34" charset="-120"/>
               </a:rPr>
-              <a:t>Two methods that disagree, and the disagreement is the honest part.</a:t>
+              <a:t>Probability × impact, both on a 1 to 5 scale. Nothing is rated more likely than 3.</a:t>
             </a:r>
             <a:endParaRPr lang="en-US" sz="1400" dirty="0"/>
           </a:p>
@@ -17999,56 +18790,80 @@
       </p:sp>
       <p:sp>
         <p:nvSpPr>
-          <p:cNvPr id="5" name="Text 3"/>
-          <p:cNvSpPr txBox="1"/>
+          <p:cNvPr id="5" name="Shape 3"/>
+          <p:cNvSpPr/>
           <p:nvPr/>
         </p:nvSpPr>
         <p:spPr>
           <a:xfrm>
             <a:off x="713232" y="2194560"/>
-            <a:ext cx="2926080" cy="219456"/>
-          </a:xfrm>
-          <a:prstGeom prst="rect">
-            <a:avLst/>
-          </a:prstGeom>
-          <a:noFill/>
-          <a:ln/>
-        </p:spPr>
-        <p:txBody>
-          <a:bodyPr wrap="square" lIns="0" tIns="0" rIns="0" bIns="0" rtlCol="0" anchor="t"/>
-          <a:lstStyle/>
-          <a:p>
-            <a:pPr marL="0" indent="0">
-              <a:lnSpc>
-                <a:spcPts val="1400"/>
-              </a:lnSpc>
-              <a:buNone/>
-            </a:pPr>
-            <a:r>
-              <a:rPr lang="en-US" sz="1150" kern="0" spc="220" dirty="0">
-                <a:solidFill>
-                  <a:srgbClr val="828C9A"/>
+            <a:ext cx="10765231" cy="896112"/>
+          </a:xfrm>
+          <a:prstGeom prst="roundRect">
+            <a:avLst>
+              <a:gd name="adj" fmla="val 4082"/>
+            </a:avLst>
+          </a:prstGeom>
+          <a:solidFill>
+            <a:srgbClr val="171A20"/>
+          </a:solidFill>
+          <a:ln w="9525">
+            <a:solidFill>
+              <a:srgbClr val="262C35"/>
+            </a:solidFill>
+            <a:prstDash val="solid"/>
+          </a:ln>
+        </p:spPr>
+      </p:sp>
+      <p:sp>
+        <p:nvSpPr>
+          <p:cNvPr id="6" name="Text 4"/>
+          <p:cNvSpPr txBox="1"/>
+          <p:nvPr/>
+        </p:nvSpPr>
+        <p:spPr>
+          <a:xfrm>
+            <a:off x="969264" y="2432304"/>
+            <a:ext cx="548640" cy="365760"/>
+          </a:xfrm>
+          <a:prstGeom prst="rect">
+            <a:avLst/>
+          </a:prstGeom>
+          <a:noFill/>
+          <a:ln/>
+        </p:spPr>
+        <p:txBody>
+          <a:bodyPr wrap="square" lIns="0" tIns="0" rIns="0" bIns="0" rtlCol="0" anchor="t"/>
+          <a:lstStyle/>
+          <a:p>
+            <a:pPr marL="0" indent="0">
+              <a:buNone/>
+            </a:pPr>
+            <a:r>
+              <a:rPr lang="en-US" sz="2400" dirty="0">
+                <a:solidFill>
+                  <a:srgbClr val="F2555A"/>
                 </a:solidFill>
                 <a:latin typeface="Barlow Condensed" pitchFamily="34" charset="0"/>
                 <a:ea typeface="Barlow Condensed" pitchFamily="34" charset="-122"/>
                 <a:cs typeface="Barlow Condensed" pitchFamily="34" charset="-120"/>
               </a:rPr>
-              <a:t>DCF ENTERPRISE VALUE</a:t>
-            </a:r>
-            <a:endParaRPr lang="en-US" sz="1150" dirty="0"/>
-          </a:p>
-        </p:txBody>
-      </p:sp>
-      <p:sp>
-        <p:nvSpPr>
-          <p:cNvPr id="6" name="Text 4"/>
-          <p:cNvSpPr txBox="1"/>
-          <p:nvPr/>
-        </p:nvSpPr>
-        <p:spPr>
-          <a:xfrm>
-            <a:off x="713232" y="2414016"/>
-            <a:ext cx="2926080" cy="725214"/>
+              <a:t>R1</a:t>
+            </a:r>
+            <a:endParaRPr lang="en-US" sz="2400" dirty="0"/>
+          </a:p>
+        </p:txBody>
+      </p:sp>
+      <p:sp>
+        <p:nvSpPr>
+          <p:cNvPr id="7" name="Text 5"/>
+          <p:cNvSpPr txBox="1"/>
+          <p:nvPr/>
+        </p:nvSpPr>
+        <p:spPr>
+          <a:xfrm>
+            <a:off x="1627632" y="2350008"/>
+            <a:ext cx="3749040" cy="548640"/>
           </a:xfrm>
           <a:prstGeom prst="rect">
             <a:avLst/>
@@ -18062,35 +18877,74 @@
           <a:p>
             <a:pPr marL="0" indent="0">
               <a:lnSpc>
-                <a:spcPts val="4508"/>
+                <a:spcPts val="1800"/>
               </a:lnSpc>
               <a:buNone/>
             </a:pPr>
             <a:r>
-              <a:rPr lang="en-US" sz="4600" dirty="0">
+              <a:rPr lang="en-US" sz="1400" dirty="0">
                 <a:solidFill>
                   <a:srgbClr val="F2F4F7"/>
+                </a:solidFill>
+                <a:latin typeface="Barlow" pitchFamily="34" charset="0"/>
+                <a:ea typeface="Barlow" pitchFamily="34" charset="-122"/>
+                <a:cs typeface="Barlow" pitchFamily="34" charset="-120"/>
+              </a:rPr>
+              <a:t>Fans do not pay for niche-athlete content</a:t>
+            </a:r>
+            <a:endParaRPr lang="en-US" sz="1400" dirty="0"/>
+          </a:p>
+        </p:txBody>
+      </p:sp>
+      <p:sp>
+        <p:nvSpPr>
+          <p:cNvPr id="8" name="Text 6"/>
+          <p:cNvSpPr txBox="1"/>
+          <p:nvPr/>
+        </p:nvSpPr>
+        <p:spPr>
+          <a:xfrm>
+            <a:off x="5468112" y="2468880"/>
+            <a:ext cx="1371600" cy="274320"/>
+          </a:xfrm>
+          <a:prstGeom prst="rect">
+            <a:avLst/>
+          </a:prstGeom>
+          <a:noFill/>
+          <a:ln/>
+        </p:spPr>
+        <p:txBody>
+          <a:bodyPr wrap="square" lIns="0" tIns="0" rIns="0" bIns="0" rtlCol="0" anchor="t"/>
+          <a:lstStyle/>
+          <a:p>
+            <a:pPr marL="0" indent="0">
+              <a:buNone/>
+            </a:pPr>
+            <a:r>
+              <a:rPr lang="en-US" sz="1600" dirty="0">
+                <a:solidFill>
+                  <a:srgbClr val="F2555A"/>
                 </a:solidFill>
                 <a:latin typeface="Barlow Condensed" pitchFamily="34" charset="0"/>
                 <a:ea typeface="Barlow Condensed" pitchFamily="34" charset="-122"/>
                 <a:cs typeface="Barlow Condensed" pitchFamily="34" charset="-120"/>
               </a:rPr>
-              <a:t>€1.23M</a:t>
-            </a:r>
-            <a:endParaRPr lang="en-US" sz="4600" dirty="0"/>
-          </a:p>
-        </p:txBody>
-      </p:sp>
-      <p:sp>
-        <p:nvSpPr>
-          <p:cNvPr id="7" name="Text 5"/>
-          <p:cNvSpPr txBox="1"/>
-          <p:nvPr/>
-        </p:nvSpPr>
-        <p:spPr>
-          <a:xfrm>
-            <a:off x="713232" y="3166662"/>
-            <a:ext cx="2926080" cy="713232"/>
+              <a:t>3 × 5 = 15</a:t>
+            </a:r>
+            <a:endParaRPr lang="en-US" sz="1600" dirty="0"/>
+          </a:p>
+        </p:txBody>
+      </p:sp>
+      <p:sp>
+        <p:nvSpPr>
+          <p:cNvPr id="9" name="Text 7"/>
+          <p:cNvSpPr txBox="1"/>
+          <p:nvPr/>
+        </p:nvSpPr>
+        <p:spPr>
+          <a:xfrm>
+            <a:off x="7022592" y="2377440"/>
+            <a:ext cx="4181551" cy="566928"/>
           </a:xfrm>
           <a:prstGeom prst="rect">
             <a:avLst/>
@@ -18104,7 +18958,7 @@
           <a:p>
             <a:pPr marL="0" indent="0">
               <a:lnSpc>
-                <a:spcPts val="1500"/>
+                <a:spcPts val="1600"/>
               </a:lnSpc>
               <a:buNone/>
             </a:pPr>
@@ -18117,7 +18971,7 @@
                 <a:ea typeface="Barlow" pitchFamily="34" charset="-122"/>
                 <a:cs typeface="Barlow" pitchFamily="34" charset="-120"/>
               </a:rPr>
-              <a:t>25% WACC, 3% terminal growth. Below the pre-money, which is normal for a pre-revenue venture.</a:t>
+              <a:t>Three months of real revenue from one anchor athlete, before the second tranche</a:t>
             </a:r>
             <a:endParaRPr lang="en-US" sz="1200" dirty="0"/>
           </a:p>
@@ -18125,56 +18979,80 @@
       </p:sp>
       <p:sp>
         <p:nvSpPr>
-          <p:cNvPr id="8" name="Text 6"/>
-          <p:cNvSpPr txBox="1"/>
-          <p:nvPr/>
-        </p:nvSpPr>
-        <p:spPr>
-          <a:xfrm>
-            <a:off x="4645152" y="2194560"/>
-            <a:ext cx="2926080" cy="219456"/>
-          </a:xfrm>
-          <a:prstGeom prst="rect">
-            <a:avLst/>
-          </a:prstGeom>
-          <a:noFill/>
-          <a:ln/>
-        </p:spPr>
-        <p:txBody>
-          <a:bodyPr wrap="square" lIns="0" tIns="0" rIns="0" bIns="0" rtlCol="0" anchor="t"/>
-          <a:lstStyle/>
-          <a:p>
-            <a:pPr marL="0" indent="0">
-              <a:lnSpc>
-                <a:spcPts val="1400"/>
-              </a:lnSpc>
-              <a:buNone/>
-            </a:pPr>
-            <a:r>
-              <a:rPr lang="en-US" sz="1150" kern="0" spc="220" dirty="0">
-                <a:solidFill>
-                  <a:srgbClr val="828C9A"/>
+          <p:cNvPr id="10" name="Shape 8"/>
+          <p:cNvSpPr/>
+          <p:nvPr/>
+        </p:nvSpPr>
+        <p:spPr>
+          <a:xfrm>
+            <a:off x="713232" y="3218688"/>
+            <a:ext cx="10765231" cy="896112"/>
+          </a:xfrm>
+          <a:prstGeom prst="roundRect">
+            <a:avLst>
+              <a:gd name="adj" fmla="val 4082"/>
+            </a:avLst>
+          </a:prstGeom>
+          <a:solidFill>
+            <a:srgbClr val="171A20"/>
+          </a:solidFill>
+          <a:ln w="9525">
+            <a:solidFill>
+              <a:srgbClr val="262C35"/>
+            </a:solidFill>
+            <a:prstDash val="solid"/>
+          </a:ln>
+        </p:spPr>
+      </p:sp>
+      <p:sp>
+        <p:nvSpPr>
+          <p:cNvPr id="11" name="Text 9"/>
+          <p:cNvSpPr txBox="1"/>
+          <p:nvPr/>
+        </p:nvSpPr>
+        <p:spPr>
+          <a:xfrm>
+            <a:off x="969264" y="3456432"/>
+            <a:ext cx="548640" cy="365760"/>
+          </a:xfrm>
+          <a:prstGeom prst="rect">
+            <a:avLst/>
+          </a:prstGeom>
+          <a:noFill/>
+          <a:ln/>
+        </p:spPr>
+        <p:txBody>
+          <a:bodyPr wrap="square" lIns="0" tIns="0" rIns="0" bIns="0" rtlCol="0" anchor="t"/>
+          <a:lstStyle/>
+          <a:p>
+            <a:pPr marL="0" indent="0">
+              <a:buNone/>
+            </a:pPr>
+            <a:r>
+              <a:rPr lang="en-US" sz="2400" dirty="0">
+                <a:solidFill>
+                  <a:srgbClr val="FF8A3D"/>
                 </a:solidFill>
                 <a:latin typeface="Barlow Condensed" pitchFamily="34" charset="0"/>
                 <a:ea typeface="Barlow Condensed" pitchFamily="34" charset="-122"/>
                 <a:cs typeface="Barlow Condensed" pitchFamily="34" charset="-120"/>
               </a:rPr>
-              <a:t>COMPARABLE SET</a:t>
-            </a:r>
-            <a:endParaRPr lang="en-US" sz="1150" dirty="0"/>
-          </a:p>
-        </p:txBody>
-      </p:sp>
-      <p:sp>
-        <p:nvSpPr>
-          <p:cNvPr id="9" name="Text 7"/>
-          <p:cNvSpPr txBox="1"/>
-          <p:nvPr/>
-        </p:nvSpPr>
-        <p:spPr>
-          <a:xfrm>
-            <a:off x="4645152" y="2414016"/>
-            <a:ext cx="2926080" cy="725214"/>
+              <a:t>R4</a:t>
+            </a:r>
+            <a:endParaRPr lang="en-US" sz="2400" dirty="0"/>
+          </a:p>
+        </p:txBody>
+      </p:sp>
+      <p:sp>
+        <p:nvSpPr>
+          <p:cNvPr id="12" name="Text 10"/>
+          <p:cNvSpPr txBox="1"/>
+          <p:nvPr/>
+        </p:nvSpPr>
+        <p:spPr>
+          <a:xfrm>
+            <a:off x="1627632" y="3374136"/>
+            <a:ext cx="3749040" cy="548640"/>
           </a:xfrm>
           <a:prstGeom prst="rect">
             <a:avLst/>
@@ -18188,35 +19066,74 @@
           <a:p>
             <a:pPr marL="0" indent="0">
               <a:lnSpc>
-                <a:spcPts val="4508"/>
+                <a:spcPts val="1800"/>
               </a:lnSpc>
               <a:buNone/>
             </a:pPr>
             <a:r>
-              <a:rPr lang="en-US" sz="4600" dirty="0">
-                <a:solidFill>
-                  <a:srgbClr val="FFB020"/>
+              <a:rPr lang="en-US" sz="1400" dirty="0">
+                <a:solidFill>
+                  <a:srgbClr val="F2F4F7"/>
+                </a:solidFill>
+                <a:latin typeface="Barlow" pitchFamily="34" charset="0"/>
+                <a:ea typeface="Barlow" pitchFamily="34" charset="-122"/>
+                <a:cs typeface="Barlow" pitchFamily="34" charset="-120"/>
+              </a:rPr>
+              <a:t>A funded entrant copies the model</a:t>
+            </a:r>
+            <a:endParaRPr lang="en-US" sz="1400" dirty="0"/>
+          </a:p>
+        </p:txBody>
+      </p:sp>
+      <p:sp>
+        <p:nvSpPr>
+          <p:cNvPr id="13" name="Text 11"/>
+          <p:cNvSpPr txBox="1"/>
+          <p:nvPr/>
+        </p:nvSpPr>
+        <p:spPr>
+          <a:xfrm>
+            <a:off x="5468112" y="3493008"/>
+            <a:ext cx="1371600" cy="274320"/>
+          </a:xfrm>
+          <a:prstGeom prst="rect">
+            <a:avLst/>
+          </a:prstGeom>
+          <a:noFill/>
+          <a:ln/>
+        </p:spPr>
+        <p:txBody>
+          <a:bodyPr wrap="square" lIns="0" tIns="0" rIns="0" bIns="0" rtlCol="0" anchor="t"/>
+          <a:lstStyle/>
+          <a:p>
+            <a:pPr marL="0" indent="0">
+              <a:buNone/>
+            </a:pPr>
+            <a:r>
+              <a:rPr lang="en-US" sz="1600" dirty="0">
+                <a:solidFill>
+                  <a:srgbClr val="FF8A3D"/>
                 </a:solidFill>
                 <a:latin typeface="Barlow Condensed" pitchFamily="34" charset="0"/>
                 <a:ea typeface="Barlow Condensed" pitchFamily="34" charset="-122"/>
                 <a:cs typeface="Barlow Condensed" pitchFamily="34" charset="-120"/>
               </a:rPr>
-              <a:t>€1.8M</a:t>
-            </a:r>
-            <a:endParaRPr lang="en-US" sz="4600" dirty="0"/>
-          </a:p>
-        </p:txBody>
-      </p:sp>
-      <p:sp>
-        <p:nvSpPr>
-          <p:cNvPr id="10" name="Text 8"/>
-          <p:cNvSpPr txBox="1"/>
-          <p:nvPr/>
-        </p:nvSpPr>
-        <p:spPr>
-          <a:xfrm>
-            <a:off x="4645152" y="3166662"/>
-            <a:ext cx="2926080" cy="713232"/>
+              <a:t>3 × 4 = 12</a:t>
+            </a:r>
+            <a:endParaRPr lang="en-US" sz="1600" dirty="0"/>
+          </a:p>
+        </p:txBody>
+      </p:sp>
+      <p:sp>
+        <p:nvSpPr>
+          <p:cNvPr id="14" name="Text 12"/>
+          <p:cNvSpPr txBox="1"/>
+          <p:nvPr/>
+        </p:nvSpPr>
+        <p:spPr>
+          <a:xfrm>
+            <a:off x="7022592" y="3401568"/>
+            <a:ext cx="4181551" cy="566928"/>
           </a:xfrm>
           <a:prstGeom prst="rect">
             <a:avLst/>
@@ -18230,7 +19147,7 @@
           <a:p>
             <a:pPr marL="0" indent="0">
               <a:lnSpc>
-                <a:spcPts val="1500"/>
+                <a:spcPts val="1600"/>
               </a:lnSpc>
               <a:buNone/>
             </a:pPr>
@@ -18243,7 +19160,7 @@
                 <a:ea typeface="Barlow" pitchFamily="34" charset="-122"/>
                 <a:cs typeface="Barlow" pitchFamily="34" charset="-120"/>
               </a:rPr>
-              <a:t>Benchmarked against Sponsoo and OpenSponsorship, the two companies running the same model.</a:t>
+              <a:t>The defence is scoring history and athlete relationships, which take time nobody can buy</a:t>
             </a:r>
             <a:endParaRPr lang="en-US" sz="1200" dirty="0"/>
           </a:p>
@@ -18251,56 +19168,80 @@
       </p:sp>
       <p:sp>
         <p:nvSpPr>
-          <p:cNvPr id="11" name="Text 9"/>
-          <p:cNvSpPr txBox="1"/>
-          <p:nvPr/>
-        </p:nvSpPr>
-        <p:spPr>
-          <a:xfrm>
-            <a:off x="8577072" y="2194560"/>
-            <a:ext cx="2926080" cy="219456"/>
-          </a:xfrm>
-          <a:prstGeom prst="rect">
-            <a:avLst/>
-          </a:prstGeom>
-          <a:noFill/>
-          <a:ln/>
-        </p:spPr>
-        <p:txBody>
-          <a:bodyPr wrap="square" lIns="0" tIns="0" rIns="0" bIns="0" rtlCol="0" anchor="t"/>
-          <a:lstStyle/>
-          <a:p>
-            <a:pPr marL="0" indent="0">
-              <a:lnSpc>
-                <a:spcPts val="1400"/>
-              </a:lnSpc>
-              <a:buNone/>
-            </a:pPr>
-            <a:r>
-              <a:rPr lang="en-US" sz="1150" kern="0" spc="220" dirty="0">
-                <a:solidFill>
-                  <a:srgbClr val="828C9A"/>
+          <p:cNvPr id="15" name="Shape 13"/>
+          <p:cNvSpPr/>
+          <p:nvPr/>
+        </p:nvSpPr>
+        <p:spPr>
+          <a:xfrm>
+            <a:off x="713232" y="4242816"/>
+            <a:ext cx="10765231" cy="896112"/>
+          </a:xfrm>
+          <a:prstGeom prst="roundRect">
+            <a:avLst>
+              <a:gd name="adj" fmla="val 4082"/>
+            </a:avLst>
+          </a:prstGeom>
+          <a:solidFill>
+            <a:srgbClr val="171A20"/>
+          </a:solidFill>
+          <a:ln w="9525">
+            <a:solidFill>
+              <a:srgbClr val="262C35"/>
+            </a:solidFill>
+            <a:prstDash val="solid"/>
+          </a:ln>
+        </p:spPr>
+      </p:sp>
+      <p:sp>
+        <p:nvSpPr>
+          <p:cNvPr id="16" name="Text 14"/>
+          <p:cNvSpPr txBox="1"/>
+          <p:nvPr/>
+        </p:nvSpPr>
+        <p:spPr>
+          <a:xfrm>
+            <a:off x="969264" y="4480560"/>
+            <a:ext cx="548640" cy="365760"/>
+          </a:xfrm>
+          <a:prstGeom prst="rect">
+            <a:avLst/>
+          </a:prstGeom>
+          <a:noFill/>
+          <a:ln/>
+        </p:spPr>
+        <p:txBody>
+          <a:bodyPr wrap="square" lIns="0" tIns="0" rIns="0" bIns="0" rtlCol="0" anchor="t"/>
+          <a:lstStyle/>
+          <a:p>
+            <a:pPr marL="0" indent="0">
+              <a:buNone/>
+            </a:pPr>
+            <a:r>
+              <a:rPr lang="en-US" sz="2400" dirty="0">
+                <a:solidFill>
+                  <a:srgbClr val="FF8A3D"/>
                 </a:solidFill>
                 <a:latin typeface="Barlow Condensed" pitchFamily="34" charset="0"/>
                 <a:ea typeface="Barlow Condensed" pitchFamily="34" charset="-122"/>
                 <a:cs typeface="Barlow Condensed" pitchFamily="34" charset="-120"/>
               </a:rPr>
-              <a:t>FOUNDER AND TEAM HOLD</a:t>
-            </a:r>
-            <a:endParaRPr lang="en-US" sz="1150" dirty="0"/>
-          </a:p>
-        </p:txBody>
-      </p:sp>
-      <p:sp>
-        <p:nvSpPr>
-          <p:cNvPr id="12" name="Text 10"/>
-          <p:cNvSpPr txBox="1"/>
-          <p:nvPr/>
-        </p:nvSpPr>
-        <p:spPr>
-          <a:xfrm>
-            <a:off x="8577072" y="2414016"/>
-            <a:ext cx="2926080" cy="725214"/>
+              <a:t>R5</a:t>
+            </a:r>
+            <a:endParaRPr lang="en-US" sz="2400" dirty="0"/>
+          </a:p>
+        </p:txBody>
+      </p:sp>
+      <p:sp>
+        <p:nvSpPr>
+          <p:cNvPr id="17" name="Text 15"/>
+          <p:cNvSpPr txBox="1"/>
+          <p:nvPr/>
+        </p:nvSpPr>
+        <p:spPr>
+          <a:xfrm>
+            <a:off x="1627632" y="4398264"/>
+            <a:ext cx="3749040" cy="548640"/>
           </a:xfrm>
           <a:prstGeom prst="rect">
             <a:avLst/>
@@ -18314,35 +19255,74 @@
           <a:p>
             <a:pPr marL="0" indent="0">
               <a:lnSpc>
-                <a:spcPts val="4508"/>
+                <a:spcPts val="1800"/>
               </a:lnSpc>
               <a:buNone/>
             </a:pPr>
             <a:r>
-              <a:rPr lang="en-US" sz="4600" dirty="0">
+              <a:rPr lang="en-US" sz="1400" dirty="0">
                 <a:solidFill>
                   <a:srgbClr val="F2F4F7"/>
+                </a:solidFill>
+                <a:latin typeface="Barlow" pitchFamily="34" charset="0"/>
+                <a:ea typeface="Barlow" pitchFamily="34" charset="-122"/>
+                <a:cs typeface="Barlow" pitchFamily="34" charset="-120"/>
+              </a:rPr>
+              <a:t>Regulatory: DAC7, age assurance, startup law</a:t>
+            </a:r>
+            <a:endParaRPr lang="en-US" sz="1400" dirty="0"/>
+          </a:p>
+        </p:txBody>
+      </p:sp>
+      <p:sp>
+        <p:nvSpPr>
+          <p:cNvPr id="18" name="Text 16"/>
+          <p:cNvSpPr txBox="1"/>
+          <p:nvPr/>
+        </p:nvSpPr>
+        <p:spPr>
+          <a:xfrm>
+            <a:off x="5468112" y="4517136"/>
+            <a:ext cx="1371600" cy="274320"/>
+          </a:xfrm>
+          <a:prstGeom prst="rect">
+            <a:avLst/>
+          </a:prstGeom>
+          <a:noFill/>
+          <a:ln/>
+        </p:spPr>
+        <p:txBody>
+          <a:bodyPr wrap="square" lIns="0" tIns="0" rIns="0" bIns="0" rtlCol="0" anchor="t"/>
+          <a:lstStyle/>
+          <a:p>
+            <a:pPr marL="0" indent="0">
+              <a:buNone/>
+            </a:pPr>
+            <a:r>
+              <a:rPr lang="en-US" sz="1600" dirty="0">
+                <a:solidFill>
+                  <a:srgbClr val="FF8A3D"/>
                 </a:solidFill>
                 <a:latin typeface="Barlow Condensed" pitchFamily="34" charset="0"/>
                 <a:ea typeface="Barlow Condensed" pitchFamily="34" charset="-122"/>
                 <a:cs typeface="Barlow Condensed" pitchFamily="34" charset="-120"/>
               </a:rPr>
-              <a:t>65.2%</a:t>
-            </a:r>
-            <a:endParaRPr lang="en-US" sz="4600" dirty="0"/>
-          </a:p>
-        </p:txBody>
-      </p:sp>
-      <p:sp>
-        <p:nvSpPr>
-          <p:cNvPr id="13" name="Text 11"/>
-          <p:cNvSpPr txBox="1"/>
-          <p:nvPr/>
-        </p:nvSpPr>
-        <p:spPr>
-          <a:xfrm>
-            <a:off x="8577072" y="3166662"/>
-            <a:ext cx="2926080" cy="713232"/>
+              <a:t>3 × 4 = 12</a:t>
+            </a:r>
+            <a:endParaRPr lang="en-US" sz="1600" dirty="0"/>
+          </a:p>
+        </p:txBody>
+      </p:sp>
+      <p:sp>
+        <p:nvSpPr>
+          <p:cNvPr id="19" name="Text 17"/>
+          <p:cNvSpPr txBox="1"/>
+          <p:nvPr/>
+        </p:nvSpPr>
+        <p:spPr>
+          <a:xfrm>
+            <a:off x="7022592" y="4425696"/>
+            <a:ext cx="4181551" cy="566928"/>
           </a:xfrm>
           <a:prstGeom prst="rect">
             <a:avLst/>
@@ -18356,7 +19336,7 @@
           <a:p>
             <a:pPr marL="0" indent="0">
               <a:lnSpc>
-                <a:spcPts val="1500"/>
+                <a:spcPts val="1600"/>
               </a:lnSpc>
               <a:buNone/>
             </a:pPr>
@@ -18369,7 +19349,7 @@
                 <a:ea typeface="Barlow" pitchFamily="34" charset="-122"/>
                 <a:cs typeface="Barlow" pitchFamily="34" charset="-120"/>
               </a:rPr>
-              <a:t>After both tranches, the optional growth round and a fully topped 10% ESOP.</a:t>
+              <a:t>Compliance built in rather than retrofitted; reporting is a product feature</a:t>
             </a:r>
             <a:endParaRPr lang="en-US" sz="1200" dirty="0"/>
           </a:p>
@@ -18377,78 +19357,14 @@
       </p:sp>
       <p:sp>
         <p:nvSpPr>
-          <p:cNvPr id="14" name="Shape 12"/>
-          <p:cNvSpPr/>
-          <p:nvPr/>
-        </p:nvSpPr>
-        <p:spPr>
-          <a:xfrm>
-            <a:off x="713232" y="4160520"/>
-            <a:ext cx="10765231" cy="12802"/>
-          </a:xfrm>
-          <a:prstGeom prst="rect">
-            <a:avLst/>
-          </a:prstGeom>
-          <a:solidFill>
-            <a:srgbClr val="262C35"/>
-          </a:solidFill>
-          <a:ln w="12700">
-            <a:solidFill>
-              <a:srgbClr val="333333"/>
-            </a:solidFill>
-            <a:prstDash val="solid"/>
-          </a:ln>
-        </p:spPr>
-      </p:sp>
-      <p:sp>
-        <p:nvSpPr>
-          <p:cNvPr id="15" name="Text 13"/>
-          <p:cNvSpPr txBox="1"/>
-          <p:nvPr/>
-        </p:nvSpPr>
-        <p:spPr>
-          <a:xfrm>
-            <a:off x="713232" y="4343400"/>
-            <a:ext cx="2554148" cy="219456"/>
-          </a:xfrm>
-          <a:prstGeom prst="rect">
-            <a:avLst/>
-          </a:prstGeom>
-          <a:noFill/>
-          <a:ln/>
-        </p:spPr>
-        <p:txBody>
-          <a:bodyPr wrap="square" lIns="0" tIns="0" rIns="0" bIns="0" rtlCol="0" anchor="t"/>
-          <a:lstStyle/>
-          <a:p>
-            <a:pPr marL="0" indent="0">
-              <a:buNone/>
-            </a:pPr>
-            <a:r>
-              <a:rPr lang="en-US" sz="1100" kern="0" spc="200" dirty="0">
-                <a:solidFill>
-                  <a:srgbClr val="828C9A"/>
-                </a:solidFill>
-                <a:latin typeface="Barlow Condensed" pitchFamily="34" charset="0"/>
-                <a:ea typeface="Barlow Condensed" pitchFamily="34" charset="-122"/>
-                <a:cs typeface="Barlow Condensed" pitchFamily="34" charset="-120"/>
-              </a:rPr>
-              <a:t>PRE-SEED</a:t>
-            </a:r>
-            <a:endParaRPr lang="en-US" sz="1100" dirty="0"/>
-          </a:p>
-        </p:txBody>
-      </p:sp>
-      <p:sp>
-        <p:nvSpPr>
-          <p:cNvPr id="16" name="Text 14"/>
-          <p:cNvSpPr txBox="1"/>
-          <p:nvPr/>
-        </p:nvSpPr>
-        <p:spPr>
-          <a:xfrm>
-            <a:off x="713232" y="4572000"/>
-            <a:ext cx="2554148" cy="274320"/>
+          <p:cNvPr id="20" name="Text 18"/>
+          <p:cNvSpPr txBox="1"/>
+          <p:nvPr/>
+        </p:nvSpPr>
+        <p:spPr>
+          <a:xfrm>
+            <a:off x="713232" y="5394960"/>
+            <a:ext cx="10765231" cy="457200"/>
           </a:xfrm>
           <a:prstGeom prst="rect">
             <a:avLst/>
@@ -18467,7 +19383,7 @@
               <a:buNone/>
             </a:pPr>
             <a:r>
-              <a:rPr lang="en-US" sz="1250" dirty="0">
+              <a:rPr lang="en-US" sz="1350" dirty="0">
                 <a:solidFill>
                   <a:srgbClr val="AEB6C2"/>
                 </a:solidFill>
@@ -18475,495 +19391,15 @@
                 <a:ea typeface="Barlow" pitchFamily="34" charset="-122"/>
                 <a:cs typeface="Barlow" pitchFamily="34" charset="-120"/>
               </a:rPr>
-              <a:t>€150k at €1.8M</a:t>
-            </a:r>
-            <a:endParaRPr lang="en-US" sz="1250" dirty="0"/>
-          </a:p>
-        </p:txBody>
-      </p:sp>
-      <p:sp>
-        <p:nvSpPr>
-          <p:cNvPr id="17" name="Text 15"/>
-          <p:cNvSpPr txBox="1"/>
-          <p:nvPr/>
-        </p:nvSpPr>
-        <p:spPr>
-          <a:xfrm>
-            <a:off x="713232" y="4846320"/>
-            <a:ext cx="2554148" cy="384048"/>
-          </a:xfrm>
-          <a:prstGeom prst="rect">
-            <a:avLst/>
-          </a:prstGeom>
-          <a:noFill/>
-          <a:ln/>
-        </p:spPr>
-        <p:txBody>
-          <a:bodyPr wrap="square" lIns="0" tIns="0" rIns="0" bIns="0" rtlCol="0" anchor="t"/>
-          <a:lstStyle/>
-          <a:p>
-            <a:pPr marL="0" indent="0">
-              <a:buNone/>
-            </a:pPr>
-            <a:r>
-              <a:rPr lang="en-US" sz="2400" dirty="0">
-                <a:solidFill>
-                  <a:srgbClr val="F2F4F7"/>
-                </a:solidFill>
-                <a:latin typeface="Barlow Condensed" pitchFamily="34" charset="0"/>
-                <a:ea typeface="Barlow Condensed" pitchFamily="34" charset="-122"/>
-                <a:cs typeface="Barlow Condensed" pitchFamily="34" charset="-120"/>
-              </a:rPr>
-              <a:t>87.3%</a:t>
-            </a:r>
-            <a:endParaRPr lang="en-US" sz="2400" dirty="0"/>
-          </a:p>
-        </p:txBody>
-      </p:sp>
-      <p:sp>
-        <p:nvSpPr>
-          <p:cNvPr id="18" name="Text 16"/>
-          <p:cNvSpPr txBox="1"/>
-          <p:nvPr/>
-        </p:nvSpPr>
-        <p:spPr>
-          <a:xfrm>
-            <a:off x="3450260" y="4343400"/>
-            <a:ext cx="2554148" cy="219456"/>
-          </a:xfrm>
-          <a:prstGeom prst="rect">
-            <a:avLst/>
-          </a:prstGeom>
-          <a:noFill/>
-          <a:ln/>
-        </p:spPr>
-        <p:txBody>
-          <a:bodyPr wrap="square" lIns="0" tIns="0" rIns="0" bIns="0" rtlCol="0" anchor="t"/>
-          <a:lstStyle/>
-          <a:p>
-            <a:pPr marL="0" indent="0">
-              <a:buNone/>
-            </a:pPr>
-            <a:r>
-              <a:rPr lang="en-US" sz="1100" kern="0" spc="200" dirty="0">
-                <a:solidFill>
-                  <a:srgbClr val="828C9A"/>
-                </a:solidFill>
-                <a:latin typeface="Barlow Condensed" pitchFamily="34" charset="0"/>
-                <a:ea typeface="Barlow Condensed" pitchFamily="34" charset="-122"/>
-                <a:cs typeface="Barlow Condensed" pitchFamily="34" charset="-120"/>
-              </a:rPr>
-              <a:t>EXTENSION</a:t>
-            </a:r>
-            <a:endParaRPr lang="en-US" sz="1100" dirty="0"/>
-          </a:p>
-        </p:txBody>
-      </p:sp>
-      <p:sp>
-        <p:nvSpPr>
-          <p:cNvPr id="19" name="Text 17"/>
-          <p:cNvSpPr txBox="1"/>
-          <p:nvPr/>
-        </p:nvSpPr>
-        <p:spPr>
-          <a:xfrm>
-            <a:off x="3450260" y="4572000"/>
-            <a:ext cx="2554148" cy="274320"/>
-          </a:xfrm>
-          <a:prstGeom prst="rect">
-            <a:avLst/>
-          </a:prstGeom>
-          <a:noFill/>
-          <a:ln/>
-        </p:spPr>
-        <p:txBody>
-          <a:bodyPr wrap="square" lIns="0" tIns="0" rIns="0" bIns="0" rtlCol="0" anchor="t"/>
-          <a:lstStyle/>
-          <a:p>
-            <a:pPr marL="0" indent="0">
-              <a:lnSpc>
-                <a:spcPts val="2200"/>
-              </a:lnSpc>
-              <a:buNone/>
-            </a:pPr>
-            <a:r>
-              <a:rPr lang="en-US" sz="1250" dirty="0">
-                <a:solidFill>
-                  <a:srgbClr val="AEB6C2"/>
-                </a:solidFill>
-                <a:latin typeface="Barlow" pitchFamily="34" charset="0"/>
-                <a:ea typeface="Barlow" pitchFamily="34" charset="-122"/>
-                <a:cs typeface="Barlow" pitchFamily="34" charset="-120"/>
-              </a:rPr>
-              <a:t>€250k at €3.5M</a:t>
-            </a:r>
-            <a:endParaRPr lang="en-US" sz="1250" dirty="0"/>
-          </a:p>
-        </p:txBody>
-      </p:sp>
-      <p:sp>
-        <p:nvSpPr>
-          <p:cNvPr id="20" name="Text 18"/>
-          <p:cNvSpPr txBox="1"/>
-          <p:nvPr/>
-        </p:nvSpPr>
-        <p:spPr>
-          <a:xfrm>
-            <a:off x="3450260" y="4846320"/>
-            <a:ext cx="2554148" cy="384048"/>
-          </a:xfrm>
-          <a:prstGeom prst="rect">
-            <a:avLst/>
-          </a:prstGeom>
-          <a:noFill/>
-          <a:ln/>
-        </p:spPr>
-        <p:txBody>
-          <a:bodyPr wrap="square" lIns="0" tIns="0" rIns="0" bIns="0" rtlCol="0" anchor="t"/>
-          <a:lstStyle/>
-          <a:p>
-            <a:pPr marL="0" indent="0">
-              <a:buNone/>
-            </a:pPr>
-            <a:r>
-              <a:rPr lang="en-US" sz="2400" dirty="0">
-                <a:solidFill>
-                  <a:srgbClr val="F2F4F7"/>
-                </a:solidFill>
-                <a:latin typeface="Barlow Condensed" pitchFamily="34" charset="0"/>
-                <a:ea typeface="Barlow Condensed" pitchFamily="34" charset="-122"/>
-                <a:cs typeface="Barlow Condensed" pitchFamily="34" charset="-120"/>
-              </a:rPr>
-              <a:t>81.5%</a:t>
-            </a:r>
-            <a:endParaRPr lang="en-US" sz="2400" dirty="0"/>
-          </a:p>
-        </p:txBody>
-      </p:sp>
-      <p:sp>
-        <p:nvSpPr>
-          <p:cNvPr id="21" name="Text 19"/>
-          <p:cNvSpPr txBox="1"/>
-          <p:nvPr/>
-        </p:nvSpPr>
-        <p:spPr>
-          <a:xfrm>
-            <a:off x="6187288" y="4343400"/>
-            <a:ext cx="2554148" cy="219456"/>
-          </a:xfrm>
-          <a:prstGeom prst="rect">
-            <a:avLst/>
-          </a:prstGeom>
-          <a:noFill/>
-          <a:ln/>
-        </p:spPr>
-        <p:txBody>
-          <a:bodyPr wrap="square" lIns="0" tIns="0" rIns="0" bIns="0" rtlCol="0" anchor="t"/>
-          <a:lstStyle/>
-          <a:p>
-            <a:pPr marL="0" indent="0">
-              <a:buNone/>
-            </a:pPr>
-            <a:r>
-              <a:rPr lang="en-US" sz="1100" kern="0" spc="200" dirty="0">
-                <a:solidFill>
-                  <a:srgbClr val="828C9A"/>
-                </a:solidFill>
-                <a:latin typeface="Barlow Condensed" pitchFamily="34" charset="0"/>
-                <a:ea typeface="Barlow Condensed" pitchFamily="34" charset="-122"/>
-                <a:cs typeface="Barlow Condensed" pitchFamily="34" charset="-120"/>
-              </a:rPr>
-              <a:t>GROWTH, OPTIONAL</a:t>
-            </a:r>
-            <a:endParaRPr lang="en-US" sz="1100" dirty="0"/>
-          </a:p>
-        </p:txBody>
-      </p:sp>
-      <p:sp>
-        <p:nvSpPr>
-          <p:cNvPr id="22" name="Text 20"/>
-          <p:cNvSpPr txBox="1"/>
-          <p:nvPr/>
-        </p:nvSpPr>
-        <p:spPr>
-          <a:xfrm>
-            <a:off x="6187288" y="4572000"/>
-            <a:ext cx="2554148" cy="274320"/>
-          </a:xfrm>
-          <a:prstGeom prst="rect">
-            <a:avLst/>
-          </a:prstGeom>
-          <a:noFill/>
-          <a:ln/>
-        </p:spPr>
-        <p:txBody>
-          <a:bodyPr wrap="square" lIns="0" tIns="0" rIns="0" bIns="0" rtlCol="0" anchor="t"/>
-          <a:lstStyle/>
-          <a:p>
-            <a:pPr marL="0" indent="0">
-              <a:lnSpc>
-                <a:spcPts val="2200"/>
-              </a:lnSpc>
-              <a:buNone/>
-            </a:pPr>
-            <a:r>
-              <a:rPr lang="en-US" sz="1250" dirty="0">
-                <a:solidFill>
-                  <a:srgbClr val="AEB6C2"/>
-                </a:solidFill>
-                <a:latin typeface="Barlow" pitchFamily="34" charset="0"/>
-                <a:ea typeface="Barlow" pitchFamily="34" charset="-122"/>
-                <a:cs typeface="Barlow" pitchFamily="34" charset="-120"/>
-              </a:rPr>
-              <a:t>€1.5M at €12M</a:t>
-            </a:r>
-            <a:endParaRPr lang="en-US" sz="1250" dirty="0"/>
-          </a:p>
-        </p:txBody>
-      </p:sp>
-      <p:sp>
-        <p:nvSpPr>
-          <p:cNvPr id="23" name="Text 21"/>
-          <p:cNvSpPr txBox="1"/>
-          <p:nvPr/>
-        </p:nvSpPr>
-        <p:spPr>
-          <a:xfrm>
-            <a:off x="6187288" y="4846320"/>
-            <a:ext cx="2554148" cy="384048"/>
-          </a:xfrm>
-          <a:prstGeom prst="rect">
-            <a:avLst/>
-          </a:prstGeom>
-          <a:noFill/>
-          <a:ln/>
-        </p:spPr>
-        <p:txBody>
-          <a:bodyPr wrap="square" lIns="0" tIns="0" rIns="0" bIns="0" rtlCol="0" anchor="t"/>
-          <a:lstStyle/>
-          <a:p>
-            <a:pPr marL="0" indent="0">
-              <a:buNone/>
-            </a:pPr>
-            <a:r>
-              <a:rPr lang="en-US" sz="2400" dirty="0">
-                <a:solidFill>
-                  <a:srgbClr val="F2F4F7"/>
-                </a:solidFill>
-                <a:latin typeface="Barlow Condensed" pitchFamily="34" charset="0"/>
-                <a:ea typeface="Barlow Condensed" pitchFamily="34" charset="-122"/>
-                <a:cs typeface="Barlow Condensed" pitchFamily="34" charset="-120"/>
-              </a:rPr>
-              <a:t>72.4%</a:t>
-            </a:r>
-            <a:endParaRPr lang="en-US" sz="2400" dirty="0"/>
-          </a:p>
-        </p:txBody>
-      </p:sp>
-      <p:sp>
-        <p:nvSpPr>
-          <p:cNvPr id="24" name="Text 22"/>
-          <p:cNvSpPr txBox="1"/>
-          <p:nvPr/>
-        </p:nvSpPr>
-        <p:spPr>
-          <a:xfrm>
-            <a:off x="8924315" y="4343400"/>
-            <a:ext cx="2554148" cy="219456"/>
-          </a:xfrm>
-          <a:prstGeom prst="rect">
-            <a:avLst/>
-          </a:prstGeom>
-          <a:noFill/>
-          <a:ln/>
-        </p:spPr>
-        <p:txBody>
-          <a:bodyPr wrap="square" lIns="0" tIns="0" rIns="0" bIns="0" rtlCol="0" anchor="t"/>
-          <a:lstStyle/>
-          <a:p>
-            <a:pPr marL="0" indent="0">
-              <a:buNone/>
-            </a:pPr>
-            <a:r>
-              <a:rPr lang="en-US" sz="1100" kern="0" spc="200" dirty="0">
-                <a:solidFill>
-                  <a:srgbClr val="828C9A"/>
-                </a:solidFill>
-                <a:latin typeface="Barlow Condensed" pitchFamily="34" charset="0"/>
-                <a:ea typeface="Barlow Condensed" pitchFamily="34" charset="-122"/>
-                <a:cs typeface="Barlow Condensed" pitchFamily="34" charset="-120"/>
-              </a:rPr>
-              <a:t>AFTER ESOP</a:t>
-            </a:r>
-            <a:endParaRPr lang="en-US" sz="1100" dirty="0"/>
-          </a:p>
-        </p:txBody>
-      </p:sp>
-      <p:sp>
-        <p:nvSpPr>
-          <p:cNvPr id="25" name="Text 23"/>
-          <p:cNvSpPr txBox="1"/>
-          <p:nvPr/>
-        </p:nvSpPr>
-        <p:spPr>
-          <a:xfrm>
-            <a:off x="8924315" y="4572000"/>
-            <a:ext cx="2554148" cy="274320"/>
-          </a:xfrm>
-          <a:prstGeom prst="rect">
-            <a:avLst/>
-          </a:prstGeom>
-          <a:noFill/>
-          <a:ln/>
-        </p:spPr>
-        <p:txBody>
-          <a:bodyPr wrap="square" lIns="0" tIns="0" rIns="0" bIns="0" rtlCol="0" anchor="t"/>
-          <a:lstStyle/>
-          <a:p>
-            <a:pPr marL="0" indent="0">
-              <a:lnSpc>
-                <a:spcPts val="2200"/>
-              </a:lnSpc>
-              <a:buNone/>
-            </a:pPr>
-            <a:r>
-              <a:rPr lang="en-US" sz="1250" dirty="0">
-                <a:solidFill>
-                  <a:srgbClr val="AEB6C2"/>
-                </a:solidFill>
-                <a:latin typeface="Barlow" pitchFamily="34" charset="0"/>
-                <a:ea typeface="Barlow" pitchFamily="34" charset="-122"/>
-                <a:cs typeface="Barlow" pitchFamily="34" charset="-120"/>
-              </a:rPr>
-              <a:t>10% pool</a:t>
-            </a:r>
-            <a:endParaRPr lang="en-US" sz="1250" dirty="0"/>
-          </a:p>
-        </p:txBody>
-      </p:sp>
-      <p:sp>
-        <p:nvSpPr>
-          <p:cNvPr id="26" name="Text 24"/>
-          <p:cNvSpPr txBox="1"/>
-          <p:nvPr/>
-        </p:nvSpPr>
-        <p:spPr>
-          <a:xfrm>
-            <a:off x="8924315" y="4846320"/>
-            <a:ext cx="2554148" cy="384048"/>
-          </a:xfrm>
-          <a:prstGeom prst="rect">
-            <a:avLst/>
-          </a:prstGeom>
-          <a:noFill/>
-          <a:ln/>
-        </p:spPr>
-        <p:txBody>
-          <a:bodyPr wrap="square" lIns="0" tIns="0" rIns="0" bIns="0" rtlCol="0" anchor="t"/>
-          <a:lstStyle/>
-          <a:p>
-            <a:pPr marL="0" indent="0">
-              <a:buNone/>
-            </a:pPr>
-            <a:r>
-              <a:rPr lang="en-US" sz="2400" dirty="0">
-                <a:solidFill>
-                  <a:srgbClr val="FFB020"/>
-                </a:solidFill>
-                <a:latin typeface="Barlow Condensed" pitchFamily="34" charset="0"/>
-                <a:ea typeface="Barlow Condensed" pitchFamily="34" charset="-122"/>
-                <a:cs typeface="Barlow Condensed" pitchFamily="34" charset="-120"/>
-              </a:rPr>
-              <a:t>65.2%</a:t>
-            </a:r>
-            <a:endParaRPr lang="en-US" sz="2400" dirty="0"/>
-          </a:p>
-        </p:txBody>
-      </p:sp>
-      <p:sp>
-        <p:nvSpPr>
-          <p:cNvPr id="27" name="Text 25"/>
-          <p:cNvSpPr txBox="1"/>
-          <p:nvPr/>
-        </p:nvSpPr>
-        <p:spPr>
-          <a:xfrm>
-            <a:off x="713232" y="5285232"/>
-            <a:ext cx="5486400" cy="274320"/>
-          </a:xfrm>
-          <a:prstGeom prst="rect">
-            <a:avLst/>
-          </a:prstGeom>
-          <a:noFill/>
-          <a:ln/>
-        </p:spPr>
-        <p:txBody>
-          <a:bodyPr wrap="square" lIns="0" tIns="0" rIns="0" bIns="0" rtlCol="0" anchor="t"/>
-          <a:lstStyle/>
-          <a:p>
-            <a:pPr marL="0" indent="0">
-              <a:lnSpc>
-                <a:spcPts val="2200"/>
-              </a:lnSpc>
-              <a:buNone/>
-            </a:pPr>
-            <a:r>
-              <a:rPr lang="en-US" sz="1150" dirty="0">
-                <a:solidFill>
-                  <a:srgbClr val="828C9A"/>
-                </a:solidFill>
-                <a:latin typeface="Barlow" pitchFamily="34" charset="0"/>
-                <a:ea typeface="Barlow" pitchFamily="34" charset="-122"/>
-                <a:cs typeface="Barlow" pitchFamily="34" charset="-120"/>
-              </a:rPr>
-              <a:t>Founder stake retained through each round</a:t>
-            </a:r>
-            <a:endParaRPr lang="en-US" sz="1150" dirty="0"/>
-          </a:p>
-        </p:txBody>
-      </p:sp>
-      <p:sp>
-        <p:nvSpPr>
-          <p:cNvPr id="28" name="Text 26"/>
-          <p:cNvSpPr txBox="1"/>
-          <p:nvPr/>
-        </p:nvSpPr>
-        <p:spPr>
-          <a:xfrm>
-            <a:off x="713232" y="6382512"/>
-            <a:ext cx="9667951" cy="274320"/>
-          </a:xfrm>
-          <a:prstGeom prst="rect">
-            <a:avLst/>
-          </a:prstGeom>
-          <a:noFill/>
-          <a:ln/>
-        </p:spPr>
-        <p:txBody>
-          <a:bodyPr wrap="square" lIns="0" tIns="0" rIns="0" bIns="0" rtlCol="0" anchor="t"/>
-          <a:lstStyle/>
-          <a:p>
-            <a:pPr marL="0" indent="0">
-              <a:buNone/>
-            </a:pPr>
-            <a:r>
-              <a:rPr lang="en-US" sz="950" dirty="0">
-                <a:solidFill>
-                  <a:srgbClr val="828C9A"/>
-                </a:solidFill>
-                <a:latin typeface="Barlow" pitchFamily="34" charset="0"/>
-                <a:ea typeface="Barlow" pitchFamily="34" charset="-122"/>
-                <a:cs typeface="Barlow" pitchFamily="34" charset="-120"/>
-              </a:rPr>
-              <a:t>Stride financial model: DCF, comparable transactions from PitchBook, and the dilution waterfall.</a:t>
-            </a:r>
-            <a:endParaRPr lang="en-US" sz="950" dirty="0"/>
-          </a:p>
-        </p:txBody>
-      </p:sp>
-      <p:sp>
-        <p:nvSpPr>
-          <p:cNvPr id="29" name="Slide Number Placeholder 0"/>
+              <a:t>A risk map that is evenly scattered has not identified which risk is the real one. R1 is the thesis, and the entire financing structure exists to buy it down cheaply.</a:t>
+            </a:r>
+            <a:endParaRPr lang="en-US" sz="1350" dirty="0"/>
+          </a:p>
+        </p:txBody>
+      </p:sp>
+      <p:sp>
+        <p:nvSpPr>
+          <p:cNvPr id="25" name="Slide Number Placeholder 0"/>
           <p:cNvSpPr>
             <a:spLocks noGrp="1"/>
           </p:cNvSpPr>
@@ -19067,6 +19503,1166 @@
                 <a:ea typeface="Barlow Condensed" pitchFamily="34" charset="-122"/>
                 <a:cs typeface="Barlow Condensed" pitchFamily="34" charset="-120"/>
               </a:rPr>
+              <a:t>BACKUP, VALUATION</a:t>
+            </a:r>
+            <a:endParaRPr lang="en-US" sz="1250" dirty="0"/>
+          </a:p>
+        </p:txBody>
+      </p:sp>
+      <p:sp>
+        <p:nvSpPr>
+          <p:cNvPr id="3" name="Text 1"/>
+          <p:cNvSpPr txBox="1"/>
+          <p:nvPr/>
+        </p:nvSpPr>
+        <p:spPr>
+          <a:xfrm>
+            <a:off x="713232" y="786384"/>
+            <a:ext cx="10765231" cy="685800"/>
+          </a:xfrm>
+          <a:prstGeom prst="rect">
+            <a:avLst/>
+          </a:prstGeom>
+          <a:noFill/>
+          <a:ln/>
+        </p:spPr>
+        <p:txBody>
+          <a:bodyPr wrap="square" lIns="0" tIns="0" rIns="0" bIns="0" rtlCol="0" anchor="t"/>
+          <a:lstStyle/>
+          <a:p>
+            <a:pPr marL="0" indent="0">
+              <a:lnSpc>
+                <a:spcPts val="3800"/>
+              </a:lnSpc>
+              <a:buNone/>
+            </a:pPr>
+            <a:r>
+              <a:rPr lang="en-US" sz="3200" dirty="0">
+                <a:solidFill>
+                  <a:srgbClr val="F2F4F7"/>
+                </a:solidFill>
+                <a:latin typeface="Barlow Condensed" pitchFamily="34" charset="0"/>
+                <a:ea typeface="Barlow Condensed" pitchFamily="34" charset="-122"/>
+                <a:cs typeface="Barlow Condensed" pitchFamily="34" charset="-120"/>
+              </a:rPr>
+              <a:t>Where the €1.8M pre-money comes from</a:t>
+            </a:r>
+            <a:endParaRPr lang="en-US" sz="3200" dirty="0"/>
+          </a:p>
+        </p:txBody>
+      </p:sp>
+      <p:sp>
+        <p:nvSpPr>
+          <p:cNvPr id="4" name="Text 2"/>
+          <p:cNvSpPr txBox="1"/>
+          <p:nvPr/>
+        </p:nvSpPr>
+        <p:spPr>
+          <a:xfrm>
+            <a:off x="713232" y="1536192"/>
+            <a:ext cx="10765231" cy="411480"/>
+          </a:xfrm>
+          <a:prstGeom prst="rect">
+            <a:avLst/>
+          </a:prstGeom>
+          <a:noFill/>
+          <a:ln/>
+        </p:spPr>
+        <p:txBody>
+          <a:bodyPr wrap="square" lIns="0" tIns="0" rIns="0" bIns="0" rtlCol="0" anchor="t"/>
+          <a:lstStyle/>
+          <a:p>
+            <a:pPr marL="0" indent="0">
+              <a:lnSpc>
+                <a:spcPts val="2200"/>
+              </a:lnSpc>
+              <a:buNone/>
+            </a:pPr>
+            <a:r>
+              <a:rPr lang="en-US" sz="1400" dirty="0">
+                <a:solidFill>
+                  <a:srgbClr val="AEB6C2"/>
+                </a:solidFill>
+                <a:latin typeface="Barlow" pitchFamily="34" charset="0"/>
+                <a:ea typeface="Barlow" pitchFamily="34" charset="-122"/>
+                <a:cs typeface="Barlow" pitchFamily="34" charset="-120"/>
+              </a:rPr>
+              <a:t>Two methods that disagree, and the disagreement is the honest part.</a:t>
+            </a:r>
+            <a:endParaRPr lang="en-US" sz="1400" dirty="0"/>
+          </a:p>
+        </p:txBody>
+      </p:sp>
+      <p:sp>
+        <p:nvSpPr>
+          <p:cNvPr id="5" name="Text 3"/>
+          <p:cNvSpPr txBox="1"/>
+          <p:nvPr/>
+        </p:nvSpPr>
+        <p:spPr>
+          <a:xfrm>
+            <a:off x="713232" y="2194560"/>
+            <a:ext cx="2926080" cy="219456"/>
+          </a:xfrm>
+          <a:prstGeom prst="rect">
+            <a:avLst/>
+          </a:prstGeom>
+          <a:noFill/>
+          <a:ln/>
+        </p:spPr>
+        <p:txBody>
+          <a:bodyPr wrap="square" lIns="0" tIns="0" rIns="0" bIns="0" rtlCol="0" anchor="t"/>
+          <a:lstStyle/>
+          <a:p>
+            <a:pPr marL="0" indent="0">
+              <a:lnSpc>
+                <a:spcPts val="1400"/>
+              </a:lnSpc>
+              <a:buNone/>
+            </a:pPr>
+            <a:r>
+              <a:rPr lang="en-US" sz="1150" kern="0" spc="220" dirty="0">
+                <a:solidFill>
+                  <a:srgbClr val="828C9A"/>
+                </a:solidFill>
+                <a:latin typeface="Barlow Condensed" pitchFamily="34" charset="0"/>
+                <a:ea typeface="Barlow Condensed" pitchFamily="34" charset="-122"/>
+                <a:cs typeface="Barlow Condensed" pitchFamily="34" charset="-120"/>
+              </a:rPr>
+              <a:t>DCF ENTERPRISE VALUE</a:t>
+            </a:r>
+            <a:endParaRPr lang="en-US" sz="1150" dirty="0"/>
+          </a:p>
+        </p:txBody>
+      </p:sp>
+      <p:sp>
+        <p:nvSpPr>
+          <p:cNvPr id="6" name="Text 4"/>
+          <p:cNvSpPr txBox="1"/>
+          <p:nvPr/>
+        </p:nvSpPr>
+        <p:spPr>
+          <a:xfrm>
+            <a:off x="713232" y="2414016"/>
+            <a:ext cx="2926080" cy="725214"/>
+          </a:xfrm>
+          <a:prstGeom prst="rect">
+            <a:avLst/>
+          </a:prstGeom>
+          <a:noFill/>
+          <a:ln/>
+        </p:spPr>
+        <p:txBody>
+          <a:bodyPr wrap="square" lIns="0" tIns="0" rIns="0" bIns="0" rtlCol="0" anchor="t"/>
+          <a:lstStyle/>
+          <a:p>
+            <a:pPr marL="0" indent="0">
+              <a:lnSpc>
+                <a:spcPts val="4508"/>
+              </a:lnSpc>
+              <a:buNone/>
+            </a:pPr>
+            <a:r>
+              <a:rPr lang="en-US" sz="4600" dirty="0">
+                <a:solidFill>
+                  <a:srgbClr val="F2F4F7"/>
+                </a:solidFill>
+                <a:latin typeface="Barlow Condensed" pitchFamily="34" charset="0"/>
+                <a:ea typeface="Barlow Condensed" pitchFamily="34" charset="-122"/>
+                <a:cs typeface="Barlow Condensed" pitchFamily="34" charset="-120"/>
+              </a:rPr>
+              <a:t>€1.23M</a:t>
+            </a:r>
+            <a:endParaRPr lang="en-US" sz="4600" dirty="0"/>
+          </a:p>
+        </p:txBody>
+      </p:sp>
+      <p:sp>
+        <p:nvSpPr>
+          <p:cNvPr id="7" name="Text 5"/>
+          <p:cNvSpPr txBox="1"/>
+          <p:nvPr/>
+        </p:nvSpPr>
+        <p:spPr>
+          <a:xfrm>
+            <a:off x="713232" y="3166662"/>
+            <a:ext cx="2926080" cy="713232"/>
+          </a:xfrm>
+          <a:prstGeom prst="rect">
+            <a:avLst/>
+          </a:prstGeom>
+          <a:noFill/>
+          <a:ln/>
+        </p:spPr>
+        <p:txBody>
+          <a:bodyPr wrap="square" lIns="0" tIns="0" rIns="0" bIns="0" rtlCol="0" anchor="t"/>
+          <a:lstStyle/>
+          <a:p>
+            <a:pPr marL="0" indent="0">
+              <a:lnSpc>
+                <a:spcPts val="1500"/>
+              </a:lnSpc>
+              <a:buNone/>
+            </a:pPr>
+            <a:r>
+              <a:rPr lang="en-US" sz="1200" dirty="0">
+                <a:solidFill>
+                  <a:srgbClr val="828C9A"/>
+                </a:solidFill>
+                <a:latin typeface="Barlow" pitchFamily="34" charset="0"/>
+                <a:ea typeface="Barlow" pitchFamily="34" charset="-122"/>
+                <a:cs typeface="Barlow" pitchFamily="34" charset="-120"/>
+              </a:rPr>
+              <a:t>25% WACC, 3% terminal growth. Below the pre-money, which is normal for a pre-revenue venture.</a:t>
+            </a:r>
+            <a:endParaRPr lang="en-US" sz="1200" dirty="0"/>
+          </a:p>
+        </p:txBody>
+      </p:sp>
+      <p:sp>
+        <p:nvSpPr>
+          <p:cNvPr id="8" name="Text 6"/>
+          <p:cNvSpPr txBox="1"/>
+          <p:nvPr/>
+        </p:nvSpPr>
+        <p:spPr>
+          <a:xfrm>
+            <a:off x="4645152" y="2194560"/>
+            <a:ext cx="2926080" cy="219456"/>
+          </a:xfrm>
+          <a:prstGeom prst="rect">
+            <a:avLst/>
+          </a:prstGeom>
+          <a:noFill/>
+          <a:ln/>
+        </p:spPr>
+        <p:txBody>
+          <a:bodyPr wrap="square" lIns="0" tIns="0" rIns="0" bIns="0" rtlCol="0" anchor="t"/>
+          <a:lstStyle/>
+          <a:p>
+            <a:pPr marL="0" indent="0">
+              <a:lnSpc>
+                <a:spcPts val="1400"/>
+              </a:lnSpc>
+              <a:buNone/>
+            </a:pPr>
+            <a:r>
+              <a:rPr lang="en-US" sz="1150" kern="0" spc="220" dirty="0">
+                <a:solidFill>
+                  <a:srgbClr val="828C9A"/>
+                </a:solidFill>
+                <a:latin typeface="Barlow Condensed" pitchFamily="34" charset="0"/>
+                <a:ea typeface="Barlow Condensed" pitchFamily="34" charset="-122"/>
+                <a:cs typeface="Barlow Condensed" pitchFamily="34" charset="-120"/>
+              </a:rPr>
+              <a:t>COMPARABLE SET</a:t>
+            </a:r>
+            <a:endParaRPr lang="en-US" sz="1150" dirty="0"/>
+          </a:p>
+        </p:txBody>
+      </p:sp>
+      <p:sp>
+        <p:nvSpPr>
+          <p:cNvPr id="9" name="Text 7"/>
+          <p:cNvSpPr txBox="1"/>
+          <p:nvPr/>
+        </p:nvSpPr>
+        <p:spPr>
+          <a:xfrm>
+            <a:off x="4645152" y="2414016"/>
+            <a:ext cx="2926080" cy="725214"/>
+          </a:xfrm>
+          <a:prstGeom prst="rect">
+            <a:avLst/>
+          </a:prstGeom>
+          <a:noFill/>
+          <a:ln/>
+        </p:spPr>
+        <p:txBody>
+          <a:bodyPr wrap="square" lIns="0" tIns="0" rIns="0" bIns="0" rtlCol="0" anchor="t"/>
+          <a:lstStyle/>
+          <a:p>
+            <a:pPr marL="0" indent="0">
+              <a:lnSpc>
+                <a:spcPts val="4508"/>
+              </a:lnSpc>
+              <a:buNone/>
+            </a:pPr>
+            <a:r>
+              <a:rPr lang="en-US" sz="4600" dirty="0">
+                <a:solidFill>
+                  <a:srgbClr val="FFB020"/>
+                </a:solidFill>
+                <a:latin typeface="Barlow Condensed" pitchFamily="34" charset="0"/>
+                <a:ea typeface="Barlow Condensed" pitchFamily="34" charset="-122"/>
+                <a:cs typeface="Barlow Condensed" pitchFamily="34" charset="-120"/>
+              </a:rPr>
+              <a:t>€1.8M</a:t>
+            </a:r>
+            <a:endParaRPr lang="en-US" sz="4600" dirty="0"/>
+          </a:p>
+        </p:txBody>
+      </p:sp>
+      <p:sp>
+        <p:nvSpPr>
+          <p:cNvPr id="10" name="Text 8"/>
+          <p:cNvSpPr txBox="1"/>
+          <p:nvPr/>
+        </p:nvSpPr>
+        <p:spPr>
+          <a:xfrm>
+            <a:off x="4645152" y="3166662"/>
+            <a:ext cx="2926080" cy="713232"/>
+          </a:xfrm>
+          <a:prstGeom prst="rect">
+            <a:avLst/>
+          </a:prstGeom>
+          <a:noFill/>
+          <a:ln/>
+        </p:spPr>
+        <p:txBody>
+          <a:bodyPr wrap="square" lIns="0" tIns="0" rIns="0" bIns="0" rtlCol="0" anchor="t"/>
+          <a:lstStyle/>
+          <a:p>
+            <a:pPr marL="0" indent="0">
+              <a:lnSpc>
+                <a:spcPts val="1500"/>
+              </a:lnSpc>
+              <a:buNone/>
+            </a:pPr>
+            <a:r>
+              <a:rPr lang="en-US" sz="1200" dirty="0">
+                <a:solidFill>
+                  <a:srgbClr val="828C9A"/>
+                </a:solidFill>
+                <a:latin typeface="Barlow" pitchFamily="34" charset="0"/>
+                <a:ea typeface="Barlow" pitchFamily="34" charset="-122"/>
+                <a:cs typeface="Barlow" pitchFamily="34" charset="-120"/>
+              </a:rPr>
+              <a:t>Benchmarked against Sponsoo and OpenSponsorship, the two companies running the same model.</a:t>
+            </a:r>
+            <a:endParaRPr lang="en-US" sz="1200" dirty="0"/>
+          </a:p>
+        </p:txBody>
+      </p:sp>
+      <p:sp>
+        <p:nvSpPr>
+          <p:cNvPr id="11" name="Text 9"/>
+          <p:cNvSpPr txBox="1"/>
+          <p:nvPr/>
+        </p:nvSpPr>
+        <p:spPr>
+          <a:xfrm>
+            <a:off x="8577072" y="2194560"/>
+            <a:ext cx="2926080" cy="219456"/>
+          </a:xfrm>
+          <a:prstGeom prst="rect">
+            <a:avLst/>
+          </a:prstGeom>
+          <a:noFill/>
+          <a:ln/>
+        </p:spPr>
+        <p:txBody>
+          <a:bodyPr wrap="square" lIns="0" tIns="0" rIns="0" bIns="0" rtlCol="0" anchor="t"/>
+          <a:lstStyle/>
+          <a:p>
+            <a:pPr marL="0" indent="0">
+              <a:lnSpc>
+                <a:spcPts val="1400"/>
+              </a:lnSpc>
+              <a:buNone/>
+            </a:pPr>
+            <a:r>
+              <a:rPr lang="en-US" sz="1150" kern="0" spc="220" dirty="0">
+                <a:solidFill>
+                  <a:srgbClr val="828C9A"/>
+                </a:solidFill>
+                <a:latin typeface="Barlow Condensed" pitchFamily="34" charset="0"/>
+                <a:ea typeface="Barlow Condensed" pitchFamily="34" charset="-122"/>
+                <a:cs typeface="Barlow Condensed" pitchFamily="34" charset="-120"/>
+              </a:rPr>
+              <a:t>FOUNDER AND TEAM HOLD</a:t>
+            </a:r>
+            <a:endParaRPr lang="en-US" sz="1150" dirty="0"/>
+          </a:p>
+        </p:txBody>
+      </p:sp>
+      <p:sp>
+        <p:nvSpPr>
+          <p:cNvPr id="12" name="Text 10"/>
+          <p:cNvSpPr txBox="1"/>
+          <p:nvPr/>
+        </p:nvSpPr>
+        <p:spPr>
+          <a:xfrm>
+            <a:off x="8577072" y="2414016"/>
+            <a:ext cx="2926080" cy="725214"/>
+          </a:xfrm>
+          <a:prstGeom prst="rect">
+            <a:avLst/>
+          </a:prstGeom>
+          <a:noFill/>
+          <a:ln/>
+        </p:spPr>
+        <p:txBody>
+          <a:bodyPr wrap="square" lIns="0" tIns="0" rIns="0" bIns="0" rtlCol="0" anchor="t"/>
+          <a:lstStyle/>
+          <a:p>
+            <a:pPr marL="0" indent="0">
+              <a:lnSpc>
+                <a:spcPts val="4508"/>
+              </a:lnSpc>
+              <a:buNone/>
+            </a:pPr>
+            <a:r>
+              <a:rPr lang="en-US" sz="4600" dirty="0">
+                <a:solidFill>
+                  <a:srgbClr val="F2F4F7"/>
+                </a:solidFill>
+                <a:latin typeface="Barlow Condensed" pitchFamily="34" charset="0"/>
+                <a:ea typeface="Barlow Condensed" pitchFamily="34" charset="-122"/>
+                <a:cs typeface="Barlow Condensed" pitchFamily="34" charset="-120"/>
+              </a:rPr>
+              <a:t>65.2%</a:t>
+            </a:r>
+            <a:endParaRPr lang="en-US" sz="4600" dirty="0"/>
+          </a:p>
+        </p:txBody>
+      </p:sp>
+      <p:sp>
+        <p:nvSpPr>
+          <p:cNvPr id="13" name="Text 11"/>
+          <p:cNvSpPr txBox="1"/>
+          <p:nvPr/>
+        </p:nvSpPr>
+        <p:spPr>
+          <a:xfrm>
+            <a:off x="8577072" y="3166662"/>
+            <a:ext cx="2926080" cy="713232"/>
+          </a:xfrm>
+          <a:prstGeom prst="rect">
+            <a:avLst/>
+          </a:prstGeom>
+          <a:noFill/>
+          <a:ln/>
+        </p:spPr>
+        <p:txBody>
+          <a:bodyPr wrap="square" lIns="0" tIns="0" rIns="0" bIns="0" rtlCol="0" anchor="t"/>
+          <a:lstStyle/>
+          <a:p>
+            <a:pPr marL="0" indent="0">
+              <a:lnSpc>
+                <a:spcPts val="1500"/>
+              </a:lnSpc>
+              <a:buNone/>
+            </a:pPr>
+            <a:r>
+              <a:rPr lang="en-US" sz="1200" dirty="0">
+                <a:solidFill>
+                  <a:srgbClr val="828C9A"/>
+                </a:solidFill>
+                <a:latin typeface="Barlow" pitchFamily="34" charset="0"/>
+                <a:ea typeface="Barlow" pitchFamily="34" charset="-122"/>
+                <a:cs typeface="Barlow" pitchFamily="34" charset="-120"/>
+              </a:rPr>
+              <a:t>After both tranches, the optional growth round and a fully topped 10% ESOP.</a:t>
+            </a:r>
+            <a:endParaRPr lang="en-US" sz="1200" dirty="0"/>
+          </a:p>
+        </p:txBody>
+      </p:sp>
+      <p:sp>
+        <p:nvSpPr>
+          <p:cNvPr id="14" name="Shape 12"/>
+          <p:cNvSpPr/>
+          <p:nvPr/>
+        </p:nvSpPr>
+        <p:spPr>
+          <a:xfrm>
+            <a:off x="713232" y="4160520"/>
+            <a:ext cx="10765231" cy="12802"/>
+          </a:xfrm>
+          <a:prstGeom prst="rect">
+            <a:avLst/>
+          </a:prstGeom>
+          <a:solidFill>
+            <a:srgbClr val="262C35"/>
+          </a:solidFill>
+          <a:ln w="12700">
+            <a:solidFill>
+              <a:srgbClr val="333333"/>
+            </a:solidFill>
+            <a:prstDash val="solid"/>
+          </a:ln>
+        </p:spPr>
+      </p:sp>
+      <p:sp>
+        <p:nvSpPr>
+          <p:cNvPr id="15" name="Text 13"/>
+          <p:cNvSpPr txBox="1"/>
+          <p:nvPr/>
+        </p:nvSpPr>
+        <p:spPr>
+          <a:xfrm>
+            <a:off x="713232" y="4343400"/>
+            <a:ext cx="2554148" cy="219456"/>
+          </a:xfrm>
+          <a:prstGeom prst="rect">
+            <a:avLst/>
+          </a:prstGeom>
+          <a:noFill/>
+          <a:ln/>
+        </p:spPr>
+        <p:txBody>
+          <a:bodyPr wrap="square" lIns="0" tIns="0" rIns="0" bIns="0" rtlCol="0" anchor="t"/>
+          <a:lstStyle/>
+          <a:p>
+            <a:pPr marL="0" indent="0">
+              <a:buNone/>
+            </a:pPr>
+            <a:r>
+              <a:rPr lang="en-US" sz="1100" kern="0" spc="200" dirty="0">
+                <a:solidFill>
+                  <a:srgbClr val="828C9A"/>
+                </a:solidFill>
+                <a:latin typeface="Barlow Condensed" pitchFamily="34" charset="0"/>
+                <a:ea typeface="Barlow Condensed" pitchFamily="34" charset="-122"/>
+                <a:cs typeface="Barlow Condensed" pitchFamily="34" charset="-120"/>
+              </a:rPr>
+              <a:t>PRE-SEED</a:t>
+            </a:r>
+            <a:endParaRPr lang="en-US" sz="1100" dirty="0"/>
+          </a:p>
+        </p:txBody>
+      </p:sp>
+      <p:sp>
+        <p:nvSpPr>
+          <p:cNvPr id="16" name="Text 14"/>
+          <p:cNvSpPr txBox="1"/>
+          <p:nvPr/>
+        </p:nvSpPr>
+        <p:spPr>
+          <a:xfrm>
+            <a:off x="713232" y="4572000"/>
+            <a:ext cx="2554148" cy="274320"/>
+          </a:xfrm>
+          <a:prstGeom prst="rect">
+            <a:avLst/>
+          </a:prstGeom>
+          <a:noFill/>
+          <a:ln/>
+        </p:spPr>
+        <p:txBody>
+          <a:bodyPr wrap="square" lIns="0" tIns="0" rIns="0" bIns="0" rtlCol="0" anchor="t"/>
+          <a:lstStyle/>
+          <a:p>
+            <a:pPr marL="0" indent="0">
+              <a:lnSpc>
+                <a:spcPts val="2200"/>
+              </a:lnSpc>
+              <a:buNone/>
+            </a:pPr>
+            <a:r>
+              <a:rPr lang="en-US" sz="1250" dirty="0">
+                <a:solidFill>
+                  <a:srgbClr val="AEB6C2"/>
+                </a:solidFill>
+                <a:latin typeface="Barlow" pitchFamily="34" charset="0"/>
+                <a:ea typeface="Barlow" pitchFamily="34" charset="-122"/>
+                <a:cs typeface="Barlow" pitchFamily="34" charset="-120"/>
+              </a:rPr>
+              <a:t>€150k at €1.8M</a:t>
+            </a:r>
+            <a:endParaRPr lang="en-US" sz="1250" dirty="0"/>
+          </a:p>
+        </p:txBody>
+      </p:sp>
+      <p:sp>
+        <p:nvSpPr>
+          <p:cNvPr id="17" name="Text 15"/>
+          <p:cNvSpPr txBox="1"/>
+          <p:nvPr/>
+        </p:nvSpPr>
+        <p:spPr>
+          <a:xfrm>
+            <a:off x="713232" y="4846320"/>
+            <a:ext cx="2554148" cy="384048"/>
+          </a:xfrm>
+          <a:prstGeom prst="rect">
+            <a:avLst/>
+          </a:prstGeom>
+          <a:noFill/>
+          <a:ln/>
+        </p:spPr>
+        <p:txBody>
+          <a:bodyPr wrap="square" lIns="0" tIns="0" rIns="0" bIns="0" rtlCol="0" anchor="t"/>
+          <a:lstStyle/>
+          <a:p>
+            <a:pPr marL="0" indent="0">
+              <a:buNone/>
+            </a:pPr>
+            <a:r>
+              <a:rPr lang="en-US" sz="2400" dirty="0">
+                <a:solidFill>
+                  <a:srgbClr val="F2F4F7"/>
+                </a:solidFill>
+                <a:latin typeface="Barlow Condensed" pitchFamily="34" charset="0"/>
+                <a:ea typeface="Barlow Condensed" pitchFamily="34" charset="-122"/>
+                <a:cs typeface="Barlow Condensed" pitchFamily="34" charset="-120"/>
+              </a:rPr>
+              <a:t>87.3%</a:t>
+            </a:r>
+            <a:endParaRPr lang="en-US" sz="2400" dirty="0"/>
+          </a:p>
+        </p:txBody>
+      </p:sp>
+      <p:sp>
+        <p:nvSpPr>
+          <p:cNvPr id="18" name="Text 16"/>
+          <p:cNvSpPr txBox="1"/>
+          <p:nvPr/>
+        </p:nvSpPr>
+        <p:spPr>
+          <a:xfrm>
+            <a:off x="3450260" y="4343400"/>
+            <a:ext cx="2554148" cy="219456"/>
+          </a:xfrm>
+          <a:prstGeom prst="rect">
+            <a:avLst/>
+          </a:prstGeom>
+          <a:noFill/>
+          <a:ln/>
+        </p:spPr>
+        <p:txBody>
+          <a:bodyPr wrap="square" lIns="0" tIns="0" rIns="0" bIns="0" rtlCol="0" anchor="t"/>
+          <a:lstStyle/>
+          <a:p>
+            <a:pPr marL="0" indent="0">
+              <a:buNone/>
+            </a:pPr>
+            <a:r>
+              <a:rPr lang="en-US" sz="1100" kern="0" spc="200" dirty="0">
+                <a:solidFill>
+                  <a:srgbClr val="828C9A"/>
+                </a:solidFill>
+                <a:latin typeface="Barlow Condensed" pitchFamily="34" charset="0"/>
+                <a:ea typeface="Barlow Condensed" pitchFamily="34" charset="-122"/>
+                <a:cs typeface="Barlow Condensed" pitchFamily="34" charset="-120"/>
+              </a:rPr>
+              <a:t>EXTENSION</a:t>
+            </a:r>
+            <a:endParaRPr lang="en-US" sz="1100" dirty="0"/>
+          </a:p>
+        </p:txBody>
+      </p:sp>
+      <p:sp>
+        <p:nvSpPr>
+          <p:cNvPr id="19" name="Text 17"/>
+          <p:cNvSpPr txBox="1"/>
+          <p:nvPr/>
+        </p:nvSpPr>
+        <p:spPr>
+          <a:xfrm>
+            <a:off x="3450260" y="4572000"/>
+            <a:ext cx="2554148" cy="274320"/>
+          </a:xfrm>
+          <a:prstGeom prst="rect">
+            <a:avLst/>
+          </a:prstGeom>
+          <a:noFill/>
+          <a:ln/>
+        </p:spPr>
+        <p:txBody>
+          <a:bodyPr wrap="square" lIns="0" tIns="0" rIns="0" bIns="0" rtlCol="0" anchor="t"/>
+          <a:lstStyle/>
+          <a:p>
+            <a:pPr marL="0" indent="0">
+              <a:lnSpc>
+                <a:spcPts val="2200"/>
+              </a:lnSpc>
+              <a:buNone/>
+            </a:pPr>
+            <a:r>
+              <a:rPr lang="en-US" sz="1250" dirty="0">
+                <a:solidFill>
+                  <a:srgbClr val="AEB6C2"/>
+                </a:solidFill>
+                <a:latin typeface="Barlow" pitchFamily="34" charset="0"/>
+                <a:ea typeface="Barlow" pitchFamily="34" charset="-122"/>
+                <a:cs typeface="Barlow" pitchFamily="34" charset="-120"/>
+              </a:rPr>
+              <a:t>€250k at €3.5M</a:t>
+            </a:r>
+            <a:endParaRPr lang="en-US" sz="1250" dirty="0"/>
+          </a:p>
+        </p:txBody>
+      </p:sp>
+      <p:sp>
+        <p:nvSpPr>
+          <p:cNvPr id="20" name="Text 18"/>
+          <p:cNvSpPr txBox="1"/>
+          <p:nvPr/>
+        </p:nvSpPr>
+        <p:spPr>
+          <a:xfrm>
+            <a:off x="3450260" y="4846320"/>
+            <a:ext cx="2554148" cy="384048"/>
+          </a:xfrm>
+          <a:prstGeom prst="rect">
+            <a:avLst/>
+          </a:prstGeom>
+          <a:noFill/>
+          <a:ln/>
+        </p:spPr>
+        <p:txBody>
+          <a:bodyPr wrap="square" lIns="0" tIns="0" rIns="0" bIns="0" rtlCol="0" anchor="t"/>
+          <a:lstStyle/>
+          <a:p>
+            <a:pPr marL="0" indent="0">
+              <a:buNone/>
+            </a:pPr>
+            <a:r>
+              <a:rPr lang="en-US" sz="2400" dirty="0">
+                <a:solidFill>
+                  <a:srgbClr val="F2F4F7"/>
+                </a:solidFill>
+                <a:latin typeface="Barlow Condensed" pitchFamily="34" charset="0"/>
+                <a:ea typeface="Barlow Condensed" pitchFamily="34" charset="-122"/>
+                <a:cs typeface="Barlow Condensed" pitchFamily="34" charset="-120"/>
+              </a:rPr>
+              <a:t>81.5%</a:t>
+            </a:r>
+            <a:endParaRPr lang="en-US" sz="2400" dirty="0"/>
+          </a:p>
+        </p:txBody>
+      </p:sp>
+      <p:sp>
+        <p:nvSpPr>
+          <p:cNvPr id="21" name="Text 19"/>
+          <p:cNvSpPr txBox="1"/>
+          <p:nvPr/>
+        </p:nvSpPr>
+        <p:spPr>
+          <a:xfrm>
+            <a:off x="6187288" y="4343400"/>
+            <a:ext cx="2554148" cy="219456"/>
+          </a:xfrm>
+          <a:prstGeom prst="rect">
+            <a:avLst/>
+          </a:prstGeom>
+          <a:noFill/>
+          <a:ln/>
+        </p:spPr>
+        <p:txBody>
+          <a:bodyPr wrap="square" lIns="0" tIns="0" rIns="0" bIns="0" rtlCol="0" anchor="t"/>
+          <a:lstStyle/>
+          <a:p>
+            <a:pPr marL="0" indent="0">
+              <a:buNone/>
+            </a:pPr>
+            <a:r>
+              <a:rPr lang="en-US" sz="1100" kern="0" spc="200" dirty="0">
+                <a:solidFill>
+                  <a:srgbClr val="828C9A"/>
+                </a:solidFill>
+                <a:latin typeface="Barlow Condensed" pitchFamily="34" charset="0"/>
+                <a:ea typeface="Barlow Condensed" pitchFamily="34" charset="-122"/>
+                <a:cs typeface="Barlow Condensed" pitchFamily="34" charset="-120"/>
+              </a:rPr>
+              <a:t>GROWTH, OPTIONAL</a:t>
+            </a:r>
+            <a:endParaRPr lang="en-US" sz="1100" dirty="0"/>
+          </a:p>
+        </p:txBody>
+      </p:sp>
+      <p:sp>
+        <p:nvSpPr>
+          <p:cNvPr id="22" name="Text 20"/>
+          <p:cNvSpPr txBox="1"/>
+          <p:nvPr/>
+        </p:nvSpPr>
+        <p:spPr>
+          <a:xfrm>
+            <a:off x="6187288" y="4572000"/>
+            <a:ext cx="2554148" cy="274320"/>
+          </a:xfrm>
+          <a:prstGeom prst="rect">
+            <a:avLst/>
+          </a:prstGeom>
+          <a:noFill/>
+          <a:ln/>
+        </p:spPr>
+        <p:txBody>
+          <a:bodyPr wrap="square" lIns="0" tIns="0" rIns="0" bIns="0" rtlCol="0" anchor="t"/>
+          <a:lstStyle/>
+          <a:p>
+            <a:pPr marL="0" indent="0">
+              <a:lnSpc>
+                <a:spcPts val="2200"/>
+              </a:lnSpc>
+              <a:buNone/>
+            </a:pPr>
+            <a:r>
+              <a:rPr lang="en-US" sz="1250" dirty="0">
+                <a:solidFill>
+                  <a:srgbClr val="AEB6C2"/>
+                </a:solidFill>
+                <a:latin typeface="Barlow" pitchFamily="34" charset="0"/>
+                <a:ea typeface="Barlow" pitchFamily="34" charset="-122"/>
+                <a:cs typeface="Barlow" pitchFamily="34" charset="-120"/>
+              </a:rPr>
+              <a:t>€1.5M at €12M</a:t>
+            </a:r>
+            <a:endParaRPr lang="en-US" sz="1250" dirty="0"/>
+          </a:p>
+        </p:txBody>
+      </p:sp>
+      <p:sp>
+        <p:nvSpPr>
+          <p:cNvPr id="23" name="Text 21"/>
+          <p:cNvSpPr txBox="1"/>
+          <p:nvPr/>
+        </p:nvSpPr>
+        <p:spPr>
+          <a:xfrm>
+            <a:off x="6187288" y="4846320"/>
+            <a:ext cx="2554148" cy="384048"/>
+          </a:xfrm>
+          <a:prstGeom prst="rect">
+            <a:avLst/>
+          </a:prstGeom>
+          <a:noFill/>
+          <a:ln/>
+        </p:spPr>
+        <p:txBody>
+          <a:bodyPr wrap="square" lIns="0" tIns="0" rIns="0" bIns="0" rtlCol="0" anchor="t"/>
+          <a:lstStyle/>
+          <a:p>
+            <a:pPr marL="0" indent="0">
+              <a:buNone/>
+            </a:pPr>
+            <a:r>
+              <a:rPr lang="en-US" sz="2400" dirty="0">
+                <a:solidFill>
+                  <a:srgbClr val="F2F4F7"/>
+                </a:solidFill>
+                <a:latin typeface="Barlow Condensed" pitchFamily="34" charset="0"/>
+                <a:ea typeface="Barlow Condensed" pitchFamily="34" charset="-122"/>
+                <a:cs typeface="Barlow Condensed" pitchFamily="34" charset="-120"/>
+              </a:rPr>
+              <a:t>72.4%</a:t>
+            </a:r>
+            <a:endParaRPr lang="en-US" sz="2400" dirty="0"/>
+          </a:p>
+        </p:txBody>
+      </p:sp>
+      <p:sp>
+        <p:nvSpPr>
+          <p:cNvPr id="24" name="Text 22"/>
+          <p:cNvSpPr txBox="1"/>
+          <p:nvPr/>
+        </p:nvSpPr>
+        <p:spPr>
+          <a:xfrm>
+            <a:off x="8924315" y="4343400"/>
+            <a:ext cx="2554148" cy="219456"/>
+          </a:xfrm>
+          <a:prstGeom prst="rect">
+            <a:avLst/>
+          </a:prstGeom>
+          <a:noFill/>
+          <a:ln/>
+        </p:spPr>
+        <p:txBody>
+          <a:bodyPr wrap="square" lIns="0" tIns="0" rIns="0" bIns="0" rtlCol="0" anchor="t"/>
+          <a:lstStyle/>
+          <a:p>
+            <a:pPr marL="0" indent="0">
+              <a:buNone/>
+            </a:pPr>
+            <a:r>
+              <a:rPr lang="en-US" sz="1100" kern="0" spc="200" dirty="0">
+                <a:solidFill>
+                  <a:srgbClr val="828C9A"/>
+                </a:solidFill>
+                <a:latin typeface="Barlow Condensed" pitchFamily="34" charset="0"/>
+                <a:ea typeface="Barlow Condensed" pitchFamily="34" charset="-122"/>
+                <a:cs typeface="Barlow Condensed" pitchFamily="34" charset="-120"/>
+              </a:rPr>
+              <a:t>AFTER ESOP</a:t>
+            </a:r>
+            <a:endParaRPr lang="en-US" sz="1100" dirty="0"/>
+          </a:p>
+        </p:txBody>
+      </p:sp>
+      <p:sp>
+        <p:nvSpPr>
+          <p:cNvPr id="25" name="Text 23"/>
+          <p:cNvSpPr txBox="1"/>
+          <p:nvPr/>
+        </p:nvSpPr>
+        <p:spPr>
+          <a:xfrm>
+            <a:off x="8924315" y="4572000"/>
+            <a:ext cx="2554148" cy="274320"/>
+          </a:xfrm>
+          <a:prstGeom prst="rect">
+            <a:avLst/>
+          </a:prstGeom>
+          <a:noFill/>
+          <a:ln/>
+        </p:spPr>
+        <p:txBody>
+          <a:bodyPr wrap="square" lIns="0" tIns="0" rIns="0" bIns="0" rtlCol="0" anchor="t"/>
+          <a:lstStyle/>
+          <a:p>
+            <a:pPr marL="0" indent="0">
+              <a:lnSpc>
+                <a:spcPts val="2200"/>
+              </a:lnSpc>
+              <a:buNone/>
+            </a:pPr>
+            <a:r>
+              <a:rPr lang="en-US" sz="1250" dirty="0">
+                <a:solidFill>
+                  <a:srgbClr val="AEB6C2"/>
+                </a:solidFill>
+                <a:latin typeface="Barlow" pitchFamily="34" charset="0"/>
+                <a:ea typeface="Barlow" pitchFamily="34" charset="-122"/>
+                <a:cs typeface="Barlow" pitchFamily="34" charset="-120"/>
+              </a:rPr>
+              <a:t>10% pool</a:t>
+            </a:r>
+            <a:endParaRPr lang="en-US" sz="1250" dirty="0"/>
+          </a:p>
+        </p:txBody>
+      </p:sp>
+      <p:sp>
+        <p:nvSpPr>
+          <p:cNvPr id="26" name="Text 24"/>
+          <p:cNvSpPr txBox="1"/>
+          <p:nvPr/>
+        </p:nvSpPr>
+        <p:spPr>
+          <a:xfrm>
+            <a:off x="8924315" y="4846320"/>
+            <a:ext cx="2554148" cy="384048"/>
+          </a:xfrm>
+          <a:prstGeom prst="rect">
+            <a:avLst/>
+          </a:prstGeom>
+          <a:noFill/>
+          <a:ln/>
+        </p:spPr>
+        <p:txBody>
+          <a:bodyPr wrap="square" lIns="0" tIns="0" rIns="0" bIns="0" rtlCol="0" anchor="t"/>
+          <a:lstStyle/>
+          <a:p>
+            <a:pPr marL="0" indent="0">
+              <a:buNone/>
+            </a:pPr>
+            <a:r>
+              <a:rPr lang="en-US" sz="2400" dirty="0">
+                <a:solidFill>
+                  <a:srgbClr val="FFB020"/>
+                </a:solidFill>
+                <a:latin typeface="Barlow Condensed" pitchFamily="34" charset="0"/>
+                <a:ea typeface="Barlow Condensed" pitchFamily="34" charset="-122"/>
+                <a:cs typeface="Barlow Condensed" pitchFamily="34" charset="-120"/>
+              </a:rPr>
+              <a:t>65.2%</a:t>
+            </a:r>
+            <a:endParaRPr lang="en-US" sz="2400" dirty="0"/>
+          </a:p>
+        </p:txBody>
+      </p:sp>
+      <p:sp>
+        <p:nvSpPr>
+          <p:cNvPr id="27" name="Text 25"/>
+          <p:cNvSpPr txBox="1"/>
+          <p:nvPr/>
+        </p:nvSpPr>
+        <p:spPr>
+          <a:xfrm>
+            <a:off x="713232" y="5285232"/>
+            <a:ext cx="5486400" cy="274320"/>
+          </a:xfrm>
+          <a:prstGeom prst="rect">
+            <a:avLst/>
+          </a:prstGeom>
+          <a:noFill/>
+          <a:ln/>
+        </p:spPr>
+        <p:txBody>
+          <a:bodyPr wrap="square" lIns="0" tIns="0" rIns="0" bIns="0" rtlCol="0" anchor="t"/>
+          <a:lstStyle/>
+          <a:p>
+            <a:pPr marL="0" indent="0">
+              <a:lnSpc>
+                <a:spcPts val="2200"/>
+              </a:lnSpc>
+              <a:buNone/>
+            </a:pPr>
+            <a:r>
+              <a:rPr lang="en-US" sz="1150" dirty="0">
+                <a:solidFill>
+                  <a:srgbClr val="828C9A"/>
+                </a:solidFill>
+                <a:latin typeface="Barlow" pitchFamily="34" charset="0"/>
+                <a:ea typeface="Barlow" pitchFamily="34" charset="-122"/>
+                <a:cs typeface="Barlow" pitchFamily="34" charset="-120"/>
+              </a:rPr>
+              <a:t>Founder stake retained through each round</a:t>
+            </a:r>
+            <a:endParaRPr lang="en-US" sz="1150" dirty="0"/>
+          </a:p>
+        </p:txBody>
+      </p:sp>
+      <p:sp>
+        <p:nvSpPr>
+          <p:cNvPr id="28" name="Text 26"/>
+          <p:cNvSpPr txBox="1"/>
+          <p:nvPr/>
+        </p:nvSpPr>
+        <p:spPr>
+          <a:xfrm>
+            <a:off x="713232" y="6382512"/>
+            <a:ext cx="9667951" cy="274320"/>
+          </a:xfrm>
+          <a:prstGeom prst="rect">
+            <a:avLst/>
+          </a:prstGeom>
+          <a:noFill/>
+          <a:ln/>
+        </p:spPr>
+        <p:txBody>
+          <a:bodyPr wrap="square" lIns="0" tIns="0" rIns="0" bIns="0" rtlCol="0" anchor="t"/>
+          <a:lstStyle/>
+          <a:p>
+            <a:pPr marL="0" indent="0">
+              <a:buNone/>
+            </a:pPr>
+            <a:r>
+              <a:rPr lang="en-US" sz="950" dirty="0">
+                <a:solidFill>
+                  <a:srgbClr val="828C9A"/>
+                </a:solidFill>
+                <a:latin typeface="Barlow" pitchFamily="34" charset="0"/>
+                <a:ea typeface="Barlow" pitchFamily="34" charset="-122"/>
+                <a:cs typeface="Barlow" pitchFamily="34" charset="-120"/>
+              </a:rPr>
+              <a:t>Stride financial model: DCF, comparable transactions from PitchBook, and the dilution waterfall.</a:t>
+            </a:r>
+            <a:endParaRPr lang="en-US" sz="950" dirty="0"/>
+          </a:p>
+        </p:txBody>
+      </p:sp>
+      <p:sp>
+        <p:nvSpPr>
+          <p:cNvPr id="29" name="Slide Number Placeholder 0"/>
+          <p:cNvSpPr>
+            <a:spLocks noGrp="1"/>
+          </p:cNvSpPr>
+          <p:nvPr>
+            <p:ph type="sldNum" sz="quarter" idx="4294967295"/>
+          </p:nvPr>
+        </p:nvSpPr>
+        <p:spPr>
+          <a:xfrm>
+            <a:off x="10746943" y="6382512"/>
+            <a:ext cx="731520" cy="274320"/>
+          </a:xfrm>
+          <a:prstGeom prst="rect">
+            <a:avLst/>
+          </a:prstGeom>
+          <a:extLst>
+            <a:ext uri="{C572A759-6A51-4108-AA02-DFA0A04FC94B}">
+              <ma14:wrappingTextBoxFlag xmlns:ma14="http://schemas.microsoft.com/office/mac/drawingml/2011/main" xmlns="" val="0"/>
+            </a:ext>
+          </a:extLst>
+        </p:spPr>
+        <p:txBody>
+          <a:bodyPr/>
+          <a:lstStyle>
+            <a:lvl1pPr>
+              <a:defRPr sz="1200">
+                <a:solidFill>
+                  <a:srgbClr val="828C9A"/>
+                </a:solidFill>
+                <a:latin typeface="Barlow Condensed"/>
+                <a:ea typeface="Barlow Condensed"/>
+                <a:cs typeface="Barlow Condensed"/>
+              </a:defRPr>
+            </a:lvl1pPr>
+          </a:lstStyle>
+          <a:p>
+            <a:pPr algn="r"/>
+            <a:fld id="{F7021451-1387-4CA6-816F-3879F97B5CBC}" type="slidenum">
+              <a:rPr lang="en-US" b="0"/>
+              <a:t>27</a:t>
+            </a:fld>
+            <a:endParaRPr lang="en-US"/>
+          </a:p>
+        </p:txBody>
+      </p:sp>
+    </p:spTree>
+  </p:cSld>
+  <p:clrMapOvr>
+    <a:masterClrMapping/>
+  </p:clrMapOvr>
+</p:sld>
+</file>
+
+<file path=ppt/slides/slide28.xml><?xml version="1.0" encoding="utf-8"?>
+<p:sld xmlns:a="http://schemas.openxmlformats.org/drawingml/2006/main" xmlns:r="http://schemas.openxmlformats.org/officeDocument/2006/relationships" xmlns:p="http://schemas.openxmlformats.org/presentationml/2006/main">
+  <p:cSld name="Slide 28">
+    <p:spTree>
+      <p:nvGrpSpPr>
+        <p:cNvPr id="1" name=""/>
+        <p:cNvGrpSpPr/>
+        <p:nvPr/>
+      </p:nvGrpSpPr>
+      <p:grpSpPr>
+        <a:xfrm>
+          <a:off x="0" y="0"/>
+          <a:ext cx="0" cy="0"/>
+          <a:chOff x="0" y="0"/>
+          <a:chExt cx="0" cy="0"/>
+        </a:xfrm>
+      </p:grpSpPr>
+      <p:sp>
+        <p:nvSpPr>
+          <p:cNvPr id="2" name="Text 0"/>
+          <p:cNvSpPr txBox="1"/>
+          <p:nvPr/>
+        </p:nvSpPr>
+        <p:spPr>
+          <a:xfrm>
+            <a:off x="713232" y="475488"/>
+            <a:ext cx="10765231" cy="237744"/>
+          </a:xfrm>
+          <a:prstGeom prst="rect">
+            <a:avLst/>
+          </a:prstGeom>
+          <a:noFill/>
+          <a:ln/>
+        </p:spPr>
+        <p:txBody>
+          <a:bodyPr wrap="square" lIns="0" tIns="0" rIns="0" bIns="0" rtlCol="0" anchor="t"/>
+          <a:lstStyle/>
+          <a:p>
+            <a:pPr marL="0" indent="0">
+              <a:buNone/>
+            </a:pPr>
+            <a:r>
+              <a:rPr lang="en-US" sz="1250" kern="0" spc="320" dirty="0">
+                <a:solidFill>
+                  <a:srgbClr val="FFB020"/>
+                </a:solidFill>
+                <a:latin typeface="Barlow Condensed" pitchFamily="34" charset="0"/>
+                <a:ea typeface="Barlow Condensed" pitchFamily="34" charset="-122"/>
+                <a:cs typeface="Barlow Condensed" pitchFamily="34" charset="-120"/>
+              </a:rPr>
               <a:t>BACKUP, THE GATE</a:t>
             </a:r>
             <a:endParaRPr lang="en-US" sz="1250" dirty="0"/>
@@ -19841,7 +21437,7 @@
             <a:pPr algn="r"/>
             <a:fld id="{F7021451-1387-4CA6-816F-3879F97B5CBC}" type="slidenum">
               <a:rPr lang="en-US" b="0"/>
-              <a:t>27</a:t>
+              <a:t>28</a:t>
             </a:fld>
             <a:endParaRPr lang="en-US"/>
           </a:p>

--- a/deck/Stride_Pitch_Deck.pptx
+++ b/deck/Stride_Pitch_Deck.pptx
@@ -144,12 +144,12 @@
   <p:extLst>
     <p:ext uri="{521415D9-36F7-43E2-AB2F-B90AF26B5E84}">
       <p14:sectionLst xmlns:p14="http://schemas.microsoft.com/office/powerpoint/2010/main">
-        <p14:section name="Open" id="{FC121F50-C1B5-289B-6D5A-6B10971B3FA1}">
+        <p14:section name="Open" id="{CD08F9EE-7D89-EB90-7B28-EB1EB90D6315}">
           <p14:sldIdLst>
             <p14:sldId id="256"/>
           </p14:sldIdLst>
         </p14:section>
-        <p14:section name="Problem" id="{7BC4583A-C2A5-20C9-ADFB-994746B9F0A1}">
+        <p14:section name="Problem" id="{FC9FFA67-BC23-D3A2-59AD-E50693360312}">
           <p14:sldIdLst>
             <p14:sldId id="257"/>
             <p14:sldId id="258"/>
@@ -157,7 +157,7 @@
             <p14:sldId id="260"/>
           </p14:sldIdLst>
         </p14:section>
-        <p14:section name="Product" id="{F8A729DE-0063-B2A9-2889-DF62B9B39A4C}">
+        <p14:section name="Product" id="{677D4C7C-3112-4E1D-B099-5E8E4EDCBC9A}">
           <p14:sldIdLst>
             <p14:sldId id="261"/>
             <p14:sldId id="262"/>
@@ -166,28 +166,28 @@
             <p14:sldId id="265"/>
           </p14:sldIdLst>
         </p14:section>
-        <p14:section name="Market" id="{28817DDF-ED90-6096-F014-AC52C0FE8CDF}">
+        <p14:section name="Market" id="{7B2D62DE-2F5F-678E-B6BF-DBDA0B5C5BE8}">
           <p14:sldIdLst>
             <p14:sldId id="266"/>
             <p14:sldId id="267"/>
             <p14:sldId id="268"/>
           </p14:sldIdLst>
         </p14:section>
-        <p14:section name="Model" id="{D5ECA1C3-03D1-BC53-D620-CDB0BD97118A}">
+        <p14:section name="Model" id="{0642DDA1-F9D0-468C-7DAB-BED1FFEB5A4A}">
           <p14:sldIdLst>
             <p14:sldId id="269"/>
             <p14:sldId id="270"/>
             <p14:sldId id="271"/>
           </p14:sldIdLst>
         </p14:section>
-        <p14:section name="Money" id="{77454514-3043-95CF-DB77-0191458A3FC3}">
+        <p14:section name="Money" id="{184CE615-67D4-F60C-6B1D-9AA9ADDBF203}">
           <p14:sldIdLst>
             <p14:sldId id="272"/>
             <p14:sldId id="273"/>
             <p14:sldId id="274"/>
           </p14:sldIdLst>
         </p14:section>
-        <p14:section name="Backup" id="{81F8E7DF-8387-21EE-21B7-674BE97A5FAA}">
+        <p14:section name="Backup" id="{99A84D8B-1478-BB4B-4261-CE2EBD853586}">
           <p14:sldIdLst>
             <p14:sldId id="275"/>
             <p14:sldId id="276"/>
@@ -305,7 +305,7 @@
           </c:val>
           <c:extLst>
             <c:ext xmlns:c16="http://schemas.microsoft.com/office/drawing/2014/chart" uri="{C3380CC4-5D6E-409C-BE32-E72D297353CC}">
-              <c16:uniqueId val="{00000000-AE57-4646-9CC9-B5A1A45B734B}"/>
+              <c16:uniqueId val="{00000000-C872-439F-9B67-8AED45576E05}"/>
             </c:ext>
           </c:extLst>
         </c:ser>
@@ -391,7 +391,7 @@
           </c:val>
           <c:extLst>
             <c:ext xmlns:c16="http://schemas.microsoft.com/office/drawing/2014/chart" uri="{C3380CC4-5D6E-409C-BE32-E72D297353CC}">
-              <c16:uniqueId val="{00000001-AE57-4646-9CC9-B5A1A45B734B}"/>
+              <c16:uniqueId val="{00000001-C872-439F-9B67-8AED45576E05}"/>
             </c:ext>
           </c:extLst>
         </c:ser>
@@ -477,7 +477,7 @@
           </c:val>
           <c:extLst>
             <c:ext xmlns:c16="http://schemas.microsoft.com/office/drawing/2014/chart" uri="{C3380CC4-5D6E-409C-BE32-E72D297353CC}">
-              <c16:uniqueId val="{00000002-AE57-4646-9CC9-B5A1A45B734B}"/>
+              <c16:uniqueId val="{00000002-C872-439F-9B67-8AED45576E05}"/>
             </c:ext>
           </c:extLst>
         </c:ser>
@@ -735,7 +735,7 @@
           </c:val>
           <c:extLst>
             <c:ext xmlns:c16="http://schemas.microsoft.com/office/drawing/2014/chart" uri="{C3380CC4-5D6E-409C-BE32-E72D297353CC}">
-              <c16:uniqueId val="{00000000-747B-4944-8727-444FB280A0D2}"/>
+              <c16:uniqueId val="{00000000-81C4-49FD-99E4-C93C88FF857D}"/>
             </c:ext>
           </c:extLst>
         </c:ser>
@@ -857,7 +857,7 @@
           <c:smooth val="0"/>
           <c:extLst>
             <c:ext xmlns:c16="http://schemas.microsoft.com/office/drawing/2014/chart" uri="{C3380CC4-5D6E-409C-BE32-E72D297353CC}">
-              <c16:uniqueId val="{00000001-747B-4944-8727-444FB280A0D2}"/>
+              <c16:uniqueId val="{00000001-81C4-49FD-99E4-C93C88FF857D}"/>
             </c:ext>
           </c:extLst>
         </c:ser>
@@ -1133,7 +1133,7 @@
           <c:smooth val="0"/>
           <c:extLst>
             <c:ext xmlns:c16="http://schemas.microsoft.com/office/drawing/2014/chart" uri="{C3380CC4-5D6E-409C-BE32-E72D297353CC}">
-              <c16:uniqueId val="{00000000-133D-4801-844A-6A253C6673B5}"/>
+              <c16:uniqueId val="{00000000-C0DA-45A6-A95C-A304A0156097}"/>
             </c:ext>
           </c:extLst>
         </c:ser>
@@ -1298,7 +1298,7 @@
     </p:spTree>
     <p:extLst>
       <p:ext uri="{BB962C8B-B14F-4D97-AF65-F5344CB8AC3E}">
-        <p14:creationId xmlns:p14="http://schemas.microsoft.com/office/powerpoint/2010/main" val="3716834216"/>
+        <p14:creationId xmlns:p14="http://schemas.microsoft.com/office/powerpoint/2010/main" val="4069615097"/>
       </p:ext>
     </p:extLst>
   </p:cSld>
@@ -1445,7 +1445,9 @@
             <a:r>
               <a:rPr lang="en-US" dirty="0"/>
               <a:t>Good morning. I am Jad Zoghaib and this is Stride.
-One sentence for the whole plan: athletes are creators with a second payer. OnlyFans proved direct fan monetisation beats ad share. Nobody has built it for athletes, who unlike lifestyle creators also have sponsors, clubs and a competitive record that makes their audience measurable.
+Two sentences. Get the athlete paid, and show the brand what it bought. Those are the two halves of the company, and most of my fifteen minutes is about why they are one company rather than two.
+Be clear about who I mean on both sides. The athletes are semi-professional and amateur, in niche sports, with a real following in a real place and no agent. A professional does not need me, they already have one, and they would not use this. The brands are the businesses near that athlete's club: the physiotherapy clinic, the gym, the car dealer.
+And the thesis in one sentence: athletes are creators with a second payer. OnlyFans proved direct fan monetisation beats ad share. Nobody built it for athletes, who unlike lifestyle creators also have sponsors, clubs and a competitive record that makes their audience measurable.
 Everything I show you is live at that URL, and I am happy to open it in the Q&amp;A.</a:t>
             </a:r>
           </a:p>
@@ -1711,9 +1713,10 @@
           <a:p>
             <a:r>
               <a:rPr lang="en-US" dirty="0"/>
-              <a:t>Why niche sports first, and this is the strategic heart of the plan.
-A niche athlete costs 16 euros to acquire against 40 for a popular one, and by year seven 48 per cent of them monetise against 30 per cent.
-Cheaper, and more of them earn. And nobody is competing for them, because there is no agent there to compete with. What we learn in niche sports generalises upward into bigger ones. Starting in football and working down does not work, because in football we would be the fifth option.</a:t>
+              <a:t>Why niche sports first, and this is the strategic heart of the plan. There are two reasons and the second one is the better one.
+The first is cost. A niche athlete costs 16 euros to acquire against 40 for a popular one, and by year seven 48 per cent of them monetise against 30 per cent. Cheaper, and more of them earn, because nobody is competing for them. A professional already has an agent and would not use this.
+The second reason is the one I would argue for. A niche athlete's audience is concentrated in a place, around the club and the circuit they compete on. To a national advertiser that is close to worthless, which is why nobody bids for it. To the physiotherapy clinic two streets from the club it is the only thing worth buying, and there is currently no way to buy it. So the same decision that makes my supply cheap is what makes my demand side exist at all.
+And what we learn here generalises upward into bigger sports. Starting in football and working down does not work, because in football we would be the fifth option.</a:t>
             </a:r>
           </a:p>
         </p:txBody>
@@ -1803,6 +1806,7 @@
               <a:t>I want to be straight with you about the comparables, because they are not flattering.
 Four companies have built in this space. The two doing exactly what we do are small after more than a decade. Sponsoo has thirteen people after eleven years and its total equity is zero, which means accumulated losses have eaten everything shareholders put in. PitchBook models it at a 94 per cent probability of no exit.
 But look at how the four split, because it is the slide about the flywheel again. Sponsoo and OpenSponsorship built the marketplace and no analytics worth the name. Hookit and SponsorUnited built the data and never had the athlete relationship, so they sell enterprise dashboards to brands that already spend. Two halves, four companies, nobody with both.
+If you want the long answer on SponsorUnited I have a backup slide for it, but the short one is this. They sell what the market did. We measure what one brand's money did, and we can only do that because the projection is written onto the deal at the moment the offer is made. A company that was not in the transaction never saw the promise. I am not beating them, to be clear. I am serving a customer their cost structure will not let them near.
 And none of the four has the fan. For us that is 48 per cent of year seven revenue: a second payer none of them has, and it is the whole thesis. If it works we are not Sponsoo. If it does not, we are.</a:t>
             </a:r>
           </a:p>
@@ -4539,7 +4543,27 @@
                 <a:ea typeface="Barlow Condensed" pitchFamily="34" charset="-122"/>
                 <a:cs typeface="Barlow Condensed" pitchFamily="34" charset="-120"/>
               </a:rPr>
-              <a:t>Athletes are creators with a second payer</a:t>
+              <a:t>Get the athlete paid.</a:t>
+            </a:r>
+            <a:endParaRPr lang="en-US" sz="4600" dirty="0"/>
+          </a:p>
+          <a:p>
+            <a:pPr marL="0" indent="0">
+              <a:lnSpc>
+                <a:spcPts val="5000"/>
+              </a:lnSpc>
+              <a:buNone/>
+            </a:pPr>
+            <a:r>
+              <a:rPr lang="en-US" sz="4600" dirty="0">
+                <a:solidFill>
+                  <a:srgbClr val="F2F4F7"/>
+                </a:solidFill>
+                <a:latin typeface="Barlow Condensed" pitchFamily="34" charset="0"/>
+                <a:ea typeface="Barlow Condensed" pitchFamily="34" charset="-122"/>
+                <a:cs typeface="Barlow Condensed" pitchFamily="34" charset="-120"/>
+              </a:rPr>
+              <a:t>Show the brand what it bought.</a:t>
             </a:r>
             <a:endParaRPr lang="en-US" sz="4600" dirty="0"/>
           </a:p>
@@ -4581,7 +4605,7 @@
                 <a:ea typeface="Barlow" pitchFamily="34" charset="-122"/>
                 <a:cs typeface="Barlow" pitchFamily="34" charset="-120"/>
               </a:rPr>
-              <a:t>Paid fan subscriptions on one side, measured sponsorship on the other, and each one produces what the other cannot buy. Built for the athletes no agent has ever called.</a:t>
+              <a:t>For semi-professional athletes in niche sports, and the local businesses near their club. Neither side is served today.</a:t>
             </a:r>
             <a:endParaRPr lang="en-US" sz="1550" dirty="0"/>
           </a:p>
@@ -6886,7 +6910,7 @@
         <p:spPr>
           <a:xfrm>
             <a:off x="713232" y="4224528"/>
-            <a:ext cx="10765231" cy="731520"/>
+            <a:ext cx="10765231" cy="822960"/>
           </a:xfrm>
           <a:prstGeom prst="rect">
             <a:avLst/>
@@ -6913,7 +6937,7 @@
                 <a:ea typeface="Barlow" pitchFamily="34" charset="-122"/>
                 <a:cs typeface="Barlow" pitchFamily="34" charset="-120"/>
               </a:rPr>
-              <a:t>Cheaper to acquire, and a larger share of them earn. Nobody is fighting us for a trail runner with 25,000 followers and an inbox of unanswered brand DMs. What we learn there generalises upward. Football does not generalise downward.</a:t>
+              <a:t>Cheaper to acquire, and a larger share of them earn. A professional already has an agent and would not use this, so nobody is fighting us for a trail runner with 25,000 followers and an inbox of unanswered brand DMs. What we learn there generalises upward. Football does not generalise downward.</a:t>
             </a:r>
             <a:endParaRPr lang="en-US" sz="1450" dirty="0"/>
           </a:p>
@@ -6921,7 +6945,115 @@
       </p:sp>
       <p:sp>
         <p:nvSpPr>
-          <p:cNvPr id="17" name="Text 15"/>
+          <p:cNvPr id="17" name="Shape 15"/>
+          <p:cNvSpPr/>
+          <p:nvPr/>
+        </p:nvSpPr>
+        <p:spPr>
+          <a:xfrm>
+            <a:off x="713232" y="5138928"/>
+            <a:ext cx="10765231" cy="896112"/>
+          </a:xfrm>
+          <a:prstGeom prst="roundRect">
+            <a:avLst>
+              <a:gd name="adj" fmla="val 4082"/>
+            </a:avLst>
+          </a:prstGeom>
+          <a:solidFill>
+            <a:srgbClr val="1F242C"/>
+          </a:solidFill>
+          <a:ln w="9525">
+            <a:solidFill>
+              <a:srgbClr val="262C35"/>
+            </a:solidFill>
+            <a:prstDash val="solid"/>
+          </a:ln>
+        </p:spPr>
+      </p:sp>
+      <p:sp>
+        <p:nvSpPr>
+          <p:cNvPr id="18" name="Text 16"/>
+          <p:cNvSpPr txBox="1"/>
+          <p:nvPr/>
+        </p:nvSpPr>
+        <p:spPr>
+          <a:xfrm>
+            <a:off x="987552" y="5340096"/>
+            <a:ext cx="2743200" cy="237744"/>
+          </a:xfrm>
+          <a:prstGeom prst="rect">
+            <a:avLst/>
+          </a:prstGeom>
+          <a:noFill/>
+          <a:ln/>
+        </p:spPr>
+        <p:txBody>
+          <a:bodyPr wrap="square" lIns="0" tIns="0" rIns="0" bIns="0" rtlCol="0" anchor="t"/>
+          <a:lstStyle/>
+          <a:p>
+            <a:pPr marL="0" indent="0">
+              <a:buNone/>
+            </a:pPr>
+            <a:r>
+              <a:rPr lang="en-US" sz="1350" kern="0" spc="240" dirty="0">
+                <a:solidFill>
+                  <a:srgbClr val="FFB020"/>
+                </a:solidFill>
+                <a:latin typeface="Barlow Condensed" pitchFamily="34" charset="0"/>
+                <a:ea typeface="Barlow Condensed" pitchFamily="34" charset="-122"/>
+                <a:cs typeface="Barlow Condensed" pitchFamily="34" charset="-120"/>
+              </a:rPr>
+              <a:t>WHY THE TWO SIDES FIT</a:t>
+            </a:r>
+            <a:endParaRPr lang="en-US" sz="1350" dirty="0"/>
+          </a:p>
+        </p:txBody>
+      </p:sp>
+      <p:sp>
+        <p:nvSpPr>
+          <p:cNvPr id="19" name="Text 17"/>
+          <p:cNvSpPr txBox="1"/>
+          <p:nvPr/>
+        </p:nvSpPr>
+        <p:spPr>
+          <a:xfrm>
+            <a:off x="3913632" y="5303520"/>
+            <a:ext cx="7290511" cy="621792"/>
+          </a:xfrm>
+          <a:prstGeom prst="rect">
+            <a:avLst/>
+          </a:prstGeom>
+          <a:noFill/>
+          <a:ln/>
+        </p:spPr>
+        <p:txBody>
+          <a:bodyPr wrap="square" lIns="0" tIns="0" rIns="0" bIns="0" rtlCol="0" anchor="t"/>
+          <a:lstStyle/>
+          <a:p>
+            <a:pPr marL="0" indent="0">
+              <a:lnSpc>
+                <a:spcPts val="1700"/>
+              </a:lnSpc>
+              <a:buNone/>
+            </a:pPr>
+            <a:r>
+              <a:rPr lang="en-US" sz="1300" dirty="0">
+                <a:solidFill>
+                  <a:srgbClr val="AEB6C2"/>
+                </a:solidFill>
+                <a:latin typeface="Barlow" pitchFamily="34" charset="0"/>
+                <a:ea typeface="Barlow" pitchFamily="34" charset="-122"/>
+                <a:cs typeface="Barlow" pitchFamily="34" charset="-120"/>
+              </a:rPr>
+              <a:t>A niche athlete's audience is concentrated where they train and compete. That concentration is worth little to a national advertiser, and it is exactly what the clinic two streets from the club is trying to buy and has no other way of buying. The same choice makes supply cheap and demand local.</a:t>
+            </a:r>
+            <a:endParaRPr lang="en-US" sz="1300" dirty="0"/>
+          </a:p>
+        </p:txBody>
+      </p:sp>
+      <p:sp>
+        <p:nvSpPr>
+          <p:cNvPr id="20" name="Text 18"/>
           <p:cNvSpPr txBox="1"/>
           <p:nvPr/>
         </p:nvSpPr>
@@ -8334,13 +8466,55 @@
       </p:sp>
       <p:sp>
         <p:nvSpPr>
-          <p:cNvPr id="36" name="Shape 34"/>
+          <p:cNvPr id="36" name="Text 34"/>
+          <p:cNvSpPr txBox="1"/>
+          <p:nvPr/>
+        </p:nvSpPr>
+        <p:spPr>
+          <a:xfrm>
+            <a:off x="713232" y="4389120"/>
+            <a:ext cx="10765231" cy="512064"/>
+          </a:xfrm>
+          <a:prstGeom prst="rect">
+            <a:avLst/>
+          </a:prstGeom>
+          <a:noFill/>
+          <a:ln/>
+        </p:spPr>
+        <p:txBody>
+          <a:bodyPr wrap="square" lIns="0" tIns="0" rIns="0" bIns="0" rtlCol="0" anchor="t"/>
+          <a:lstStyle/>
+          <a:p>
+            <a:pPr marL="0" indent="0">
+              <a:lnSpc>
+                <a:spcPts val="1800"/>
+              </a:lnSpc>
+              <a:buNone/>
+            </a:pPr>
+            <a:r>
+              <a:rPr lang="en-US" sz="1350" dirty="0">
+                <a:solidFill>
+                  <a:srgbClr val="AEB6C2"/>
+                </a:solidFill>
+                <a:latin typeface="Barlow" pitchFamily="34" charset="0"/>
+                <a:ea typeface="Barlow" pitchFamily="34" charset="-122"/>
+                <a:cs typeface="Barlow" pitchFamily="34" charset="-120"/>
+              </a:rPr>
+              <a:t>The one that got large sells data to agencies and rights holders, and never executes a deal. 355 people is what enterprise sales costs, and it is the reason nobody runs this motion down at a €2,000 sponsorship.</a:t>
+            </a:r>
+            <a:endParaRPr lang="en-US" sz="1350" dirty="0"/>
+          </a:p>
+        </p:txBody>
+      </p:sp>
+      <p:sp>
+        <p:nvSpPr>
+          <p:cNvPr id="37" name="Shape 35"/>
           <p:cNvSpPr/>
           <p:nvPr/>
         </p:nvSpPr>
         <p:spPr>
           <a:xfrm>
-            <a:off x="713232" y="4462272"/>
+            <a:off x="713232" y="5010912"/>
             <a:ext cx="10765231" cy="1024128"/>
           </a:xfrm>
           <a:prstGeom prst="roundRect">
@@ -8361,13 +8535,13 @@
       </p:sp>
       <p:sp>
         <p:nvSpPr>
-          <p:cNvPr id="37" name="Text 35"/>
-          <p:cNvSpPr txBox="1"/>
-          <p:nvPr/>
-        </p:nvSpPr>
-        <p:spPr>
-          <a:xfrm>
-            <a:off x="987552" y="4645152"/>
+          <p:cNvPr id="38" name="Text 36"/>
+          <p:cNvSpPr txBox="1"/>
+          <p:nvPr/>
+        </p:nvSpPr>
+        <p:spPr>
+          <a:xfrm>
+            <a:off x="987552" y="5193792"/>
             <a:ext cx="2377440" cy="237744"/>
           </a:xfrm>
           <a:prstGeom prst="rect">
@@ -8400,13 +8574,13 @@
       </p:sp>
       <p:sp>
         <p:nvSpPr>
-          <p:cNvPr id="38" name="Text 36"/>
-          <p:cNvSpPr txBox="1"/>
-          <p:nvPr/>
-        </p:nvSpPr>
-        <p:spPr>
-          <a:xfrm>
-            <a:off x="3639312" y="4608576"/>
+          <p:cNvPr id="39" name="Text 37"/>
+          <p:cNvSpPr txBox="1"/>
+          <p:nvPr/>
+        </p:nvSpPr>
+        <p:spPr>
+          <a:xfrm>
+            <a:off x="3639312" y="5157216"/>
             <a:ext cx="7564831" cy="768096"/>
           </a:xfrm>
           <a:prstGeom prst="rect">
@@ -8442,7 +8616,7 @@
       </p:sp>
       <p:sp>
         <p:nvSpPr>
-          <p:cNvPr id="39" name="Text 37"/>
+          <p:cNvPr id="40" name="Text 38"/>
           <p:cNvSpPr txBox="1"/>
           <p:nvPr/>
         </p:nvSpPr>
@@ -8481,7 +8655,7 @@
       </p:sp>
       <p:sp>
         <p:nvSpPr>
-          <p:cNvPr id="40" name="Slide Number Placeholder 0"/>
+          <p:cNvPr id="41" name="Slide Number Placeholder 0"/>
           <p:cNvSpPr>
             <a:spLocks noGrp="1"/>
           </p:cNvSpPr>

--- a/deck/Stride_Pitch_Deck.pptx
+++ b/deck/Stride_Pitch_Deck.pptx
@@ -144,12 +144,12 @@
   <p:extLst>
     <p:ext uri="{521415D9-36F7-43E2-AB2F-B90AF26B5E84}">
       <p14:sectionLst xmlns:p14="http://schemas.microsoft.com/office/powerpoint/2010/main">
-        <p14:section name="Open" id="{CD08F9EE-7D89-EB90-7B28-EB1EB90D6315}">
+        <p14:section name="Open" id="{F983554B-14D7-D713-F8DE-01828A4CAD28}">
           <p14:sldIdLst>
             <p14:sldId id="256"/>
           </p14:sldIdLst>
         </p14:section>
-        <p14:section name="Problem" id="{FC9FFA67-BC23-D3A2-59AD-E50693360312}">
+        <p14:section name="Problem" id="{7E6A7A9A-58E7-23E2-2BE5-88D1FD59D967}">
           <p14:sldIdLst>
             <p14:sldId id="257"/>
             <p14:sldId id="258"/>
@@ -157,7 +157,7 @@
             <p14:sldId id="260"/>
           </p14:sldIdLst>
         </p14:section>
-        <p14:section name="Product" id="{677D4C7C-3112-4E1D-B099-5E8E4EDCBC9A}">
+        <p14:section name="Product" id="{6811445A-18E1-01DC-A763-C61A0D822916}">
           <p14:sldIdLst>
             <p14:sldId id="261"/>
             <p14:sldId id="262"/>
@@ -166,28 +166,28 @@
             <p14:sldId id="265"/>
           </p14:sldIdLst>
         </p14:section>
-        <p14:section name="Market" id="{7B2D62DE-2F5F-678E-B6BF-DBDA0B5C5BE8}">
+        <p14:section name="Market" id="{43CF304B-6CBE-8DC4-9F83-8553E006F26E}">
           <p14:sldIdLst>
             <p14:sldId id="266"/>
             <p14:sldId id="267"/>
             <p14:sldId id="268"/>
           </p14:sldIdLst>
         </p14:section>
-        <p14:section name="Model" id="{0642DDA1-F9D0-468C-7DAB-BED1FFEB5A4A}">
+        <p14:section name="Model" id="{FE3BAB5A-77CE-4FDE-5016-8E0B853E5967}">
           <p14:sldIdLst>
             <p14:sldId id="269"/>
             <p14:sldId id="270"/>
             <p14:sldId id="271"/>
           </p14:sldIdLst>
         </p14:section>
-        <p14:section name="Money" id="{184CE615-67D4-F60C-6B1D-9AA9ADDBF203}">
+        <p14:section name="Money" id="{3F4C3298-2F95-D7E3-79E8-C70567DAD001}">
           <p14:sldIdLst>
             <p14:sldId id="272"/>
             <p14:sldId id="273"/>
             <p14:sldId id="274"/>
           </p14:sldIdLst>
         </p14:section>
-        <p14:section name="Backup" id="{99A84D8B-1478-BB4B-4261-CE2EBD853586}">
+        <p14:section name="Backup" id="{C93D6AE7-376A-5425-14D9-4019581D5FFD}">
           <p14:sldIdLst>
             <p14:sldId id="275"/>
             <p14:sldId id="276"/>
@@ -305,7 +305,7 @@
           </c:val>
           <c:extLst>
             <c:ext xmlns:c16="http://schemas.microsoft.com/office/drawing/2014/chart" uri="{C3380CC4-5D6E-409C-BE32-E72D297353CC}">
-              <c16:uniqueId val="{00000000-C872-439F-9B67-8AED45576E05}"/>
+              <c16:uniqueId val="{00000000-7372-4295-A273-9D0DD392BB3B}"/>
             </c:ext>
           </c:extLst>
         </c:ser>
@@ -391,7 +391,7 @@
           </c:val>
           <c:extLst>
             <c:ext xmlns:c16="http://schemas.microsoft.com/office/drawing/2014/chart" uri="{C3380CC4-5D6E-409C-BE32-E72D297353CC}">
-              <c16:uniqueId val="{00000001-C872-439F-9B67-8AED45576E05}"/>
+              <c16:uniqueId val="{00000001-7372-4295-A273-9D0DD392BB3B}"/>
             </c:ext>
           </c:extLst>
         </c:ser>
@@ -477,7 +477,7 @@
           </c:val>
           <c:extLst>
             <c:ext xmlns:c16="http://schemas.microsoft.com/office/drawing/2014/chart" uri="{C3380CC4-5D6E-409C-BE32-E72D297353CC}">
-              <c16:uniqueId val="{00000002-C872-439F-9B67-8AED45576E05}"/>
+              <c16:uniqueId val="{00000002-7372-4295-A273-9D0DD392BB3B}"/>
             </c:ext>
           </c:extLst>
         </c:ser>
@@ -735,7 +735,7 @@
           </c:val>
           <c:extLst>
             <c:ext xmlns:c16="http://schemas.microsoft.com/office/drawing/2014/chart" uri="{C3380CC4-5D6E-409C-BE32-E72D297353CC}">
-              <c16:uniqueId val="{00000000-81C4-49FD-99E4-C93C88FF857D}"/>
+              <c16:uniqueId val="{00000000-C8B5-4CD5-983D-3A184105E894}"/>
             </c:ext>
           </c:extLst>
         </c:ser>
@@ -857,7 +857,7 @@
           <c:smooth val="0"/>
           <c:extLst>
             <c:ext xmlns:c16="http://schemas.microsoft.com/office/drawing/2014/chart" uri="{C3380CC4-5D6E-409C-BE32-E72D297353CC}">
-              <c16:uniqueId val="{00000001-81C4-49FD-99E4-C93C88FF857D}"/>
+              <c16:uniqueId val="{00000001-C8B5-4CD5-983D-3A184105E894}"/>
             </c:ext>
           </c:extLst>
         </c:ser>
@@ -1133,7 +1133,7 @@
           <c:smooth val="0"/>
           <c:extLst>
             <c:ext xmlns:c16="http://schemas.microsoft.com/office/drawing/2014/chart" uri="{C3380CC4-5D6E-409C-BE32-E72D297353CC}">
-              <c16:uniqueId val="{00000000-C0DA-45A6-A95C-A304A0156097}"/>
+              <c16:uniqueId val="{00000000-B442-43EF-AA5D-0EEDB7B0E613}"/>
             </c:ext>
           </c:extLst>
         </c:ser>
@@ -1298,7 +1298,7 @@
     </p:spTree>
     <p:extLst>
       <p:ext uri="{BB962C8B-B14F-4D97-AF65-F5344CB8AC3E}">
-        <p14:creationId xmlns:p14="http://schemas.microsoft.com/office/powerpoint/2010/main" val="4069615097"/>
+        <p14:creationId xmlns:p14="http://schemas.microsoft.com/office/powerpoint/2010/main" val="3982140233"/>
       </p:ext>
     </p:extLst>
   </p:cSld>
@@ -14363,7 +14363,7 @@
                 <a:ea typeface="Barlow" pitchFamily="34" charset="-122"/>
                 <a:cs typeface="Barlow" pitchFamily="34" charset="-120"/>
               </a:rPr>
-              <a:t>Marketability is computed on eight weighted components, each traceable to the posts behind it, and every score version is kept.</a:t>
+              <a:t>Marketability is the mean of five computed dimensions, each traceable to the posts behind it, and every score version is kept.</a:t>
             </a:r>
             <a:endParaRPr lang="en-US" sz="1250" dirty="0"/>
           </a:p>
@@ -14510,7 +14510,7 @@
                 <a:ea typeface="Barlow" pitchFamily="34" charset="-122"/>
                 <a:cs typeface="Barlow" pitchFamily="34" charset="-120"/>
               </a:rPr>
-              <a:t>A sponsor briefs a campaign and receives a ranked shortlist in which every score decomposes: audience fit 72 × 32% = 23.1.</a:t>
+              <a:t>A sponsor briefs a campaign, and the match is scored on eight weighted components, each one decomposed: audience fit 72 × 32% = 23.1.</a:t>
             </a:r>
             <a:endParaRPr lang="en-US" sz="1250" dirty="0"/>
           </a:p>

--- a/deck/Stride_Pitch_Deck.pptx
+++ b/deck/Stride_Pitch_Deck.pptx
@@ -144,12 +144,12 @@
   <p:extLst>
     <p:ext uri="{521415D9-36F7-43E2-AB2F-B90AF26B5E84}">
       <p14:sectionLst xmlns:p14="http://schemas.microsoft.com/office/powerpoint/2010/main">
-        <p14:section name="Open" id="{F983554B-14D7-D713-F8DE-01828A4CAD28}">
+        <p14:section name="Open" id="{D5FBD59C-1168-67C6-11D5-009254ADB5DC}">
           <p14:sldIdLst>
             <p14:sldId id="256"/>
           </p14:sldIdLst>
         </p14:section>
-        <p14:section name="Problem" id="{7E6A7A9A-58E7-23E2-2BE5-88D1FD59D967}">
+        <p14:section name="Problem" id="{39EE2147-FB5F-008D-DE14-92824DE4F841}">
           <p14:sldIdLst>
             <p14:sldId id="257"/>
             <p14:sldId id="258"/>
@@ -157,7 +157,7 @@
             <p14:sldId id="260"/>
           </p14:sldIdLst>
         </p14:section>
-        <p14:section name="Product" id="{6811445A-18E1-01DC-A763-C61A0D822916}">
+        <p14:section name="Product" id="{BB413FC7-2848-DD0F-4CFE-4C3EF064F142}">
           <p14:sldIdLst>
             <p14:sldId id="261"/>
             <p14:sldId id="262"/>
@@ -166,28 +166,28 @@
             <p14:sldId id="265"/>
           </p14:sldIdLst>
         </p14:section>
-        <p14:section name="Market" id="{43CF304B-6CBE-8DC4-9F83-8553E006F26E}">
+        <p14:section name="Market" id="{BEE323FB-2992-8941-7EAC-9CA3A0C5AC15}">
           <p14:sldIdLst>
             <p14:sldId id="266"/>
             <p14:sldId id="267"/>
             <p14:sldId id="268"/>
           </p14:sldIdLst>
         </p14:section>
-        <p14:section name="Model" id="{FE3BAB5A-77CE-4FDE-5016-8E0B853E5967}">
+        <p14:section name="Model" id="{AF21B2C8-0D33-DCE9-73BF-3BD671D834B5}">
           <p14:sldIdLst>
             <p14:sldId id="269"/>
             <p14:sldId id="270"/>
             <p14:sldId id="271"/>
           </p14:sldIdLst>
         </p14:section>
-        <p14:section name="Money" id="{3F4C3298-2F95-D7E3-79E8-C70567DAD001}">
+        <p14:section name="Money" id="{94832A3B-332E-2024-7A67-E9A513BE7025}">
           <p14:sldIdLst>
             <p14:sldId id="272"/>
             <p14:sldId id="273"/>
             <p14:sldId id="274"/>
           </p14:sldIdLst>
         </p14:section>
-        <p14:section name="Backup" id="{C93D6AE7-376A-5425-14D9-4019581D5FFD}">
+        <p14:section name="Backup" id="{7E8FF166-9635-EC51-1C53-E726FF34FBDA}">
           <p14:sldIdLst>
             <p14:sldId id="275"/>
             <p14:sldId id="276"/>
@@ -305,7 +305,7 @@
           </c:val>
           <c:extLst>
             <c:ext xmlns:c16="http://schemas.microsoft.com/office/drawing/2014/chart" uri="{C3380CC4-5D6E-409C-BE32-E72D297353CC}">
-              <c16:uniqueId val="{00000000-7372-4295-A273-9D0DD392BB3B}"/>
+              <c16:uniqueId val="{00000000-1956-4CCD-93FC-1CCEF674D351}"/>
             </c:ext>
           </c:extLst>
         </c:ser>
@@ -391,7 +391,7 @@
           </c:val>
           <c:extLst>
             <c:ext xmlns:c16="http://schemas.microsoft.com/office/drawing/2014/chart" uri="{C3380CC4-5D6E-409C-BE32-E72D297353CC}">
-              <c16:uniqueId val="{00000001-7372-4295-A273-9D0DD392BB3B}"/>
+              <c16:uniqueId val="{00000001-1956-4CCD-93FC-1CCEF674D351}"/>
             </c:ext>
           </c:extLst>
         </c:ser>
@@ -477,7 +477,7 @@
           </c:val>
           <c:extLst>
             <c:ext xmlns:c16="http://schemas.microsoft.com/office/drawing/2014/chart" uri="{C3380CC4-5D6E-409C-BE32-E72D297353CC}">
-              <c16:uniqueId val="{00000002-7372-4295-A273-9D0DD392BB3B}"/>
+              <c16:uniqueId val="{00000002-1956-4CCD-93FC-1CCEF674D351}"/>
             </c:ext>
           </c:extLst>
         </c:ser>
@@ -735,7 +735,7 @@
           </c:val>
           <c:extLst>
             <c:ext xmlns:c16="http://schemas.microsoft.com/office/drawing/2014/chart" uri="{C3380CC4-5D6E-409C-BE32-E72D297353CC}">
-              <c16:uniqueId val="{00000000-C8B5-4CD5-983D-3A184105E894}"/>
+              <c16:uniqueId val="{00000000-50FF-4DE5-99AA-98EBAC8D365B}"/>
             </c:ext>
           </c:extLst>
         </c:ser>
@@ -857,7 +857,7 @@
           <c:smooth val="0"/>
           <c:extLst>
             <c:ext xmlns:c16="http://schemas.microsoft.com/office/drawing/2014/chart" uri="{C3380CC4-5D6E-409C-BE32-E72D297353CC}">
-              <c16:uniqueId val="{00000001-C8B5-4CD5-983D-3A184105E894}"/>
+              <c16:uniqueId val="{00000001-50FF-4DE5-99AA-98EBAC8D365B}"/>
             </c:ext>
           </c:extLst>
         </c:ser>
@@ -1133,7 +1133,7 @@
           <c:smooth val="0"/>
           <c:extLst>
             <c:ext xmlns:c16="http://schemas.microsoft.com/office/drawing/2014/chart" uri="{C3380CC4-5D6E-409C-BE32-E72D297353CC}">
-              <c16:uniqueId val="{00000000-B442-43EF-AA5D-0EEDB7B0E613}"/>
+              <c16:uniqueId val="{00000000-0DD9-49E6-B1BD-885074D7EE15}"/>
             </c:ext>
           </c:extLst>
         </c:ser>
@@ -1298,7 +1298,7 @@
     </p:spTree>
     <p:extLst>
       <p:ext uri="{BB962C8B-B14F-4D97-AF65-F5344CB8AC3E}">
-        <p14:creationId xmlns:p14="http://schemas.microsoft.com/office/powerpoint/2010/main" val="3982140233"/>
+        <p14:creationId xmlns:p14="http://schemas.microsoft.com/office/powerpoint/2010/main" val="3224858854"/>
       </p:ext>
     </p:extLst>
   </p:cSld>
@@ -2430,9 +2430,11 @@
           <a:p>
             <a:r>
               <a:rPr lang="en-US" dirty="0"/>
-              <a:t>Thirty seconds on why I am the person telling you this.
-I am capped by the Lebanese national rugby team. The athletes I interviewed are people I play with, so I am inside the segment this plan describes, not studying it from outside.
-Four years of consulting gave me the modelling. The MSc and the build gave me the product. Everything in the demo is my own code.</a:t>
+              <a:t>Why this, and it starts with one person.
+A friend I play rugby with is the CrossFit champion of Lebanon, and one of the best rugby league players in the country. He earns nothing from either one. Not a little. Nothing.
+He is one of the five athletes in my research, and in that group he is not the exception. He is the median. Someone at the very top of two sports, with a real audience, and no mechanism anywhere that turns either of those things into income.
+I started building this because of him.
+And the reason I can see it at all is on the bottom line: these are teammates, not survey respondents. I am capped for Lebanon myself, which is why the conversations were candid. The consulting built the model, and the demo is my own code.</a:t>
             </a:r>
           </a:p>
         </p:txBody>
@@ -3287,8 +3289,8 @@
           <a:p>
             <a:r>
               <a:rPr lang="en-US" dirty="0"/>
-              <a:t>I asked five athletes in my own sports what they earn from their audience.
-The answer was not 'a little'. It was zero. Nothing.
+              <a:t>He was one of five athletes in my own sports I asked the same question: what do you earn from your audience.
+The answer was not 'a little'. It was zero. Nothing, across all five.
 And read the quote carefully, because it is the finding that matters most: they do not build an audience, because there is no return on building one. That is not a complaint about pricing. It is a market with no infrastructure in it.</a:t>
             </a:r>
           </a:p>
@@ -13320,7 +13322,7 @@
                 <a:ea typeface="Barlow Condensed" pitchFamily="34" charset="-122"/>
                 <a:cs typeface="Barlow Condensed" pitchFamily="34" charset="-120"/>
               </a:rPr>
-              <a:t>WHY THIS, FROM ME</a:t>
+              <a:t>WHY THIS</a:t>
             </a:r>
             <a:endParaRPr lang="en-US" sz="1250" dirty="0"/>
           </a:p>
@@ -13362,7 +13364,7 @@
                 <a:ea typeface="Barlow Condensed" pitchFamily="34" charset="-122"/>
                 <a:cs typeface="Barlow Condensed" pitchFamily="34" charset="-120"/>
               </a:rPr>
-              <a:t>I am not researching this market from outside it</a:t>
+              <a:t>A national champion, and the sport has no way to pay him</a:t>
             </a:r>
             <a:endParaRPr lang="en-US" sz="3600" dirty="0"/>
           </a:p>
@@ -13376,12 +13378,12 @@
         </p:nvSpPr>
         <p:spPr>
           <a:xfrm>
-            <a:off x="713232" y="2029968"/>
-            <a:ext cx="3405530" cy="2395728"/>
+            <a:off x="713232" y="1920240"/>
+            <a:ext cx="6675120" cy="2926080"/>
           </a:xfrm>
           <a:prstGeom prst="roundRect">
             <a:avLst>
-              <a:gd name="adj" fmla="val 1527"/>
+              <a:gd name="adj" fmla="val 1250"/>
             </a:avLst>
           </a:prstGeom>
           <a:solidFill>
@@ -13403,32 +13405,71 @@
         </p:nvSpPr>
         <p:spPr>
           <a:xfrm>
-            <a:off x="987552" y="2304288"/>
-            <a:ext cx="2856890" cy="274320"/>
-          </a:xfrm>
-          <a:prstGeom prst="rect">
-            <a:avLst/>
-          </a:prstGeom>
-          <a:noFill/>
-          <a:ln/>
-        </p:spPr>
-        <p:txBody>
-          <a:bodyPr wrap="square" lIns="0" tIns="0" rIns="0" bIns="0" rtlCol="0" anchor="t"/>
-          <a:lstStyle/>
-          <a:p>
-            <a:pPr marL="0" indent="0">
-              <a:buNone/>
-            </a:pPr>
-            <a:r>
-              <a:rPr lang="en-US" sz="1900" kern="0" spc="180" dirty="0">
-                <a:solidFill>
-                  <a:srgbClr val="FFB020"/>
+            <a:off x="1005840" y="2121408"/>
+            <a:ext cx="6035040" cy="237744"/>
+          </a:xfrm>
+          <a:prstGeom prst="rect">
+            <a:avLst/>
+          </a:prstGeom>
+          <a:noFill/>
+          <a:ln/>
+        </p:spPr>
+        <p:txBody>
+          <a:bodyPr wrap="square" lIns="0" tIns="0" rIns="0" bIns="0" rtlCol="0" anchor="t"/>
+          <a:lstStyle/>
+          <a:p>
+            <a:pPr marL="0" indent="0">
+              <a:buNone/>
+            </a:pPr>
+            <a:r>
+              <a:rPr lang="en-US" sz="1200" kern="0" spc="260" dirty="0">
+                <a:solidFill>
+                  <a:srgbClr val="828C9A"/>
                 </a:solidFill>
                 <a:latin typeface="Barlow Condensed" pitchFamily="34" charset="0"/>
                 <a:ea typeface="Barlow Condensed" pitchFamily="34" charset="-122"/>
                 <a:cs typeface="Barlow Condensed" pitchFamily="34" charset="-120"/>
               </a:rPr>
-              <a:t>ATHLETE</a:t>
+              <a:t>TWO SPORTS, AT THE TOP OF BOTH</a:t>
+            </a:r>
+            <a:endParaRPr lang="en-US" sz="1200" dirty="0"/>
+          </a:p>
+        </p:txBody>
+      </p:sp>
+      <p:sp>
+        <p:nvSpPr>
+          <p:cNvPr id="6" name="Text 4"/>
+          <p:cNvSpPr txBox="1"/>
+          <p:nvPr/>
+        </p:nvSpPr>
+        <p:spPr>
+          <a:xfrm>
+            <a:off x="1005840" y="2523744"/>
+            <a:ext cx="2377440" cy="310896"/>
+          </a:xfrm>
+          <a:prstGeom prst="rect">
+            <a:avLst/>
+          </a:prstGeom>
+          <a:noFill/>
+          <a:ln/>
+        </p:spPr>
+        <p:txBody>
+          <a:bodyPr wrap="square" lIns="0" tIns="0" rIns="0" bIns="0" rtlCol="0" anchor="t"/>
+          <a:lstStyle/>
+          <a:p>
+            <a:pPr marL="0" indent="0">
+              <a:buNone/>
+            </a:pPr>
+            <a:r>
+              <a:rPr lang="en-US" sz="1900" kern="0" spc="180" dirty="0">
+                <a:solidFill>
+                  <a:srgbClr val="FFB020"/>
+                </a:solidFill>
+                <a:latin typeface="Barlow Condensed" pitchFamily="34" charset="0"/>
+                <a:ea typeface="Barlow Condensed" pitchFamily="34" charset="-122"/>
+                <a:cs typeface="Barlow Condensed" pitchFamily="34" charset="-120"/>
+              </a:rPr>
+              <a:t>CROSSFIT</a:t>
             </a:r>
             <a:endParaRPr lang="en-US" sz="1900" dirty="0"/>
           </a:p>
@@ -13436,14 +13477,181 @@
       </p:sp>
       <p:sp>
         <p:nvSpPr>
-          <p:cNvPr id="6" name="Text 4"/>
-          <p:cNvSpPr txBox="1"/>
-          <p:nvPr/>
-        </p:nvSpPr>
-        <p:spPr>
-          <a:xfrm>
-            <a:off x="987552" y="2697480"/>
-            <a:ext cx="2856890" cy="2103120"/>
+          <p:cNvPr id="7" name="Text 5"/>
+          <p:cNvSpPr txBox="1"/>
+          <p:nvPr/>
+        </p:nvSpPr>
+        <p:spPr>
+          <a:xfrm>
+            <a:off x="3456432" y="2542032"/>
+            <a:ext cx="3566160" cy="310896"/>
+          </a:xfrm>
+          <a:prstGeom prst="rect">
+            <a:avLst/>
+          </a:prstGeom>
+          <a:noFill/>
+          <a:ln/>
+        </p:spPr>
+        <p:txBody>
+          <a:bodyPr wrap="square" lIns="0" tIns="0" rIns="0" bIns="0" rtlCol="0" anchor="t"/>
+          <a:lstStyle/>
+          <a:p>
+            <a:pPr marL="0" indent="0">
+              <a:buNone/>
+            </a:pPr>
+            <a:r>
+              <a:rPr lang="en-US" sz="1900" dirty="0">
+                <a:solidFill>
+                  <a:srgbClr val="F2F4F7"/>
+                </a:solidFill>
+                <a:latin typeface="Barlow Condensed" pitchFamily="34" charset="0"/>
+                <a:ea typeface="Barlow Condensed" pitchFamily="34" charset="-122"/>
+                <a:cs typeface="Barlow Condensed" pitchFamily="34" charset="-120"/>
+              </a:rPr>
+              <a:t>Champion of Lebanon</a:t>
+            </a:r>
+            <a:endParaRPr lang="en-US" sz="1900" dirty="0"/>
+          </a:p>
+        </p:txBody>
+      </p:sp>
+      <p:sp>
+        <p:nvSpPr>
+          <p:cNvPr id="8" name="Shape 6"/>
+          <p:cNvSpPr/>
+          <p:nvPr/>
+        </p:nvSpPr>
+        <p:spPr>
+          <a:xfrm>
+            <a:off x="1005840" y="2980944"/>
+            <a:ext cx="6035040" cy="12802"/>
+          </a:xfrm>
+          <a:prstGeom prst="rect">
+            <a:avLst/>
+          </a:prstGeom>
+          <a:solidFill>
+            <a:srgbClr val="262C35"/>
+          </a:solidFill>
+          <a:ln w="12700">
+            <a:solidFill>
+              <a:srgbClr val="333333"/>
+            </a:solidFill>
+            <a:prstDash val="solid"/>
+          </a:ln>
+        </p:spPr>
+      </p:sp>
+      <p:sp>
+        <p:nvSpPr>
+          <p:cNvPr id="9" name="Text 7"/>
+          <p:cNvSpPr txBox="1"/>
+          <p:nvPr/>
+        </p:nvSpPr>
+        <p:spPr>
+          <a:xfrm>
+            <a:off x="1005840" y="3145536"/>
+            <a:ext cx="2377440" cy="310896"/>
+          </a:xfrm>
+          <a:prstGeom prst="rect">
+            <a:avLst/>
+          </a:prstGeom>
+          <a:noFill/>
+          <a:ln/>
+        </p:spPr>
+        <p:txBody>
+          <a:bodyPr wrap="square" lIns="0" tIns="0" rIns="0" bIns="0" rtlCol="0" anchor="t"/>
+          <a:lstStyle/>
+          <a:p>
+            <a:pPr marL="0" indent="0">
+              <a:buNone/>
+            </a:pPr>
+            <a:r>
+              <a:rPr lang="en-US" sz="1900" kern="0" spc="180" dirty="0">
+                <a:solidFill>
+                  <a:srgbClr val="FFB020"/>
+                </a:solidFill>
+                <a:latin typeface="Barlow Condensed" pitchFamily="34" charset="0"/>
+                <a:ea typeface="Barlow Condensed" pitchFamily="34" charset="-122"/>
+                <a:cs typeface="Barlow Condensed" pitchFamily="34" charset="-120"/>
+              </a:rPr>
+              <a:t>RUGBY LEAGUE</a:t>
+            </a:r>
+            <a:endParaRPr lang="en-US" sz="1900" dirty="0"/>
+          </a:p>
+        </p:txBody>
+      </p:sp>
+      <p:sp>
+        <p:nvSpPr>
+          <p:cNvPr id="10" name="Text 8"/>
+          <p:cNvSpPr txBox="1"/>
+          <p:nvPr/>
+        </p:nvSpPr>
+        <p:spPr>
+          <a:xfrm>
+            <a:off x="3456432" y="3163824"/>
+            <a:ext cx="3566160" cy="310896"/>
+          </a:xfrm>
+          <a:prstGeom prst="rect">
+            <a:avLst/>
+          </a:prstGeom>
+          <a:noFill/>
+          <a:ln/>
+        </p:spPr>
+        <p:txBody>
+          <a:bodyPr wrap="square" lIns="0" tIns="0" rIns="0" bIns="0" rtlCol="0" anchor="t"/>
+          <a:lstStyle/>
+          <a:p>
+            <a:pPr marL="0" indent="0">
+              <a:buNone/>
+            </a:pPr>
+            <a:r>
+              <a:rPr lang="en-US" sz="1900" dirty="0">
+                <a:solidFill>
+                  <a:srgbClr val="F2F4F7"/>
+                </a:solidFill>
+                <a:latin typeface="Barlow Condensed" pitchFamily="34" charset="0"/>
+                <a:ea typeface="Barlow Condensed" pitchFamily="34" charset="-122"/>
+                <a:cs typeface="Barlow Condensed" pitchFamily="34" charset="-120"/>
+              </a:rPr>
+              <a:t>Among the best in the country</a:t>
+            </a:r>
+            <a:endParaRPr lang="en-US" sz="1900" dirty="0"/>
+          </a:p>
+        </p:txBody>
+      </p:sp>
+      <p:sp>
+        <p:nvSpPr>
+          <p:cNvPr id="11" name="Shape 9"/>
+          <p:cNvSpPr/>
+          <p:nvPr/>
+        </p:nvSpPr>
+        <p:spPr>
+          <a:xfrm>
+            <a:off x="1005840" y="3602736"/>
+            <a:ext cx="6035040" cy="12802"/>
+          </a:xfrm>
+          <a:prstGeom prst="rect">
+            <a:avLst/>
+          </a:prstGeom>
+          <a:solidFill>
+            <a:srgbClr val="262C35"/>
+          </a:solidFill>
+          <a:ln w="12700">
+            <a:solidFill>
+              <a:srgbClr val="333333"/>
+            </a:solidFill>
+            <a:prstDash val="solid"/>
+          </a:ln>
+        </p:spPr>
+      </p:sp>
+      <p:sp>
+        <p:nvSpPr>
+          <p:cNvPr id="12" name="Text 10"/>
+          <p:cNvSpPr txBox="1"/>
+          <p:nvPr/>
+        </p:nvSpPr>
+        <p:spPr>
+          <a:xfrm>
+            <a:off x="1005840" y="3767328"/>
+            <a:ext cx="6035040" cy="914400"/>
           </a:xfrm>
           <a:prstGeom prst="rect">
             <a:avLst/>
@@ -13470,7 +13678,7 @@
                 <a:ea typeface="Barlow" pitchFamily="34" charset="-122"/>
                 <a:cs typeface="Barlow" pitchFamily="34" charset="-120"/>
               </a:rPr>
-              <a:t>Capped by the Lebanese national rugby team, with international tournament experience. The athletes in my research are people I play with, which is why the conversations were candid rather than performative.</a:t>
+              <a:t>A friend I play rugby with, and one of the five athletes in the research behind this plan. He is not the exception in that group. He is what a niche sport looks like at the very top of it.</a:t>
             </a:r>
             <a:endParaRPr lang="en-US" sz="1350" dirty="0"/>
           </a:p>
@@ -13478,22 +13686,22 @@
       </p:sp>
       <p:sp>
         <p:nvSpPr>
-          <p:cNvPr id="7" name="Shape 5"/>
+          <p:cNvPr id="13" name="Shape 11"/>
           <p:cNvSpPr/>
           <p:nvPr/>
         </p:nvSpPr>
         <p:spPr>
           <a:xfrm>
-            <a:off x="4393082" y="2029968"/>
-            <a:ext cx="3405530" cy="2395728"/>
+            <a:off x="7662672" y="1920240"/>
+            <a:ext cx="3815791" cy="2926080"/>
           </a:xfrm>
           <a:prstGeom prst="roundRect">
             <a:avLst>
-              <a:gd name="adj" fmla="val 1527"/>
+              <a:gd name="adj" fmla="val 1250"/>
             </a:avLst>
           </a:prstGeom>
           <a:solidFill>
-            <a:srgbClr val="171A20"/>
+            <a:srgbClr val="1F242C"/>
           </a:solidFill>
           <a:ln w="9525">
             <a:solidFill>
@@ -13505,53 +13713,53 @@
       </p:sp>
       <p:sp>
         <p:nvSpPr>
-          <p:cNvPr id="8" name="Text 6"/>
-          <p:cNvSpPr txBox="1"/>
-          <p:nvPr/>
-        </p:nvSpPr>
-        <p:spPr>
-          <a:xfrm>
-            <a:off x="4667402" y="2304288"/>
-            <a:ext cx="2856890" cy="274320"/>
-          </a:xfrm>
-          <a:prstGeom prst="rect">
-            <a:avLst/>
-          </a:prstGeom>
-          <a:noFill/>
-          <a:ln/>
-        </p:spPr>
-        <p:txBody>
-          <a:bodyPr wrap="square" lIns="0" tIns="0" rIns="0" bIns="0" rtlCol="0" anchor="t"/>
-          <a:lstStyle/>
-          <a:p>
-            <a:pPr marL="0" indent="0">
-              <a:buNone/>
-            </a:pPr>
-            <a:r>
-              <a:rPr lang="en-US" sz="1900" kern="0" spc="180" dirty="0">
-                <a:solidFill>
-                  <a:srgbClr val="FFB020"/>
+          <p:cNvPr id="14" name="Text 12"/>
+          <p:cNvSpPr txBox="1"/>
+          <p:nvPr/>
+        </p:nvSpPr>
+        <p:spPr>
+          <a:xfrm>
+            <a:off x="7936992" y="2121408"/>
+            <a:ext cx="3291840" cy="237744"/>
+          </a:xfrm>
+          <a:prstGeom prst="rect">
+            <a:avLst/>
+          </a:prstGeom>
+          <a:noFill/>
+          <a:ln/>
+        </p:spPr>
+        <p:txBody>
+          <a:bodyPr wrap="square" lIns="0" tIns="0" rIns="0" bIns="0" rtlCol="0" anchor="t"/>
+          <a:lstStyle/>
+          <a:p>
+            <a:pPr marL="0" indent="0">
+              <a:buNone/>
+            </a:pPr>
+            <a:r>
+              <a:rPr lang="en-US" sz="1200" kern="0" spc="260" dirty="0">
+                <a:solidFill>
+                  <a:srgbClr val="828C9A"/>
                 </a:solidFill>
                 <a:latin typeface="Barlow Condensed" pitchFamily="34" charset="0"/>
                 <a:ea typeface="Barlow Condensed" pitchFamily="34" charset="-122"/>
                 <a:cs typeface="Barlow Condensed" pitchFamily="34" charset="-120"/>
               </a:rPr>
-              <a:t>OPERATOR</a:t>
-            </a:r>
-            <a:endParaRPr lang="en-US" sz="1900" dirty="0"/>
-          </a:p>
-        </p:txBody>
-      </p:sp>
-      <p:sp>
-        <p:nvSpPr>
-          <p:cNvPr id="9" name="Text 7"/>
-          <p:cNvSpPr txBox="1"/>
-          <p:nvPr/>
-        </p:nvSpPr>
-        <p:spPr>
-          <a:xfrm>
-            <a:off x="4667402" y="2697480"/>
-            <a:ext cx="2856890" cy="2103120"/>
+              <a:t>WHAT HE EARNS</a:t>
+            </a:r>
+            <a:endParaRPr lang="en-US" sz="1200" dirty="0"/>
+          </a:p>
+        </p:txBody>
+      </p:sp>
+      <p:sp>
+        <p:nvSpPr>
+          <p:cNvPr id="15" name="Text 13"/>
+          <p:cNvSpPr txBox="1"/>
+          <p:nvPr/>
+        </p:nvSpPr>
+        <p:spPr>
+          <a:xfrm>
+            <a:off x="7936992" y="2450592"/>
+            <a:ext cx="3291840" cy="731520"/>
           </a:xfrm>
           <a:prstGeom prst="rect">
             <a:avLst/>
@@ -13565,12 +13773,54 @@
           <a:p>
             <a:pPr marL="0" indent="0">
               <a:lnSpc>
-                <a:spcPts val="1900"/>
+                <a:spcPts val="4800"/>
               </a:lnSpc>
               <a:buNone/>
             </a:pPr>
             <a:r>
-              <a:rPr lang="en-US" sz="1350" dirty="0">
+              <a:rPr lang="en-US" sz="4600" dirty="0">
+                <a:solidFill>
+                  <a:srgbClr val="FFB020"/>
+                </a:solidFill>
+                <a:latin typeface="Barlow Condensed" pitchFamily="34" charset="0"/>
+                <a:ea typeface="Barlow Condensed" pitchFamily="34" charset="-122"/>
+                <a:cs typeface="Barlow Condensed" pitchFamily="34" charset="-120"/>
+              </a:rPr>
+              <a:t>Nothing</a:t>
+            </a:r>
+            <a:endParaRPr lang="en-US" sz="4600" dirty="0"/>
+          </a:p>
+        </p:txBody>
+      </p:sp>
+      <p:sp>
+        <p:nvSpPr>
+          <p:cNvPr id="16" name="Text 14"/>
+          <p:cNvSpPr txBox="1"/>
+          <p:nvPr/>
+        </p:nvSpPr>
+        <p:spPr>
+          <a:xfrm>
+            <a:off x="7936992" y="3255264"/>
+            <a:ext cx="3291840" cy="1097280"/>
+          </a:xfrm>
+          <a:prstGeom prst="rect">
+            <a:avLst/>
+          </a:prstGeom>
+          <a:noFill/>
+          <a:ln/>
+        </p:spPr>
+        <p:txBody>
+          <a:bodyPr wrap="square" lIns="0" tIns="0" rIns="0" bIns="0" rtlCol="0" anchor="t"/>
+          <a:lstStyle/>
+          <a:p>
+            <a:pPr marL="0" indent="0">
+              <a:lnSpc>
+                <a:spcPts val="1800"/>
+              </a:lnSpc>
+              <a:buNone/>
+            </a:pPr>
+            <a:r>
+              <a:rPr lang="en-US" sz="1300" dirty="0">
                 <a:solidFill>
                   <a:srgbClr val="AEB6C2"/>
                 </a:solidFill>
@@ -13578,30 +13828,72 @@
                 <a:ea typeface="Barlow" pitchFamily="34" charset="-122"/>
                 <a:cs typeface="Barlow" pitchFamily="34" charset="-120"/>
               </a:rPr>
-              <a:t>Four years in management consulting across MENA. Feasibility studies at $5 to 15M, DCF modelling, and an OpEx reorganisation that delivered SAR 650M of capital optimisation.</a:t>
-            </a:r>
-            <a:endParaRPr lang="en-US" sz="1350" dirty="0"/>
-          </a:p>
-        </p:txBody>
-      </p:sp>
-      <p:sp>
-        <p:nvSpPr>
-          <p:cNvPr id="10" name="Shape 8"/>
+              <a:t>Not a small amount, and not an inconsistent one. There is no mechanism at all by which a record like his, or the audience that comes with it, turns into income.</a:t>
+            </a:r>
+            <a:endParaRPr lang="en-US" sz="1300" dirty="0"/>
+          </a:p>
+        </p:txBody>
+      </p:sp>
+      <p:sp>
+        <p:nvSpPr>
+          <p:cNvPr id="17" name="Text 15"/>
+          <p:cNvSpPr txBox="1"/>
+          <p:nvPr/>
+        </p:nvSpPr>
+        <p:spPr>
+          <a:xfrm>
+            <a:off x="7936992" y="4370832"/>
+            <a:ext cx="3291840" cy="365760"/>
+          </a:xfrm>
+          <a:prstGeom prst="rect">
+            <a:avLst/>
+          </a:prstGeom>
+          <a:noFill/>
+          <a:ln/>
+        </p:spPr>
+        <p:txBody>
+          <a:bodyPr wrap="square" lIns="0" tIns="0" rIns="0" bIns="0" rtlCol="0" anchor="t"/>
+          <a:lstStyle/>
+          <a:p>
+            <a:pPr marL="0" indent="0">
+              <a:lnSpc>
+                <a:spcPts val="1800"/>
+              </a:lnSpc>
+              <a:buNone/>
+            </a:pPr>
+            <a:r>
+              <a:rPr lang="en-US" sz="1300" dirty="0">
+                <a:solidFill>
+                  <a:srgbClr val="F2F4F7"/>
+                </a:solidFill>
+                <a:latin typeface="Barlow" pitchFamily="34" charset="0"/>
+                <a:ea typeface="Barlow" pitchFamily="34" charset="-122"/>
+                <a:cs typeface="Barlow" pitchFamily="34" charset="-120"/>
+              </a:rPr>
+              <a:t>I started building because of him.</a:t>
+            </a:r>
+            <a:endParaRPr lang="en-US" sz="1300" dirty="0"/>
+          </a:p>
+        </p:txBody>
+      </p:sp>
+      <p:sp>
+        <p:nvSpPr>
+          <p:cNvPr id="18" name="Shape 16"/>
           <p:cNvSpPr/>
           <p:nvPr/>
         </p:nvSpPr>
         <p:spPr>
           <a:xfrm>
-            <a:off x="8072933" y="2029968"/>
-            <a:ext cx="3405530" cy="2395728"/>
+            <a:off x="713232" y="5074920"/>
+            <a:ext cx="10765231" cy="914400"/>
           </a:xfrm>
           <a:prstGeom prst="roundRect">
             <a:avLst>
-              <a:gd name="adj" fmla="val 1527"/>
+              <a:gd name="adj" fmla="val 4000"/>
             </a:avLst>
           </a:prstGeom>
           <a:solidFill>
-            <a:srgbClr val="171A20"/>
+            <a:srgbClr val="1F242C"/>
           </a:solidFill>
           <a:ln w="9525">
             <a:solidFill>
@@ -13613,30 +13905,30 @@
       </p:sp>
       <p:sp>
         <p:nvSpPr>
-          <p:cNvPr id="11" name="Text 9"/>
-          <p:cNvSpPr txBox="1"/>
-          <p:nvPr/>
-        </p:nvSpPr>
-        <p:spPr>
-          <a:xfrm>
-            <a:off x="8347253" y="2304288"/>
-            <a:ext cx="2856890" cy="274320"/>
-          </a:xfrm>
-          <a:prstGeom prst="rect">
-            <a:avLst/>
-          </a:prstGeom>
-          <a:noFill/>
-          <a:ln/>
-        </p:spPr>
-        <p:txBody>
-          <a:bodyPr wrap="square" lIns="0" tIns="0" rIns="0" bIns="0" rtlCol="0" anchor="t"/>
-          <a:lstStyle/>
-          <a:p>
-            <a:pPr marL="0" indent="0">
-              <a:buNone/>
-            </a:pPr>
-            <a:r>
-              <a:rPr lang="en-US" sz="1900" kern="0" spc="180" dirty="0">
+          <p:cNvPr id="19" name="Text 17"/>
+          <p:cNvSpPr txBox="1"/>
+          <p:nvPr/>
+        </p:nvSpPr>
+        <p:spPr>
+          <a:xfrm>
+            <a:off x="987552" y="5276088"/>
+            <a:ext cx="3017520" cy="237744"/>
+          </a:xfrm>
+          <a:prstGeom prst="rect">
+            <a:avLst/>
+          </a:prstGeom>
+          <a:noFill/>
+          <a:ln/>
+        </p:spPr>
+        <p:txBody>
+          <a:bodyPr wrap="square" lIns="0" tIns="0" rIns="0" bIns="0" rtlCol="0" anchor="t"/>
+          <a:lstStyle/>
+          <a:p>
+            <a:pPr marL="0" indent="0">
+              <a:buNone/>
+            </a:pPr>
+            <a:r>
+              <a:rPr lang="en-US" sz="1300" kern="0" spc="220" dirty="0">
                 <a:solidFill>
                   <a:srgbClr val="FFB020"/>
                 </a:solidFill>
@@ -13644,22 +13936,22 @@
                 <a:ea typeface="Barlow Condensed" pitchFamily="34" charset="-122"/>
                 <a:cs typeface="Barlow Condensed" pitchFamily="34" charset="-120"/>
               </a:rPr>
-              <a:t>BUILDER</a:t>
-            </a:r>
-            <a:endParaRPr lang="en-US" sz="1900" dirty="0"/>
-          </a:p>
-        </p:txBody>
-      </p:sp>
-      <p:sp>
-        <p:nvSpPr>
-          <p:cNvPr id="12" name="Text 10"/>
-          <p:cNvSpPr txBox="1"/>
-          <p:nvPr/>
-        </p:nvSpPr>
-        <p:spPr>
-          <a:xfrm>
-            <a:off x="8347253" y="2697480"/>
-            <a:ext cx="2856890" cy="2103120"/>
+              <a:t>WHY I CAN SEE THIS AT ALL</a:t>
+            </a:r>
+            <a:endParaRPr lang="en-US" sz="1300" dirty="0"/>
+          </a:p>
+        </p:txBody>
+      </p:sp>
+      <p:sp>
+        <p:nvSpPr>
+          <p:cNvPr id="20" name="Text 18"/>
+          <p:cNvSpPr txBox="1"/>
+          <p:nvPr/>
+        </p:nvSpPr>
+        <p:spPr>
+          <a:xfrm>
+            <a:off x="4279392" y="5239512"/>
+            <a:ext cx="6924751" cy="658368"/>
           </a:xfrm>
           <a:prstGeom prst="rect">
             <a:avLst/>
@@ -13673,12 +13965,12 @@
           <a:p>
             <a:pPr marL="0" indent="0">
               <a:lnSpc>
-                <a:spcPts val="1900"/>
+                <a:spcPts val="1700"/>
               </a:lnSpc>
               <a:buNone/>
             </a:pPr>
             <a:r>
-              <a:rPr lang="en-US" sz="1350" dirty="0">
+              <a:rPr lang="en-US" sz="1300" dirty="0">
                 <a:solidFill>
                   <a:srgbClr val="AEB6C2"/>
                 </a:solidFill>
@@ -13686,41 +13978,38 @@
                 <a:ea typeface="Barlow" pitchFamily="34" charset="-122"/>
                 <a:cs typeface="Barlow" pitchFamily="34" charset="-120"/>
               </a:rPr>
-              <a:t>MSc Business Analytics at ESADE. The deployed product, the analytics engine and the financial model behind this plan are all my own work.</a:t>
-            </a:r>
-            <a:endParaRPr lang="en-US" sz="1350" dirty="0"/>
-          </a:p>
-        </p:txBody>
-      </p:sp>
-      <p:sp>
-        <p:nvSpPr>
-          <p:cNvPr id="13" name="Text 11"/>
-          <p:cNvSpPr txBox="1"/>
-          <p:nvPr/>
-        </p:nvSpPr>
-        <p:spPr>
-          <a:xfrm>
-            <a:off x="713232" y="4681728"/>
-            <a:ext cx="10765231" cy="365760"/>
-          </a:xfrm>
-          <a:prstGeom prst="rect">
-            <a:avLst/>
-          </a:prstGeom>
-          <a:noFill/>
-          <a:ln/>
-        </p:spPr>
-        <p:txBody>
-          <a:bodyPr wrap="square" lIns="0" tIns="0" rIns="0" bIns="0" rtlCol="0" anchor="t"/>
-          <a:lstStyle/>
-          <a:p>
-            <a:pPr marL="0" indent="0">
-              <a:lnSpc>
-                <a:spcPts val="2200"/>
-              </a:lnSpc>
-              <a:buNone/>
-            </a:pPr>
-            <a:r>
-              <a:rPr lang="en-US" sz="1400" dirty="0">
+              <a:t>Capped by the Lebanese national rugby team, so these are teammates rather than survey respondents. Four years of consulting built the model; the MSc and the build produced the product and its code.</a:t>
+            </a:r>
+            <a:endParaRPr lang="en-US" sz="1300" dirty="0"/>
+          </a:p>
+        </p:txBody>
+      </p:sp>
+      <p:sp>
+        <p:nvSpPr>
+          <p:cNvPr id="21" name="Text 19"/>
+          <p:cNvSpPr txBox="1"/>
+          <p:nvPr/>
+        </p:nvSpPr>
+        <p:spPr>
+          <a:xfrm>
+            <a:off x="713232" y="6382512"/>
+            <a:ext cx="9667951" cy="274320"/>
+          </a:xfrm>
+          <a:prstGeom prst="rect">
+            <a:avLst/>
+          </a:prstGeom>
+          <a:noFill/>
+          <a:ln/>
+        </p:spPr>
+        <p:txBody>
+          <a:bodyPr wrap="square" lIns="0" tIns="0" rIns="0" bIns="0" rtlCol="0" anchor="t"/>
+          <a:lstStyle/>
+          <a:p>
+            <a:pPr marL="0" indent="0">
+              <a:buNone/>
+            </a:pPr>
+            <a:r>
+              <a:rPr lang="en-US" sz="950" dirty="0">
                 <a:solidFill>
                   <a:srgbClr val="828C9A"/>
                 </a:solidFill>
@@ -13728,9 +14017,9 @@
                 <a:ea typeface="Barlow" pitchFamily="34" charset="-122"/>
                 <a:cs typeface="Barlow" pitchFamily="34" charset="-120"/>
               </a:rPr>
-              <a:t>The plan can make claims about the technology that are checkable rather than aspirational, because I wrote it.</a:t>
-            </a:r>
-            <a:endParaRPr lang="en-US" sz="1400" dirty="0"/>
+              <a:t>One of the five athletes in the primary research. Full method and limitations in section 3.1.5.</a:t>
+            </a:r>
+            <a:endParaRPr lang="en-US" sz="950" dirty="0"/>
           </a:p>
         </p:txBody>
       </p:sp>

--- a/deck/Stride_Pitch_Deck.pptx
+++ b/deck/Stride_Pitch_Deck.pptx
@@ -144,12 +144,12 @@
   <p:extLst>
     <p:ext uri="{521415D9-36F7-43E2-AB2F-B90AF26B5E84}">
       <p14:sectionLst xmlns:p14="http://schemas.microsoft.com/office/powerpoint/2010/main">
-        <p14:section name="Open" id="{D5FBD59C-1168-67C6-11D5-009254ADB5DC}">
+        <p14:section name="Open" id="{7B71D9B7-8105-7CA0-E67A-C695B3877B6D}">
           <p14:sldIdLst>
             <p14:sldId id="256"/>
           </p14:sldIdLst>
         </p14:section>
-        <p14:section name="Problem" id="{39EE2147-FB5F-008D-DE14-92824DE4F841}">
+        <p14:section name="Problem" id="{5D9C4B10-045C-4BF0-32AA-7C127C3E42BA}">
           <p14:sldIdLst>
             <p14:sldId id="257"/>
             <p14:sldId id="258"/>
@@ -157,7 +157,7 @@
             <p14:sldId id="260"/>
           </p14:sldIdLst>
         </p14:section>
-        <p14:section name="Product" id="{BB413FC7-2848-DD0F-4CFE-4C3EF064F142}">
+        <p14:section name="Product" id="{448C143E-D4D8-B66C-1F5D-62839D0D49E5}">
           <p14:sldIdLst>
             <p14:sldId id="261"/>
             <p14:sldId id="262"/>
@@ -166,28 +166,28 @@
             <p14:sldId id="265"/>
           </p14:sldIdLst>
         </p14:section>
-        <p14:section name="Market" id="{BEE323FB-2992-8941-7EAC-9CA3A0C5AC15}">
+        <p14:section name="Market" id="{7652C5EF-CD0F-81BE-7E1B-90C87DBC1350}">
           <p14:sldIdLst>
             <p14:sldId id="266"/>
             <p14:sldId id="267"/>
             <p14:sldId id="268"/>
           </p14:sldIdLst>
         </p14:section>
-        <p14:section name="Model" id="{AF21B2C8-0D33-DCE9-73BF-3BD671D834B5}">
+        <p14:section name="Model" id="{EAA52762-882A-67AF-0000-E973364286DD}">
           <p14:sldIdLst>
             <p14:sldId id="269"/>
             <p14:sldId id="270"/>
             <p14:sldId id="271"/>
           </p14:sldIdLst>
         </p14:section>
-        <p14:section name="Money" id="{94832A3B-332E-2024-7A67-E9A513BE7025}">
+        <p14:section name="Money" id="{69F4CEBC-0298-7282-A060-562652D724A6}">
           <p14:sldIdLst>
             <p14:sldId id="272"/>
             <p14:sldId id="273"/>
             <p14:sldId id="274"/>
           </p14:sldIdLst>
         </p14:section>
-        <p14:section name="Backup" id="{7E8FF166-9635-EC51-1C53-E726FF34FBDA}">
+        <p14:section name="Backup" id="{B96E8C73-C6C4-28C8-1ACB-8EF1AFF4361B}">
           <p14:sldIdLst>
             <p14:sldId id="275"/>
             <p14:sldId id="276"/>
@@ -305,7 +305,7 @@
           </c:val>
           <c:extLst>
             <c:ext xmlns:c16="http://schemas.microsoft.com/office/drawing/2014/chart" uri="{C3380CC4-5D6E-409C-BE32-E72D297353CC}">
-              <c16:uniqueId val="{00000000-1956-4CCD-93FC-1CCEF674D351}"/>
+              <c16:uniqueId val="{00000000-C3D3-476F-98CB-4975062C4831}"/>
             </c:ext>
           </c:extLst>
         </c:ser>
@@ -391,7 +391,7 @@
           </c:val>
           <c:extLst>
             <c:ext xmlns:c16="http://schemas.microsoft.com/office/drawing/2014/chart" uri="{C3380CC4-5D6E-409C-BE32-E72D297353CC}">
-              <c16:uniqueId val="{00000001-1956-4CCD-93FC-1CCEF674D351}"/>
+              <c16:uniqueId val="{00000001-C3D3-476F-98CB-4975062C4831}"/>
             </c:ext>
           </c:extLst>
         </c:ser>
@@ -477,7 +477,7 @@
           </c:val>
           <c:extLst>
             <c:ext xmlns:c16="http://schemas.microsoft.com/office/drawing/2014/chart" uri="{C3380CC4-5D6E-409C-BE32-E72D297353CC}">
-              <c16:uniqueId val="{00000002-1956-4CCD-93FC-1CCEF674D351}"/>
+              <c16:uniqueId val="{00000002-C3D3-476F-98CB-4975062C4831}"/>
             </c:ext>
           </c:extLst>
         </c:ser>
@@ -735,7 +735,7 @@
           </c:val>
           <c:extLst>
             <c:ext xmlns:c16="http://schemas.microsoft.com/office/drawing/2014/chart" uri="{C3380CC4-5D6E-409C-BE32-E72D297353CC}">
-              <c16:uniqueId val="{00000000-50FF-4DE5-99AA-98EBAC8D365B}"/>
+              <c16:uniqueId val="{00000000-2C35-46CE-A62A-71653A582E39}"/>
             </c:ext>
           </c:extLst>
         </c:ser>
@@ -857,7 +857,7 @@
           <c:smooth val="0"/>
           <c:extLst>
             <c:ext xmlns:c16="http://schemas.microsoft.com/office/drawing/2014/chart" uri="{C3380CC4-5D6E-409C-BE32-E72D297353CC}">
-              <c16:uniqueId val="{00000001-50FF-4DE5-99AA-98EBAC8D365B}"/>
+              <c16:uniqueId val="{00000001-2C35-46CE-A62A-71653A582E39}"/>
             </c:ext>
           </c:extLst>
         </c:ser>
@@ -1133,7 +1133,7 @@
           <c:smooth val="0"/>
           <c:extLst>
             <c:ext xmlns:c16="http://schemas.microsoft.com/office/drawing/2014/chart" uri="{C3380CC4-5D6E-409C-BE32-E72D297353CC}">
-              <c16:uniqueId val="{00000000-0DD9-49E6-B1BD-885074D7EE15}"/>
+              <c16:uniqueId val="{00000000-BF9F-4106-A6D8-032D45469F70}"/>
             </c:ext>
           </c:extLst>
         </c:ser>
@@ -1298,7 +1298,7 @@
     </p:spTree>
     <p:extLst>
       <p:ext uri="{BB962C8B-B14F-4D97-AF65-F5344CB8AC3E}">
-        <p14:creationId xmlns:p14="http://schemas.microsoft.com/office/powerpoint/2010/main" val="3224858854"/>
+        <p14:creationId xmlns:p14="http://schemas.microsoft.com/office/powerpoint/2010/main" val="268650731"/>
       </p:ext>
     </p:extLst>
   </p:cSld>
@@ -2431,7 +2431,7 @@
             <a:r>
               <a:rPr lang="en-US" dirty="0"/>
               <a:t>Why this, and it starts with one person.
-A friend I play rugby with is the CrossFit champion of Lebanon, and one of the best rugby league players in the country. He earns nothing from either one. Not a little. Nothing.
+A friend I play rugby with is the CrossFit champion of Lebanon, and one of the best rugby league players in the country. Neither sport has ever paid him anything. Not a little. Nothing.
 He is one of the five athletes in my research, and in that group he is not the exception. He is the median. Someone at the very top of two sports, with a real audience, and no mechanism anywhere that turns either of those things into income.
 I started building this because of him.
 And the reason I can see it at all is on the bottom line: these are teammates, not survey respondents. I am capped for Lebanon myself, which is why the conversations were candid. The consulting built the model, and the demo is my own code.</a:t>
@@ -3289,9 +3289,10 @@
           <a:p>
             <a:r>
               <a:rPr lang="en-US" dirty="0"/>
-              <a:t>He was one of five athletes in my own sports I asked the same question: what do you earn from your audience.
-The answer was not 'a little'. It was zero. Nothing, across all five.
-And read the quote carefully, because it is the finding that matters most: they do not build an audience, because there is no return on building one. That is not a complaint about pricing. It is a market with no infrastructure in it.</a:t>
+              <a:t>He was one of five athletes in my own sports I asked the same question: what has your sport ever paid you.
+The answer was not 'a little'. Across all five it is zero, and I want to be precise about what that zero is, because one of them does have a sponsor.
+He did not get it as a rugby league player. It came to him some other way, and no part of it came through the sport. So the claim is not that these people are uncommercial. A brand pays him. The claim is that the sport captures none of it, because there is no route by which it could. That is a stronger finding than five zeros would have been.
+And read the quote, because it is the one that matters most: they do not build an audience, because there is no return on building one. That is not a complaint about pricing. It is a market with no infrastructure in it.</a:t>
             </a:r>
           </a:p>
         </p:txBody>
@@ -13744,7 +13745,7 @@
                 <a:ea typeface="Barlow Condensed" pitchFamily="34" charset="-122"/>
                 <a:cs typeface="Barlow Condensed" pitchFamily="34" charset="-120"/>
               </a:rPr>
-              <a:t>WHAT HE EARNS</a:t>
+              <a:t>WHAT EITHER SPORT HAS PAID HIM</a:t>
             </a:r>
             <a:endParaRPr lang="en-US" sz="1200" dirty="0"/>
           </a:p>
@@ -13801,7 +13802,7 @@
         <p:spPr>
           <a:xfrm>
             <a:off x="7936992" y="3255264"/>
-            <a:ext cx="3291840" cy="1097280"/>
+            <a:ext cx="3291840" cy="960120"/>
           </a:xfrm>
           <a:prstGeom prst="rect">
             <a:avLst/>
@@ -13828,7 +13829,7 @@
                 <a:ea typeface="Barlow" pitchFamily="34" charset="-122"/>
                 <a:cs typeface="Barlow" pitchFamily="34" charset="-120"/>
               </a:rPr>
-              <a:t>Not a small amount, and not an inconsistent one. There is no mechanism at all by which a record like his, or the audience that comes with it, turns into income.</a:t>
+              <a:t>Not a small amount, and not an inconsistent one. Nothing either sport built for him converts into income, so whatever he earns arrives another way.</a:t>
             </a:r>
             <a:endParaRPr lang="en-US" sz="1300" dirty="0"/>
           </a:p>
@@ -13836,13 +13837,38 @@
       </p:sp>
       <p:sp>
         <p:nvSpPr>
-          <p:cNvPr id="17" name="Text 15"/>
-          <p:cNvSpPr txBox="1"/>
-          <p:nvPr/>
-        </p:nvSpPr>
-        <p:spPr>
-          <a:xfrm>
-            <a:off x="7936992" y="4370832"/>
+          <p:cNvPr id="17" name="Shape 15"/>
+          <p:cNvSpPr/>
+          <p:nvPr/>
+        </p:nvSpPr>
+        <p:spPr>
+          <a:xfrm>
+            <a:off x="7936992" y="4315968"/>
+            <a:ext cx="3291840" cy="12802"/>
+          </a:xfrm>
+          <a:prstGeom prst="rect">
+            <a:avLst/>
+          </a:prstGeom>
+          <a:solidFill>
+            <a:srgbClr val="262C35"/>
+          </a:solidFill>
+          <a:ln w="12700">
+            <a:solidFill>
+              <a:srgbClr val="333333"/>
+            </a:solidFill>
+            <a:prstDash val="solid"/>
+          </a:ln>
+        </p:spPr>
+      </p:sp>
+      <p:sp>
+        <p:nvSpPr>
+          <p:cNvPr id="18" name="Text 16"/>
+          <p:cNvSpPr txBox="1"/>
+          <p:nvPr/>
+        </p:nvSpPr>
+        <p:spPr>
+          <a:xfrm>
+            <a:off x="7936992" y="4443984"/>
             <a:ext cx="3291840" cy="365760"/>
           </a:xfrm>
           <a:prstGeom prst="rect">
@@ -13878,7 +13904,7 @@
       </p:sp>
       <p:sp>
         <p:nvSpPr>
-          <p:cNvPr id="18" name="Shape 16"/>
+          <p:cNvPr id="19" name="Shape 17"/>
           <p:cNvSpPr/>
           <p:nvPr/>
         </p:nvSpPr>
@@ -13905,7 +13931,7 @@
       </p:sp>
       <p:sp>
         <p:nvSpPr>
-          <p:cNvPr id="19" name="Text 17"/>
+          <p:cNvPr id="20" name="Text 18"/>
           <p:cNvSpPr txBox="1"/>
           <p:nvPr/>
         </p:nvSpPr>
@@ -13944,7 +13970,7 @@
       </p:sp>
       <p:sp>
         <p:nvSpPr>
-          <p:cNvPr id="20" name="Text 18"/>
+          <p:cNvPr id="21" name="Text 19"/>
           <p:cNvSpPr txBox="1"/>
           <p:nvPr/>
         </p:nvSpPr>
@@ -13986,7 +14012,7 @@
       </p:sp>
       <p:sp>
         <p:nvSpPr>
-          <p:cNvPr id="21" name="Text 19"/>
+          <p:cNvPr id="22" name="Text 20"/>
           <p:cNvSpPr txBox="1"/>
           <p:nvPr/>
         </p:nvSpPr>
@@ -22021,7 +22047,7 @@
         <p:spPr>
           <a:xfrm>
             <a:off x="713232" y="3310128"/>
-            <a:ext cx="4937760" cy="274320"/>
+            <a:ext cx="5120640" cy="274320"/>
           </a:xfrm>
           <a:prstGeom prst="rect">
             <a:avLst/>
@@ -22045,7 +22071,7 @@
                 <a:ea typeface="Barlow Condensed" pitchFamily="34" charset="-122"/>
                 <a:cs typeface="Barlow Condensed" pitchFamily="34" charset="-120"/>
               </a:rPr>
-              <a:t>CURRENT INCOME FROM THEIR AUDIENCE</a:t>
+              <a:t>INCOME THE SPORT ITSELF PRODUCED</a:t>
             </a:r>
             <a:endParaRPr lang="en-US" sz="1300" dirty="0"/>
           </a:p>
@@ -22096,6 +22122,114 @@
       <p:sp>
         <p:nvSpPr>
           <p:cNvPr id="6" name="Shape 4"/>
+          <p:cNvSpPr/>
+          <p:nvPr/>
+        </p:nvSpPr>
+        <p:spPr>
+          <a:xfrm>
+            <a:off x="713232" y="4261104"/>
+            <a:ext cx="5212080" cy="859536"/>
+          </a:xfrm>
+          <a:prstGeom prst="roundRect">
+            <a:avLst>
+              <a:gd name="adj" fmla="val 4255"/>
+            </a:avLst>
+          </a:prstGeom>
+          <a:solidFill>
+            <a:srgbClr val="1F242C"/>
+          </a:solidFill>
+          <a:ln w="9525">
+            <a:solidFill>
+              <a:srgbClr val="262C35"/>
+            </a:solidFill>
+            <a:prstDash val="solid"/>
+          </a:ln>
+        </p:spPr>
+      </p:sp>
+      <p:sp>
+        <p:nvSpPr>
+          <p:cNvPr id="7" name="Text 5"/>
+          <p:cNvSpPr txBox="1"/>
+          <p:nvPr/>
+        </p:nvSpPr>
+        <p:spPr>
+          <a:xfrm>
+            <a:off x="969264" y="4425696"/>
+            <a:ext cx="4754880" cy="219456"/>
+          </a:xfrm>
+          <a:prstGeom prst="rect">
+            <a:avLst/>
+          </a:prstGeom>
+          <a:noFill/>
+          <a:ln/>
+        </p:spPr>
+        <p:txBody>
+          <a:bodyPr wrap="square" lIns="0" tIns="0" rIns="0" bIns="0" rtlCol="0" anchor="t"/>
+          <a:lstStyle/>
+          <a:p>
+            <a:pPr marL="0" indent="0">
+              <a:buNone/>
+            </a:pPr>
+            <a:r>
+              <a:rPr lang="en-US" sz="1150" kern="0" spc="200" dirty="0">
+                <a:solidFill>
+                  <a:srgbClr val="FFB020"/>
+                </a:solidFill>
+                <a:latin typeface="Barlow Condensed" pitchFamily="34" charset="0"/>
+                <a:ea typeface="Barlow Condensed" pitchFamily="34" charset="-122"/>
+                <a:cs typeface="Barlow Condensed" pitchFamily="34" charset="-120"/>
+              </a:rPr>
+              <a:t>ONE OF THE FIVE DOES HAVE A SPONSOR</a:t>
+            </a:r>
+            <a:endParaRPr lang="en-US" sz="1150" dirty="0"/>
+          </a:p>
+        </p:txBody>
+      </p:sp>
+      <p:sp>
+        <p:nvSpPr>
+          <p:cNvPr id="8" name="Text 6"/>
+          <p:cNvSpPr txBox="1"/>
+          <p:nvPr/>
+        </p:nvSpPr>
+        <p:spPr>
+          <a:xfrm>
+            <a:off x="969264" y="4663440"/>
+            <a:ext cx="4754880" cy="402336"/>
+          </a:xfrm>
+          <a:prstGeom prst="rect">
+            <a:avLst/>
+          </a:prstGeom>
+          <a:noFill/>
+          <a:ln/>
+        </p:spPr>
+        <p:txBody>
+          <a:bodyPr wrap="square" lIns="0" tIns="0" rIns="0" bIns="0" rtlCol="0" anchor="t"/>
+          <a:lstStyle/>
+          <a:p>
+            <a:pPr marL="0" indent="0">
+              <a:lnSpc>
+                <a:spcPts val="1600"/>
+              </a:lnSpc>
+              <a:buNone/>
+            </a:pPr>
+            <a:r>
+              <a:rPr lang="en-US" sz="1200" dirty="0">
+                <a:solidFill>
+                  <a:srgbClr val="AEB6C2"/>
+                </a:solidFill>
+                <a:latin typeface="Barlow" pitchFamily="34" charset="0"/>
+                <a:ea typeface="Barlow" pitchFamily="34" charset="-122"/>
+                <a:cs typeface="Barlow" pitchFamily="34" charset="-120"/>
+              </a:rPr>
+              <a:t>He did not get it as a rugby league player. None of it came through the sport, which is the finding and not an exception to it.</a:t>
+            </a:r>
+            <a:endParaRPr lang="en-US" sz="1200" dirty="0"/>
+          </a:p>
+        </p:txBody>
+      </p:sp>
+      <p:sp>
+        <p:nvSpPr>
+          <p:cNvPr id="9" name="Shape 7"/>
           <p:cNvSpPr/>
           <p:nvPr/>
         </p:nvSpPr>
@@ -22122,7 +22256,7 @@
       </p:sp>
       <p:sp>
         <p:nvSpPr>
-          <p:cNvPr id="7" name="Text 5"/>
+          <p:cNvPr id="10" name="Text 8"/>
           <p:cNvSpPr txBox="1"/>
           <p:nvPr/>
         </p:nvSpPr>
@@ -22161,7 +22295,7 @@
       </p:sp>
       <p:sp>
         <p:nvSpPr>
-          <p:cNvPr id="8" name="Text 6"/>
+          <p:cNvPr id="11" name="Text 9"/>
           <p:cNvSpPr txBox="1"/>
           <p:nvPr/>
         </p:nvSpPr>
@@ -22203,7 +22337,7 @@
       </p:sp>
       <p:sp>
         <p:nvSpPr>
-          <p:cNvPr id="9" name="Shape 7"/>
+          <p:cNvPr id="12" name="Shape 10"/>
           <p:cNvSpPr/>
           <p:nvPr/>
         </p:nvSpPr>
@@ -22228,7 +22362,7 @@
       </p:sp>
       <p:sp>
         <p:nvSpPr>
-          <p:cNvPr id="10" name="Text 8"/>
+          <p:cNvPr id="13" name="Text 11"/>
           <p:cNvSpPr txBox="1"/>
           <p:nvPr/>
         </p:nvSpPr>
@@ -22270,14 +22404,14 @@
       </p:sp>
       <p:sp>
         <p:nvSpPr>
-          <p:cNvPr id="11" name="Shape 9"/>
+          <p:cNvPr id="14" name="Shape 12"/>
           <p:cNvSpPr/>
           <p:nvPr/>
         </p:nvSpPr>
         <p:spPr>
           <a:xfrm>
-            <a:off x="713232" y="5138928"/>
-            <a:ext cx="3405530" cy="12802"/>
+            <a:off x="713232" y="5248656"/>
+            <a:ext cx="5245456" cy="12802"/>
           </a:xfrm>
           <a:prstGeom prst="rect">
             <a:avLst/>
@@ -22295,14 +22429,14 @@
       </p:sp>
       <p:sp>
         <p:nvSpPr>
-          <p:cNvPr id="12" name="Text 10"/>
-          <p:cNvSpPr txBox="1"/>
-          <p:nvPr/>
-        </p:nvSpPr>
-        <p:spPr>
-          <a:xfrm>
-            <a:off x="713232" y="5266944"/>
-            <a:ext cx="3405530" cy="219456"/>
+          <p:cNvPr id="15" name="Text 13"/>
+          <p:cNvSpPr txBox="1"/>
+          <p:nvPr/>
+        </p:nvSpPr>
+        <p:spPr>
+          <a:xfrm>
+            <a:off x="713232" y="5376672"/>
+            <a:ext cx="5245456" cy="219456"/>
           </a:xfrm>
           <a:prstGeom prst="rect">
             <a:avLst/>
@@ -22334,14 +22468,14 @@
       </p:sp>
       <p:sp>
         <p:nvSpPr>
-          <p:cNvPr id="13" name="Text 11"/>
-          <p:cNvSpPr txBox="1"/>
-          <p:nvPr/>
-        </p:nvSpPr>
-        <p:spPr>
-          <a:xfrm>
-            <a:off x="713232" y="5504688"/>
-            <a:ext cx="3405530" cy="548640"/>
+          <p:cNvPr id="16" name="Text 14"/>
+          <p:cNvSpPr txBox="1"/>
+          <p:nvPr/>
+        </p:nvSpPr>
+        <p:spPr>
+          <a:xfrm>
+            <a:off x="713232" y="5614416"/>
+            <a:ext cx="5245456" cy="548640"/>
           </a:xfrm>
           <a:prstGeom prst="rect">
             <a:avLst/>
@@ -22376,14 +22510,14 @@
       </p:sp>
       <p:sp>
         <p:nvSpPr>
-          <p:cNvPr id="14" name="Shape 12"/>
+          <p:cNvPr id="17" name="Shape 15"/>
           <p:cNvSpPr/>
           <p:nvPr/>
         </p:nvSpPr>
         <p:spPr>
           <a:xfrm>
-            <a:off x="4393082" y="5138928"/>
-            <a:ext cx="3405530" cy="12802"/>
+            <a:off x="6233008" y="5248656"/>
+            <a:ext cx="5245456" cy="12802"/>
           </a:xfrm>
           <a:prstGeom prst="rect">
             <a:avLst/>
@@ -22401,14 +22535,14 @@
       </p:sp>
       <p:sp>
         <p:nvSpPr>
-          <p:cNvPr id="15" name="Text 13"/>
-          <p:cNvSpPr txBox="1"/>
-          <p:nvPr/>
-        </p:nvSpPr>
-        <p:spPr>
-          <a:xfrm>
-            <a:off x="4393082" y="5266944"/>
-            <a:ext cx="3405530" cy="219456"/>
+          <p:cNvPr id="18" name="Text 16"/>
+          <p:cNvSpPr txBox="1"/>
+          <p:nvPr/>
+        </p:nvSpPr>
+        <p:spPr>
+          <a:xfrm>
+            <a:off x="6233008" y="5376672"/>
+            <a:ext cx="5245456" cy="219456"/>
           </a:xfrm>
           <a:prstGeom prst="rect">
             <a:avLst/>
@@ -22432,7 +22566,7 @@
                 <a:ea typeface="Barlow Condensed" pitchFamily="34" charset="-122"/>
                 <a:cs typeface="Barlow Condensed" pitchFamily="34" charset="-120"/>
               </a:rPr>
-              <a:t>SPONSORSHIP ARRIVES DESPITE THE SPORT</a:t>
+              <a:t>SO THEY STOP BUILDING AN AUDIENCE</a:t>
             </a:r>
             <a:endParaRPr lang="en-US" sz="1200" dirty="0"/>
           </a:p>
@@ -22440,120 +22574,14 @@
       </p:sp>
       <p:sp>
         <p:nvSpPr>
-          <p:cNvPr id="16" name="Text 14"/>
-          <p:cNvSpPr txBox="1"/>
-          <p:nvPr/>
-        </p:nvSpPr>
-        <p:spPr>
-          <a:xfrm>
-            <a:off x="4393082" y="5504688"/>
-            <a:ext cx="3405530" cy="548640"/>
-          </a:xfrm>
-          <a:prstGeom prst="rect">
-            <a:avLst/>
-          </a:prstGeom>
-          <a:noFill/>
-          <a:ln/>
-        </p:spPr>
-        <p:txBody>
-          <a:bodyPr wrap="square" lIns="0" tIns="0" rIns="0" bIns="0" rtlCol="0" anchor="t"/>
-          <a:lstStyle/>
-          <a:p>
-            <a:pPr marL="0" indent="0">
-              <a:lnSpc>
-                <a:spcPts val="1500"/>
-              </a:lnSpc>
-              <a:buNone/>
-            </a:pPr>
-            <a:r>
-              <a:rPr lang="en-US" sz="1150" dirty="0">
-                <a:solidFill>
-                  <a:srgbClr val="828C9A"/>
-                </a:solidFill>
-                <a:latin typeface="Barlow" pitchFamily="34" charset="0"/>
-                <a:ea typeface="Barlow" pitchFamily="34" charset="-122"/>
-                <a:cs typeface="Barlow" pitchFamily="34" charset="-120"/>
-              </a:rPr>
-              <a:t>The one athlete who has a sponsor did not get it as a rugby league player</a:t>
-            </a:r>
-            <a:endParaRPr lang="en-US" sz="1150" dirty="0"/>
-          </a:p>
-        </p:txBody>
-      </p:sp>
-      <p:sp>
-        <p:nvSpPr>
-          <p:cNvPr id="17" name="Shape 15"/>
-          <p:cNvSpPr/>
-          <p:nvPr/>
-        </p:nvSpPr>
-        <p:spPr>
-          <a:xfrm>
-            <a:off x="8072933" y="5138928"/>
-            <a:ext cx="3405530" cy="12802"/>
-          </a:xfrm>
-          <a:prstGeom prst="rect">
-            <a:avLst/>
-          </a:prstGeom>
-          <a:solidFill>
-            <a:srgbClr val="262C35"/>
-          </a:solidFill>
-          <a:ln w="12700">
-            <a:solidFill>
-              <a:srgbClr val="333333"/>
-            </a:solidFill>
-            <a:prstDash val="solid"/>
-          </a:ln>
-        </p:spPr>
-      </p:sp>
-      <p:sp>
-        <p:nvSpPr>
-          <p:cNvPr id="18" name="Text 16"/>
-          <p:cNvSpPr txBox="1"/>
-          <p:nvPr/>
-        </p:nvSpPr>
-        <p:spPr>
-          <a:xfrm>
-            <a:off x="8072933" y="5266944"/>
-            <a:ext cx="3405530" cy="219456"/>
-          </a:xfrm>
-          <a:prstGeom prst="rect">
-            <a:avLst/>
-          </a:prstGeom>
-          <a:noFill/>
-          <a:ln/>
-        </p:spPr>
-        <p:txBody>
-          <a:bodyPr wrap="square" lIns="0" tIns="0" rIns="0" bIns="0" rtlCol="0" anchor="t"/>
-          <a:lstStyle/>
-          <a:p>
-            <a:pPr marL="0" indent="0">
-              <a:buNone/>
-            </a:pPr>
-            <a:r>
-              <a:rPr lang="en-US" sz="1200" kern="0" spc="180" dirty="0">
-                <a:solidFill>
-                  <a:srgbClr val="F2F4F7"/>
-                </a:solidFill>
-                <a:latin typeface="Barlow Condensed" pitchFamily="34" charset="0"/>
-                <a:ea typeface="Barlow Condensed" pitchFamily="34" charset="-122"/>
-                <a:cs typeface="Barlow Condensed" pitchFamily="34" charset="-120"/>
-              </a:rPr>
-              <a:t>SO THEY STOP BUILDING AN AUDIENCE</a:t>
-            </a:r>
-            <a:endParaRPr lang="en-US" sz="1200" dirty="0"/>
-          </a:p>
-        </p:txBody>
-      </p:sp>
-      <p:sp>
-        <p:nvSpPr>
           <p:cNvPr id="19" name="Text 17"/>
           <p:cNvSpPr txBox="1"/>
           <p:nvPr/>
         </p:nvSpPr>
         <p:spPr>
           <a:xfrm>
-            <a:off x="8072933" y="5504688"/>
-            <a:ext cx="3405530" cy="548640"/>
+            <a:off x="6233008" y="5614416"/>
+            <a:ext cx="5245456" cy="548640"/>
           </a:xfrm>
           <a:prstGeom prst="rect">
             <a:avLst/>

--- a/deck/Stride_Pitch_Deck.pptx
+++ b/deck/Stride_Pitch_Deck.pptx
@@ -144,12 +144,12 @@
   <p:extLst>
     <p:ext uri="{521415D9-36F7-43E2-AB2F-B90AF26B5E84}">
       <p14:sectionLst xmlns:p14="http://schemas.microsoft.com/office/powerpoint/2010/main">
-        <p14:section name="Open" id="{7B71D9B7-8105-7CA0-E67A-C695B3877B6D}">
+        <p14:section name="Open" id="{0434A21F-CC77-C284-163D-286B411C53CC}">
           <p14:sldIdLst>
             <p14:sldId id="256"/>
           </p14:sldIdLst>
         </p14:section>
-        <p14:section name="Problem" id="{5D9C4B10-045C-4BF0-32AA-7C127C3E42BA}">
+        <p14:section name="Problem" id="{8F2DBDBA-E065-6E13-0118-8D08905AF80B}">
           <p14:sldIdLst>
             <p14:sldId id="257"/>
             <p14:sldId id="258"/>
@@ -157,7 +157,7 @@
             <p14:sldId id="260"/>
           </p14:sldIdLst>
         </p14:section>
-        <p14:section name="Product" id="{448C143E-D4D8-B66C-1F5D-62839D0D49E5}">
+        <p14:section name="Product" id="{A9DC15EC-B0B4-DF0B-CA17-2652BAB783EE}">
           <p14:sldIdLst>
             <p14:sldId id="261"/>
             <p14:sldId id="262"/>
@@ -166,28 +166,28 @@
             <p14:sldId id="265"/>
           </p14:sldIdLst>
         </p14:section>
-        <p14:section name="Market" id="{7652C5EF-CD0F-81BE-7E1B-90C87DBC1350}">
+        <p14:section name="Market" id="{56C381A4-CFF0-8467-9280-E084A20B1BA0}">
           <p14:sldIdLst>
             <p14:sldId id="266"/>
             <p14:sldId id="267"/>
             <p14:sldId id="268"/>
           </p14:sldIdLst>
         </p14:section>
-        <p14:section name="Model" id="{EAA52762-882A-67AF-0000-E973364286DD}">
+        <p14:section name="Model" id="{EB9E722F-DDEB-7B79-E30C-917CF435CBB5}">
           <p14:sldIdLst>
             <p14:sldId id="269"/>
             <p14:sldId id="270"/>
             <p14:sldId id="271"/>
           </p14:sldIdLst>
         </p14:section>
-        <p14:section name="Money" id="{69F4CEBC-0298-7282-A060-562652D724A6}">
+        <p14:section name="Money" id="{CF85A7D2-B9B7-93CD-7A0D-2072A92B5B08}">
           <p14:sldIdLst>
             <p14:sldId id="272"/>
             <p14:sldId id="273"/>
             <p14:sldId id="274"/>
           </p14:sldIdLst>
         </p14:section>
-        <p14:section name="Backup" id="{B96E8C73-C6C4-28C8-1ACB-8EF1AFF4361B}">
+        <p14:section name="Backup" id="{63A7A871-0727-CA89-391E-DF12C1E0F5DA}">
           <p14:sldIdLst>
             <p14:sldId id="275"/>
             <p14:sldId id="276"/>
@@ -305,7 +305,7 @@
           </c:val>
           <c:extLst>
             <c:ext xmlns:c16="http://schemas.microsoft.com/office/drawing/2014/chart" uri="{C3380CC4-5D6E-409C-BE32-E72D297353CC}">
-              <c16:uniqueId val="{00000000-C3D3-476F-98CB-4975062C4831}"/>
+              <c16:uniqueId val="{00000000-5FF6-441A-B64C-DEC951995098}"/>
             </c:ext>
           </c:extLst>
         </c:ser>
@@ -391,7 +391,7 @@
           </c:val>
           <c:extLst>
             <c:ext xmlns:c16="http://schemas.microsoft.com/office/drawing/2014/chart" uri="{C3380CC4-5D6E-409C-BE32-E72D297353CC}">
-              <c16:uniqueId val="{00000001-C3D3-476F-98CB-4975062C4831}"/>
+              <c16:uniqueId val="{00000001-5FF6-441A-B64C-DEC951995098}"/>
             </c:ext>
           </c:extLst>
         </c:ser>
@@ -477,7 +477,7 @@
           </c:val>
           <c:extLst>
             <c:ext xmlns:c16="http://schemas.microsoft.com/office/drawing/2014/chart" uri="{C3380CC4-5D6E-409C-BE32-E72D297353CC}">
-              <c16:uniqueId val="{00000002-C3D3-476F-98CB-4975062C4831}"/>
+              <c16:uniqueId val="{00000002-5FF6-441A-B64C-DEC951995098}"/>
             </c:ext>
           </c:extLst>
         </c:ser>
@@ -735,7 +735,7 @@
           </c:val>
           <c:extLst>
             <c:ext xmlns:c16="http://schemas.microsoft.com/office/drawing/2014/chart" uri="{C3380CC4-5D6E-409C-BE32-E72D297353CC}">
-              <c16:uniqueId val="{00000000-2C35-46CE-A62A-71653A582E39}"/>
+              <c16:uniqueId val="{00000000-B52A-42B7-A924-7E2D618A38D2}"/>
             </c:ext>
           </c:extLst>
         </c:ser>
@@ -857,7 +857,7 @@
           <c:smooth val="0"/>
           <c:extLst>
             <c:ext xmlns:c16="http://schemas.microsoft.com/office/drawing/2014/chart" uri="{C3380CC4-5D6E-409C-BE32-E72D297353CC}">
-              <c16:uniqueId val="{00000001-2C35-46CE-A62A-71653A582E39}"/>
+              <c16:uniqueId val="{00000001-B52A-42B7-A924-7E2D618A38D2}"/>
             </c:ext>
           </c:extLst>
         </c:ser>
@@ -1133,7 +1133,7 @@
           <c:smooth val="0"/>
           <c:extLst>
             <c:ext xmlns:c16="http://schemas.microsoft.com/office/drawing/2014/chart" uri="{C3380CC4-5D6E-409C-BE32-E72D297353CC}">
-              <c16:uniqueId val="{00000000-BF9F-4106-A6D8-032D45469F70}"/>
+              <c16:uniqueId val="{00000000-8AA4-4047-AE02-7901A5C50CF9}"/>
             </c:ext>
           </c:extLst>
         </c:ser>
@@ -1298,7 +1298,7 @@
     </p:spTree>
     <p:extLst>
       <p:ext uri="{BB962C8B-B14F-4D97-AF65-F5344CB8AC3E}">
-        <p14:creationId xmlns:p14="http://schemas.microsoft.com/office/powerpoint/2010/main" val="268650731"/>
+        <p14:creationId xmlns:p14="http://schemas.microsoft.com/office/powerpoint/2010/main" val="3575168175"/>
       </p:ext>
     </p:extLst>
   </p:cSld>
@@ -3292,7 +3292,8 @@
               <a:t>He was one of five athletes in my own sports I asked the same question: what has your sport ever paid you.
 The answer was not 'a little'. Across all five it is zero, and I want to be precise about what that zero is, because one of them does have a sponsor.
 He did not get it as a rugby league player. It came to him some other way, and no part of it came through the sport. So the claim is not that these people are uncommercial. A brand pays him. The claim is that the sport captures none of it, because there is no route by which it could. That is a stronger finding than five zeros would have been.
-And read the quote, because it is the one that matters most: they do not build an audience, because there is no return on building one. That is not a complaint about pricing. It is a market with no infrastructure in it.</a:t>
+And read the quote, because it is the one that matters most: they do not build an audience, because there is no return on building one. That is not a complaint about pricing. It is a market with no infrastructure in it.
+If anyone asks why the figure is in euros when two of the three sports are in Lebanon: the whole plan is denominated in euros and Spain is the launch market, so it is the unit every other number in this deck uses. Zero is the one figure where the unit cannot change the answer.</a:t>
             </a:r>
           </a:p>
         </p:txBody>
@@ -22004,7 +22005,46 @@
         </p:nvSpPr>
         <p:spPr>
           <a:xfrm>
-            <a:off x="713232" y="1143000"/>
+            <a:off x="713232" y="1005840"/>
+            <a:ext cx="5120640" cy="274320"/>
+          </a:xfrm>
+          <a:prstGeom prst="rect">
+            <a:avLst/>
+          </a:prstGeom>
+          <a:noFill/>
+          <a:ln/>
+        </p:spPr>
+        <p:txBody>
+          <a:bodyPr wrap="square" lIns="0" tIns="0" rIns="0" bIns="0" rtlCol="0" anchor="t"/>
+          <a:lstStyle/>
+          <a:p>
+            <a:pPr marL="0" indent="0">
+              <a:buNone/>
+            </a:pPr>
+            <a:r>
+              <a:rPr lang="en-US" sz="1300" kern="0" spc="260" dirty="0">
+                <a:solidFill>
+                  <a:srgbClr val="828C9A"/>
+                </a:solidFill>
+                <a:latin typeface="Barlow Condensed" pitchFamily="34" charset="0"/>
+                <a:ea typeface="Barlow Condensed" pitchFamily="34" charset="-122"/>
+                <a:cs typeface="Barlow Condensed" pitchFamily="34" charset="-120"/>
+              </a:rPr>
+              <a:t>INCOME THE SPORT ITSELF PRODUCED</a:t>
+            </a:r>
+            <a:endParaRPr lang="en-US" sz="1300" dirty="0"/>
+          </a:p>
+        </p:txBody>
+      </p:sp>
+      <p:sp>
+        <p:nvSpPr>
+          <p:cNvPr id="4" name="Text 2"/>
+          <p:cNvSpPr txBox="1"/>
+          <p:nvPr/>
+        </p:nvSpPr>
+        <p:spPr>
+          <a:xfrm>
+            <a:off x="713232" y="1353312"/>
             <a:ext cx="4754880" cy="2286000"/>
           </a:xfrm>
           <a:prstGeom prst="rect">
@@ -22040,79 +22080,40 @@
       </p:sp>
       <p:sp>
         <p:nvSpPr>
-          <p:cNvPr id="4" name="Text 2"/>
-          <p:cNvSpPr txBox="1"/>
-          <p:nvPr/>
-        </p:nvSpPr>
-        <p:spPr>
-          <a:xfrm>
-            <a:off x="713232" y="3310128"/>
-            <a:ext cx="5120640" cy="274320"/>
-          </a:xfrm>
-          <a:prstGeom prst="rect">
-            <a:avLst/>
-          </a:prstGeom>
-          <a:noFill/>
-          <a:ln/>
-        </p:spPr>
-        <p:txBody>
-          <a:bodyPr wrap="square" lIns="0" tIns="0" rIns="0" bIns="0" rtlCol="0" anchor="t"/>
-          <a:lstStyle/>
-          <a:p>
-            <a:pPr marL="0" indent="0">
-              <a:buNone/>
-            </a:pPr>
-            <a:r>
-              <a:rPr lang="en-US" sz="1300" kern="0" spc="260" dirty="0">
-                <a:solidFill>
-                  <a:srgbClr val="828C9A"/>
+          <p:cNvPr id="5" name="Text 3"/>
+          <p:cNvSpPr txBox="1"/>
+          <p:nvPr/>
+        </p:nvSpPr>
+        <p:spPr>
+          <a:xfrm>
+            <a:off x="713232" y="3255264"/>
+            <a:ext cx="5120640" cy="822960"/>
+          </a:xfrm>
+          <a:prstGeom prst="rect">
+            <a:avLst/>
+          </a:prstGeom>
+          <a:noFill/>
+          <a:ln/>
+        </p:spPr>
+        <p:txBody>
+          <a:bodyPr wrap="square" lIns="0" tIns="0" rIns="0" bIns="0" rtlCol="0" anchor="t"/>
+          <a:lstStyle/>
+          <a:p>
+            <a:pPr marL="0" indent="0">
+              <a:lnSpc>
+                <a:spcPts val="3400"/>
+              </a:lnSpc>
+              <a:buNone/>
+            </a:pPr>
+            <a:r>
+              <a:rPr lang="en-US" sz="3000" dirty="0">
+                <a:solidFill>
+                  <a:srgbClr val="FFB020"/>
                 </a:solidFill>
                 <a:latin typeface="Barlow Condensed" pitchFamily="34" charset="0"/>
                 <a:ea typeface="Barlow Condensed" pitchFamily="34" charset="-122"/>
                 <a:cs typeface="Barlow Condensed" pitchFamily="34" charset="-120"/>
               </a:rPr>
-              <a:t>INCOME THE SPORT ITSELF PRODUCED</a:t>
-            </a:r>
-            <a:endParaRPr lang="en-US" sz="1300" dirty="0"/>
-          </a:p>
-        </p:txBody>
-      </p:sp>
-      <p:sp>
-        <p:nvSpPr>
-          <p:cNvPr id="5" name="Text 3"/>
-          <p:cNvSpPr txBox="1"/>
-          <p:nvPr/>
-        </p:nvSpPr>
-        <p:spPr>
-          <a:xfrm>
-            <a:off x="713232" y="3703320"/>
-            <a:ext cx="5120640" cy="822960"/>
-          </a:xfrm>
-          <a:prstGeom prst="rect">
-            <a:avLst/>
-          </a:prstGeom>
-          <a:noFill/>
-          <a:ln/>
-        </p:spPr>
-        <p:txBody>
-          <a:bodyPr wrap="square" lIns="0" tIns="0" rIns="0" bIns="0" rtlCol="0" anchor="t"/>
-          <a:lstStyle/>
-          <a:p>
-            <a:pPr marL="0" indent="0">
-              <a:lnSpc>
-                <a:spcPts val="3400"/>
-              </a:lnSpc>
-              <a:buNone/>
-            </a:pPr>
-            <a:r>
-              <a:rPr lang="en-US" sz="3000" dirty="0">
-                <a:solidFill>
-                  <a:srgbClr val="FFB020"/>
-                </a:solidFill>
-                <a:latin typeface="Barlow Condensed" pitchFamily="34" charset="0"/>
-                <a:ea typeface="Barlow Condensed" pitchFamily="34" charset="-122"/>
-                <a:cs typeface="Barlow Condensed" pitchFamily="34" charset="-120"/>
-              </a:rPr>
               <a:t>Not low. Not inconsistent. Nothing</a:t>
             </a:r>
             <a:endParaRPr lang="en-US" sz="3000" dirty="0"/>
@@ -22127,7 +22128,7 @@
         </p:nvSpPr>
         <p:spPr>
           <a:xfrm>
-            <a:off x="713232" y="4261104"/>
+            <a:off x="713232" y="3968496"/>
             <a:ext cx="5212080" cy="859536"/>
           </a:xfrm>
           <a:prstGeom prst="roundRect">
@@ -22154,7 +22155,7 @@
         </p:nvSpPr>
         <p:spPr>
           <a:xfrm>
-            <a:off x="969264" y="4425696"/>
+            <a:off x="969264" y="4133088"/>
             <a:ext cx="4754880" cy="219456"/>
           </a:xfrm>
           <a:prstGeom prst="rect">
@@ -22193,7 +22194,7 @@
         </p:nvSpPr>
         <p:spPr>
           <a:xfrm>
-            <a:off x="969264" y="4663440"/>
+            <a:off x="969264" y="4370832"/>
             <a:ext cx="4754880" cy="402336"/>
           </a:xfrm>
           <a:prstGeom prst="rect">

--- a/deck/Stride_Pitch_Deck.pptx
+++ b/deck/Stride_Pitch_Deck.pptx
@@ -3980,7 +3980,7 @@
           </a:prstGeom>
           <a:extLst>
             <a:ext uri="{C572A759-6A51-4108-AA02-DFA0A04FC94B}">
-              <ma14:wrappingTextBoxFlag xmlns:ma14="http://schemas.microsoft.com/office/mac/drawingml/2011/main" xmlns="" val="0"/>
+              <ma14:wrappingTextBoxFlag xmlns="" xmlns:ma14="http://schemas.microsoft.com/office/mac/drawingml/2011/main" val="0"/>
             </a:ext>
           </a:extLst>
         </p:spPr>
@@ -4061,7 +4061,7 @@
           </a:prstGeom>
           <a:extLst>
             <a:ext uri="{C572A759-6A51-4108-AA02-DFA0A04FC94B}">
-              <ma14:wrappingTextBoxFlag xmlns:ma14="http://schemas.microsoft.com/office/mac/drawingml/2011/main" xmlns="" val="0"/>
+              <ma14:wrappingTextBoxFlag xmlns="" xmlns:ma14="http://schemas.microsoft.com/office/mac/drawingml/2011/main" val="0"/>
             </a:ext>
           </a:extLst>
         </p:spPr>
@@ -4139,7 +4139,7 @@
           </a:prstGeom>
           <a:extLst>
             <a:ext uri="{C572A759-6A51-4108-AA02-DFA0A04FC94B}">
-              <ma14:wrappingTextBoxFlag xmlns:ma14="http://schemas.microsoft.com/office/mac/drawingml/2011/main" xmlns="" val="0"/>
+              <ma14:wrappingTextBoxFlag xmlns="" xmlns:ma14="http://schemas.microsoft.com/office/mac/drawingml/2011/main" val="0"/>
             </a:ext>
           </a:extLst>
         </p:spPr>
@@ -5234,7 +5234,7 @@
           </a:prstGeom>
           <a:extLst>
             <a:ext uri="{C572A759-6A51-4108-AA02-DFA0A04FC94B}">
-              <ma14:wrappingTextBoxFlag xmlns:ma14="http://schemas.microsoft.com/office/mac/drawingml/2011/main" xmlns="" val="0"/>
+              <ma14:wrappingTextBoxFlag xmlns="" xmlns:ma14="http://schemas.microsoft.com/office/mac/drawingml/2011/main" val="0"/>
             </a:ext>
           </a:extLst>
         </p:spPr>
@@ -6303,7 +6303,7 @@
           </a:prstGeom>
           <a:extLst>
             <a:ext uri="{C572A759-6A51-4108-AA02-DFA0A04FC94B}">
-              <ma14:wrappingTextBoxFlag xmlns:ma14="http://schemas.microsoft.com/office/mac/drawingml/2011/main" xmlns="" val="0"/>
+              <ma14:wrappingTextBoxFlag xmlns="" xmlns:ma14="http://schemas.microsoft.com/office/mac/drawingml/2011/main" val="0"/>
             </a:ext>
           </a:extLst>
         </p:spPr>
@@ -7114,7 +7114,7 @@
           </a:prstGeom>
           <a:extLst>
             <a:ext uri="{C572A759-6A51-4108-AA02-DFA0A04FC94B}">
-              <ma14:wrappingTextBoxFlag xmlns:ma14="http://schemas.microsoft.com/office/mac/drawingml/2011/main" xmlns="" val="0"/>
+              <ma14:wrappingTextBoxFlag xmlns="" xmlns:ma14="http://schemas.microsoft.com/office/mac/drawingml/2011/main" val="0"/>
             </a:ext>
           </a:extLst>
         </p:spPr>
@@ -8677,7 +8677,7 @@
           </a:prstGeom>
           <a:extLst>
             <a:ext uri="{C572A759-6A51-4108-AA02-DFA0A04FC94B}">
-              <ma14:wrappingTextBoxFlag xmlns:ma14="http://schemas.microsoft.com/office/mac/drawingml/2011/main" xmlns="" val="0"/>
+              <ma14:wrappingTextBoxFlag xmlns="" xmlns:ma14="http://schemas.microsoft.com/office/mac/drawingml/2011/main" val="0"/>
             </a:ext>
           </a:extLst>
         </p:spPr>
@@ -9252,7 +9252,7 @@
           </a:prstGeom>
           <a:extLst>
             <a:ext uri="{C572A759-6A51-4108-AA02-DFA0A04FC94B}">
-              <ma14:wrappingTextBoxFlag xmlns:ma14="http://schemas.microsoft.com/office/mac/drawingml/2011/main" xmlns="" val="0"/>
+              <ma14:wrappingTextBoxFlag xmlns="" xmlns:ma14="http://schemas.microsoft.com/office/mac/drawingml/2011/main" val="0"/>
             </a:ext>
           </a:extLst>
         </p:spPr>
@@ -10126,7 +10126,7 @@
           </a:prstGeom>
           <a:extLst>
             <a:ext uri="{C572A759-6A51-4108-AA02-DFA0A04FC94B}">
-              <ma14:wrappingTextBoxFlag xmlns:ma14="http://schemas.microsoft.com/office/mac/drawingml/2011/main" xmlns="" val="0"/>
+              <ma14:wrappingTextBoxFlag xmlns="" xmlns:ma14="http://schemas.microsoft.com/office/mac/drawingml/2011/main" val="0"/>
             </a:ext>
           </a:extLst>
         </p:spPr>
@@ -11217,7 +11217,7 @@
           </a:prstGeom>
           <a:extLst>
             <a:ext uri="{C572A759-6A51-4108-AA02-DFA0A04FC94B}">
-              <ma14:wrappingTextBoxFlag xmlns:ma14="http://schemas.microsoft.com/office/mac/drawingml/2011/main" xmlns="" val="0"/>
+              <ma14:wrappingTextBoxFlag xmlns="" xmlns:ma14="http://schemas.microsoft.com/office/mac/drawingml/2011/main" val="0"/>
             </a:ext>
           </a:extLst>
         </p:spPr>
@@ -11792,7 +11792,7 @@
           </a:prstGeom>
           <a:extLst>
             <a:ext uri="{C572A759-6A51-4108-AA02-DFA0A04FC94B}">
-              <ma14:wrappingTextBoxFlag xmlns:ma14="http://schemas.microsoft.com/office/mac/drawingml/2011/main" xmlns="" val="0"/>
+              <ma14:wrappingTextBoxFlag xmlns="" xmlns:ma14="http://schemas.microsoft.com/office/mac/drawingml/2011/main" val="0"/>
             </a:ext>
           </a:extLst>
         </p:spPr>
@@ -12532,7 +12532,7 @@
           </a:prstGeom>
           <a:extLst>
             <a:ext uri="{C572A759-6A51-4108-AA02-DFA0A04FC94B}">
-              <ma14:wrappingTextBoxFlag xmlns:ma14="http://schemas.microsoft.com/office/mac/drawingml/2011/main" xmlns="" val="0"/>
+              <ma14:wrappingTextBoxFlag xmlns="" xmlns:ma14="http://schemas.microsoft.com/office/mac/drawingml/2011/main" val="0"/>
             </a:ext>
           </a:extLst>
         </p:spPr>
@@ -14070,7 +14070,7 @@
           </a:prstGeom>
           <a:extLst>
             <a:ext uri="{C572A759-6A51-4108-AA02-DFA0A04FC94B}">
-              <ma14:wrappingTextBoxFlag xmlns:ma14="http://schemas.microsoft.com/office/mac/drawingml/2011/main" xmlns="" val="0"/>
+              <ma14:wrappingTextBoxFlag xmlns="" xmlns:ma14="http://schemas.microsoft.com/office/mac/drawingml/2011/main" val="0"/>
             </a:ext>
           </a:extLst>
         </p:spPr>
@@ -15107,7 +15107,7 @@
           </a:prstGeom>
           <a:extLst>
             <a:ext uri="{C572A759-6A51-4108-AA02-DFA0A04FC94B}">
-              <ma14:wrappingTextBoxFlag xmlns:ma14="http://schemas.microsoft.com/office/mac/drawingml/2011/main" xmlns="" val="0"/>
+              <ma14:wrappingTextBoxFlag xmlns="" xmlns:ma14="http://schemas.microsoft.com/office/mac/drawingml/2011/main" val="0"/>
             </a:ext>
           </a:extLst>
         </p:spPr>
@@ -15609,7 +15609,7 @@
           </a:prstGeom>
           <a:extLst>
             <a:ext uri="{C572A759-6A51-4108-AA02-DFA0A04FC94B}">
-              <ma14:wrappingTextBoxFlag xmlns:ma14="http://schemas.microsoft.com/office/mac/drawingml/2011/main" xmlns="" val="0"/>
+              <ma14:wrappingTextBoxFlag xmlns="" xmlns:ma14="http://schemas.microsoft.com/office/mac/drawingml/2011/main" val="0"/>
             </a:ext>
           </a:extLst>
         </p:spPr>
@@ -17112,7 +17112,7 @@
           </a:prstGeom>
           <a:extLst>
             <a:ext uri="{C572A759-6A51-4108-AA02-DFA0A04FC94B}">
-              <ma14:wrappingTextBoxFlag xmlns:ma14="http://schemas.microsoft.com/office/mac/drawingml/2011/main" xmlns="" val="0"/>
+              <ma14:wrappingTextBoxFlag xmlns="" xmlns:ma14="http://schemas.microsoft.com/office/mac/drawingml/2011/main" val="0"/>
             </a:ext>
           </a:extLst>
         </p:spPr>
@@ -17839,7 +17839,7 @@
           </a:prstGeom>
           <a:extLst>
             <a:ext uri="{C572A759-6A51-4108-AA02-DFA0A04FC94B}">
-              <ma14:wrappingTextBoxFlag xmlns:ma14="http://schemas.microsoft.com/office/mac/drawingml/2011/main" xmlns="" val="0"/>
+              <ma14:wrappingTextBoxFlag xmlns="" xmlns:ma14="http://schemas.microsoft.com/office/mac/drawingml/2011/main" val="0"/>
             </a:ext>
           </a:extLst>
         </p:spPr>
@@ -19102,7 +19102,7 @@
           </a:prstGeom>
           <a:extLst>
             <a:ext uri="{C572A759-6A51-4108-AA02-DFA0A04FC94B}">
-              <ma14:wrappingTextBoxFlag xmlns:ma14="http://schemas.microsoft.com/office/mac/drawingml/2011/main" xmlns="" val="0"/>
+              <ma14:wrappingTextBoxFlag xmlns="" xmlns:ma14="http://schemas.microsoft.com/office/mac/drawingml/2011/main" val="0"/>
             </a:ext>
           </a:extLst>
         </p:spPr>
@@ -19907,7 +19907,7 @@
           </a:prstGeom>
           <a:extLst>
             <a:ext uri="{C572A759-6A51-4108-AA02-DFA0A04FC94B}">
-              <ma14:wrappingTextBoxFlag xmlns:ma14="http://schemas.microsoft.com/office/mac/drawingml/2011/main" xmlns="" val="0"/>
+              <ma14:wrappingTextBoxFlag xmlns="" xmlns:ma14="http://schemas.microsoft.com/office/mac/drawingml/2011/main" val="0"/>
             </a:ext>
           </a:extLst>
         </p:spPr>
@@ -21067,7 +21067,7 @@
           </a:prstGeom>
           <a:extLst>
             <a:ext uri="{C572A759-6A51-4108-AA02-DFA0A04FC94B}">
-              <ma14:wrappingTextBoxFlag xmlns:ma14="http://schemas.microsoft.com/office/mac/drawingml/2011/main" xmlns="" val="0"/>
+              <ma14:wrappingTextBoxFlag xmlns="" xmlns:ma14="http://schemas.microsoft.com/office/mac/drawingml/2011/main" val="0"/>
             </a:ext>
           </a:extLst>
         </p:spPr>
@@ -21905,7 +21905,7 @@
           </a:prstGeom>
           <a:extLst>
             <a:ext uri="{C572A759-6A51-4108-AA02-DFA0A04FC94B}">
-              <ma14:wrappingTextBoxFlag xmlns:ma14="http://schemas.microsoft.com/office/mac/drawingml/2011/main" xmlns="" val="0"/>
+              <ma14:wrappingTextBoxFlag xmlns="" xmlns:ma14="http://schemas.microsoft.com/office/mac/drawingml/2011/main" val="0"/>
             </a:ext>
           </a:extLst>
         </p:spPr>
@@ -22674,7 +22674,7 @@
           </a:prstGeom>
           <a:extLst>
             <a:ext uri="{C572A759-6A51-4108-AA02-DFA0A04FC94B}">
-              <ma14:wrappingTextBoxFlag xmlns:ma14="http://schemas.microsoft.com/office/mac/drawingml/2011/main" xmlns="" val="0"/>
+              <ma14:wrappingTextBoxFlag xmlns="" xmlns:ma14="http://schemas.microsoft.com/office/mac/drawingml/2011/main" val="0"/>
             </a:ext>
           </a:extLst>
         </p:spPr>
@@ -23536,7 +23536,7 @@
           </a:prstGeom>
           <a:extLst>
             <a:ext uri="{C572A759-6A51-4108-AA02-DFA0A04FC94B}">
-              <ma14:wrappingTextBoxFlag xmlns:ma14="http://schemas.microsoft.com/office/mac/drawingml/2011/main" xmlns="" val="0"/>
+              <ma14:wrappingTextBoxFlag xmlns="" xmlns:ma14="http://schemas.microsoft.com/office/mac/drawingml/2011/main" val="0"/>
             </a:ext>
           </a:extLst>
         </p:spPr>
@@ -24389,7 +24389,7 @@
           </a:prstGeom>
           <a:extLst>
             <a:ext uri="{C572A759-6A51-4108-AA02-DFA0A04FC94B}">
-              <ma14:wrappingTextBoxFlag xmlns:ma14="http://schemas.microsoft.com/office/mac/drawingml/2011/main" xmlns="" val="0"/>
+              <ma14:wrappingTextBoxFlag xmlns="" xmlns:ma14="http://schemas.microsoft.com/office/mac/drawingml/2011/main" val="0"/>
             </a:ext>
           </a:extLst>
         </p:spPr>
@@ -25218,7 +25218,7 @@
           </a:prstGeom>
           <a:extLst>
             <a:ext uri="{C572A759-6A51-4108-AA02-DFA0A04FC94B}">
-              <ma14:wrappingTextBoxFlag xmlns:ma14="http://schemas.microsoft.com/office/mac/drawingml/2011/main" xmlns="" val="0"/>
+              <ma14:wrappingTextBoxFlag xmlns="" xmlns:ma14="http://schemas.microsoft.com/office/mac/drawingml/2011/main" val="0"/>
             </a:ext>
           </a:extLst>
         </p:spPr>
@@ -26408,7 +26408,7 @@
           </a:prstGeom>
           <a:extLst>
             <a:ext uri="{C572A759-6A51-4108-AA02-DFA0A04FC94B}">
-              <ma14:wrappingTextBoxFlag xmlns:ma14="http://schemas.microsoft.com/office/mac/drawingml/2011/main" xmlns="" val="0"/>
+              <ma14:wrappingTextBoxFlag xmlns="" xmlns:ma14="http://schemas.microsoft.com/office/mac/drawingml/2011/main" val="0"/>
             </a:ext>
           </a:extLst>
         </p:spPr>
@@ -27128,7 +27128,7 @@
           </a:prstGeom>
           <a:extLst>
             <a:ext uri="{C572A759-6A51-4108-AA02-DFA0A04FC94B}">
-              <ma14:wrappingTextBoxFlag xmlns:ma14="http://schemas.microsoft.com/office/mac/drawingml/2011/main" xmlns="" val="0"/>
+              <ma14:wrappingTextBoxFlag xmlns="" xmlns:ma14="http://schemas.microsoft.com/office/mac/drawingml/2011/main" val="0"/>
             </a:ext>
           </a:extLst>
         </p:spPr>
@@ -27809,7 +27809,7 @@
           </a:prstGeom>
           <a:extLst>
             <a:ext uri="{C572A759-6A51-4108-AA02-DFA0A04FC94B}">
-              <ma14:wrappingTextBoxFlag xmlns:ma14="http://schemas.microsoft.com/office/mac/drawingml/2011/main" xmlns="" val="0"/>
+              <ma14:wrappingTextBoxFlag xmlns="" xmlns:ma14="http://schemas.microsoft.com/office/mac/drawingml/2011/main" val="0"/>
             </a:ext>
           </a:extLst>
         </p:spPr>

--- a/deck/Stride_Pitch_Deck.pptx
+++ b/deck/Stride_Pitch_Deck.pptx
@@ -144,12 +144,12 @@
   <p:extLst>
     <p:ext uri="{521415D9-36F7-43E2-AB2F-B90AF26B5E84}">
       <p14:sectionLst xmlns:p14="http://schemas.microsoft.com/office/powerpoint/2010/main">
-        <p14:section name="Open" id="{0434A21F-CC77-C284-163D-286B411C53CC}">
+        <p14:section name="Open" id="{20050C95-6CD3-B569-314C-D1085F66DCCA}">
           <p14:sldIdLst>
             <p14:sldId id="256"/>
           </p14:sldIdLst>
         </p14:section>
-        <p14:section name="Problem" id="{8F2DBDBA-E065-6E13-0118-8D08905AF80B}">
+        <p14:section name="Problem" id="{85014AF7-E8E8-31E6-BAA8-20250BAB93AC}">
           <p14:sldIdLst>
             <p14:sldId id="257"/>
             <p14:sldId id="258"/>
@@ -157,7 +157,7 @@
             <p14:sldId id="260"/>
           </p14:sldIdLst>
         </p14:section>
-        <p14:section name="Product" id="{A9DC15EC-B0B4-DF0B-CA17-2652BAB783EE}">
+        <p14:section name="Product" id="{9E62D5DB-86E1-D76C-74C8-C9036FBCA3BC}">
           <p14:sldIdLst>
             <p14:sldId id="261"/>
             <p14:sldId id="262"/>
@@ -166,28 +166,28 @@
             <p14:sldId id="265"/>
           </p14:sldIdLst>
         </p14:section>
-        <p14:section name="Market" id="{56C381A4-CFF0-8467-9280-E084A20B1BA0}">
+        <p14:section name="Market" id="{6B6E327D-9593-DF2C-E0BC-729E03103B13}">
           <p14:sldIdLst>
             <p14:sldId id="266"/>
             <p14:sldId id="267"/>
             <p14:sldId id="268"/>
           </p14:sldIdLst>
         </p14:section>
-        <p14:section name="Model" id="{EB9E722F-DDEB-7B79-E30C-917CF435CBB5}">
+        <p14:section name="Model" id="{9CD66308-E522-5547-123F-B18451274A4D}">
           <p14:sldIdLst>
             <p14:sldId id="269"/>
             <p14:sldId id="270"/>
             <p14:sldId id="271"/>
           </p14:sldIdLst>
         </p14:section>
-        <p14:section name="Money" id="{CF85A7D2-B9B7-93CD-7A0D-2072A92B5B08}">
+        <p14:section name="Money" id="{3BF0C6AD-B642-72BB-0F52-C9776517F189}">
           <p14:sldIdLst>
             <p14:sldId id="272"/>
             <p14:sldId id="273"/>
             <p14:sldId id="274"/>
           </p14:sldIdLst>
         </p14:section>
-        <p14:section name="Backup" id="{63A7A871-0727-CA89-391E-DF12C1E0F5DA}">
+        <p14:section name="Backup" id="{1D89A03C-7D10-9B69-8458-A4B30610AA8B}">
           <p14:sldIdLst>
             <p14:sldId id="275"/>
             <p14:sldId id="276"/>
@@ -305,7 +305,7 @@
           </c:val>
           <c:extLst>
             <c:ext xmlns:c16="http://schemas.microsoft.com/office/drawing/2014/chart" uri="{C3380CC4-5D6E-409C-BE32-E72D297353CC}">
-              <c16:uniqueId val="{00000000-5FF6-441A-B64C-DEC951995098}"/>
+              <c16:uniqueId val="{00000000-8700-404D-9BBC-B1659AF9B719}"/>
             </c:ext>
           </c:extLst>
         </c:ser>
@@ -391,7 +391,7 @@
           </c:val>
           <c:extLst>
             <c:ext xmlns:c16="http://schemas.microsoft.com/office/drawing/2014/chart" uri="{C3380CC4-5D6E-409C-BE32-E72D297353CC}">
-              <c16:uniqueId val="{00000001-5FF6-441A-B64C-DEC951995098}"/>
+              <c16:uniqueId val="{00000001-8700-404D-9BBC-B1659AF9B719}"/>
             </c:ext>
           </c:extLst>
         </c:ser>
@@ -477,7 +477,7 @@
           </c:val>
           <c:extLst>
             <c:ext xmlns:c16="http://schemas.microsoft.com/office/drawing/2014/chart" uri="{C3380CC4-5D6E-409C-BE32-E72D297353CC}">
-              <c16:uniqueId val="{00000002-5FF6-441A-B64C-DEC951995098}"/>
+              <c16:uniqueId val="{00000002-8700-404D-9BBC-B1659AF9B719}"/>
             </c:ext>
           </c:extLst>
         </c:ser>
@@ -735,7 +735,7 @@
           </c:val>
           <c:extLst>
             <c:ext xmlns:c16="http://schemas.microsoft.com/office/drawing/2014/chart" uri="{C3380CC4-5D6E-409C-BE32-E72D297353CC}">
-              <c16:uniqueId val="{00000000-B52A-42B7-A924-7E2D618A38D2}"/>
+              <c16:uniqueId val="{00000000-0431-46DD-BF92-DA41CC74CF77}"/>
             </c:ext>
           </c:extLst>
         </c:ser>
@@ -857,7 +857,7 @@
           <c:smooth val="0"/>
           <c:extLst>
             <c:ext xmlns:c16="http://schemas.microsoft.com/office/drawing/2014/chart" uri="{C3380CC4-5D6E-409C-BE32-E72D297353CC}">
-              <c16:uniqueId val="{00000001-B52A-42B7-A924-7E2D618A38D2}"/>
+              <c16:uniqueId val="{00000001-0431-46DD-BF92-DA41CC74CF77}"/>
             </c:ext>
           </c:extLst>
         </c:ser>
@@ -1133,7 +1133,7 @@
           <c:smooth val="0"/>
           <c:extLst>
             <c:ext xmlns:c16="http://schemas.microsoft.com/office/drawing/2014/chart" uri="{C3380CC4-5D6E-409C-BE32-E72D297353CC}">
-              <c16:uniqueId val="{00000000-8AA4-4047-AE02-7901A5C50CF9}"/>
+              <c16:uniqueId val="{00000000-ACB6-4710-841E-7FE0BD976A32}"/>
             </c:ext>
           </c:extLst>
         </c:ser>
@@ -1298,7 +1298,7 @@
     </p:spTree>
     <p:extLst>
       <p:ext uri="{BB962C8B-B14F-4D97-AF65-F5344CB8AC3E}">
-        <p14:creationId xmlns:p14="http://schemas.microsoft.com/office/powerpoint/2010/main" val="3575168175"/>
+        <p14:creationId xmlns:p14="http://schemas.microsoft.com/office/powerpoint/2010/main" val="3933350278"/>
       </p:ext>
     </p:extLst>
   </p:cSld>
@@ -2431,7 +2431,8 @@
             <a:r>
               <a:rPr lang="en-US" dirty="0"/>
               <a:t>Why this, and it starts with one person.
-A friend I play rugby with is the CrossFit champion of Lebanon, and one of the best rugby league players in the country. Neither sport has ever paid him anything. Not a little. Nothing.
+A friend I play rugby with is the CrossFit champion of Lebanon, and one of the best rugby league players in the country. Neither sport pays him.
+I want to be precise, because the easy version of this is a big zero and it would not be true. He gets given things. Gear, product, the odd paid post. What none of it has is a price, a contract, or any reason to arrive a second time.
 He is one of the five athletes in my research, and in that group he is not the exception. He is the median. Someone at the very top of two sports, with a real audience, and no mechanism anywhere that turns either of those things into income.
 I started building this because of him.
 And the reason I can see it at all is on the bottom line: these are teammates, not survey respondents. I am capped for Lebanon myself, which is why the conversations were candid. The consulting built the model, and the demo is my own code.</a:t>
@@ -3289,11 +3290,11 @@
           <a:p>
             <a:r>
               <a:rPr lang="en-US" dirty="0"/>
-              <a:t>He was one of five athletes in my own sports I asked the same question: what has your sport ever paid you.
-The answer was not 'a little'. Across all five it is zero, and I want to be precise about what that zero is, because one of them does have a sponsor.
-He did not get it as a rugby league player. It came to him some other way, and no part of it came through the sport. So the claim is not that these people are uncommercial. A brand pays him. The claim is that the sport captures none of it, because there is no route by which it could. That is a stronger finding than five zeros would have been.
-And read the quote, because it is the one that matters most: they do not build an audience, because there is no return on building one. That is not a complaint about pricing. It is a market with no infrastructure in it.
-If anyone asks why the figure is in euros when two of the three sports are in Lebanon: the whole plan is denominated in euros and Spain is the launch market, so it is the unit every other number in this deck uses. Zero is the one figure where the unit cannot change the answer.</a:t>
+              <a:t>He was one of five athletes in my own sports I asked the same question: what does your sport actually pay you.
+I want to be careful here, because the easy version of this slide is a big zero and it would not be true. They do get things. Gear, product, the occasional paid post, prize money now and then. A national champion is given plenty.
+What none of it has is a rate, a contract, or any reason at all to expect it a second time. Nobody is buying anything. They are being given things, and you cannot build a career, or a business, on being given things.
+One of the five does have a proper sponsor, and he did not get it as a rugby league player. It arrived some other way, and no part of it came through the sport.
+And read the quote, because it is the finding that matters most: they do not build an audience, because there is no return on building one. That is not a complaint about money. It is a market with no infrastructure in it.</a:t>
             </a:r>
           </a:p>
         </p:txBody>
@@ -3980,7 +3981,7 @@
           </a:prstGeom>
           <a:extLst>
             <a:ext uri="{C572A759-6A51-4108-AA02-DFA0A04FC94B}">
-              <ma14:wrappingTextBoxFlag xmlns="" xmlns:ma14="http://schemas.microsoft.com/office/mac/drawingml/2011/main" val="0"/>
+              <ma14:wrappingTextBoxFlag xmlns:ma14="http://schemas.microsoft.com/office/mac/drawingml/2011/main" xmlns="" val="0"/>
             </a:ext>
           </a:extLst>
         </p:spPr>
@@ -4061,7 +4062,7 @@
           </a:prstGeom>
           <a:extLst>
             <a:ext uri="{C572A759-6A51-4108-AA02-DFA0A04FC94B}">
-              <ma14:wrappingTextBoxFlag xmlns="" xmlns:ma14="http://schemas.microsoft.com/office/mac/drawingml/2011/main" val="0"/>
+              <ma14:wrappingTextBoxFlag xmlns:ma14="http://schemas.microsoft.com/office/mac/drawingml/2011/main" xmlns="" val="0"/>
             </a:ext>
           </a:extLst>
         </p:spPr>
@@ -4139,7 +4140,7 @@
           </a:prstGeom>
           <a:extLst>
             <a:ext uri="{C572A759-6A51-4108-AA02-DFA0A04FC94B}">
-              <ma14:wrappingTextBoxFlag xmlns="" xmlns:ma14="http://schemas.microsoft.com/office/mac/drawingml/2011/main" val="0"/>
+              <ma14:wrappingTextBoxFlag xmlns:ma14="http://schemas.microsoft.com/office/mac/drawingml/2011/main" xmlns="" val="0"/>
             </a:ext>
           </a:extLst>
         </p:spPr>
@@ -5234,7 +5235,7 @@
           </a:prstGeom>
           <a:extLst>
             <a:ext uri="{C572A759-6A51-4108-AA02-DFA0A04FC94B}">
-              <ma14:wrappingTextBoxFlag xmlns="" xmlns:ma14="http://schemas.microsoft.com/office/mac/drawingml/2011/main" val="0"/>
+              <ma14:wrappingTextBoxFlag xmlns:ma14="http://schemas.microsoft.com/office/mac/drawingml/2011/main" xmlns="" val="0"/>
             </a:ext>
           </a:extLst>
         </p:spPr>
@@ -6303,7 +6304,7 @@
           </a:prstGeom>
           <a:extLst>
             <a:ext uri="{C572A759-6A51-4108-AA02-DFA0A04FC94B}">
-              <ma14:wrappingTextBoxFlag xmlns="" xmlns:ma14="http://schemas.microsoft.com/office/mac/drawingml/2011/main" val="0"/>
+              <ma14:wrappingTextBoxFlag xmlns:ma14="http://schemas.microsoft.com/office/mac/drawingml/2011/main" xmlns="" val="0"/>
             </a:ext>
           </a:extLst>
         </p:spPr>
@@ -7114,7 +7115,7 @@
           </a:prstGeom>
           <a:extLst>
             <a:ext uri="{C572A759-6A51-4108-AA02-DFA0A04FC94B}">
-              <ma14:wrappingTextBoxFlag xmlns="" xmlns:ma14="http://schemas.microsoft.com/office/mac/drawingml/2011/main" val="0"/>
+              <ma14:wrappingTextBoxFlag xmlns:ma14="http://schemas.microsoft.com/office/mac/drawingml/2011/main" xmlns="" val="0"/>
             </a:ext>
           </a:extLst>
         </p:spPr>
@@ -8677,7 +8678,7 @@
           </a:prstGeom>
           <a:extLst>
             <a:ext uri="{C572A759-6A51-4108-AA02-DFA0A04FC94B}">
-              <ma14:wrappingTextBoxFlag xmlns="" xmlns:ma14="http://schemas.microsoft.com/office/mac/drawingml/2011/main" val="0"/>
+              <ma14:wrappingTextBoxFlag xmlns:ma14="http://schemas.microsoft.com/office/mac/drawingml/2011/main" xmlns="" val="0"/>
             </a:ext>
           </a:extLst>
         </p:spPr>
@@ -9252,7 +9253,7 @@
           </a:prstGeom>
           <a:extLst>
             <a:ext uri="{C572A759-6A51-4108-AA02-DFA0A04FC94B}">
-              <ma14:wrappingTextBoxFlag xmlns="" xmlns:ma14="http://schemas.microsoft.com/office/mac/drawingml/2011/main" val="0"/>
+              <ma14:wrappingTextBoxFlag xmlns:ma14="http://schemas.microsoft.com/office/mac/drawingml/2011/main" xmlns="" val="0"/>
             </a:ext>
           </a:extLst>
         </p:spPr>
@@ -10126,7 +10127,7 @@
           </a:prstGeom>
           <a:extLst>
             <a:ext uri="{C572A759-6A51-4108-AA02-DFA0A04FC94B}">
-              <ma14:wrappingTextBoxFlag xmlns="" xmlns:ma14="http://schemas.microsoft.com/office/mac/drawingml/2011/main" val="0"/>
+              <ma14:wrappingTextBoxFlag xmlns:ma14="http://schemas.microsoft.com/office/mac/drawingml/2011/main" xmlns="" val="0"/>
             </a:ext>
           </a:extLst>
         </p:spPr>
@@ -11217,7 +11218,7 @@
           </a:prstGeom>
           <a:extLst>
             <a:ext uri="{C572A759-6A51-4108-AA02-DFA0A04FC94B}">
-              <ma14:wrappingTextBoxFlag xmlns="" xmlns:ma14="http://schemas.microsoft.com/office/mac/drawingml/2011/main" val="0"/>
+              <ma14:wrappingTextBoxFlag xmlns:ma14="http://schemas.microsoft.com/office/mac/drawingml/2011/main" xmlns="" val="0"/>
             </a:ext>
           </a:extLst>
         </p:spPr>
@@ -11792,7 +11793,7 @@
           </a:prstGeom>
           <a:extLst>
             <a:ext uri="{C572A759-6A51-4108-AA02-DFA0A04FC94B}">
-              <ma14:wrappingTextBoxFlag xmlns="" xmlns:ma14="http://schemas.microsoft.com/office/mac/drawingml/2011/main" val="0"/>
+              <ma14:wrappingTextBoxFlag xmlns:ma14="http://schemas.microsoft.com/office/mac/drawingml/2011/main" xmlns="" val="0"/>
             </a:ext>
           </a:extLst>
         </p:spPr>
@@ -12532,7 +12533,7 @@
           </a:prstGeom>
           <a:extLst>
             <a:ext uri="{C572A759-6A51-4108-AA02-DFA0A04FC94B}">
-              <ma14:wrappingTextBoxFlag xmlns="" xmlns:ma14="http://schemas.microsoft.com/office/mac/drawingml/2011/main" val="0"/>
+              <ma14:wrappingTextBoxFlag xmlns:ma14="http://schemas.microsoft.com/office/mac/drawingml/2011/main" xmlns="" val="0"/>
             </a:ext>
           </a:extLst>
         </p:spPr>
@@ -13746,7 +13747,7 @@
                 <a:ea typeface="Barlow Condensed" pitchFamily="34" charset="-122"/>
                 <a:cs typeface="Barlow Condensed" pitchFamily="34" charset="-120"/>
               </a:rPr>
-              <a:t>WHAT EITHER SPORT HAS PAID HIM</a:t>
+              <a:t>WHAT EITHER SPORT PAYS HIM</a:t>
             </a:r>
             <a:endParaRPr lang="en-US" sz="1200" dirty="0"/>
           </a:p>
@@ -13788,7 +13789,7 @@
                 <a:ea typeface="Barlow Condensed" pitchFamily="34" charset="-122"/>
                 <a:cs typeface="Barlow Condensed" pitchFamily="34" charset="-120"/>
               </a:rPr>
-              <a:t>Nothing</a:t>
+              <a:t>No rate</a:t>
             </a:r>
             <a:endParaRPr lang="en-US" sz="4600" dirty="0"/>
           </a:p>
@@ -13830,7 +13831,7 @@
                 <a:ea typeface="Barlow" pitchFamily="34" charset="-122"/>
                 <a:cs typeface="Barlow" pitchFamily="34" charset="-120"/>
               </a:rPr>
-              <a:t>Not a small amount, and not an inconsistent one. Nothing either sport built for him converts into income, so whatever he earns arrives another way.</a:t>
+              <a:t>He is given things. Gear, product, the occasional paid post. None of it carries a price, a contract, or any reason to arrive a second time.</a:t>
             </a:r>
             <a:endParaRPr lang="en-US" sz="1300" dirty="0"/>
           </a:p>
@@ -14070,7 +14071,7 @@
           </a:prstGeom>
           <a:extLst>
             <a:ext uri="{C572A759-6A51-4108-AA02-DFA0A04FC94B}">
-              <ma14:wrappingTextBoxFlag xmlns="" xmlns:ma14="http://schemas.microsoft.com/office/mac/drawingml/2011/main" val="0"/>
+              <ma14:wrappingTextBoxFlag xmlns:ma14="http://schemas.microsoft.com/office/mac/drawingml/2011/main" xmlns="" val="0"/>
             </a:ext>
           </a:extLst>
         </p:spPr>
@@ -15107,7 +15108,7 @@
           </a:prstGeom>
           <a:extLst>
             <a:ext uri="{C572A759-6A51-4108-AA02-DFA0A04FC94B}">
-              <ma14:wrappingTextBoxFlag xmlns="" xmlns:ma14="http://schemas.microsoft.com/office/mac/drawingml/2011/main" val="0"/>
+              <ma14:wrappingTextBoxFlag xmlns:ma14="http://schemas.microsoft.com/office/mac/drawingml/2011/main" xmlns="" val="0"/>
             </a:ext>
           </a:extLst>
         </p:spPr>
@@ -15609,7 +15610,7 @@
           </a:prstGeom>
           <a:extLst>
             <a:ext uri="{C572A759-6A51-4108-AA02-DFA0A04FC94B}">
-              <ma14:wrappingTextBoxFlag xmlns="" xmlns:ma14="http://schemas.microsoft.com/office/mac/drawingml/2011/main" val="0"/>
+              <ma14:wrappingTextBoxFlag xmlns:ma14="http://schemas.microsoft.com/office/mac/drawingml/2011/main" xmlns="" val="0"/>
             </a:ext>
           </a:extLst>
         </p:spPr>
@@ -17112,7 +17113,7 @@
           </a:prstGeom>
           <a:extLst>
             <a:ext uri="{C572A759-6A51-4108-AA02-DFA0A04FC94B}">
-              <ma14:wrappingTextBoxFlag xmlns="" xmlns:ma14="http://schemas.microsoft.com/office/mac/drawingml/2011/main" val="0"/>
+              <ma14:wrappingTextBoxFlag xmlns:ma14="http://schemas.microsoft.com/office/mac/drawingml/2011/main" xmlns="" val="0"/>
             </a:ext>
           </a:extLst>
         </p:spPr>
@@ -17839,7 +17840,7 @@
           </a:prstGeom>
           <a:extLst>
             <a:ext uri="{C572A759-6A51-4108-AA02-DFA0A04FC94B}">
-              <ma14:wrappingTextBoxFlag xmlns="" xmlns:ma14="http://schemas.microsoft.com/office/mac/drawingml/2011/main" val="0"/>
+              <ma14:wrappingTextBoxFlag xmlns:ma14="http://schemas.microsoft.com/office/mac/drawingml/2011/main" xmlns="" val="0"/>
             </a:ext>
           </a:extLst>
         </p:spPr>
@@ -19102,7 +19103,7 @@
           </a:prstGeom>
           <a:extLst>
             <a:ext uri="{C572A759-6A51-4108-AA02-DFA0A04FC94B}">
-              <ma14:wrappingTextBoxFlag xmlns="" xmlns:ma14="http://schemas.microsoft.com/office/mac/drawingml/2011/main" val="0"/>
+              <ma14:wrappingTextBoxFlag xmlns:ma14="http://schemas.microsoft.com/office/mac/drawingml/2011/main" xmlns="" val="0"/>
             </a:ext>
           </a:extLst>
         </p:spPr>
@@ -19907,7 +19908,7 @@
           </a:prstGeom>
           <a:extLst>
             <a:ext uri="{C572A759-6A51-4108-AA02-DFA0A04FC94B}">
-              <ma14:wrappingTextBoxFlag xmlns="" xmlns:ma14="http://schemas.microsoft.com/office/mac/drawingml/2011/main" val="0"/>
+              <ma14:wrappingTextBoxFlag xmlns:ma14="http://schemas.microsoft.com/office/mac/drawingml/2011/main" xmlns="" val="0"/>
             </a:ext>
           </a:extLst>
         </p:spPr>
@@ -21067,7 +21068,7 @@
           </a:prstGeom>
           <a:extLst>
             <a:ext uri="{C572A759-6A51-4108-AA02-DFA0A04FC94B}">
-              <ma14:wrappingTextBoxFlag xmlns="" xmlns:ma14="http://schemas.microsoft.com/office/mac/drawingml/2011/main" val="0"/>
+              <ma14:wrappingTextBoxFlag xmlns:ma14="http://schemas.microsoft.com/office/mac/drawingml/2011/main" xmlns="" val="0"/>
             </a:ext>
           </a:extLst>
         </p:spPr>
@@ -21905,7 +21906,7 @@
           </a:prstGeom>
           <a:extLst>
             <a:ext uri="{C572A759-6A51-4108-AA02-DFA0A04FC94B}">
-              <ma14:wrappingTextBoxFlag xmlns="" xmlns:ma14="http://schemas.microsoft.com/office/mac/drawingml/2011/main" val="0"/>
+              <ma14:wrappingTextBoxFlag xmlns:ma14="http://schemas.microsoft.com/office/mac/drawingml/2011/main" xmlns="" val="0"/>
             </a:ext>
           </a:extLst>
         </p:spPr>
@@ -22005,34 +22006,34 @@
         </p:nvSpPr>
         <p:spPr>
           <a:xfrm>
-            <a:off x="713232" y="1005840"/>
-            <a:ext cx="5120640" cy="274320"/>
-          </a:xfrm>
-          <a:prstGeom prst="rect">
-            <a:avLst/>
-          </a:prstGeom>
-          <a:noFill/>
-          <a:ln/>
-        </p:spPr>
-        <p:txBody>
-          <a:bodyPr wrap="square" lIns="0" tIns="0" rIns="0" bIns="0" rtlCol="0" anchor="t"/>
-          <a:lstStyle/>
-          <a:p>
-            <a:pPr marL="0" indent="0">
-              <a:buNone/>
-            </a:pPr>
-            <a:r>
-              <a:rPr lang="en-US" sz="1300" kern="0" spc="260" dirty="0">
-                <a:solidFill>
-                  <a:srgbClr val="828C9A"/>
+            <a:off x="658368" y="841248"/>
+            <a:ext cx="1097280" cy="914400"/>
+          </a:xfrm>
+          <a:prstGeom prst="rect">
+            <a:avLst/>
+          </a:prstGeom>
+          <a:noFill/>
+          <a:ln/>
+        </p:spPr>
+        <p:txBody>
+          <a:bodyPr wrap="square" lIns="0" tIns="0" rIns="0" bIns="0" rtlCol="0" anchor="t"/>
+          <a:lstStyle/>
+          <a:p>
+            <a:pPr marL="0" indent="0">
+              <a:buNone/>
+            </a:pPr>
+            <a:r>
+              <a:rPr lang="en-US" sz="8600" dirty="0">
+                <a:solidFill>
+                  <a:srgbClr val="262C35"/>
                 </a:solidFill>
                 <a:latin typeface="Barlow Condensed" pitchFamily="34" charset="0"/>
                 <a:ea typeface="Barlow Condensed" pitchFamily="34" charset="-122"/>
                 <a:cs typeface="Barlow Condensed" pitchFamily="34" charset="-120"/>
               </a:rPr>
-              <a:t>INCOME THE SPORT ITSELF PRODUCED</a:t>
-            </a:r>
-            <a:endParaRPr lang="en-US" sz="1300" dirty="0"/>
+              <a:t>“</a:t>
+            </a:r>
+            <a:endParaRPr lang="en-US" sz="8600" dirty="0"/>
           </a:p>
         </p:txBody>
       </p:sp>
@@ -22044,8 +22045,8 @@
         </p:nvSpPr>
         <p:spPr>
           <a:xfrm>
-            <a:off x="713232" y="1353312"/>
-            <a:ext cx="4754880" cy="2286000"/>
+            <a:off x="713232" y="1481328"/>
+            <a:ext cx="6583680" cy="1920240"/>
           </a:xfrm>
           <a:prstGeom prst="rect">
             <a:avLst/>
@@ -22059,12 +22060,12 @@
           <a:p>
             <a:pPr marL="0" indent="0">
               <a:lnSpc>
-                <a:spcPts val="16000"/>
+                <a:spcPts val="3600"/>
               </a:lnSpc>
               <a:buNone/>
             </a:pPr>
             <a:r>
-              <a:rPr lang="en-US" sz="16800" dirty="0">
+              <a:rPr lang="en-US" sz="3200" dirty="0">
                 <a:solidFill>
                   <a:srgbClr val="F2F4F7"/>
                 </a:solidFill>
@@ -22072,76 +22073,32 @@
                 <a:ea typeface="Barlow Condensed" pitchFamily="34" charset="-122"/>
                 <a:cs typeface="Barlow Condensed" pitchFamily="34" charset="-120"/>
               </a:rPr>
-              <a:t>€0</a:t>
-            </a:r>
-            <a:endParaRPr lang="en-US" sz="16800" dirty="0"/>
-          </a:p>
-        </p:txBody>
-      </p:sp>
-      <p:sp>
-        <p:nvSpPr>
-          <p:cNvPr id="5" name="Text 3"/>
-          <p:cNvSpPr txBox="1"/>
-          <p:nvPr/>
-        </p:nvSpPr>
-        <p:spPr>
-          <a:xfrm>
-            <a:off x="713232" y="3255264"/>
-            <a:ext cx="5120640" cy="822960"/>
-          </a:xfrm>
-          <a:prstGeom prst="rect">
-            <a:avLst/>
-          </a:prstGeom>
-          <a:noFill/>
-          <a:ln/>
-        </p:spPr>
-        <p:txBody>
-          <a:bodyPr wrap="square" lIns="0" tIns="0" rIns="0" bIns="0" rtlCol="0" anchor="t"/>
-          <a:lstStyle/>
-          <a:p>
-            <a:pPr marL="0" indent="0">
-              <a:lnSpc>
-                <a:spcPts val="3400"/>
-              </a:lnSpc>
-              <a:buNone/>
-            </a:pPr>
-            <a:r>
-              <a:rPr lang="en-US" sz="3000" dirty="0">
-                <a:solidFill>
-                  <a:srgbClr val="FFB020"/>
-                </a:solidFill>
-                <a:latin typeface="Barlow Condensed" pitchFamily="34" charset="0"/>
-                <a:ea typeface="Barlow Condensed" pitchFamily="34" charset="-122"/>
-                <a:cs typeface="Barlow Condensed" pitchFamily="34" charset="-120"/>
-              </a:rPr>
-              <a:t>Not low. Not inconsistent. Nothing</a:t>
-            </a:r>
-            <a:endParaRPr lang="en-US" sz="3000" dirty="0"/>
-          </a:p>
-        </p:txBody>
-      </p:sp>
-      <p:sp>
-        <p:nvSpPr>
-          <p:cNvPr id="6" name="Shape 4"/>
+              <a:t>People are not going to spend time setting up social media and building followers purely around their sport if nothing comes back.</a:t>
+            </a:r>
+            <a:endParaRPr lang="en-US" sz="3200" dirty="0"/>
+          </a:p>
+        </p:txBody>
+      </p:sp>
+      <p:sp>
+        <p:nvSpPr>
+          <p:cNvPr id="5" name="Shape 3"/>
           <p:cNvSpPr/>
           <p:nvPr/>
         </p:nvSpPr>
         <p:spPr>
           <a:xfrm>
-            <a:off x="713232" y="3968496"/>
-            <a:ext cx="5212080" cy="859536"/>
-          </a:xfrm>
-          <a:prstGeom prst="roundRect">
-            <a:avLst>
-              <a:gd name="adj" fmla="val 4255"/>
-            </a:avLst>
+            <a:off x="713232" y="3511296"/>
+            <a:ext cx="1005840" cy="18288"/>
+          </a:xfrm>
+          <a:prstGeom prst="rect">
+            <a:avLst/>
           </a:prstGeom>
           <a:solidFill>
-            <a:srgbClr val="1F242C"/>
+            <a:srgbClr val="FFB020"/>
           </a:solidFill>
-          <a:ln w="9525">
+          <a:ln w="12700">
             <a:solidFill>
-              <a:srgbClr val="262C35"/>
+              <a:srgbClr val="333333"/>
             </a:solidFill>
             <a:prstDash val="solid"/>
           </a:ln>
@@ -22149,53 +22106,14 @@
       </p:sp>
       <p:sp>
         <p:nvSpPr>
-          <p:cNvPr id="7" name="Text 5"/>
-          <p:cNvSpPr txBox="1"/>
-          <p:nvPr/>
-        </p:nvSpPr>
-        <p:spPr>
-          <a:xfrm>
-            <a:off x="969264" y="4133088"/>
-            <a:ext cx="4754880" cy="219456"/>
-          </a:xfrm>
-          <a:prstGeom prst="rect">
-            <a:avLst/>
-          </a:prstGeom>
-          <a:noFill/>
-          <a:ln/>
-        </p:spPr>
-        <p:txBody>
-          <a:bodyPr wrap="square" lIns="0" tIns="0" rIns="0" bIns="0" rtlCol="0" anchor="t"/>
-          <a:lstStyle/>
-          <a:p>
-            <a:pPr marL="0" indent="0">
-              <a:buNone/>
-            </a:pPr>
-            <a:r>
-              <a:rPr lang="en-US" sz="1150" kern="0" spc="200" dirty="0">
-                <a:solidFill>
-                  <a:srgbClr val="FFB020"/>
-                </a:solidFill>
-                <a:latin typeface="Barlow Condensed" pitchFamily="34" charset="0"/>
-                <a:ea typeface="Barlow Condensed" pitchFamily="34" charset="-122"/>
-                <a:cs typeface="Barlow Condensed" pitchFamily="34" charset="-120"/>
-              </a:rPr>
-              <a:t>ONE OF THE FIVE DOES HAVE A SPONSOR</a:t>
-            </a:r>
-            <a:endParaRPr lang="en-US" sz="1150" dirty="0"/>
-          </a:p>
-        </p:txBody>
-      </p:sp>
-      <p:sp>
-        <p:nvSpPr>
-          <p:cNvPr id="8" name="Text 6"/>
-          <p:cNvSpPr txBox="1"/>
-          <p:nvPr/>
-        </p:nvSpPr>
-        <p:spPr>
-          <a:xfrm>
-            <a:off x="969264" y="4370832"/>
-            <a:ext cx="4754880" cy="402336"/>
+          <p:cNvPr id="6" name="Text 4"/>
+          <p:cNvSpPr txBox="1"/>
+          <p:nvPr/>
+        </p:nvSpPr>
+        <p:spPr>
+          <a:xfrm>
+            <a:off x="713232" y="3675888"/>
+            <a:ext cx="6400800" cy="731520"/>
           </a:xfrm>
           <a:prstGeom prst="rect">
             <a:avLst/>
@@ -22209,39 +22127,39 @@
           <a:p>
             <a:pPr marL="0" indent="0">
               <a:lnSpc>
-                <a:spcPts val="1600"/>
+                <a:spcPts val="1700"/>
               </a:lnSpc>
               <a:buNone/>
             </a:pPr>
             <a:r>
-              <a:rPr lang="en-US" sz="1200" dirty="0">
-                <a:solidFill>
-                  <a:srgbClr val="AEB6C2"/>
+              <a:rPr lang="en-US" sz="1250" dirty="0">
+                <a:solidFill>
+                  <a:srgbClr val="828C9A"/>
                 </a:solidFill>
                 <a:latin typeface="Barlow" pitchFamily="34" charset="0"/>
                 <a:ea typeface="Barlow" pitchFamily="34" charset="-122"/>
                 <a:cs typeface="Barlow" pitchFamily="34" charset="-120"/>
               </a:rPr>
-              <a:t>He did not get it as a rugby league player. None of it came through the sport, which is the finding and not an exception to it.</a:t>
-            </a:r>
-            <a:endParaRPr lang="en-US" sz="1200" dirty="0"/>
-          </a:p>
-        </p:txBody>
-      </p:sp>
-      <p:sp>
-        <p:nvSpPr>
-          <p:cNvPr id="9" name="Shape 7"/>
+              <a:t>One of the five. Rugby league players competing in Spain and Lebanon, and top-ranked Lebanese CrossFit athletes. The founder is capped by the Lebanese national rugby team, which is how this access exists.</a:t>
+            </a:r>
+            <a:endParaRPr lang="en-US" sz="1250" dirty="0"/>
+          </a:p>
+        </p:txBody>
+      </p:sp>
+      <p:sp>
+        <p:nvSpPr>
+          <p:cNvPr id="7" name="Shape 5"/>
           <p:cNvSpPr/>
           <p:nvPr/>
         </p:nvSpPr>
         <p:spPr>
           <a:xfrm>
-            <a:off x="6309360" y="1234440"/>
-            <a:ext cx="5169103" cy="3611880"/>
+            <a:off x="7589520" y="1188720"/>
+            <a:ext cx="3888943" cy="3108960"/>
           </a:xfrm>
           <a:prstGeom prst="roundRect">
             <a:avLst>
-              <a:gd name="adj" fmla="val 1013"/>
+              <a:gd name="adj" fmla="val 1176"/>
             </a:avLst>
           </a:prstGeom>
           <a:solidFill>
@@ -22257,95 +22175,53 @@
       </p:sp>
       <p:sp>
         <p:nvSpPr>
-          <p:cNvPr id="10" name="Text 8"/>
-          <p:cNvSpPr txBox="1"/>
-          <p:nvPr/>
-        </p:nvSpPr>
-        <p:spPr>
-          <a:xfrm>
-            <a:off x="6583680" y="1298448"/>
-            <a:ext cx="914400" cy="914400"/>
-          </a:xfrm>
-          <a:prstGeom prst="rect">
-            <a:avLst/>
-          </a:prstGeom>
-          <a:noFill/>
-          <a:ln/>
-        </p:spPr>
-        <p:txBody>
-          <a:bodyPr wrap="square" lIns="0" tIns="0" rIns="0" bIns="0" rtlCol="0" anchor="t"/>
-          <a:lstStyle/>
-          <a:p>
-            <a:pPr marL="0" indent="0">
-              <a:buNone/>
-            </a:pPr>
-            <a:r>
-              <a:rPr lang="en-US" sz="8000" dirty="0">
-                <a:solidFill>
-                  <a:srgbClr val="262C35"/>
+          <p:cNvPr id="8" name="Text 6"/>
+          <p:cNvSpPr txBox="1"/>
+          <p:nvPr/>
+        </p:nvSpPr>
+        <p:spPr>
+          <a:xfrm>
+            <a:off x="7845552" y="1389888"/>
+            <a:ext cx="3383280" cy="237744"/>
+          </a:xfrm>
+          <a:prstGeom prst="rect">
+            <a:avLst/>
+          </a:prstGeom>
+          <a:noFill/>
+          <a:ln/>
+        </p:spPr>
+        <p:txBody>
+          <a:bodyPr wrap="square" lIns="0" tIns="0" rIns="0" bIns="0" rtlCol="0" anchor="t"/>
+          <a:lstStyle/>
+          <a:p>
+            <a:pPr marL="0" indent="0">
+              <a:buNone/>
+            </a:pPr>
+            <a:r>
+              <a:rPr lang="en-US" sz="1200" kern="0" spc="260" dirty="0">
+                <a:solidFill>
+                  <a:srgbClr val="828C9A"/>
                 </a:solidFill>
                 <a:latin typeface="Barlow Condensed" pitchFamily="34" charset="0"/>
                 <a:ea typeface="Barlow Condensed" pitchFamily="34" charset="-122"/>
                 <a:cs typeface="Barlow Condensed" pitchFamily="34" charset="-120"/>
               </a:rPr>
-              <a:t>“</a:t>
-            </a:r>
-            <a:endParaRPr lang="en-US" sz="8000" dirty="0"/>
-          </a:p>
-        </p:txBody>
-      </p:sp>
-      <p:sp>
-        <p:nvSpPr>
-          <p:cNvPr id="11" name="Text 9"/>
-          <p:cNvSpPr txBox="1"/>
-          <p:nvPr/>
-        </p:nvSpPr>
-        <p:spPr>
-          <a:xfrm>
-            <a:off x="6675120" y="2057400"/>
-            <a:ext cx="4364431" cy="1371600"/>
-          </a:xfrm>
-          <a:prstGeom prst="rect">
-            <a:avLst/>
-          </a:prstGeom>
-          <a:noFill/>
-          <a:ln/>
-        </p:spPr>
-        <p:txBody>
-          <a:bodyPr wrap="square" lIns="0" tIns="0" rIns="0" bIns="0" rtlCol="0" anchor="t"/>
-          <a:lstStyle/>
-          <a:p>
-            <a:pPr marL="0" indent="0">
-              <a:lnSpc>
-                <a:spcPts val="2700"/>
-              </a:lnSpc>
-              <a:buNone/>
-            </a:pPr>
-            <a:r>
-              <a:rPr lang="en-US" sz="1900" dirty="0">
-                <a:solidFill>
-                  <a:srgbClr val="F2F4F7"/>
-                </a:solidFill>
-                <a:latin typeface="Barlow" pitchFamily="34" charset="0"/>
-                <a:ea typeface="Barlow" pitchFamily="34" charset="-122"/>
-                <a:cs typeface="Barlow" pitchFamily="34" charset="-120"/>
-              </a:rPr>
-              <a:t>People are not going to spend time setting up social media and building followers purely around their sport if nothing comes back.</a:t>
-            </a:r>
-            <a:endParaRPr lang="en-US" sz="1900" dirty="0"/>
-          </a:p>
-        </p:txBody>
-      </p:sp>
-      <p:sp>
-        <p:nvSpPr>
-          <p:cNvPr id="12" name="Shape 10"/>
+              <a:t>WHAT THEY DO GET</a:t>
+            </a:r>
+            <a:endParaRPr lang="en-US" sz="1200" dirty="0"/>
+          </a:p>
+        </p:txBody>
+      </p:sp>
+      <p:sp>
+        <p:nvSpPr>
+          <p:cNvPr id="9" name="Shape 7"/>
           <p:cNvSpPr/>
           <p:nvPr/>
         </p:nvSpPr>
         <p:spPr>
           <a:xfrm>
-            <a:off x="6675120" y="3566160"/>
-            <a:ext cx="1005840" cy="18288"/>
+            <a:off x="7845552" y="1851660"/>
+            <a:ext cx="128016" cy="27432"/>
           </a:xfrm>
           <a:prstGeom prst="rect">
             <a:avLst/>
@@ -22363,14 +22239,14 @@
       </p:sp>
       <p:sp>
         <p:nvSpPr>
-          <p:cNvPr id="13" name="Text 11"/>
-          <p:cNvSpPr txBox="1"/>
-          <p:nvPr/>
-        </p:nvSpPr>
-        <p:spPr>
-          <a:xfrm>
-            <a:off x="6675120" y="3730752"/>
-            <a:ext cx="4364431" cy="1005840"/>
+          <p:cNvPr id="10" name="Text 8"/>
+          <p:cNvSpPr txBox="1"/>
+          <p:nvPr/>
+        </p:nvSpPr>
+        <p:spPr>
+          <a:xfrm>
+            <a:off x="8119872" y="1755648"/>
+            <a:ext cx="3108960" cy="292608"/>
           </a:xfrm>
           <a:prstGeom prst="rect">
             <a:avLst/>
@@ -22384,35 +22260,169 @@
           <a:p>
             <a:pPr marL="0" indent="0">
               <a:lnSpc>
-                <a:spcPts val="1700"/>
+                <a:spcPts val="2200"/>
               </a:lnSpc>
               <a:buNone/>
             </a:pPr>
             <a:r>
-              <a:rPr lang="en-US" sz="1250" dirty="0">
-                <a:solidFill>
-                  <a:srgbClr val="828C9A"/>
+              <a:rPr lang="en-US" sz="1350" dirty="0">
+                <a:solidFill>
+                  <a:srgbClr val="F2F4F7"/>
                 </a:solidFill>
                 <a:latin typeface="Barlow" pitchFamily="34" charset="0"/>
                 <a:ea typeface="Barlow" pitchFamily="34" charset="-122"/>
                 <a:cs typeface="Barlow" pitchFamily="34" charset="-120"/>
               </a:rPr>
-              <a:t>Rugby league players competing in Spain and Lebanon, and top-ranked Lebanese CrossFit athletes. The founder is capped by the Lebanese national rugby team, which is how this access exists.</a:t>
-            </a:r>
-            <a:endParaRPr lang="en-US" sz="1250" dirty="0"/>
-          </a:p>
-        </p:txBody>
-      </p:sp>
-      <p:sp>
-        <p:nvSpPr>
-          <p:cNvPr id="14" name="Shape 12"/>
+              <a:t>Gear and product</a:t>
+            </a:r>
+            <a:endParaRPr lang="en-US" sz="1350" dirty="0"/>
+          </a:p>
+        </p:txBody>
+      </p:sp>
+      <p:sp>
+        <p:nvSpPr>
+          <p:cNvPr id="11" name="Shape 9"/>
           <p:cNvSpPr/>
           <p:nvPr/>
         </p:nvSpPr>
         <p:spPr>
           <a:xfrm>
-            <a:off x="713232" y="5248656"/>
-            <a:ext cx="5245456" cy="12802"/>
+            <a:off x="7845552" y="2217420"/>
+            <a:ext cx="128016" cy="27432"/>
+          </a:xfrm>
+          <a:prstGeom prst="rect">
+            <a:avLst/>
+          </a:prstGeom>
+          <a:solidFill>
+            <a:srgbClr val="FFB020"/>
+          </a:solidFill>
+          <a:ln w="12700">
+            <a:solidFill>
+              <a:srgbClr val="333333"/>
+            </a:solidFill>
+            <a:prstDash val="solid"/>
+          </a:ln>
+        </p:spPr>
+      </p:sp>
+      <p:sp>
+        <p:nvSpPr>
+          <p:cNvPr id="12" name="Text 10"/>
+          <p:cNvSpPr txBox="1"/>
+          <p:nvPr/>
+        </p:nvSpPr>
+        <p:spPr>
+          <a:xfrm>
+            <a:off x="8119872" y="2121408"/>
+            <a:ext cx="3108960" cy="292608"/>
+          </a:xfrm>
+          <a:prstGeom prst="rect">
+            <a:avLst/>
+          </a:prstGeom>
+          <a:noFill/>
+          <a:ln/>
+        </p:spPr>
+        <p:txBody>
+          <a:bodyPr wrap="square" lIns="0" tIns="0" rIns="0" bIns="0" rtlCol="0" anchor="t"/>
+          <a:lstStyle/>
+          <a:p>
+            <a:pPr marL="0" indent="0">
+              <a:lnSpc>
+                <a:spcPts val="2200"/>
+              </a:lnSpc>
+              <a:buNone/>
+            </a:pPr>
+            <a:r>
+              <a:rPr lang="en-US" sz="1350" dirty="0">
+                <a:solidFill>
+                  <a:srgbClr val="F2F4F7"/>
+                </a:solidFill>
+                <a:latin typeface="Barlow" pitchFamily="34" charset="0"/>
+                <a:ea typeface="Barlow" pitchFamily="34" charset="-122"/>
+                <a:cs typeface="Barlow" pitchFamily="34" charset="-120"/>
+              </a:rPr>
+              <a:t>The occasional paid post</a:t>
+            </a:r>
+            <a:endParaRPr lang="en-US" sz="1350" dirty="0"/>
+          </a:p>
+        </p:txBody>
+      </p:sp>
+      <p:sp>
+        <p:nvSpPr>
+          <p:cNvPr id="13" name="Shape 11"/>
+          <p:cNvSpPr/>
+          <p:nvPr/>
+        </p:nvSpPr>
+        <p:spPr>
+          <a:xfrm>
+            <a:off x="7845552" y="2583180"/>
+            <a:ext cx="128016" cy="27432"/>
+          </a:xfrm>
+          <a:prstGeom prst="rect">
+            <a:avLst/>
+          </a:prstGeom>
+          <a:solidFill>
+            <a:srgbClr val="FFB020"/>
+          </a:solidFill>
+          <a:ln w="12700">
+            <a:solidFill>
+              <a:srgbClr val="333333"/>
+            </a:solidFill>
+            <a:prstDash val="solid"/>
+          </a:ln>
+        </p:spPr>
+      </p:sp>
+      <p:sp>
+        <p:nvSpPr>
+          <p:cNvPr id="14" name="Text 12"/>
+          <p:cNvSpPr txBox="1"/>
+          <p:nvPr/>
+        </p:nvSpPr>
+        <p:spPr>
+          <a:xfrm>
+            <a:off x="8119872" y="2487168"/>
+            <a:ext cx="3108960" cy="292608"/>
+          </a:xfrm>
+          <a:prstGeom prst="rect">
+            <a:avLst/>
+          </a:prstGeom>
+          <a:noFill/>
+          <a:ln/>
+        </p:spPr>
+        <p:txBody>
+          <a:bodyPr wrap="square" lIns="0" tIns="0" rIns="0" bIns="0" rtlCol="0" anchor="t"/>
+          <a:lstStyle/>
+          <a:p>
+            <a:pPr marL="0" indent="0">
+              <a:lnSpc>
+                <a:spcPts val="2200"/>
+              </a:lnSpc>
+              <a:buNone/>
+            </a:pPr>
+            <a:r>
+              <a:rPr lang="en-US" sz="1350" dirty="0">
+                <a:solidFill>
+                  <a:srgbClr val="F2F4F7"/>
+                </a:solidFill>
+                <a:latin typeface="Barlow" pitchFamily="34" charset="0"/>
+                <a:ea typeface="Barlow" pitchFamily="34" charset="-122"/>
+                <a:cs typeface="Barlow" pitchFamily="34" charset="-120"/>
+              </a:rPr>
+              <a:t>Prize money, sometimes</a:t>
+            </a:r>
+            <a:endParaRPr lang="en-US" sz="1350" dirty="0"/>
+          </a:p>
+        </p:txBody>
+      </p:sp>
+      <p:sp>
+        <p:nvSpPr>
+          <p:cNvPr id="15" name="Shape 13"/>
+          <p:cNvSpPr/>
+          <p:nvPr/>
+        </p:nvSpPr>
+        <p:spPr>
+          <a:xfrm>
+            <a:off x="7845552" y="2980944"/>
+            <a:ext cx="3383280" cy="12802"/>
           </a:xfrm>
           <a:prstGeom prst="rect">
             <a:avLst/>
@@ -22430,94 +22440,97 @@
       </p:sp>
       <p:sp>
         <p:nvSpPr>
-          <p:cNvPr id="15" name="Text 13"/>
-          <p:cNvSpPr txBox="1"/>
-          <p:nvPr/>
-        </p:nvSpPr>
-        <p:spPr>
-          <a:xfrm>
-            <a:off x="713232" y="5376672"/>
-            <a:ext cx="5245456" cy="219456"/>
-          </a:xfrm>
-          <a:prstGeom prst="rect">
-            <a:avLst/>
-          </a:prstGeom>
-          <a:noFill/>
-          <a:ln/>
-        </p:spPr>
-        <p:txBody>
-          <a:bodyPr wrap="square" lIns="0" tIns="0" rIns="0" bIns="0" rtlCol="0" anchor="t"/>
-          <a:lstStyle/>
-          <a:p>
-            <a:pPr marL="0" indent="0">
-              <a:buNone/>
-            </a:pPr>
-            <a:r>
-              <a:rPr lang="en-US" sz="1200" kern="0" spc="180" dirty="0">
-                <a:solidFill>
-                  <a:srgbClr val="F2F4F7"/>
+          <p:cNvPr id="16" name="Text 14"/>
+          <p:cNvSpPr txBox="1"/>
+          <p:nvPr/>
+        </p:nvSpPr>
+        <p:spPr>
+          <a:xfrm>
+            <a:off x="7845552" y="3145536"/>
+            <a:ext cx="3383280" cy="914400"/>
+          </a:xfrm>
+          <a:prstGeom prst="rect">
+            <a:avLst/>
+          </a:prstGeom>
+          <a:noFill/>
+          <a:ln/>
+        </p:spPr>
+        <p:txBody>
+          <a:bodyPr wrap="square" lIns="0" tIns="0" rIns="0" bIns="0" rtlCol="0" anchor="t"/>
+          <a:lstStyle/>
+          <a:p>
+            <a:pPr marL="0" indent="0">
+              <a:lnSpc>
+                <a:spcPts val="1700"/>
+              </a:lnSpc>
+              <a:buNone/>
+            </a:pPr>
+            <a:r>
+              <a:rPr lang="en-US" sz="1250" dirty="0">
+                <a:solidFill>
+                  <a:srgbClr val="AEB6C2"/>
+                </a:solidFill>
+                <a:latin typeface="Barlow" pitchFamily="34" charset="0"/>
+                <a:ea typeface="Barlow" pitchFamily="34" charset="-122"/>
+                <a:cs typeface="Barlow" pitchFamily="34" charset="-120"/>
+              </a:rPr>
+              <a:t>Real value, and not one euro of it carrying a rate, a contract, or any reason to expect it a second time. One of the five does have a sponsor, and it did not come through his sport.</a:t>
+            </a:r>
+            <a:endParaRPr lang="en-US" sz="1250" dirty="0"/>
+          </a:p>
+        </p:txBody>
+      </p:sp>
+      <p:sp>
+        <p:nvSpPr>
+          <p:cNvPr id="17" name="Text 15"/>
+          <p:cNvSpPr txBox="1"/>
+          <p:nvPr/>
+        </p:nvSpPr>
+        <p:spPr>
+          <a:xfrm>
+            <a:off x="713232" y="4553712"/>
+            <a:ext cx="10765231" cy="457200"/>
+          </a:xfrm>
+          <a:prstGeom prst="rect">
+            <a:avLst/>
+          </a:prstGeom>
+          <a:noFill/>
+          <a:ln/>
+        </p:spPr>
+        <p:txBody>
+          <a:bodyPr wrap="square" lIns="0" tIns="0" rIns="0" bIns="0" rtlCol="0" anchor="t"/>
+          <a:lstStyle/>
+          <a:p>
+            <a:pPr marL="0" indent="0">
+              <a:lnSpc>
+                <a:spcPts val="3000"/>
+              </a:lnSpc>
+              <a:buNone/>
+            </a:pPr>
+            <a:r>
+              <a:rPr lang="en-US" sz="2600" dirty="0">
+                <a:solidFill>
+                  <a:srgbClr val="FFB020"/>
                 </a:solidFill>
                 <a:latin typeface="Barlow Condensed" pitchFamily="34" charset="0"/>
                 <a:ea typeface="Barlow Condensed" pitchFamily="34" charset="-122"/>
                 <a:cs typeface="Barlow Condensed" pitchFamily="34" charset="-120"/>
               </a:rPr>
-              <a:t>THE INEQUITY IS FELT</a:t>
-            </a:r>
-            <a:endParaRPr lang="en-US" sz="1200" dirty="0"/>
-          </a:p>
-        </p:txBody>
-      </p:sp>
-      <p:sp>
-        <p:nvSpPr>
-          <p:cNvPr id="16" name="Text 14"/>
-          <p:cNvSpPr txBox="1"/>
-          <p:nvPr/>
-        </p:nvSpPr>
-        <p:spPr>
-          <a:xfrm>
-            <a:off x="713232" y="5614416"/>
-            <a:ext cx="5245456" cy="548640"/>
-          </a:xfrm>
-          <a:prstGeom prst="rect">
-            <a:avLst/>
-          </a:prstGeom>
-          <a:noFill/>
-          <a:ln/>
-        </p:spPr>
-        <p:txBody>
-          <a:bodyPr wrap="square" lIns="0" tIns="0" rIns="0" bIns="0" rtlCol="0" anchor="t"/>
-          <a:lstStyle/>
-          <a:p>
-            <a:pPr marL="0" indent="0">
-              <a:lnSpc>
-                <a:spcPts val="1500"/>
-              </a:lnSpc>
-              <a:buNone/>
-            </a:pPr>
-            <a:r>
-              <a:rPr lang="en-US" sz="1150" dirty="0">
-                <a:solidFill>
-                  <a:srgbClr val="828C9A"/>
-                </a:solidFill>
-                <a:latin typeface="Barlow" pitchFamily="34" charset="0"/>
-                <a:ea typeface="Barlow" pitchFamily="34" charset="-122"/>
-                <a:cs typeface="Barlow" pitchFamily="34" charset="-120"/>
-              </a:rPr>
-              <a:t>Influencers producing far less demanding content earn more than competing athletes do</a:t>
-            </a:r>
-            <a:endParaRPr lang="en-US" sz="1150" dirty="0"/>
-          </a:p>
-        </p:txBody>
-      </p:sp>
-      <p:sp>
-        <p:nvSpPr>
-          <p:cNvPr id="17" name="Shape 15"/>
+              <a:t>A champion gets given things. Nobody is buying anything.</a:t>
+            </a:r>
+            <a:endParaRPr lang="en-US" sz="2600" dirty="0"/>
+          </a:p>
+        </p:txBody>
+      </p:sp>
+      <p:sp>
+        <p:nvSpPr>
+          <p:cNvPr id="18" name="Shape 16"/>
           <p:cNvSpPr/>
           <p:nvPr/>
         </p:nvSpPr>
         <p:spPr>
           <a:xfrm>
-            <a:off x="6233008" y="5248656"/>
+            <a:off x="713232" y="5248656"/>
             <a:ext cx="5245456" cy="12802"/>
           </a:xfrm>
           <a:prstGeom prst="rect">
@@ -22536,13 +22549,13 @@
       </p:sp>
       <p:sp>
         <p:nvSpPr>
-          <p:cNvPr id="18" name="Text 16"/>
-          <p:cNvSpPr txBox="1"/>
-          <p:nvPr/>
-        </p:nvSpPr>
-        <p:spPr>
-          <a:xfrm>
-            <a:off x="6233008" y="5376672"/>
+          <p:cNvPr id="19" name="Text 17"/>
+          <p:cNvSpPr txBox="1"/>
+          <p:nvPr/>
+        </p:nvSpPr>
+        <p:spPr>
+          <a:xfrm>
+            <a:off x="713232" y="5376672"/>
             <a:ext cx="5245456" cy="219456"/>
           </a:xfrm>
           <a:prstGeom prst="rect">
@@ -22567,7 +22580,7 @@
                 <a:ea typeface="Barlow Condensed" pitchFamily="34" charset="-122"/>
                 <a:cs typeface="Barlow Condensed" pitchFamily="34" charset="-120"/>
               </a:rPr>
-              <a:t>SO THEY STOP BUILDING AN AUDIENCE</a:t>
+              <a:t>THE INEQUITY IS FELT</a:t>
             </a:r>
             <a:endParaRPr lang="en-US" sz="1200" dirty="0"/>
           </a:p>
@@ -22575,13 +22588,13 @@
       </p:sp>
       <p:sp>
         <p:nvSpPr>
-          <p:cNvPr id="19" name="Text 17"/>
-          <p:cNvSpPr txBox="1"/>
-          <p:nvPr/>
-        </p:nvSpPr>
-        <p:spPr>
-          <a:xfrm>
-            <a:off x="6233008" y="5614416"/>
+          <p:cNvPr id="20" name="Text 18"/>
+          <p:cNvSpPr txBox="1"/>
+          <p:nvPr/>
+        </p:nvSpPr>
+        <p:spPr>
+          <a:xfrm>
+            <a:off x="713232" y="5614416"/>
             <a:ext cx="5245456" cy="548640"/>
           </a:xfrm>
           <a:prstGeom prst="rect">
@@ -22609,6 +22622,112 @@
                 <a:ea typeface="Barlow" pitchFamily="34" charset="-122"/>
                 <a:cs typeface="Barlow" pitchFamily="34" charset="-120"/>
               </a:rPr>
+              <a:t>Influencers producing far less demanding content earn more than competing athletes do</a:t>
+            </a:r>
+            <a:endParaRPr lang="en-US" sz="1150" dirty="0"/>
+          </a:p>
+        </p:txBody>
+      </p:sp>
+      <p:sp>
+        <p:nvSpPr>
+          <p:cNvPr id="21" name="Shape 19"/>
+          <p:cNvSpPr/>
+          <p:nvPr/>
+        </p:nvSpPr>
+        <p:spPr>
+          <a:xfrm>
+            <a:off x="6233008" y="5248656"/>
+            <a:ext cx="5245456" cy="12802"/>
+          </a:xfrm>
+          <a:prstGeom prst="rect">
+            <a:avLst/>
+          </a:prstGeom>
+          <a:solidFill>
+            <a:srgbClr val="262C35"/>
+          </a:solidFill>
+          <a:ln w="12700">
+            <a:solidFill>
+              <a:srgbClr val="333333"/>
+            </a:solidFill>
+            <a:prstDash val="solid"/>
+          </a:ln>
+        </p:spPr>
+      </p:sp>
+      <p:sp>
+        <p:nvSpPr>
+          <p:cNvPr id="22" name="Text 20"/>
+          <p:cNvSpPr txBox="1"/>
+          <p:nvPr/>
+        </p:nvSpPr>
+        <p:spPr>
+          <a:xfrm>
+            <a:off x="6233008" y="5376672"/>
+            <a:ext cx="5245456" cy="219456"/>
+          </a:xfrm>
+          <a:prstGeom prst="rect">
+            <a:avLst/>
+          </a:prstGeom>
+          <a:noFill/>
+          <a:ln/>
+        </p:spPr>
+        <p:txBody>
+          <a:bodyPr wrap="square" lIns="0" tIns="0" rIns="0" bIns="0" rtlCol="0" anchor="t"/>
+          <a:lstStyle/>
+          <a:p>
+            <a:pPr marL="0" indent="0">
+              <a:buNone/>
+            </a:pPr>
+            <a:r>
+              <a:rPr lang="en-US" sz="1200" kern="0" spc="180" dirty="0">
+                <a:solidFill>
+                  <a:srgbClr val="F2F4F7"/>
+                </a:solidFill>
+                <a:latin typeface="Barlow Condensed" pitchFamily="34" charset="0"/>
+                <a:ea typeface="Barlow Condensed" pitchFamily="34" charset="-122"/>
+                <a:cs typeface="Barlow Condensed" pitchFamily="34" charset="-120"/>
+              </a:rPr>
+              <a:t>SO THEY STOP BUILDING AN AUDIENCE</a:t>
+            </a:r>
+            <a:endParaRPr lang="en-US" sz="1200" dirty="0"/>
+          </a:p>
+        </p:txBody>
+      </p:sp>
+      <p:sp>
+        <p:nvSpPr>
+          <p:cNvPr id="23" name="Text 21"/>
+          <p:cNvSpPr txBox="1"/>
+          <p:nvPr/>
+        </p:nvSpPr>
+        <p:spPr>
+          <a:xfrm>
+            <a:off x="6233008" y="5614416"/>
+            <a:ext cx="5245456" cy="548640"/>
+          </a:xfrm>
+          <a:prstGeom prst="rect">
+            <a:avLst/>
+          </a:prstGeom>
+          <a:noFill/>
+          <a:ln/>
+        </p:spPr>
+        <p:txBody>
+          <a:bodyPr wrap="square" lIns="0" tIns="0" rIns="0" bIns="0" rtlCol="0" anchor="t"/>
+          <a:lstStyle/>
+          <a:p>
+            <a:pPr marL="0" indent="0">
+              <a:lnSpc>
+                <a:spcPts val="1500"/>
+              </a:lnSpc>
+              <a:buNone/>
+            </a:pPr>
+            <a:r>
+              <a:rPr lang="en-US" sz="1150" dirty="0">
+                <a:solidFill>
+                  <a:srgbClr val="828C9A"/>
+                </a:solidFill>
+                <a:latin typeface="Barlow" pitchFamily="34" charset="0"/>
+                <a:ea typeface="Barlow" pitchFamily="34" charset="-122"/>
+                <a:cs typeface="Barlow" pitchFamily="34" charset="-120"/>
+              </a:rPr>
               <a:t>Which suppresses the very supply the market is measured on</a:t>
             </a:r>
             <a:endParaRPr lang="en-US" sz="1150" dirty="0"/>
@@ -22617,7 +22736,7 @@
       </p:sp>
       <p:sp>
         <p:nvSpPr>
-          <p:cNvPr id="20" name="Text 18"/>
+          <p:cNvPr id="24" name="Text 22"/>
           <p:cNvSpPr txBox="1"/>
           <p:nvPr/>
         </p:nvSpPr>
@@ -22674,7 +22793,7 @@
           </a:prstGeom>
           <a:extLst>
             <a:ext uri="{C572A759-6A51-4108-AA02-DFA0A04FC94B}">
-              <ma14:wrappingTextBoxFlag xmlns="" xmlns:ma14="http://schemas.microsoft.com/office/mac/drawingml/2011/main" val="0"/>
+              <ma14:wrappingTextBoxFlag xmlns:ma14="http://schemas.microsoft.com/office/mac/drawingml/2011/main" xmlns="" val="0"/>
             </a:ext>
           </a:extLst>
         </p:spPr>
@@ -23536,7 +23655,7 @@
           </a:prstGeom>
           <a:extLst>
             <a:ext uri="{C572A759-6A51-4108-AA02-DFA0A04FC94B}">
-              <ma14:wrappingTextBoxFlag xmlns="" xmlns:ma14="http://schemas.microsoft.com/office/mac/drawingml/2011/main" val="0"/>
+              <ma14:wrappingTextBoxFlag xmlns:ma14="http://schemas.microsoft.com/office/mac/drawingml/2011/main" xmlns="" val="0"/>
             </a:ext>
           </a:extLst>
         </p:spPr>
@@ -24389,7 +24508,7 @@
           </a:prstGeom>
           <a:extLst>
             <a:ext uri="{C572A759-6A51-4108-AA02-DFA0A04FC94B}">
-              <ma14:wrappingTextBoxFlag xmlns="" xmlns:ma14="http://schemas.microsoft.com/office/mac/drawingml/2011/main" val="0"/>
+              <ma14:wrappingTextBoxFlag xmlns:ma14="http://schemas.microsoft.com/office/mac/drawingml/2011/main" xmlns="" val="0"/>
             </a:ext>
           </a:extLst>
         </p:spPr>
@@ -25218,7 +25337,7 @@
           </a:prstGeom>
           <a:extLst>
             <a:ext uri="{C572A759-6A51-4108-AA02-DFA0A04FC94B}">
-              <ma14:wrappingTextBoxFlag xmlns="" xmlns:ma14="http://schemas.microsoft.com/office/mac/drawingml/2011/main" val="0"/>
+              <ma14:wrappingTextBoxFlag xmlns:ma14="http://schemas.microsoft.com/office/mac/drawingml/2011/main" xmlns="" val="0"/>
             </a:ext>
           </a:extLst>
         </p:spPr>
@@ -26408,7 +26527,7 @@
           </a:prstGeom>
           <a:extLst>
             <a:ext uri="{C572A759-6A51-4108-AA02-DFA0A04FC94B}">
-              <ma14:wrappingTextBoxFlag xmlns="" xmlns:ma14="http://schemas.microsoft.com/office/mac/drawingml/2011/main" val="0"/>
+              <ma14:wrappingTextBoxFlag xmlns:ma14="http://schemas.microsoft.com/office/mac/drawingml/2011/main" xmlns="" val="0"/>
             </a:ext>
           </a:extLst>
         </p:spPr>
@@ -27128,7 +27247,7 @@
           </a:prstGeom>
           <a:extLst>
             <a:ext uri="{C572A759-6A51-4108-AA02-DFA0A04FC94B}">
-              <ma14:wrappingTextBoxFlag xmlns="" xmlns:ma14="http://schemas.microsoft.com/office/mac/drawingml/2011/main" val="0"/>
+              <ma14:wrappingTextBoxFlag xmlns:ma14="http://schemas.microsoft.com/office/mac/drawingml/2011/main" xmlns="" val="0"/>
             </a:ext>
           </a:extLst>
         </p:spPr>
@@ -27809,7 +27928,7 @@
           </a:prstGeom>
           <a:extLst>
             <a:ext uri="{C572A759-6A51-4108-AA02-DFA0A04FC94B}">
-              <ma14:wrappingTextBoxFlag xmlns="" xmlns:ma14="http://schemas.microsoft.com/office/mac/drawingml/2011/main" val="0"/>
+              <ma14:wrappingTextBoxFlag xmlns:ma14="http://schemas.microsoft.com/office/mac/drawingml/2011/main" xmlns="" val="0"/>
             </a:ext>
           </a:extLst>
         </p:spPr>

--- a/deck/Stride_Pitch_Deck.pptx
+++ b/deck/Stride_Pitch_Deck.pptx
@@ -144,12 +144,12 @@
   <p:extLst>
     <p:ext uri="{521415D9-36F7-43E2-AB2F-B90AF26B5E84}">
       <p14:sectionLst xmlns:p14="http://schemas.microsoft.com/office/powerpoint/2010/main">
-        <p14:section name="Open" id="{20050C95-6CD3-B569-314C-D1085F66DCCA}">
+        <p14:section name="Open" id="{7BD90A15-5476-423F-5999-B4ACCB5F45F8}">
           <p14:sldIdLst>
             <p14:sldId id="256"/>
           </p14:sldIdLst>
         </p14:section>
-        <p14:section name="Problem" id="{85014AF7-E8E8-31E6-BAA8-20250BAB93AC}">
+        <p14:section name="Problem" id="{82F5BD53-96AB-F7E7-E4E7-9894A09CFB36}">
           <p14:sldIdLst>
             <p14:sldId id="257"/>
             <p14:sldId id="258"/>
@@ -157,7 +157,7 @@
             <p14:sldId id="260"/>
           </p14:sldIdLst>
         </p14:section>
-        <p14:section name="Product" id="{9E62D5DB-86E1-D76C-74C8-C9036FBCA3BC}">
+        <p14:section name="Product" id="{B5D138D9-E363-22E4-4D96-8BB874C40B63}">
           <p14:sldIdLst>
             <p14:sldId id="261"/>
             <p14:sldId id="262"/>
@@ -166,28 +166,28 @@
             <p14:sldId id="265"/>
           </p14:sldIdLst>
         </p14:section>
-        <p14:section name="Market" id="{6B6E327D-9593-DF2C-E0BC-729E03103B13}">
+        <p14:section name="Market" id="{BC0FC328-1831-9DED-3241-3A4417D4A76E}">
           <p14:sldIdLst>
             <p14:sldId id="266"/>
             <p14:sldId id="267"/>
             <p14:sldId id="268"/>
           </p14:sldIdLst>
         </p14:section>
-        <p14:section name="Model" id="{9CD66308-E522-5547-123F-B18451274A4D}">
+        <p14:section name="Model" id="{C87CA469-F79E-097E-77A4-09E0A22C4C48}">
           <p14:sldIdLst>
             <p14:sldId id="269"/>
             <p14:sldId id="270"/>
             <p14:sldId id="271"/>
           </p14:sldIdLst>
         </p14:section>
-        <p14:section name="Money" id="{3BF0C6AD-B642-72BB-0F52-C9776517F189}">
+        <p14:section name="Money" id="{3DB96A5D-C476-D2A1-BE0A-2A931652FB1F}">
           <p14:sldIdLst>
             <p14:sldId id="272"/>
             <p14:sldId id="273"/>
             <p14:sldId id="274"/>
           </p14:sldIdLst>
         </p14:section>
-        <p14:section name="Backup" id="{1D89A03C-7D10-9B69-8458-A4B30610AA8B}">
+        <p14:section name="Backup" id="{78458866-2A9C-720C-8E4C-ECBE97AE5264}">
           <p14:sldIdLst>
             <p14:sldId id="275"/>
             <p14:sldId id="276"/>
@@ -305,7 +305,7 @@
           </c:val>
           <c:extLst>
             <c:ext xmlns:c16="http://schemas.microsoft.com/office/drawing/2014/chart" uri="{C3380CC4-5D6E-409C-BE32-E72D297353CC}">
-              <c16:uniqueId val="{00000000-8700-404D-9BBC-B1659AF9B719}"/>
+              <c16:uniqueId val="{00000000-9808-4265-88D9-07E975753731}"/>
             </c:ext>
           </c:extLst>
         </c:ser>
@@ -391,7 +391,7 @@
           </c:val>
           <c:extLst>
             <c:ext xmlns:c16="http://schemas.microsoft.com/office/drawing/2014/chart" uri="{C3380CC4-5D6E-409C-BE32-E72D297353CC}">
-              <c16:uniqueId val="{00000001-8700-404D-9BBC-B1659AF9B719}"/>
+              <c16:uniqueId val="{00000001-9808-4265-88D9-07E975753731}"/>
             </c:ext>
           </c:extLst>
         </c:ser>
@@ -477,7 +477,7 @@
           </c:val>
           <c:extLst>
             <c:ext xmlns:c16="http://schemas.microsoft.com/office/drawing/2014/chart" uri="{C3380CC4-5D6E-409C-BE32-E72D297353CC}">
-              <c16:uniqueId val="{00000002-8700-404D-9BBC-B1659AF9B719}"/>
+              <c16:uniqueId val="{00000002-9808-4265-88D9-07E975753731}"/>
             </c:ext>
           </c:extLst>
         </c:ser>
@@ -735,7 +735,7 @@
           </c:val>
           <c:extLst>
             <c:ext xmlns:c16="http://schemas.microsoft.com/office/drawing/2014/chart" uri="{C3380CC4-5D6E-409C-BE32-E72D297353CC}">
-              <c16:uniqueId val="{00000000-0431-46DD-BF92-DA41CC74CF77}"/>
+              <c16:uniqueId val="{00000000-BC0E-47EF-BC14-9F4FBF81607D}"/>
             </c:ext>
           </c:extLst>
         </c:ser>
@@ -857,7 +857,7 @@
           <c:smooth val="0"/>
           <c:extLst>
             <c:ext xmlns:c16="http://schemas.microsoft.com/office/drawing/2014/chart" uri="{C3380CC4-5D6E-409C-BE32-E72D297353CC}">
-              <c16:uniqueId val="{00000001-0431-46DD-BF92-DA41CC74CF77}"/>
+              <c16:uniqueId val="{00000001-BC0E-47EF-BC14-9F4FBF81607D}"/>
             </c:ext>
           </c:extLst>
         </c:ser>
@@ -1133,7 +1133,7 @@
           <c:smooth val="0"/>
           <c:extLst>
             <c:ext xmlns:c16="http://schemas.microsoft.com/office/drawing/2014/chart" uri="{C3380CC4-5D6E-409C-BE32-E72D297353CC}">
-              <c16:uniqueId val="{00000000-ACB6-4710-841E-7FE0BD976A32}"/>
+              <c16:uniqueId val="{00000000-9DB2-429C-8256-E12B4D766DCD}"/>
             </c:ext>
           </c:extLst>
         </c:ser>
@@ -1298,7 +1298,7 @@
     </p:spTree>
     <p:extLst>
       <p:ext uri="{BB962C8B-B14F-4D97-AF65-F5344CB8AC3E}">
-        <p14:creationId xmlns:p14="http://schemas.microsoft.com/office/powerpoint/2010/main" val="3933350278"/>
+        <p14:creationId xmlns:p14="http://schemas.microsoft.com/office/powerpoint/2010/main" val="3766977319"/>
       </p:ext>
     </p:extLst>
   </p:cSld>
@@ -4610,7 +4610,7 @@
                 <a:ea typeface="Barlow" pitchFamily="34" charset="-122"/>
                 <a:cs typeface="Barlow" pitchFamily="34" charset="-120"/>
               </a:rPr>
-              <a:t>For semi-professional athletes in niche sports, and the local businesses near their club. Neither side is served today.</a:t>
+              <a:t>For semi-professional athletes in niche sports, and the local businesses near their club</a:t>
             </a:r>
             <a:endParaRPr lang="en-US" sz="1550" dirty="0"/>
           </a:p>
@@ -11736,45 +11736,6 @@
       </p:sp>
       <p:sp>
         <p:nvSpPr>
-          <p:cNvPr id="14" name="Text 11"/>
-          <p:cNvSpPr txBox="1"/>
-          <p:nvPr/>
-        </p:nvSpPr>
-        <p:spPr>
-          <a:xfrm>
-            <a:off x="713232" y="6382512"/>
-            <a:ext cx="9667951" cy="274320"/>
-          </a:xfrm>
-          <a:prstGeom prst="rect">
-            <a:avLst/>
-          </a:prstGeom>
-          <a:noFill/>
-          <a:ln/>
-        </p:spPr>
-        <p:txBody>
-          <a:bodyPr wrap="square" lIns="0" tIns="0" rIns="0" bIns="0" rtlCol="0" anchor="t"/>
-          <a:lstStyle/>
-          <a:p>
-            <a:pPr marL="0" indent="0">
-              <a:buNone/>
-            </a:pPr>
-            <a:r>
-              <a:rPr lang="en-US" sz="950" dirty="0">
-                <a:solidFill>
-                  <a:srgbClr val="828C9A"/>
-                </a:solidFill>
-                <a:latin typeface="Barlow" pitchFamily="34" charset="0"/>
-                <a:ea typeface="Barlow" pitchFamily="34" charset="-122"/>
-                <a:cs typeface="Barlow" pitchFamily="34" charset="-120"/>
-              </a:rPr>
-              <a:t>Stride financial model, base case. Three scenarios are modelled; the pessimistic case still breaks even in Y5.</a:t>
-            </a:r>
-            <a:endParaRPr lang="en-US" sz="950" dirty="0"/>
-          </a:p>
-        </p:txBody>
-      </p:sp>
-      <p:sp>
-        <p:nvSpPr>
           <p:cNvPr id="25" name="Slide Number Placeholder 0"/>
           <p:cNvSpPr>
             <a:spLocks noGrp="1"/>
@@ -13845,73 +13806,6 @@
         </p:nvSpPr>
         <p:spPr>
           <a:xfrm>
-            <a:off x="7936992" y="4315968"/>
-            <a:ext cx="3291840" cy="12802"/>
-          </a:xfrm>
-          <a:prstGeom prst="rect">
-            <a:avLst/>
-          </a:prstGeom>
-          <a:solidFill>
-            <a:srgbClr val="262C35"/>
-          </a:solidFill>
-          <a:ln w="12700">
-            <a:solidFill>
-              <a:srgbClr val="333333"/>
-            </a:solidFill>
-            <a:prstDash val="solid"/>
-          </a:ln>
-        </p:spPr>
-      </p:sp>
-      <p:sp>
-        <p:nvSpPr>
-          <p:cNvPr id="18" name="Text 16"/>
-          <p:cNvSpPr txBox="1"/>
-          <p:nvPr/>
-        </p:nvSpPr>
-        <p:spPr>
-          <a:xfrm>
-            <a:off x="7936992" y="4443984"/>
-            <a:ext cx="3291840" cy="365760"/>
-          </a:xfrm>
-          <a:prstGeom prst="rect">
-            <a:avLst/>
-          </a:prstGeom>
-          <a:noFill/>
-          <a:ln/>
-        </p:spPr>
-        <p:txBody>
-          <a:bodyPr wrap="square" lIns="0" tIns="0" rIns="0" bIns="0" rtlCol="0" anchor="t"/>
-          <a:lstStyle/>
-          <a:p>
-            <a:pPr marL="0" indent="0">
-              <a:lnSpc>
-                <a:spcPts val="1800"/>
-              </a:lnSpc>
-              <a:buNone/>
-            </a:pPr>
-            <a:r>
-              <a:rPr lang="en-US" sz="1300" dirty="0">
-                <a:solidFill>
-                  <a:srgbClr val="F2F4F7"/>
-                </a:solidFill>
-                <a:latin typeface="Barlow" pitchFamily="34" charset="0"/>
-                <a:ea typeface="Barlow" pitchFamily="34" charset="-122"/>
-                <a:cs typeface="Barlow" pitchFamily="34" charset="-120"/>
-              </a:rPr>
-              <a:t>I started building because of him.</a:t>
-            </a:r>
-            <a:endParaRPr lang="en-US" sz="1300" dirty="0"/>
-          </a:p>
-        </p:txBody>
-      </p:sp>
-      <p:sp>
-        <p:nvSpPr>
-          <p:cNvPr id="19" name="Shape 17"/>
-          <p:cNvSpPr/>
-          <p:nvPr/>
-        </p:nvSpPr>
-        <p:spPr>
-          <a:xfrm>
             <a:off x="713232" y="5074920"/>
             <a:ext cx="10765231" cy="914400"/>
           </a:xfrm>
@@ -13933,7 +13827,7 @@
       </p:sp>
       <p:sp>
         <p:nvSpPr>
-          <p:cNvPr id="20" name="Text 18"/>
+          <p:cNvPr id="18" name="Text 16"/>
           <p:cNvSpPr txBox="1"/>
           <p:nvPr/>
         </p:nvSpPr>
@@ -13972,7 +13866,7 @@
       </p:sp>
       <p:sp>
         <p:nvSpPr>
-          <p:cNvPr id="21" name="Text 19"/>
+          <p:cNvPr id="19" name="Text 17"/>
           <p:cNvSpPr txBox="1"/>
           <p:nvPr/>
         </p:nvSpPr>
@@ -14014,7 +13908,7 @@
       </p:sp>
       <p:sp>
         <p:nvSpPr>
-          <p:cNvPr id="22" name="Text 20"/>
+          <p:cNvPr id="20" name="Text 18"/>
           <p:cNvSpPr txBox="1"/>
           <p:nvPr/>
         </p:nvSpPr>
@@ -18347,7 +18241,7 @@
                 <a:ea typeface="Barlow" pitchFamily="34" charset="-122"/>
                 <a:cs typeface="Barlow" pitchFamily="34" charset="-120"/>
               </a:rPr>
-              <a:t>Fans/athlete −25%, monetise −20%</a:t>
+              <a:t>Fans/athlete −30%, monetise −25%, churn at benchmark</a:t>
             </a:r>
             <a:endParaRPr lang="en-US" sz="1250" dirty="0"/>
           </a:p>
@@ -19528,7 +19422,7 @@
                 <a:ea typeface="Barlow Condensed" pitchFamily="34" charset="-122"/>
                 <a:cs typeface="Barlow Condensed" pitchFamily="34" charset="-120"/>
               </a:rPr>
-              <a:t>R4</a:t>
+              <a:t>R2</a:t>
             </a:r>
             <a:endParaRPr lang="en-US" sz="2400" dirty="0"/>
           </a:p>
@@ -19570,7 +19464,7 @@
                 <a:ea typeface="Barlow" pitchFamily="34" charset="-122"/>
                 <a:cs typeface="Barlow" pitchFamily="34" charset="-120"/>
               </a:rPr>
-              <a:t>A funded entrant copies the model</a:t>
+              <a:t>Churn is at benchmark, not 45% better</a:t>
             </a:r>
             <a:endParaRPr lang="en-US" sz="1400" dirty="0"/>
           </a:p>
@@ -19651,7 +19545,7 @@
                 <a:ea typeface="Barlow" pitchFamily="34" charset="-122"/>
                 <a:cs typeface="Barlow" pitchFamily="34" charset="-120"/>
               </a:rPr>
-              <a:t>The defence is scoring history and athlete relationships, which take time nobody can buy</a:t>
+              <a:t>Measure early, on one athlete, before the extension. The model understates this</a:t>
             </a:r>
             <a:endParaRPr lang="en-US" sz="1200" dirty="0"/>
           </a:p>
@@ -19717,7 +19611,7 @@
                 <a:ea typeface="Barlow Condensed" pitchFamily="34" charset="-122"/>
                 <a:cs typeface="Barlow Condensed" pitchFamily="34" charset="-120"/>
               </a:rPr>
-              <a:t>R5</a:t>
+              <a:t>R3</a:t>
             </a:r>
             <a:endParaRPr lang="en-US" sz="2400" dirty="0"/>
           </a:p>
@@ -19759,7 +19653,7 @@
                 <a:ea typeface="Barlow" pitchFamily="34" charset="-122"/>
                 <a:cs typeface="Barlow" pitchFamily="34" charset="-120"/>
               </a:rPr>
-              <a:t>Regulatory: DAC7, age assurance, startup law</a:t>
+              <a:t>Athlete acquisition slower than modelled</a:t>
             </a:r>
             <a:endParaRPr lang="en-US" sz="1400" dirty="0"/>
           </a:p>
@@ -19840,7 +19734,7 @@
                 <a:ea typeface="Barlow" pitchFamily="34" charset="-122"/>
                 <a:cs typeface="Barlow" pitchFamily="34" charset="-120"/>
               </a:rPr>
-              <a:t>Compliance built in rather than retrofitted; reporting is a product feature</a:t>
+              <a:t>Club and federation channels are multiplicative: one conversation is 20 to 40 athletes</a:t>
             </a:r>
             <a:endParaRPr lang="en-US" sz="1200" dirty="0"/>
           </a:p>
@@ -21607,7 +21501,7 @@
                 <a:ea typeface="Barlow Condensed" pitchFamily="34" charset="-122"/>
                 <a:cs typeface="Barlow Condensed" pitchFamily="34" charset="-120"/>
               </a:rPr>
-              <a:t>0.64 FTE</a:t>
+              <a:t>0.06 FTE</a:t>
             </a:r>
             <a:endParaRPr lang="en-US" sz="3400" dirty="0"/>
           </a:p>
@@ -22073,7 +21967,7 @@
                 <a:ea typeface="Barlow Condensed" pitchFamily="34" charset="-122"/>
                 <a:cs typeface="Barlow Condensed" pitchFamily="34" charset="-120"/>
               </a:rPr>
-              <a:t>People are not going to spend time setting up social media and building followers purely around their sport if nothing comes back.</a:t>
+              <a:t>People are not going to invest in social media and building followers if the return is minimal</a:t>
             </a:r>
             <a:endParaRPr lang="en-US" sz="3200" dirty="0"/>
           </a:p>
@@ -22140,7 +22034,7 @@
                 <a:ea typeface="Barlow" pitchFamily="34" charset="-122"/>
                 <a:cs typeface="Barlow" pitchFamily="34" charset="-120"/>
               </a:rPr>
-              <a:t>One of the five. Rugby league players competing in Spain and Lebanon, and top-ranked Lebanese CrossFit athletes. The founder is capped by the Lebanese national rugby team, which is how this access exists.</a:t>
+              <a:t>One of the five. Rugby league players competing in Spain and Lebanon, and top-ranked Lebanese CrossFit athletes</a:t>
             </a:r>
             <a:endParaRPr lang="en-US" sz="1250" dirty="0"/>
           </a:p>
@@ -22482,49 +22376,7 @@
       </p:sp>
       <p:sp>
         <p:nvSpPr>
-          <p:cNvPr id="17" name="Text 15"/>
-          <p:cNvSpPr txBox="1"/>
-          <p:nvPr/>
-        </p:nvSpPr>
-        <p:spPr>
-          <a:xfrm>
-            <a:off x="713232" y="4553712"/>
-            <a:ext cx="10765231" cy="457200"/>
-          </a:xfrm>
-          <a:prstGeom prst="rect">
-            <a:avLst/>
-          </a:prstGeom>
-          <a:noFill/>
-          <a:ln/>
-        </p:spPr>
-        <p:txBody>
-          <a:bodyPr wrap="square" lIns="0" tIns="0" rIns="0" bIns="0" rtlCol="0" anchor="t"/>
-          <a:lstStyle/>
-          <a:p>
-            <a:pPr marL="0" indent="0">
-              <a:lnSpc>
-                <a:spcPts val="3000"/>
-              </a:lnSpc>
-              <a:buNone/>
-            </a:pPr>
-            <a:r>
-              <a:rPr lang="en-US" sz="2600" dirty="0">
-                <a:solidFill>
-                  <a:srgbClr val="FFB020"/>
-                </a:solidFill>
-                <a:latin typeface="Barlow Condensed" pitchFamily="34" charset="0"/>
-                <a:ea typeface="Barlow Condensed" pitchFamily="34" charset="-122"/>
-                <a:cs typeface="Barlow Condensed" pitchFamily="34" charset="-120"/>
-              </a:rPr>
-              <a:t>A champion gets given things. Nobody is buying anything.</a:t>
-            </a:r>
-            <a:endParaRPr lang="en-US" sz="2600" dirty="0"/>
-          </a:p>
-        </p:txBody>
-      </p:sp>
-      <p:sp>
-        <p:nvSpPr>
-          <p:cNvPr id="18" name="Shape 16"/>
+          <p:cNvPr id="17" name="Shape 15"/>
           <p:cNvSpPr/>
           <p:nvPr/>
         </p:nvSpPr>
@@ -22549,7 +22401,7 @@
       </p:sp>
       <p:sp>
         <p:nvSpPr>
-          <p:cNvPr id="19" name="Text 17"/>
+          <p:cNvPr id="18" name="Text 16"/>
           <p:cNvSpPr txBox="1"/>
           <p:nvPr/>
         </p:nvSpPr>
@@ -22588,7 +22440,7 @@
       </p:sp>
       <p:sp>
         <p:nvSpPr>
-          <p:cNvPr id="20" name="Text 18"/>
+          <p:cNvPr id="19" name="Text 17"/>
           <p:cNvSpPr txBox="1"/>
           <p:nvPr/>
         </p:nvSpPr>
@@ -22630,7 +22482,7 @@
       </p:sp>
       <p:sp>
         <p:nvSpPr>
-          <p:cNvPr id="21" name="Shape 19"/>
+          <p:cNvPr id="20" name="Shape 18"/>
           <p:cNvSpPr/>
           <p:nvPr/>
         </p:nvSpPr>
@@ -22655,7 +22507,7 @@
       </p:sp>
       <p:sp>
         <p:nvSpPr>
-          <p:cNvPr id="22" name="Text 20"/>
+          <p:cNvPr id="21" name="Text 19"/>
           <p:cNvSpPr txBox="1"/>
           <p:nvPr/>
         </p:nvSpPr>
@@ -22694,7 +22546,7 @@
       </p:sp>
       <p:sp>
         <p:nvSpPr>
-          <p:cNvPr id="23" name="Text 21"/>
+          <p:cNvPr id="22" name="Text 20"/>
           <p:cNvSpPr txBox="1"/>
           <p:nvPr/>
         </p:nvSpPr>
@@ -22731,45 +22583,6 @@
               <a:t>Which suppresses the very supply the market is measured on</a:t>
             </a:r>
             <a:endParaRPr lang="en-US" sz="1150" dirty="0"/>
-          </a:p>
-        </p:txBody>
-      </p:sp>
-      <p:sp>
-        <p:nvSpPr>
-          <p:cNvPr id="24" name="Text 22"/>
-          <p:cNvSpPr txBox="1"/>
-          <p:nvPr/>
-        </p:nvSpPr>
-        <p:spPr>
-          <a:xfrm>
-            <a:off x="713232" y="6382512"/>
-            <a:ext cx="9667951" cy="274320"/>
-          </a:xfrm>
-          <a:prstGeom prst="rect">
-            <a:avLst/>
-          </a:prstGeom>
-          <a:noFill/>
-          <a:ln/>
-        </p:spPr>
-        <p:txBody>
-          <a:bodyPr wrap="square" lIns="0" tIns="0" rIns="0" bIns="0" rtlCol="0" anchor="t"/>
-          <a:lstStyle/>
-          <a:p>
-            <a:pPr marL="0" indent="0">
-              <a:buNone/>
-            </a:pPr>
-            <a:r>
-              <a:rPr lang="en-US" sz="950" dirty="0">
-                <a:solidFill>
-                  <a:srgbClr val="828C9A"/>
-                </a:solidFill>
-                <a:latin typeface="Barlow" pitchFamily="34" charset="0"/>
-                <a:ea typeface="Barlow" pitchFamily="34" charset="-122"/>
-                <a:cs typeface="Barlow" pitchFamily="34" charset="-120"/>
-              </a:rPr>
-              <a:t>Primary research, five semi-structured interviews, 2026. Convenience sample, reported as one.</a:t>
-            </a:r>
-            <a:endParaRPr lang="en-US" sz="950" dirty="0"/>
           </a:p>
         </p:txBody>
       </p:sp>
@@ -23490,153 +23303,6 @@
       </p:sp>
       <p:sp>
         <p:nvSpPr>
-          <p:cNvPr id="19" name="Shape 17"/>
-          <p:cNvSpPr/>
-          <p:nvPr/>
-        </p:nvSpPr>
-        <p:spPr>
-          <a:xfrm>
-            <a:off x="713232" y="5266944"/>
-            <a:ext cx="10765231" cy="804672"/>
-          </a:xfrm>
-          <a:prstGeom prst="roundRect">
-            <a:avLst>
-              <a:gd name="adj" fmla="val 4545"/>
-            </a:avLst>
-          </a:prstGeom>
-          <a:solidFill>
-            <a:srgbClr val="1F242C"/>
-          </a:solidFill>
-          <a:ln w="9525">
-            <a:solidFill>
-              <a:srgbClr val="262C35"/>
-            </a:solidFill>
-            <a:prstDash val="solid"/>
-          </a:ln>
-        </p:spPr>
-      </p:sp>
-      <p:sp>
-        <p:nvSpPr>
-          <p:cNvPr id="20" name="Text 18"/>
-          <p:cNvSpPr txBox="1"/>
-          <p:nvPr/>
-        </p:nvSpPr>
-        <p:spPr>
-          <a:xfrm>
-            <a:off x="987552" y="5449824"/>
-            <a:ext cx="2926080" cy="237744"/>
-          </a:xfrm>
-          <a:prstGeom prst="rect">
-            <a:avLst/>
-          </a:prstGeom>
-          <a:noFill/>
-          <a:ln/>
-        </p:spPr>
-        <p:txBody>
-          <a:bodyPr wrap="square" lIns="0" tIns="0" rIns="0" bIns="0" rtlCol="0" anchor="t"/>
-          <a:lstStyle/>
-          <a:p>
-            <a:pPr marL="0" indent="0">
-              <a:buNone/>
-            </a:pPr>
-            <a:r>
-              <a:rPr lang="en-US" sz="1350" kern="0" spc="220" dirty="0">
-                <a:solidFill>
-                  <a:srgbClr val="FFB020"/>
-                </a:solidFill>
-                <a:latin typeface="Barlow Condensed" pitchFamily="34" charset="0"/>
-                <a:ea typeface="Barlow Condensed" pitchFamily="34" charset="-122"/>
-                <a:cs typeface="Barlow Condensed" pitchFamily="34" charset="-120"/>
-              </a:rPr>
-              <a:t>THE ASSUMPTION I TEST FIRST</a:t>
-            </a:r>
-            <a:endParaRPr lang="en-US" sz="1350" dirty="0"/>
-          </a:p>
-        </p:txBody>
-      </p:sp>
-      <p:sp>
-        <p:nvSpPr>
-          <p:cNvPr id="21" name="Text 19"/>
-          <p:cNvSpPr txBox="1"/>
-          <p:nvPr/>
-        </p:nvSpPr>
-        <p:spPr>
-          <a:xfrm>
-            <a:off x="4187952" y="5413248"/>
-            <a:ext cx="7016191" cy="566928"/>
-          </a:xfrm>
-          <a:prstGeom prst="rect">
-            <a:avLst/>
-          </a:prstGeom>
-          <a:noFill/>
-          <a:ln/>
-        </p:spPr>
-        <p:txBody>
-          <a:bodyPr wrap="square" lIns="0" tIns="0" rIns="0" bIns="0" rtlCol="0" anchor="t"/>
-          <a:lstStyle/>
-          <a:p>
-            <a:pPr marL="0" indent="0">
-              <a:lnSpc>
-                <a:spcPts val="1700"/>
-              </a:lnSpc>
-              <a:buNone/>
-            </a:pPr>
-            <a:r>
-              <a:rPr lang="en-US" sz="1300" dirty="0">
-                <a:solidFill>
-                  <a:srgbClr val="AEB6C2"/>
-                </a:solidFill>
-                <a:latin typeface="Barlow" pitchFamily="34" charset="0"/>
-                <a:ea typeface="Barlow" pitchFamily="34" charset="-122"/>
-                <a:cs typeface="Barlow" pitchFamily="34" charset="-120"/>
-              </a:rPr>
-              <a:t>Twenty sponsor conversations before the pre-seed gate, and the answer that kills it is written down in advance: if brands say they already know what they get, the analytics engine is not a differentiator.</a:t>
-            </a:r>
-            <a:endParaRPr lang="en-US" sz="1300" dirty="0"/>
-          </a:p>
-        </p:txBody>
-      </p:sp>
-      <p:sp>
-        <p:nvSpPr>
-          <p:cNvPr id="22" name="Text 20"/>
-          <p:cNvSpPr txBox="1"/>
-          <p:nvPr/>
-        </p:nvSpPr>
-        <p:spPr>
-          <a:xfrm>
-            <a:off x="713232" y="6382512"/>
-            <a:ext cx="9667951" cy="274320"/>
-          </a:xfrm>
-          <a:prstGeom prst="rect">
-            <a:avLst/>
-          </a:prstGeom>
-          <a:noFill/>
-          <a:ln/>
-        </p:spPr>
-        <p:txBody>
-          <a:bodyPr wrap="square" lIns="0" tIns="0" rIns="0" bIns="0" rtlCol="0" anchor="t"/>
-          <a:lstStyle/>
-          <a:p>
-            <a:pPr marL="0" indent="0">
-              <a:buNone/>
-            </a:pPr>
-            <a:r>
-              <a:rPr lang="en-US" sz="950" dirty="0">
-                <a:solidFill>
-                  <a:srgbClr val="828C9A"/>
-                </a:solidFill>
-                <a:latin typeface="Barlow" pitchFamily="34" charset="0"/>
-                <a:ea typeface="Barlow" pitchFamily="34" charset="-122"/>
-                <a:cs typeface="Barlow" pitchFamily="34" charset="-120"/>
-              </a:rPr>
-              <a:t>Sponsor discovery programme, section 4.6: four buyer groups, seven questions, each one aimed at an assumption the model depends on.</a:t>
-            </a:r>
-            <a:endParaRPr lang="en-US" sz="950" dirty="0"/>
-          </a:p>
-        </p:txBody>
-      </p:sp>
-      <p:sp>
-        <p:nvSpPr>
           <p:cNvPr id="25" name="Slide Number Placeholder 0"/>
           <p:cNvSpPr>
             <a:spLocks noGrp="1"/>
@@ -24891,17 +24557,6 @@
               </a:rPr>
               <a:t>15% of fan revenue</a:t>
             </a:r>
-            <a:r>
-              <a:rPr lang="en-US" sz="1200" dirty="0">
-                <a:solidFill>
-                  <a:srgbClr val="828C9A"/>
-                </a:solidFill>
-                <a:latin typeface="Barlow" pitchFamily="34" charset="0"/>
-                <a:ea typeface="Barlow" pitchFamily="34" charset="-122"/>
-                <a:cs typeface="Barlow" pitchFamily="34" charset="-120"/>
-              </a:rPr>
-              <a:t>   ·   48% of Y7</a:t>
-            </a:r>
             <a:endParaRPr lang="en-US" sz="1600" dirty="0"/>
           </a:p>
         </p:txBody>
@@ -25154,17 +24809,6 @@
                 <a:cs typeface="Barlow Condensed" pitchFamily="34" charset="-120"/>
               </a:rPr>
               <a:t>10% of deal value, plus €99 to €999 a month</a:t>
-            </a:r>
-            <a:r>
-              <a:rPr lang="en-US" sz="1200" dirty="0">
-                <a:solidFill>
-                  <a:srgbClr val="828C9A"/>
-                </a:solidFill>
-                <a:latin typeface="Barlow" pitchFamily="34" charset="0"/>
-                <a:ea typeface="Barlow" pitchFamily="34" charset="-122"/>
-                <a:cs typeface="Barlow" pitchFamily="34" charset="-120"/>
-              </a:rPr>
-              <a:t>   ·   52% of Y7</a:t>
             </a:r>
             <a:endParaRPr lang="en-US" sz="1600" dirty="0"/>
           </a:p>
@@ -27122,51 +26766,9 @@
           </a:p>
         </p:txBody>
       </p:sp>
-      <p:sp>
-        <p:nvSpPr>
-          <p:cNvPr id="17" name="Text 15"/>
-          <p:cNvSpPr txBox="1"/>
-          <p:nvPr/>
-        </p:nvSpPr>
-        <p:spPr>
-          <a:xfrm>
-            <a:off x="713232" y="4846320"/>
-            <a:ext cx="3657600" cy="274320"/>
-          </a:xfrm>
-          <a:prstGeom prst="rect">
-            <a:avLst/>
-          </a:prstGeom>
-          <a:noFill/>
-          <a:ln/>
-        </p:spPr>
-        <p:txBody>
-          <a:bodyPr wrap="square" lIns="0" tIns="0" rIns="0" bIns="0" rtlCol="0" anchor="t"/>
-          <a:lstStyle/>
-          <a:p>
-            <a:pPr marL="0" indent="0">
-              <a:lnSpc>
-                <a:spcPts val="2200"/>
-              </a:lnSpc>
-              <a:buNone/>
-            </a:pPr>
-            <a:r>
-              <a:rPr lang="en-US" sz="1150" dirty="0">
-                <a:solidFill>
-                  <a:srgbClr val="828C9A"/>
-                </a:solidFill>
-                <a:latin typeface="Barlow" pitchFamily="34" charset="0"/>
-                <a:ea typeface="Barlow" pitchFamily="34" charset="-122"/>
-                <a:cs typeface="Barlow" pitchFamily="34" charset="-120"/>
-              </a:rPr>
-              <a:t>Fourteen demo accounts. Registration is open.</a:t>
-            </a:r>
-            <a:endParaRPr lang="en-US" sz="1150" dirty="0"/>
-          </a:p>
-        </p:txBody>
-      </p:sp>
       <p:pic>
         <p:nvPicPr>
-          <p:cNvPr id="18" name="Image 0" descr="C:\Users\User\OneDrive - Universitat Ramón Llull\Desktop\stride\business-plan\attachments\ui\02-athlete-dashboard.png"/>
+          <p:cNvPr id="17" name="Image 0" descr="C:\Users\User\OneDrive - Universitat Ramón Llull\Desktop\stride\business-plan\attachments\ui\02-athlete-dashboard.png"/>
           <p:cNvPicPr>
             <a:picLocks noChangeAspect="1"/>
           </p:cNvPicPr>
@@ -27188,45 +26790,6 @@
           </a:prstGeom>
         </p:spPr>
       </p:pic>
-      <p:sp>
-        <p:nvSpPr>
-          <p:cNvPr id="19" name="Text 16"/>
-          <p:cNvSpPr txBox="1"/>
-          <p:nvPr/>
-        </p:nvSpPr>
-        <p:spPr>
-          <a:xfrm>
-            <a:off x="713232" y="6382512"/>
-            <a:ext cx="9667951" cy="274320"/>
-          </a:xfrm>
-          <a:prstGeom prst="rect">
-            <a:avLst/>
-          </a:prstGeom>
-          <a:noFill/>
-          <a:ln/>
-        </p:spPr>
-        <p:txBody>
-          <a:bodyPr wrap="square" lIns="0" tIns="0" rIns="0" bIns="0" rtlCol="0" anchor="t"/>
-          <a:lstStyle/>
-          <a:p>
-            <a:pPr marL="0" indent="0">
-              <a:buNone/>
-            </a:pPr>
-            <a:r>
-              <a:rPr lang="en-US" sz="950" dirty="0">
-                <a:solidFill>
-                  <a:srgbClr val="828C9A"/>
-                </a:solidFill>
-                <a:latin typeface="Barlow" pitchFamily="34" charset="0"/>
-                <a:ea typeface="Barlow" pitchFamily="34" charset="-122"/>
-                <a:cs typeface="Barlow" pitchFamily="34" charset="-120"/>
-              </a:rPr>
-              <a:t>Athlete dashboard, captured from the running application.</a:t>
-            </a:r>
-            <a:endParaRPr lang="en-US" sz="950" dirty="0"/>
-          </a:p>
-        </p:txBody>
-      </p:sp>
       <p:sp>
         <p:nvSpPr>
           <p:cNvPr id="25" name="Slide Number Placeholder 0"/>
@@ -27869,45 +27432,6 @@
           </a:prstGeom>
         </p:spPr>
       </p:pic>
-      <p:sp>
-        <p:nvSpPr>
-          <p:cNvPr id="18" name="Text 15"/>
-          <p:cNvSpPr txBox="1"/>
-          <p:nvPr/>
-        </p:nvSpPr>
-        <p:spPr>
-          <a:xfrm>
-            <a:off x="713232" y="6382512"/>
-            <a:ext cx="9667951" cy="274320"/>
-          </a:xfrm>
-          <a:prstGeom prst="rect">
-            <a:avLst/>
-          </a:prstGeom>
-          <a:noFill/>
-          <a:ln/>
-        </p:spPr>
-        <p:txBody>
-          <a:bodyPr wrap="square" lIns="0" tIns="0" rIns="0" bIns="0" rtlCol="0" anchor="t"/>
-          <a:lstStyle/>
-          <a:p>
-            <a:pPr marL="0" indent="0">
-              <a:buNone/>
-            </a:pPr>
-            <a:r>
-              <a:rPr lang="en-US" sz="950" dirty="0">
-                <a:solidFill>
-                  <a:srgbClr val="828C9A"/>
-                </a:solidFill>
-                <a:latin typeface="Barlow" pitchFamily="34" charset="0"/>
-                <a:ea typeface="Barlow" pitchFamily="34" charset="-122"/>
-                <a:cs typeface="Barlow" pitchFamily="34" charset="-120"/>
-              </a:rPr>
-              <a:t>Campaign result view, captured from the running application. The demo's engagement figures are seeded, and the product labels them simulated on the screen itself.</a:t>
-            </a:r>
-            <a:endParaRPr lang="en-US" sz="950" dirty="0"/>
-          </a:p>
-        </p:txBody>
-      </p:sp>
       <p:sp>
         <p:nvSpPr>
           <p:cNvPr id="25" name="Slide Number Placeholder 0"/>

--- a/deck/Stride_Pitch_Deck.pptx
+++ b/deck/Stride_Pitch_Deck.pptx
@@ -144,12 +144,12 @@
   <p:extLst>
     <p:ext uri="{521415D9-36F7-43E2-AB2F-B90AF26B5E84}">
       <p14:sectionLst xmlns:p14="http://schemas.microsoft.com/office/powerpoint/2010/main">
-        <p14:section name="Open" id="{7BD90A15-5476-423F-5999-B4ACCB5F45F8}">
+        <p14:section name="Open" id="{6132153C-F8D3-057C-1E9A-3E723B0DA3C1}">
           <p14:sldIdLst>
             <p14:sldId id="256"/>
           </p14:sldIdLst>
         </p14:section>
-        <p14:section name="Problem" id="{82F5BD53-96AB-F7E7-E4E7-9894A09CFB36}">
+        <p14:section name="Problem" id="{930821ED-BA93-5DB7-FDFB-6E085406396C}">
           <p14:sldIdLst>
             <p14:sldId id="257"/>
             <p14:sldId id="258"/>
@@ -157,7 +157,7 @@
             <p14:sldId id="260"/>
           </p14:sldIdLst>
         </p14:section>
-        <p14:section name="Product" id="{B5D138D9-E363-22E4-4D96-8BB874C40B63}">
+        <p14:section name="Product" id="{D36DBB39-2387-51E4-4FBC-CC942A31B4B5}">
           <p14:sldIdLst>
             <p14:sldId id="261"/>
             <p14:sldId id="262"/>
@@ -166,28 +166,28 @@
             <p14:sldId id="265"/>
           </p14:sldIdLst>
         </p14:section>
-        <p14:section name="Market" id="{BC0FC328-1831-9DED-3241-3A4417D4A76E}">
+        <p14:section name="Market" id="{9B213108-67C2-060E-DF52-1141BC09E091}">
           <p14:sldIdLst>
             <p14:sldId id="266"/>
             <p14:sldId id="267"/>
             <p14:sldId id="268"/>
           </p14:sldIdLst>
         </p14:section>
-        <p14:section name="Model" id="{C87CA469-F79E-097E-77A4-09E0A22C4C48}">
+        <p14:section name="Model" id="{B80E22E8-480D-9025-482D-FE4E14A0E28B}">
           <p14:sldIdLst>
             <p14:sldId id="269"/>
             <p14:sldId id="270"/>
             <p14:sldId id="271"/>
           </p14:sldIdLst>
         </p14:section>
-        <p14:section name="Money" id="{3DB96A5D-C476-D2A1-BE0A-2A931652FB1F}">
+        <p14:section name="Money" id="{F3C5F64C-FA9C-C533-C9CE-DA2D8D5EF563}">
           <p14:sldIdLst>
             <p14:sldId id="272"/>
             <p14:sldId id="273"/>
             <p14:sldId id="274"/>
           </p14:sldIdLst>
         </p14:section>
-        <p14:section name="Backup" id="{78458866-2A9C-720C-8E4C-ECBE97AE5264}">
+        <p14:section name="Backup" id="{83794092-2096-6712-30FE-A5C160B859E6}">
           <p14:sldIdLst>
             <p14:sldId id="275"/>
             <p14:sldId id="276"/>
@@ -305,7 +305,7 @@
           </c:val>
           <c:extLst>
             <c:ext xmlns:c16="http://schemas.microsoft.com/office/drawing/2014/chart" uri="{C3380CC4-5D6E-409C-BE32-E72D297353CC}">
-              <c16:uniqueId val="{00000000-9808-4265-88D9-07E975753731}"/>
+              <c16:uniqueId val="{00000000-9BA9-47AC-91D1-82E534479A8F}"/>
             </c:ext>
           </c:extLst>
         </c:ser>
@@ -391,7 +391,7 @@
           </c:val>
           <c:extLst>
             <c:ext xmlns:c16="http://schemas.microsoft.com/office/drawing/2014/chart" uri="{C3380CC4-5D6E-409C-BE32-E72D297353CC}">
-              <c16:uniqueId val="{00000001-9808-4265-88D9-07E975753731}"/>
+              <c16:uniqueId val="{00000001-9BA9-47AC-91D1-82E534479A8F}"/>
             </c:ext>
           </c:extLst>
         </c:ser>
@@ -477,7 +477,7 @@
           </c:val>
           <c:extLst>
             <c:ext xmlns:c16="http://schemas.microsoft.com/office/drawing/2014/chart" uri="{C3380CC4-5D6E-409C-BE32-E72D297353CC}">
-              <c16:uniqueId val="{00000002-9808-4265-88D9-07E975753731}"/>
+              <c16:uniqueId val="{00000002-9BA9-47AC-91D1-82E534479A8F}"/>
             </c:ext>
           </c:extLst>
         </c:ser>
@@ -735,7 +735,7 @@
           </c:val>
           <c:extLst>
             <c:ext xmlns:c16="http://schemas.microsoft.com/office/drawing/2014/chart" uri="{C3380CC4-5D6E-409C-BE32-E72D297353CC}">
-              <c16:uniqueId val="{00000000-BC0E-47EF-BC14-9F4FBF81607D}"/>
+              <c16:uniqueId val="{00000000-829C-4666-9FD6-56D394CBFBE9}"/>
             </c:ext>
           </c:extLst>
         </c:ser>
@@ -857,7 +857,7 @@
           <c:smooth val="0"/>
           <c:extLst>
             <c:ext xmlns:c16="http://schemas.microsoft.com/office/drawing/2014/chart" uri="{C3380CC4-5D6E-409C-BE32-E72D297353CC}">
-              <c16:uniqueId val="{00000001-BC0E-47EF-BC14-9F4FBF81607D}"/>
+              <c16:uniqueId val="{00000001-829C-4666-9FD6-56D394CBFBE9}"/>
             </c:ext>
           </c:extLst>
         </c:ser>
@@ -1133,7 +1133,7 @@
           <c:smooth val="0"/>
           <c:extLst>
             <c:ext xmlns:c16="http://schemas.microsoft.com/office/drawing/2014/chart" uri="{C3380CC4-5D6E-409C-BE32-E72D297353CC}">
-              <c16:uniqueId val="{00000000-9DB2-429C-8256-E12B4D766DCD}"/>
+              <c16:uniqueId val="{00000000-FED6-433B-B552-FBD3A2F4F57A}"/>
             </c:ext>
           </c:extLst>
         </c:ser>
@@ -1298,7 +1298,7 @@
     </p:spTree>
     <p:extLst>
       <p:ext uri="{BB962C8B-B14F-4D97-AF65-F5344CB8AC3E}">
-        <p14:creationId xmlns:p14="http://schemas.microsoft.com/office/powerpoint/2010/main" val="3766977319"/>
+        <p14:creationId xmlns:p14="http://schemas.microsoft.com/office/powerpoint/2010/main" val="1694608085"/>
       </p:ext>
     </p:extLst>
   </p:cSld>
@@ -22382,7 +22382,7 @@
         </p:nvSpPr>
         <p:spPr>
           <a:xfrm>
-            <a:off x="713232" y="5248656"/>
+            <a:off x="713232" y="4846320"/>
             <a:ext cx="5245456" cy="12802"/>
           </a:xfrm>
           <a:prstGeom prst="rect">
@@ -22407,7 +22407,7 @@
         </p:nvSpPr>
         <p:spPr>
           <a:xfrm>
-            <a:off x="713232" y="5376672"/>
+            <a:off x="713232" y="4974336"/>
             <a:ext cx="5245456" cy="219456"/>
           </a:xfrm>
           <a:prstGeom prst="rect">
@@ -22446,7 +22446,7 @@
         </p:nvSpPr>
         <p:spPr>
           <a:xfrm>
-            <a:off x="713232" y="5614416"/>
+            <a:off x="713232" y="5212080"/>
             <a:ext cx="5245456" cy="548640"/>
           </a:xfrm>
           <a:prstGeom prst="rect">
@@ -22488,7 +22488,7 @@
         </p:nvSpPr>
         <p:spPr>
           <a:xfrm>
-            <a:off x="6233008" y="5248656"/>
+            <a:off x="6233008" y="4846320"/>
             <a:ext cx="5245456" cy="12802"/>
           </a:xfrm>
           <a:prstGeom prst="rect">
@@ -22513,7 +22513,7 @@
         </p:nvSpPr>
         <p:spPr>
           <a:xfrm>
-            <a:off x="6233008" y="5376672"/>
+            <a:off x="6233008" y="4974336"/>
             <a:ext cx="5245456" cy="219456"/>
           </a:xfrm>
           <a:prstGeom prst="rect">
@@ -22552,7 +22552,7 @@
         </p:nvSpPr>
         <p:spPr>
           <a:xfrm>
-            <a:off x="6233008" y="5614416"/>
+            <a:off x="6233008" y="5212080"/>
             <a:ext cx="5245456" cy="548640"/>
           </a:xfrm>
           <a:prstGeom prst="rect">

--- a/deck/Stride_Pitch_Deck.pptx
+++ b/deck/Stride_Pitch_Deck.pptx
@@ -144,12 +144,12 @@
   <p:extLst>
     <p:ext uri="{521415D9-36F7-43E2-AB2F-B90AF26B5E84}">
       <p14:sectionLst xmlns:p14="http://schemas.microsoft.com/office/powerpoint/2010/main">
-        <p14:section name="Open" id="{6132153C-F8D3-057C-1E9A-3E723B0DA3C1}">
+        <p14:section name="Open" id="{F1668F22-0D37-872C-D9EC-C26F6A666067}">
           <p14:sldIdLst>
             <p14:sldId id="256"/>
           </p14:sldIdLst>
         </p14:section>
-        <p14:section name="Problem" id="{930821ED-BA93-5DB7-FDFB-6E085406396C}">
+        <p14:section name="Problem" id="{86C8EE97-CC35-E437-9F46-3B4BF893722F}">
           <p14:sldIdLst>
             <p14:sldId id="257"/>
             <p14:sldId id="258"/>
@@ -157,7 +157,7 @@
             <p14:sldId id="260"/>
           </p14:sldIdLst>
         </p14:section>
-        <p14:section name="Product" id="{D36DBB39-2387-51E4-4FBC-CC942A31B4B5}">
+        <p14:section name="Product" id="{22A029F0-DCC9-E892-1840-781D274C4430}">
           <p14:sldIdLst>
             <p14:sldId id="261"/>
             <p14:sldId id="262"/>
@@ -166,28 +166,28 @@
             <p14:sldId id="265"/>
           </p14:sldIdLst>
         </p14:section>
-        <p14:section name="Market" id="{9B213108-67C2-060E-DF52-1141BC09E091}">
+        <p14:section name="Market" id="{C16F0314-7E78-E273-8AE7-FCF91EE356C4}">
           <p14:sldIdLst>
             <p14:sldId id="266"/>
             <p14:sldId id="267"/>
             <p14:sldId id="268"/>
           </p14:sldIdLst>
         </p14:section>
-        <p14:section name="Model" id="{B80E22E8-480D-9025-482D-FE4E14A0E28B}">
+        <p14:section name="Model" id="{4DB19A7E-5BAF-E293-4841-F3C21CB593FD}">
           <p14:sldIdLst>
             <p14:sldId id="269"/>
             <p14:sldId id="270"/>
             <p14:sldId id="271"/>
           </p14:sldIdLst>
         </p14:section>
-        <p14:section name="Money" id="{F3C5F64C-FA9C-C533-C9CE-DA2D8D5EF563}">
+        <p14:section name="Money" id="{50FF01C3-2B0B-0C4E-1EF9-6BF434B3E39F}">
           <p14:sldIdLst>
             <p14:sldId id="272"/>
             <p14:sldId id="273"/>
             <p14:sldId id="274"/>
           </p14:sldIdLst>
         </p14:section>
-        <p14:section name="Backup" id="{83794092-2096-6712-30FE-A5C160B859E6}">
+        <p14:section name="Backup" id="{C936FCA9-55B1-B837-5A0A-8F5E442699C0}">
           <p14:sldIdLst>
             <p14:sldId id="275"/>
             <p14:sldId id="276"/>
@@ -305,7 +305,7 @@
           </c:val>
           <c:extLst>
             <c:ext xmlns:c16="http://schemas.microsoft.com/office/drawing/2014/chart" uri="{C3380CC4-5D6E-409C-BE32-E72D297353CC}">
-              <c16:uniqueId val="{00000000-9BA9-47AC-91D1-82E534479A8F}"/>
+              <c16:uniqueId val="{00000000-1724-487A-9CC3-8B7CDF9B22C8}"/>
             </c:ext>
           </c:extLst>
         </c:ser>
@@ -391,7 +391,7 @@
           </c:val>
           <c:extLst>
             <c:ext xmlns:c16="http://schemas.microsoft.com/office/drawing/2014/chart" uri="{C3380CC4-5D6E-409C-BE32-E72D297353CC}">
-              <c16:uniqueId val="{00000001-9BA9-47AC-91D1-82E534479A8F}"/>
+              <c16:uniqueId val="{00000001-1724-487A-9CC3-8B7CDF9B22C8}"/>
             </c:ext>
           </c:extLst>
         </c:ser>
@@ -477,7 +477,7 @@
           </c:val>
           <c:extLst>
             <c:ext xmlns:c16="http://schemas.microsoft.com/office/drawing/2014/chart" uri="{C3380CC4-5D6E-409C-BE32-E72D297353CC}">
-              <c16:uniqueId val="{00000002-9BA9-47AC-91D1-82E534479A8F}"/>
+              <c16:uniqueId val="{00000002-1724-487A-9CC3-8B7CDF9B22C8}"/>
             </c:ext>
           </c:extLst>
         </c:ser>
@@ -735,7 +735,7 @@
           </c:val>
           <c:extLst>
             <c:ext xmlns:c16="http://schemas.microsoft.com/office/drawing/2014/chart" uri="{C3380CC4-5D6E-409C-BE32-E72D297353CC}">
-              <c16:uniqueId val="{00000000-829C-4666-9FD6-56D394CBFBE9}"/>
+              <c16:uniqueId val="{00000000-3F01-499D-8FD0-27A35B0225E7}"/>
             </c:ext>
           </c:extLst>
         </c:ser>
@@ -857,7 +857,7 @@
           <c:smooth val="0"/>
           <c:extLst>
             <c:ext xmlns:c16="http://schemas.microsoft.com/office/drawing/2014/chart" uri="{C3380CC4-5D6E-409C-BE32-E72D297353CC}">
-              <c16:uniqueId val="{00000001-829C-4666-9FD6-56D394CBFBE9}"/>
+              <c16:uniqueId val="{00000001-3F01-499D-8FD0-27A35B0225E7}"/>
             </c:ext>
           </c:extLst>
         </c:ser>
@@ -1133,7 +1133,7 @@
           <c:smooth val="0"/>
           <c:extLst>
             <c:ext xmlns:c16="http://schemas.microsoft.com/office/drawing/2014/chart" uri="{C3380CC4-5D6E-409C-BE32-E72D297353CC}">
-              <c16:uniqueId val="{00000000-FED6-433B-B552-FBD3A2F4F57A}"/>
+              <c16:uniqueId val="{00000000-BB0D-441C-8AED-E41F5DCD240B}"/>
             </c:ext>
           </c:extLst>
         </c:ser>
@@ -1298,7 +1298,7 @@
     </p:spTree>
     <p:extLst>
       <p:ext uri="{BB962C8B-B14F-4D97-AF65-F5344CB8AC3E}">
-        <p14:creationId xmlns:p14="http://schemas.microsoft.com/office/powerpoint/2010/main" val="1694608085"/>
+        <p14:creationId xmlns:p14="http://schemas.microsoft.com/office/powerpoint/2010/main" val="1485098789"/>
       </p:ext>
     </p:extLst>
   </p:cSld>
@@ -1984,7 +1984,7 @@
             <a:r>
               <a:rPr lang="en-US" dirty="0"/>
               <a:t>Year one, concretely, because a plan that cannot say what happens first is not a plan.
-250 athletes from 1,250 applications in two or three niche Spanish sports. Twenty sponsor conversations that are the first sales as much as they are research, closing about fifteen deals. One salary, mine, plus an anchor athlete on equity rather than cash. 113,000 euros.
+250 athletes from 1,250 applications in two or three niche Spanish sports. Twenty sponsor conversations that are the first sales as much as they are research, closing about fifteen deals. 113,000 euros of cash, two thirds of it available as a non-dilutive ENISA loan. One salary, mine, plus an anchor athlete on equity rather than cash.
 And note the build order, because it is counter-intuitive. We build the sponsorship rail first and the fan product last, even though the fan product is the thesis. Commission earns inside year one. The fan tier cannot, because it needs moderation and safeguarding built first.</a:t>
             </a:r>
           </a:p>
@@ -6956,12 +6956,12 @@
         </p:nvSpPr>
         <p:spPr>
           <a:xfrm>
-            <a:off x="713232" y="5138928"/>
-            <a:ext cx="10765231" cy="896112"/>
+            <a:off x="713232" y="5084064"/>
+            <a:ext cx="10765231" cy="1170432"/>
           </a:xfrm>
           <a:prstGeom prst="roundRect">
             <a:avLst>
-              <a:gd name="adj" fmla="val 4082"/>
+              <a:gd name="adj" fmla="val 3125"/>
             </a:avLst>
           </a:prstGeom>
           <a:solidFill>
@@ -6983,24 +6983,24 @@
         </p:nvSpPr>
         <p:spPr>
           <a:xfrm>
-            <a:off x="987552" y="5340096"/>
-            <a:ext cx="2743200" cy="237744"/>
-          </a:xfrm>
-          <a:prstGeom prst="rect">
-            <a:avLst/>
-          </a:prstGeom>
-          <a:noFill/>
-          <a:ln/>
-        </p:spPr>
-        <p:txBody>
-          <a:bodyPr wrap="square" lIns="0" tIns="0" rIns="0" bIns="0" rtlCol="0" anchor="t"/>
-          <a:lstStyle/>
-          <a:p>
-            <a:pPr marL="0" indent="0">
-              <a:buNone/>
-            </a:pPr>
-            <a:r>
-              <a:rPr lang="en-US" sz="1350" kern="0" spc="240" dirty="0">
+            <a:off x="987552" y="5266944"/>
+            <a:ext cx="4572000" cy="237744"/>
+          </a:xfrm>
+          <a:prstGeom prst="rect">
+            <a:avLst/>
+          </a:prstGeom>
+          <a:noFill/>
+          <a:ln/>
+        </p:spPr>
+        <p:txBody>
+          <a:bodyPr wrap="square" lIns="0" tIns="0" rIns="0" bIns="0" rtlCol="0" anchor="t"/>
+          <a:lstStyle/>
+          <a:p>
+            <a:pPr marL="0" indent="0">
+              <a:buNone/>
+            </a:pPr>
+            <a:r>
+              <a:rPr lang="en-US" sz="1300" kern="0" spc="220" dirty="0">
                 <a:solidFill>
                   <a:srgbClr val="FFB020"/>
                 </a:solidFill>
@@ -7008,9 +7008,9 @@
                 <a:ea typeface="Barlow Condensed" pitchFamily="34" charset="-122"/>
                 <a:cs typeface="Barlow Condensed" pitchFamily="34" charset="-120"/>
               </a:rPr>
-              <a:t>WHY THE TWO SIDES FIT</a:t>
-            </a:r>
-            <a:endParaRPr lang="en-US" sz="1350" dirty="0"/>
+              <a:t>THE SAME AUDIENCE, TWO BUYERS</a:t>
+            </a:r>
+            <a:endParaRPr lang="en-US" sz="1300" dirty="0"/>
           </a:p>
         </p:txBody>
       </p:sp>
@@ -7022,8 +7022,47 @@
         </p:nvSpPr>
         <p:spPr>
           <a:xfrm>
-            <a:off x="3913632" y="5303520"/>
-            <a:ext cx="7290511" cy="621792"/>
+            <a:off x="987552" y="5614416"/>
+            <a:ext cx="4925416" cy="219456"/>
+          </a:xfrm>
+          <a:prstGeom prst="rect">
+            <a:avLst/>
+          </a:prstGeom>
+          <a:noFill/>
+          <a:ln/>
+        </p:spPr>
+        <p:txBody>
+          <a:bodyPr wrap="square" lIns="0" tIns="0" rIns="0" bIns="0" rtlCol="0" anchor="t"/>
+          <a:lstStyle/>
+          <a:p>
+            <a:pPr marL="0" indent="0">
+              <a:buNone/>
+            </a:pPr>
+            <a:r>
+              <a:rPr lang="en-US" sz="1150" kern="0" spc="200" dirty="0">
+                <a:solidFill>
+                  <a:srgbClr val="828C9A"/>
+                </a:solidFill>
+                <a:latin typeface="Barlow Condensed" pitchFamily="34" charset="0"/>
+                <a:ea typeface="Barlow Condensed" pitchFamily="34" charset="-122"/>
+                <a:cs typeface="Barlow Condensed" pitchFamily="34" charset="-120"/>
+              </a:rPr>
+              <a:t>TO A NATIONAL ADVERTISER</a:t>
+            </a:r>
+            <a:endParaRPr lang="en-US" sz="1150" dirty="0"/>
+          </a:p>
+        </p:txBody>
+      </p:sp>
+      <p:sp>
+        <p:nvSpPr>
+          <p:cNvPr id="20" name="Text 18"/>
+          <p:cNvSpPr txBox="1"/>
+          <p:nvPr/>
+        </p:nvSpPr>
+        <p:spPr>
+          <a:xfrm>
+            <a:off x="987552" y="5870448"/>
+            <a:ext cx="4925416" cy="365760"/>
           </a:xfrm>
           <a:prstGeom prst="rect">
             <a:avLst/>
@@ -7037,28 +7076,109 @@
           <a:p>
             <a:pPr marL="0" indent="0">
               <a:lnSpc>
-                <a:spcPts val="1700"/>
+                <a:spcPts val="1800"/>
               </a:lnSpc>
               <a:buNone/>
             </a:pPr>
             <a:r>
-              <a:rPr lang="en-US" sz="1300" dirty="0">
-                <a:solidFill>
-                  <a:srgbClr val="AEB6C2"/>
+              <a:rPr lang="en-US" sz="1350" dirty="0">
+                <a:solidFill>
+                  <a:srgbClr val="828C9A"/>
                 </a:solidFill>
                 <a:latin typeface="Barlow" pitchFamily="34" charset="0"/>
                 <a:ea typeface="Barlow" pitchFamily="34" charset="-122"/>
                 <a:cs typeface="Barlow" pitchFamily="34" charset="-120"/>
               </a:rPr>
-              <a:t>A niche athlete's audience is concentrated where they train and compete. That concentration is worth little to a national advertiser, and it is exactly what the clinic two streets from the club is trying to buy and has no other way of buying. The same choice makes supply cheap and demand local.</a:t>
-            </a:r>
-            <a:endParaRPr lang="en-US" sz="1300" dirty="0"/>
-          </a:p>
-        </p:txBody>
-      </p:sp>
-      <p:sp>
-        <p:nvSpPr>
-          <p:cNvPr id="20" name="Text 18"/>
+              <a:t>Close to worthless, which is why nobody bids for it</a:t>
+            </a:r>
+            <a:endParaRPr lang="en-US" sz="1350" dirty="0"/>
+          </a:p>
+        </p:txBody>
+      </p:sp>
+      <p:sp>
+        <p:nvSpPr>
+          <p:cNvPr id="21" name="Text 19"/>
+          <p:cNvSpPr txBox="1"/>
+          <p:nvPr/>
+        </p:nvSpPr>
+        <p:spPr>
+          <a:xfrm>
+            <a:off x="6278728" y="5614416"/>
+            <a:ext cx="4925416" cy="219456"/>
+          </a:xfrm>
+          <a:prstGeom prst="rect">
+            <a:avLst/>
+          </a:prstGeom>
+          <a:noFill/>
+          <a:ln/>
+        </p:spPr>
+        <p:txBody>
+          <a:bodyPr wrap="square" lIns="0" tIns="0" rIns="0" bIns="0" rtlCol="0" anchor="t"/>
+          <a:lstStyle/>
+          <a:p>
+            <a:pPr marL="0" indent="0">
+              <a:buNone/>
+            </a:pPr>
+            <a:r>
+              <a:rPr lang="en-US" sz="1150" kern="0" spc="200" dirty="0">
+                <a:solidFill>
+                  <a:srgbClr val="FFB020"/>
+                </a:solidFill>
+                <a:latin typeface="Barlow Condensed" pitchFamily="34" charset="0"/>
+                <a:ea typeface="Barlow Condensed" pitchFamily="34" charset="-122"/>
+                <a:cs typeface="Barlow Condensed" pitchFamily="34" charset="-120"/>
+              </a:rPr>
+              <a:t>TO THE CLINIC TWO STREETS AWAY</a:t>
+            </a:r>
+            <a:endParaRPr lang="en-US" sz="1150" dirty="0"/>
+          </a:p>
+        </p:txBody>
+      </p:sp>
+      <p:sp>
+        <p:nvSpPr>
+          <p:cNvPr id="22" name="Text 20"/>
+          <p:cNvSpPr txBox="1"/>
+          <p:nvPr/>
+        </p:nvSpPr>
+        <p:spPr>
+          <a:xfrm>
+            <a:off x="6278728" y="5870448"/>
+            <a:ext cx="4925416" cy="365760"/>
+          </a:xfrm>
+          <a:prstGeom prst="rect">
+            <a:avLst/>
+          </a:prstGeom>
+          <a:noFill/>
+          <a:ln/>
+        </p:spPr>
+        <p:txBody>
+          <a:bodyPr wrap="square" lIns="0" tIns="0" rIns="0" bIns="0" rtlCol="0" anchor="t"/>
+          <a:lstStyle/>
+          <a:p>
+            <a:pPr marL="0" indent="0">
+              <a:lnSpc>
+                <a:spcPts val="1800"/>
+              </a:lnSpc>
+              <a:buNone/>
+            </a:pPr>
+            <a:r>
+              <a:rPr lang="en-US" sz="1350" dirty="0">
+                <a:solidFill>
+                  <a:srgbClr val="F2F4F7"/>
+                </a:solidFill>
+                <a:latin typeface="Barlow" pitchFamily="34" charset="0"/>
+                <a:ea typeface="Barlow" pitchFamily="34" charset="-122"/>
+                <a:cs typeface="Barlow" pitchFamily="34" charset="-120"/>
+              </a:rPr>
+              <a:t>The only thing worth buying, and no other way to buy it</a:t>
+            </a:r>
+            <a:endParaRPr lang="en-US" sz="1350" dirty="0"/>
+          </a:p>
+        </p:txBody>
+      </p:sp>
+      <p:sp>
+        <p:nvSpPr>
+          <p:cNvPr id="23" name="Text 21"/>
           <p:cNvSpPr txBox="1"/>
           <p:nvPr/>
         </p:nvSpPr>
@@ -9396,7 +9516,7 @@
         <p:spPr>
           <a:xfrm>
             <a:off x="713232" y="1956816"/>
-            <a:ext cx="2519858" cy="2286000"/>
+            <a:ext cx="3344570" cy="2286000"/>
           </a:xfrm>
           <a:prstGeom prst="roundRect">
             <a:avLst>
@@ -9423,7 +9543,7 @@
         <p:spPr>
           <a:xfrm>
             <a:off x="969264" y="2176272"/>
-            <a:ext cx="2007794" cy="868680"/>
+            <a:ext cx="2832506" cy="868680"/>
           </a:xfrm>
           <a:prstGeom prst="rect">
             <a:avLst/>
@@ -9465,7 +9585,7 @@
         <p:spPr>
           <a:xfrm>
             <a:off x="969264" y="3054096"/>
-            <a:ext cx="2007794" cy="438912"/>
+            <a:ext cx="2832506" cy="438912"/>
           </a:xfrm>
           <a:prstGeom prst="rect">
             <a:avLst/>
@@ -9507,7 +9627,7 @@
         <p:spPr>
           <a:xfrm>
             <a:off x="969264" y="3547872"/>
-            <a:ext cx="2007794" cy="640080"/>
+            <a:ext cx="2832506" cy="640080"/>
           </a:xfrm>
           <a:prstGeom prst="rect">
             <a:avLst/>
@@ -9548,8 +9668,8 @@
         </p:nvSpPr>
         <p:spPr>
           <a:xfrm>
-            <a:off x="3461690" y="1956816"/>
-            <a:ext cx="2519858" cy="2286000"/>
+            <a:off x="4423562" y="1956816"/>
+            <a:ext cx="3344570" cy="2286000"/>
           </a:xfrm>
           <a:prstGeom prst="roundRect">
             <a:avLst>
@@ -9575,8 +9695,8 @@
         </p:nvSpPr>
         <p:spPr>
           <a:xfrm>
-            <a:off x="3717722" y="2176272"/>
-            <a:ext cx="2007794" cy="868680"/>
+            <a:off x="4679594" y="2176272"/>
+            <a:ext cx="2832506" cy="868680"/>
           </a:xfrm>
           <a:prstGeom prst="rect">
             <a:avLst/>
@@ -9617,8 +9737,8 @@
         </p:nvSpPr>
         <p:spPr>
           <a:xfrm>
-            <a:off x="3717722" y="3054096"/>
-            <a:ext cx="2007794" cy="438912"/>
+            <a:off x="4679594" y="3054096"/>
+            <a:ext cx="2832506" cy="438912"/>
           </a:xfrm>
           <a:prstGeom prst="rect">
             <a:avLst/>
@@ -9659,8 +9779,8 @@
         </p:nvSpPr>
         <p:spPr>
           <a:xfrm>
-            <a:off x="3717722" y="3547872"/>
-            <a:ext cx="2007794" cy="640080"/>
+            <a:off x="4679594" y="3547872"/>
+            <a:ext cx="2832506" cy="640080"/>
           </a:xfrm>
           <a:prstGeom prst="rect">
             <a:avLst/>
@@ -9701,8 +9821,8 @@
         </p:nvSpPr>
         <p:spPr>
           <a:xfrm>
-            <a:off x="6210148" y="1956816"/>
-            <a:ext cx="2519858" cy="2286000"/>
+            <a:off x="8133893" y="1956816"/>
+            <a:ext cx="3344570" cy="2286000"/>
           </a:xfrm>
           <a:prstGeom prst="roundRect">
             <a:avLst>
@@ -9728,8 +9848,8 @@
         </p:nvSpPr>
         <p:spPr>
           <a:xfrm>
-            <a:off x="6466180" y="2176272"/>
-            <a:ext cx="2007794" cy="868680"/>
+            <a:off x="8389925" y="2176272"/>
+            <a:ext cx="2832506" cy="868680"/>
           </a:xfrm>
           <a:prstGeom prst="rect">
             <a:avLst/>
@@ -9750,13 +9870,13 @@
             <a:r>
               <a:rPr lang="en-US" sz="5400" dirty="0">
                 <a:solidFill>
-                  <a:srgbClr val="F2F4F7"/>
+                  <a:srgbClr val="FFB020"/>
                 </a:solidFill>
                 <a:latin typeface="Barlow Condensed" pitchFamily="34" charset="0"/>
                 <a:ea typeface="Barlow Condensed" pitchFamily="34" charset="-122"/>
                 <a:cs typeface="Barlow Condensed" pitchFamily="34" charset="-120"/>
               </a:rPr>
-              <a:t>1</a:t>
+              <a:t>€113k</a:t>
             </a:r>
             <a:endParaRPr lang="en-US" sz="5400" dirty="0"/>
           </a:p>
@@ -9770,8 +9890,8 @@
         </p:nvSpPr>
         <p:spPr>
           <a:xfrm>
-            <a:off x="6466180" y="3054096"/>
-            <a:ext cx="2007794" cy="438912"/>
+            <a:off x="8389925" y="3054096"/>
+            <a:ext cx="2832506" cy="438912"/>
           </a:xfrm>
           <a:prstGeom prst="rect">
             <a:avLst/>
@@ -9798,7 +9918,7 @@
                 <a:ea typeface="Barlow Condensed" pitchFamily="34" charset="-122"/>
                 <a:cs typeface="Barlow Condensed" pitchFamily="34" charset="-120"/>
               </a:rPr>
-              <a:t>SALARY</a:t>
+              <a:t>OF CASH</a:t>
             </a:r>
             <a:endParaRPr lang="en-US" sz="1300" dirty="0"/>
           </a:p>
@@ -9812,8 +9932,8 @@
         </p:nvSpPr>
         <p:spPr>
           <a:xfrm>
-            <a:off x="6466180" y="3547872"/>
-            <a:ext cx="2007794" cy="640080"/>
+            <a:off x="8389925" y="3547872"/>
+            <a:ext cx="2832506" cy="640080"/>
           </a:xfrm>
           <a:prstGeom prst="rect">
             <a:avLst/>
@@ -9840,7 +9960,7 @@
                 <a:ea typeface="Barlow" pitchFamily="34" charset="-122"/>
                 <a:cs typeface="Barlow" pitchFamily="34" charset="-120"/>
               </a:rPr>
-              <a:t>mine, plus a named athlete partner on 5% equity rather than cash</a:t>
+              <a:t>two thirds of it available as a non-dilutive ENISA loan</a:t>
             </a:r>
             <a:endParaRPr lang="en-US" sz="1200" dirty="0"/>
           </a:p>
@@ -9848,18 +9968,57 @@
       </p:sp>
       <p:sp>
         <p:nvSpPr>
-          <p:cNvPr id="16" name="Shape 14"/>
+          <p:cNvPr id="16" name="Text 14"/>
+          <p:cNvSpPr txBox="1"/>
+          <p:nvPr/>
+        </p:nvSpPr>
+        <p:spPr>
+          <a:xfrm>
+            <a:off x="713232" y="4480560"/>
+            <a:ext cx="5943600" cy="237744"/>
+          </a:xfrm>
+          <a:prstGeom prst="rect">
+            <a:avLst/>
+          </a:prstGeom>
+          <a:noFill/>
+          <a:ln/>
+        </p:spPr>
+        <p:txBody>
+          <a:bodyPr wrap="square" lIns="0" tIns="0" rIns="0" bIns="0" rtlCol="0" anchor="t"/>
+          <a:lstStyle/>
+          <a:p>
+            <a:pPr marL="0" indent="0">
+              <a:buNone/>
+            </a:pPr>
+            <a:r>
+              <a:rPr lang="en-US" sz="1300" kern="0" spc="220" dirty="0">
+                <a:solidFill>
+                  <a:srgbClr val="FFB020"/>
+                </a:solidFill>
+                <a:latin typeface="Barlow Condensed" pitchFamily="34" charset="0"/>
+                <a:ea typeface="Barlow Condensed" pitchFamily="34" charset="-122"/>
+                <a:cs typeface="Barlow Condensed" pitchFamily="34" charset="-120"/>
+              </a:rPr>
+              <a:t>BUILD ORDER, AND IT IS THE OPPOSITE OF THE OBVIOUS ONE</a:t>
+            </a:r>
+            <a:endParaRPr lang="en-US" sz="1300" dirty="0"/>
+          </a:p>
+        </p:txBody>
+      </p:sp>
+      <p:sp>
+        <p:nvSpPr>
+          <p:cNvPr id="17" name="Shape 15"/>
           <p:cNvSpPr/>
           <p:nvPr/>
         </p:nvSpPr>
         <p:spPr>
           <a:xfrm>
-            <a:off x="8958605" y="1956816"/>
-            <a:ext cx="2519858" cy="2286000"/>
+            <a:off x="713232" y="4773168"/>
+            <a:ext cx="3283610" cy="914400"/>
           </a:xfrm>
           <a:prstGeom prst="roundRect">
             <a:avLst>
-              <a:gd name="adj" fmla="val 1600"/>
+              <a:gd name="adj" fmla="val 4000"/>
             </a:avLst>
           </a:prstGeom>
           <a:solidFill>
@@ -9875,56 +10034,64 @@
       </p:sp>
       <p:sp>
         <p:nvSpPr>
-          <p:cNvPr id="17" name="Text 15"/>
-          <p:cNvSpPr txBox="1"/>
-          <p:nvPr/>
-        </p:nvSpPr>
-        <p:spPr>
-          <a:xfrm>
-            <a:off x="9214637" y="2176272"/>
-            <a:ext cx="2007794" cy="868680"/>
-          </a:xfrm>
-          <a:prstGeom prst="rect">
-            <a:avLst/>
-          </a:prstGeom>
-          <a:noFill/>
-          <a:ln/>
-        </p:spPr>
-        <p:txBody>
-          <a:bodyPr wrap="square" lIns="0" tIns="0" rIns="0" bIns="0" rtlCol="0" anchor="t"/>
-          <a:lstStyle/>
-          <a:p>
-            <a:pPr marL="0" indent="0">
-              <a:lnSpc>
-                <a:spcPts val="5400"/>
-              </a:lnSpc>
-              <a:buNone/>
-            </a:pPr>
-            <a:r>
-              <a:rPr lang="en-US" sz="5400" dirty="0">
-                <a:solidFill>
-                  <a:srgbClr val="FFB020"/>
+          <p:cNvPr id="18" name="Text 16"/>
+          <p:cNvSpPr txBox="1"/>
+          <p:nvPr/>
+        </p:nvSpPr>
+        <p:spPr>
+          <a:xfrm>
+            <a:off x="950976" y="4937760"/>
+            <a:ext cx="2808122" cy="256032"/>
+          </a:xfrm>
+          <a:prstGeom prst="rect">
+            <a:avLst/>
+          </a:prstGeom>
+          <a:noFill/>
+          <a:ln/>
+        </p:spPr>
+        <p:txBody>
+          <a:bodyPr wrap="square" lIns="0" tIns="0" rIns="0" bIns="0" rtlCol="0" anchor="t"/>
+          <a:lstStyle/>
+          <a:p>
+            <a:pPr marL="0" indent="0">
+              <a:buNone/>
+            </a:pPr>
+            <a:r>
+              <a:rPr lang="en-US" sz="1500" dirty="0">
+                <a:solidFill>
+                  <a:srgbClr val="F2F4F7"/>
                 </a:solidFill>
                 <a:latin typeface="Barlow Condensed" pitchFamily="34" charset="0"/>
                 <a:ea typeface="Barlow Condensed" pitchFamily="34" charset="-122"/>
                 <a:cs typeface="Barlow Condensed" pitchFamily="34" charset="-120"/>
               </a:rPr>
-              <a:t>€113k</a:t>
-            </a:r>
-            <a:endParaRPr lang="en-US" sz="5400" dirty="0"/>
-          </a:p>
-        </p:txBody>
-      </p:sp>
-      <p:sp>
-        <p:nvSpPr>
-          <p:cNvPr id="18" name="Text 16"/>
-          <p:cNvSpPr txBox="1"/>
-          <p:nvPr/>
-        </p:nvSpPr>
-        <p:spPr>
-          <a:xfrm>
-            <a:off x="9214637" y="3054096"/>
-            <a:ext cx="2007794" cy="438912"/>
+              <a:t>01</a:t>
+            </a:r>
+            <a:r>
+              <a:rPr lang="en-US" sz="1500" kern="0" spc="180" dirty="0">
+                <a:solidFill>
+                  <a:srgbClr val="F2F4F7"/>
+                </a:solidFill>
+                <a:latin typeface="Barlow Condensed" pitchFamily="34" charset="0"/>
+                <a:ea typeface="Barlow Condensed" pitchFamily="34" charset="-122"/>
+                <a:cs typeface="Barlow Condensed" pitchFamily="34" charset="-120"/>
+              </a:rPr>
+              <a:t>   PAYMENT RAIL</a:t>
+            </a:r>
+            <a:endParaRPr lang="en-US" sz="1500" dirty="0"/>
+          </a:p>
+        </p:txBody>
+      </p:sp>
+      <p:sp>
+        <p:nvSpPr>
+          <p:cNvPr id="19" name="Text 17"/>
+          <p:cNvSpPr txBox="1"/>
+          <p:nvPr/>
+        </p:nvSpPr>
+        <p:spPr>
+          <a:xfrm>
+            <a:off x="950976" y="5212080"/>
+            <a:ext cx="2808122" cy="402336"/>
           </a:xfrm>
           <a:prstGeom prst="rect">
             <a:avLst/>
@@ -9943,7 +10110,46 @@
               <a:buNone/>
             </a:pPr>
             <a:r>
-              <a:rPr lang="en-US" sz="1300" kern="0" spc="220" dirty="0">
+              <a:rPr lang="en-US" sz="1150" dirty="0">
+                <a:solidFill>
+                  <a:srgbClr val="AEB6C2"/>
+                </a:solidFill>
+                <a:latin typeface="Barlow" pitchFamily="34" charset="0"/>
+                <a:ea typeface="Barlow" pitchFamily="34" charset="-122"/>
+                <a:cs typeface="Barlow" pitchFamily="34" charset="-120"/>
+              </a:rPr>
+              <a:t>Stripe Connect, KYC and payouts. Everything else sits on top of it.</a:t>
+            </a:r>
+            <a:endParaRPr lang="en-US" sz="1150" dirty="0"/>
+          </a:p>
+        </p:txBody>
+      </p:sp>
+      <p:sp>
+        <p:nvSpPr>
+          <p:cNvPr id="20" name="Text 18"/>
+          <p:cNvSpPr txBox="1"/>
+          <p:nvPr/>
+        </p:nvSpPr>
+        <p:spPr>
+          <a:xfrm>
+            <a:off x="4033418" y="5047488"/>
+            <a:ext cx="384048" cy="457200"/>
+          </a:xfrm>
+          <a:prstGeom prst="rect">
+            <a:avLst/>
+          </a:prstGeom>
+          <a:noFill/>
+          <a:ln/>
+        </p:spPr>
+        <p:txBody>
+          <a:bodyPr wrap="square" lIns="0" tIns="0" rIns="0" bIns="0" rtlCol="0" anchor="t"/>
+          <a:lstStyle/>
+          <a:p>
+            <a:pPr marL="0" indent="0" algn="ctr">
+              <a:buNone/>
+            </a:pPr>
+            <a:r>
+              <a:rPr lang="en-US" sz="2400" dirty="0">
                 <a:solidFill>
                   <a:srgbClr val="828C9A"/>
                 </a:solidFill>
@@ -9951,22 +10157,99 @@
                 <a:ea typeface="Barlow Condensed" pitchFamily="34" charset="-122"/>
                 <a:cs typeface="Barlow Condensed" pitchFamily="34" charset="-120"/>
               </a:rPr>
-              <a:t>OF CASH</a:t>
-            </a:r>
-            <a:endParaRPr lang="en-US" sz="1300" dirty="0"/>
-          </a:p>
-        </p:txBody>
-      </p:sp>
-      <p:sp>
-        <p:nvSpPr>
-          <p:cNvPr id="19" name="Text 17"/>
-          <p:cNvSpPr txBox="1"/>
-          <p:nvPr/>
-        </p:nvSpPr>
-        <p:spPr>
-          <a:xfrm>
-            <a:off x="9214637" y="3547872"/>
-            <a:ext cx="2007794" cy="640080"/>
+              <a:t>›</a:t>
+            </a:r>
+            <a:endParaRPr lang="en-US" sz="2400" dirty="0"/>
+          </a:p>
+        </p:txBody>
+      </p:sp>
+      <p:sp>
+        <p:nvSpPr>
+          <p:cNvPr id="21" name="Shape 19"/>
+          <p:cNvSpPr/>
+          <p:nvPr/>
+        </p:nvSpPr>
+        <p:spPr>
+          <a:xfrm>
+            <a:off x="4454042" y="4773168"/>
+            <a:ext cx="3283610" cy="914400"/>
+          </a:xfrm>
+          <a:prstGeom prst="roundRect">
+            <a:avLst>
+              <a:gd name="adj" fmla="val 4000"/>
+            </a:avLst>
+          </a:prstGeom>
+          <a:solidFill>
+            <a:srgbClr val="1F242C"/>
+          </a:solidFill>
+          <a:ln w="9525">
+            <a:solidFill>
+              <a:srgbClr val="262C35"/>
+            </a:solidFill>
+            <a:prstDash val="solid"/>
+          </a:ln>
+        </p:spPr>
+      </p:sp>
+      <p:sp>
+        <p:nvSpPr>
+          <p:cNvPr id="22" name="Text 20"/>
+          <p:cNvSpPr txBox="1"/>
+          <p:nvPr/>
+        </p:nvSpPr>
+        <p:spPr>
+          <a:xfrm>
+            <a:off x="4691786" y="4937760"/>
+            <a:ext cx="2808122" cy="256032"/>
+          </a:xfrm>
+          <a:prstGeom prst="rect">
+            <a:avLst/>
+          </a:prstGeom>
+          <a:noFill/>
+          <a:ln/>
+        </p:spPr>
+        <p:txBody>
+          <a:bodyPr wrap="square" lIns="0" tIns="0" rIns="0" bIns="0" rtlCol="0" anchor="t"/>
+          <a:lstStyle/>
+          <a:p>
+            <a:pPr marL="0" indent="0">
+              <a:buNone/>
+            </a:pPr>
+            <a:r>
+              <a:rPr lang="en-US" sz="1500" dirty="0">
+                <a:solidFill>
+                  <a:srgbClr val="FFB020"/>
+                </a:solidFill>
+                <a:latin typeface="Barlow Condensed" pitchFamily="34" charset="0"/>
+                <a:ea typeface="Barlow Condensed" pitchFamily="34" charset="-122"/>
+                <a:cs typeface="Barlow Condensed" pitchFamily="34" charset="-120"/>
+              </a:rPr>
+              <a:t>02</a:t>
+            </a:r>
+            <a:r>
+              <a:rPr lang="en-US" sz="1500" kern="0" spc="180" dirty="0">
+                <a:solidFill>
+                  <a:srgbClr val="F2F4F7"/>
+                </a:solidFill>
+                <a:latin typeface="Barlow Condensed" pitchFamily="34" charset="0"/>
+                <a:ea typeface="Barlow Condensed" pitchFamily="34" charset="-122"/>
+                <a:cs typeface="Barlow Condensed" pitchFamily="34" charset="-120"/>
+              </a:rPr>
+              <a:t>   SPONSORSHIP BILLING</a:t>
+            </a:r>
+            <a:endParaRPr lang="en-US" sz="1500" dirty="0"/>
+          </a:p>
+        </p:txBody>
+      </p:sp>
+      <p:sp>
+        <p:nvSpPr>
+          <p:cNvPr id="23" name="Text 21"/>
+          <p:cNvSpPr txBox="1"/>
+          <p:nvPr/>
+        </p:nvSpPr>
+        <p:spPr>
+          <a:xfrm>
+            <a:off x="4691786" y="5212080"/>
+            <a:ext cx="2808122" cy="402336"/>
           </a:xfrm>
           <a:prstGeom prst="rect">
             <a:avLst/>
@@ -9980,12 +10263,12 @@
           <a:p>
             <a:pPr marL="0" indent="0">
               <a:lnSpc>
-                <a:spcPts val="1600"/>
+                <a:spcPts val="1500"/>
               </a:lnSpc>
               <a:buNone/>
             </a:pPr>
             <a:r>
-              <a:rPr lang="en-US" sz="1200" dirty="0">
+              <a:rPr lang="en-US" sz="1150" dirty="0">
                 <a:solidFill>
                   <a:srgbClr val="AEB6C2"/>
                 </a:solidFill>
@@ -9993,26 +10276,65 @@
                 <a:ea typeface="Barlow" pitchFamily="34" charset="-122"/>
                 <a:cs typeface="Barlow" pitchFamily="34" charset="-120"/>
               </a:rPr>
-              <a:t>two thirds of it available as a non-dilutive ENISA loan</a:t>
-            </a:r>
-            <a:endParaRPr lang="en-US" sz="1200" dirty="0"/>
-          </a:p>
-        </p:txBody>
-      </p:sp>
-      <p:sp>
-        <p:nvSpPr>
-          <p:cNvPr id="20" name="Shape 18"/>
+              <a:t>No moderation. No safeguarding. No media egress. Invoiced against a signed deal.</a:t>
+            </a:r>
+            <a:endParaRPr lang="en-US" sz="1150" dirty="0"/>
+          </a:p>
+        </p:txBody>
+      </p:sp>
+      <p:sp>
+        <p:nvSpPr>
+          <p:cNvPr id="24" name="Text 22"/>
+          <p:cNvSpPr txBox="1"/>
+          <p:nvPr/>
+        </p:nvSpPr>
+        <p:spPr>
+          <a:xfrm>
+            <a:off x="7774229" y="5047488"/>
+            <a:ext cx="384048" cy="457200"/>
+          </a:xfrm>
+          <a:prstGeom prst="rect">
+            <a:avLst/>
+          </a:prstGeom>
+          <a:noFill/>
+          <a:ln/>
+        </p:spPr>
+        <p:txBody>
+          <a:bodyPr wrap="square" lIns="0" tIns="0" rIns="0" bIns="0" rtlCol="0" anchor="t"/>
+          <a:lstStyle/>
+          <a:p>
+            <a:pPr marL="0" indent="0" algn="ctr">
+              <a:buNone/>
+            </a:pPr>
+            <a:r>
+              <a:rPr lang="en-US" sz="2400" dirty="0">
+                <a:solidFill>
+                  <a:srgbClr val="828C9A"/>
+                </a:solidFill>
+                <a:latin typeface="Barlow Condensed" pitchFamily="34" charset="0"/>
+                <a:ea typeface="Barlow Condensed" pitchFamily="34" charset="-122"/>
+                <a:cs typeface="Barlow Condensed" pitchFamily="34" charset="-120"/>
+              </a:rPr>
+              <a:t>›</a:t>
+            </a:r>
+            <a:endParaRPr lang="en-US" sz="2400" dirty="0"/>
+          </a:p>
+        </p:txBody>
+      </p:sp>
+      <p:sp>
+        <p:nvSpPr>
+          <p:cNvPr id="25" name="Shape 23"/>
           <p:cNvSpPr/>
           <p:nvPr/>
         </p:nvSpPr>
         <p:spPr>
           <a:xfrm>
-            <a:off x="713232" y="4425696"/>
-            <a:ext cx="10765231" cy="1097280"/>
+            <a:off x="8194853" y="4773168"/>
+            <a:ext cx="3283610" cy="914400"/>
           </a:xfrm>
           <a:prstGeom prst="roundRect">
             <a:avLst>
-              <a:gd name="adj" fmla="val 3333"/>
+              <a:gd name="adj" fmla="val 4000"/>
             </a:avLst>
           </a:prstGeom>
           <a:solidFill>
@@ -10028,53 +10350,64 @@
       </p:sp>
       <p:sp>
         <p:nvSpPr>
-          <p:cNvPr id="21" name="Text 19"/>
-          <p:cNvSpPr txBox="1"/>
-          <p:nvPr/>
-        </p:nvSpPr>
-        <p:spPr>
-          <a:xfrm>
-            <a:off x="987552" y="4608576"/>
-            <a:ext cx="4572000" cy="237744"/>
-          </a:xfrm>
-          <a:prstGeom prst="rect">
-            <a:avLst/>
-          </a:prstGeom>
-          <a:noFill/>
-          <a:ln/>
-        </p:spPr>
-        <p:txBody>
-          <a:bodyPr wrap="square" lIns="0" tIns="0" rIns="0" bIns="0" rtlCol="0" anchor="t"/>
-          <a:lstStyle/>
-          <a:p>
-            <a:pPr marL="0" indent="0">
-              <a:buNone/>
-            </a:pPr>
-            <a:r>
-              <a:rPr lang="en-US" sz="1300" kern="0" spc="220" dirty="0">
-                <a:solidFill>
-                  <a:srgbClr val="FFB020"/>
+          <p:cNvPr id="26" name="Text 24"/>
+          <p:cNvSpPr txBox="1"/>
+          <p:nvPr/>
+        </p:nvSpPr>
+        <p:spPr>
+          <a:xfrm>
+            <a:off x="8432597" y="4937760"/>
+            <a:ext cx="2808122" cy="256032"/>
+          </a:xfrm>
+          <a:prstGeom prst="rect">
+            <a:avLst/>
+          </a:prstGeom>
+          <a:noFill/>
+          <a:ln/>
+        </p:spPr>
+        <p:txBody>
+          <a:bodyPr wrap="square" lIns="0" tIns="0" rIns="0" bIns="0" rtlCol="0" anchor="t"/>
+          <a:lstStyle/>
+          <a:p>
+            <a:pPr marL="0" indent="0">
+              <a:buNone/>
+            </a:pPr>
+            <a:r>
+              <a:rPr lang="en-US" sz="1500" dirty="0">
+                <a:solidFill>
+                  <a:srgbClr val="F2F4F7"/>
                 </a:solidFill>
                 <a:latin typeface="Barlow Condensed" pitchFamily="34" charset="0"/>
                 <a:ea typeface="Barlow Condensed" pitchFamily="34" charset="-122"/>
                 <a:cs typeface="Barlow Condensed" pitchFamily="34" charset="-120"/>
               </a:rPr>
-              <a:t>THE SEQUENCE IS THE OPPOSITE OF THE OBVIOUS ONE</a:t>
-            </a:r>
-            <a:endParaRPr lang="en-US" sz="1300" dirty="0"/>
-          </a:p>
-        </p:txBody>
-      </p:sp>
-      <p:sp>
-        <p:nvSpPr>
-          <p:cNvPr id="22" name="Text 20"/>
-          <p:cNvSpPr txBox="1"/>
-          <p:nvPr/>
-        </p:nvSpPr>
-        <p:spPr>
-          <a:xfrm>
-            <a:off x="987552" y="4882896"/>
-            <a:ext cx="10216591" cy="621792"/>
+              <a:t>03</a:t>
+            </a:r>
+            <a:r>
+              <a:rPr lang="en-US" sz="1500" kern="0" spc="180" dirty="0">
+                <a:solidFill>
+                  <a:srgbClr val="F2F4F7"/>
+                </a:solidFill>
+                <a:latin typeface="Barlow Condensed" pitchFamily="34" charset="0"/>
+                <a:ea typeface="Barlow Condensed" pitchFamily="34" charset="-122"/>
+                <a:cs typeface="Barlow Condensed" pitchFamily="34" charset="-120"/>
+              </a:rPr>
+              <a:t>   FAN TIER</a:t>
+            </a:r>
+            <a:endParaRPr lang="en-US" sz="1500" dirty="0"/>
+          </a:p>
+        </p:txBody>
+      </p:sp>
+      <p:sp>
+        <p:nvSpPr>
+          <p:cNvPr id="27" name="Text 25"/>
+          <p:cNvSpPr txBox="1"/>
+          <p:nvPr/>
+        </p:nvSpPr>
+        <p:spPr>
+          <a:xfrm>
+            <a:off x="8432597" y="5212080"/>
+            <a:ext cx="2808122" cy="402336"/>
           </a:xfrm>
           <a:prstGeom prst="rect">
             <a:avLst/>
@@ -10088,12 +10421,12 @@
           <a:p>
             <a:pPr marL="0" indent="0">
               <a:lnSpc>
-                <a:spcPts val="1700"/>
+                <a:spcPts val="1500"/>
               </a:lnSpc>
               <a:buNone/>
             </a:pPr>
             <a:r>
-              <a:rPr lang="en-US" sz="1300" dirty="0">
+              <a:rPr lang="en-US" sz="1150" dirty="0">
                 <a:solidFill>
                   <a:srgbClr val="AEB6C2"/>
                 </a:solidFill>
@@ -10101,15 +10434,57 @@
                 <a:ea typeface="Barlow" pitchFamily="34" charset="-122"/>
                 <a:cs typeface="Barlow" pitchFamily="34" charset="-120"/>
               </a:rPr>
-              <a:t>Build the payment rail and sponsorship billing first, and the fan tier last. Commission is invoiced against a signed deal: it needs no content moderation, no minors safeguarding and no media egress, so it is the cheapest of the three to build and the only one that earns inside the first year.</a:t>
-            </a:r>
-            <a:endParaRPr lang="en-US" sz="1300" dirty="0"/>
-          </a:p>
-        </p:txBody>
-      </p:sp>
-      <p:sp>
-        <p:nvSpPr>
-          <p:cNvPr id="25" name="Slide Number Placeholder 0"/>
+              <a:t>Needs all three of those, so it ships last and earns from Y2.</a:t>
+            </a:r>
+            <a:endParaRPr lang="en-US" sz="1150" dirty="0"/>
+          </a:p>
+        </p:txBody>
+      </p:sp>
+      <p:sp>
+        <p:nvSpPr>
+          <p:cNvPr id="28" name="Text 26"/>
+          <p:cNvSpPr txBox="1"/>
+          <p:nvPr/>
+        </p:nvSpPr>
+        <p:spPr>
+          <a:xfrm>
+            <a:off x="713232" y="5833872"/>
+            <a:ext cx="10765231" cy="347472"/>
+          </a:xfrm>
+          <a:prstGeom prst="rect">
+            <a:avLst/>
+          </a:prstGeom>
+          <a:noFill/>
+          <a:ln/>
+        </p:spPr>
+        <p:txBody>
+          <a:bodyPr wrap="square" lIns="0" tIns="0" rIns="0" bIns="0" rtlCol="0" anchor="t"/>
+          <a:lstStyle/>
+          <a:p>
+            <a:pPr marL="0" indent="0">
+              <a:lnSpc>
+                <a:spcPts val="1900"/>
+              </a:lnSpc>
+              <a:buNone/>
+            </a:pPr>
+            <a:r>
+              <a:rPr lang="en-US" sz="1400" dirty="0">
+                <a:solidFill>
+                  <a:srgbClr val="F2F4F7"/>
+                </a:solidFill>
+                <a:latin typeface="Barlow" pitchFamily="34" charset="0"/>
+                <a:ea typeface="Barlow" pitchFamily="34" charset="-122"/>
+                <a:cs typeface="Barlow" pitchFamily="34" charset="-120"/>
+              </a:rPr>
+              <a:t>The cheapest of the three to build is the only one that earns inside the first year.</a:t>
+            </a:r>
+            <a:endParaRPr lang="en-US" sz="1400" dirty="0"/>
+          </a:p>
+        </p:txBody>
+      </p:sp>
+      <p:sp>
+        <p:nvSpPr>
+          <p:cNvPr id="29" name="Slide Number Placeholder 0"/>
           <p:cNvSpPr>
             <a:spLocks noGrp="1"/>
           </p:cNvSpPr>
@@ -13908,45 +14283,6 @@
       </p:sp>
       <p:sp>
         <p:nvSpPr>
-          <p:cNvPr id="20" name="Text 18"/>
-          <p:cNvSpPr txBox="1"/>
-          <p:nvPr/>
-        </p:nvSpPr>
-        <p:spPr>
-          <a:xfrm>
-            <a:off x="713232" y="6382512"/>
-            <a:ext cx="9667951" cy="274320"/>
-          </a:xfrm>
-          <a:prstGeom prst="rect">
-            <a:avLst/>
-          </a:prstGeom>
-          <a:noFill/>
-          <a:ln/>
-        </p:spPr>
-        <p:txBody>
-          <a:bodyPr wrap="square" lIns="0" tIns="0" rIns="0" bIns="0" rtlCol="0" anchor="t"/>
-          <a:lstStyle/>
-          <a:p>
-            <a:pPr marL="0" indent="0">
-              <a:buNone/>
-            </a:pPr>
-            <a:r>
-              <a:rPr lang="en-US" sz="950" dirty="0">
-                <a:solidFill>
-                  <a:srgbClr val="828C9A"/>
-                </a:solidFill>
-                <a:latin typeface="Barlow" pitchFamily="34" charset="0"/>
-                <a:ea typeface="Barlow" pitchFamily="34" charset="-122"/>
-                <a:cs typeface="Barlow" pitchFamily="34" charset="-120"/>
-              </a:rPr>
-              <a:t>One of the five athletes in the primary research. Full method and limitations in section 3.1.5.</a:t>
-            </a:r>
-            <a:endParaRPr lang="en-US" sz="950" dirty="0"/>
-          </a:p>
-        </p:txBody>
-      </p:sp>
-      <p:sp>
-        <p:nvSpPr>
           <p:cNvPr id="25" name="Slide Number Placeholder 0"/>
           <p:cNvSpPr>
             <a:spLocks noGrp="1"/>
@@ -24924,45 +25260,6 @@
       </p:sp>
       <p:sp>
         <p:nvSpPr>
-          <p:cNvPr id="21" name="Text 19"/>
-          <p:cNvSpPr txBox="1"/>
-          <p:nvPr/>
-        </p:nvSpPr>
-        <p:spPr>
-          <a:xfrm>
-            <a:off x="713232" y="6382512"/>
-            <a:ext cx="9667951" cy="274320"/>
-          </a:xfrm>
-          <a:prstGeom prst="rect">
-            <a:avLst/>
-          </a:prstGeom>
-          <a:noFill/>
-          <a:ln/>
-        </p:spPr>
-        <p:txBody>
-          <a:bodyPr wrap="square" lIns="0" tIns="0" rIns="0" bIns="0" rtlCol="0" anchor="t"/>
-          <a:lstStyle/>
-          <a:p>
-            <a:pPr marL="0" indent="0">
-              <a:buNone/>
-            </a:pPr>
-            <a:r>
-              <a:rPr lang="en-US" sz="950" dirty="0">
-                <a:solidFill>
-                  <a:srgbClr val="828C9A"/>
-                </a:solidFill>
-                <a:latin typeface="Barlow" pitchFamily="34" charset="0"/>
-                <a:ea typeface="Barlow" pitchFamily="34" charset="-122"/>
-                <a:cs typeface="Barlow" pitchFamily="34" charset="-120"/>
-              </a:rPr>
-              <a:t>Stride financial model: Y7 net revenue of €3.01M, 48% from fans and 52% from the two sponsor streams.</a:t>
-            </a:r>
-            <a:endParaRPr lang="en-US" sz="950" dirty="0"/>
-          </a:p>
-        </p:txBody>
-      </p:sp>
-      <p:sp>
-        <p:nvSpPr>
           <p:cNvPr id="25" name="Slide Number Placeholder 0"/>
           <p:cNvSpPr>
             <a:spLocks noGrp="1"/>
@@ -26768,7 +27065,7 @@
       </p:sp>
       <p:pic>
         <p:nvPicPr>
-          <p:cNvPr id="17" name="Image 0" descr="C:\Users\User\OneDrive - Universitat Ramón Llull\Desktop\stride\business-plan\attachments\ui\02-athlete-dashboard.png"/>
+          <p:cNvPr id="17" name="Image 0" descr="C:\Users\User\OneDrive - Universitat Ramón Llull\Desktop\stride\deck\qr-demo.png"/>
           <p:cNvPicPr>
             <a:picLocks noChangeAspect="1"/>
           </p:cNvPicPr>
@@ -26776,6 +27073,30 @@
         </p:nvPicPr>
         <p:blipFill>
           <a:blip r:embed="rId3"/>
+          <a:stretch>
+            <a:fillRect/>
+          </a:stretch>
+        </p:blipFill>
+        <p:spPr>
+          <a:xfrm>
+            <a:off x="713232" y="4956048"/>
+            <a:ext cx="1490472" cy="1508760"/>
+          </a:xfrm>
+          <a:prstGeom prst="rect">
+            <a:avLst/>
+          </a:prstGeom>
+        </p:spPr>
+      </p:pic>
+      <p:pic>
+        <p:nvPicPr>
+          <p:cNvPr id="18" name="Image 1" descr="C:\Users\User\OneDrive - Universitat Ramón Llull\Desktop\stride\business-plan\attachments\ui\02-athlete-dashboard.png"/>
+          <p:cNvPicPr>
+            <a:picLocks noChangeAspect="1"/>
+          </p:cNvPicPr>
+          <p:nvPr/>
+        </p:nvPicPr>
+        <p:blipFill>
+          <a:blip r:embed="rId4"/>
           <a:stretch>
             <a:fillRect/>
           </a:stretch>

--- a/deck/Stride_Pitch_Deck.pptx
+++ b/deck/Stride_Pitch_Deck.pptx
@@ -187,7 +187,7 @@
             <p14:sldId id="274"/>
           </p14:sldIdLst>
         </p14:section>
-        <p14:section name="Backup" id="{C936FCA9-55B1-B837-5A0A-8F5E442699C0}">
+        <p14:section name="Appendix" id="{C936FCA9-55B1-B837-5A0A-8F5E442699C0}">
           <p14:sldIdLst>
             <p14:sldId id="275"/>
             <p14:sldId id="276"/>
@@ -209,6 +209,380 @@
 </p:presentation>
 </file>
 
+<file path=ppt/changesInfos/changesInfo1.xml><?xml version="1.0" encoding="utf-8"?>
+<pc:chgInfo xmlns:a="http://schemas.openxmlformats.org/drawingml/2006/main" xmlns:r="http://schemas.openxmlformats.org/officeDocument/2006/relationships" xmlns:ac="http://schemas.microsoft.com/office/drawing/2013/main/command" xmlns:pc="http://schemas.microsoft.com/office/powerpoint/2013/main/command">
+  <pc:docChgLst>
+    <pc:chgData name="Zoghaib, Jad" userId="4b197848-b2d3-4296-8b9e-c2ff8ab49a21" providerId="ADAL" clId="{B933D1F9-BD17-4F58-B525-49B5C068FF7F}"/>
+    <pc:docChg chg="custSel modSld modSection">
+      <pc:chgData name="Zoghaib, Jad" userId="4b197848-b2d3-4296-8b9e-c2ff8ab49a21" providerId="ADAL" clId="{B933D1F9-BD17-4F58-B525-49B5C068FF7F}" dt="2026-10-11T23:09:10.514" v="156" actId="14100"/>
+      <pc:docMkLst>
+        <pc:docMk/>
+      </pc:docMkLst>
+      <pc:sldChg chg="modSp mod">
+        <pc:chgData name="Zoghaib, Jad" userId="4b197848-b2d3-4296-8b9e-c2ff8ab49a21" providerId="ADAL" clId="{B933D1F9-BD17-4F58-B525-49B5C068FF7F}" dt="2026-10-11T22:58:23.875" v="18" actId="1036"/>
+        <pc:sldMkLst>
+          <pc:docMk/>
+          <pc:sldMk cId="0" sldId="259"/>
+        </pc:sldMkLst>
+        <pc:spChg chg="mod">
+          <ac:chgData name="Zoghaib, Jad" userId="4b197848-b2d3-4296-8b9e-c2ff8ab49a21" providerId="ADAL" clId="{B933D1F9-BD17-4F58-B525-49B5C068FF7F}" dt="2026-10-11T22:58:23.875" v="18" actId="1036"/>
+          <ac:spMkLst>
+            <pc:docMk/>
+            <pc:sldMk cId="0" sldId="259"/>
+            <ac:spMk id="10" creationId="{00000000-0000-0000-0000-000000000000}"/>
+          </ac:spMkLst>
+        </pc:spChg>
+        <pc:spChg chg="mod">
+          <ac:chgData name="Zoghaib, Jad" userId="4b197848-b2d3-4296-8b9e-c2ff8ab49a21" providerId="ADAL" clId="{B933D1F9-BD17-4F58-B525-49B5C068FF7F}" dt="2026-10-11T22:58:23.875" v="18" actId="1036"/>
+          <ac:spMkLst>
+            <pc:docMk/>
+            <pc:sldMk cId="0" sldId="259"/>
+            <ac:spMk id="11" creationId="{00000000-0000-0000-0000-000000000000}"/>
+          </ac:spMkLst>
+        </pc:spChg>
+        <pc:spChg chg="mod">
+          <ac:chgData name="Zoghaib, Jad" userId="4b197848-b2d3-4296-8b9e-c2ff8ab49a21" providerId="ADAL" clId="{B933D1F9-BD17-4F58-B525-49B5C068FF7F}" dt="2026-10-11T22:58:23.875" v="18" actId="1036"/>
+          <ac:spMkLst>
+            <pc:docMk/>
+            <pc:sldMk cId="0" sldId="259"/>
+            <ac:spMk id="12" creationId="{00000000-0000-0000-0000-000000000000}"/>
+          </ac:spMkLst>
+        </pc:spChg>
+        <pc:spChg chg="mod">
+          <ac:chgData name="Zoghaib, Jad" userId="4b197848-b2d3-4296-8b9e-c2ff8ab49a21" providerId="ADAL" clId="{B933D1F9-BD17-4F58-B525-49B5C068FF7F}" dt="2026-10-11T22:58:23.875" v="18" actId="1036"/>
+          <ac:spMkLst>
+            <pc:docMk/>
+            <pc:sldMk cId="0" sldId="259"/>
+            <ac:spMk id="13" creationId="{00000000-0000-0000-0000-000000000000}"/>
+          </ac:spMkLst>
+        </pc:spChg>
+        <pc:spChg chg="mod">
+          <ac:chgData name="Zoghaib, Jad" userId="4b197848-b2d3-4296-8b9e-c2ff8ab49a21" providerId="ADAL" clId="{B933D1F9-BD17-4F58-B525-49B5C068FF7F}" dt="2026-10-11T22:58:23.875" v="18" actId="1036"/>
+          <ac:spMkLst>
+            <pc:docMk/>
+            <pc:sldMk cId="0" sldId="259"/>
+            <ac:spMk id="14" creationId="{00000000-0000-0000-0000-000000000000}"/>
+          </ac:spMkLst>
+        </pc:spChg>
+        <pc:spChg chg="mod">
+          <ac:chgData name="Zoghaib, Jad" userId="4b197848-b2d3-4296-8b9e-c2ff8ab49a21" providerId="ADAL" clId="{B933D1F9-BD17-4F58-B525-49B5C068FF7F}" dt="2026-10-11T22:58:23.875" v="18" actId="1036"/>
+          <ac:spMkLst>
+            <pc:docMk/>
+            <pc:sldMk cId="0" sldId="259"/>
+            <ac:spMk id="15" creationId="{00000000-0000-0000-0000-000000000000}"/>
+          </ac:spMkLst>
+        </pc:spChg>
+        <pc:spChg chg="mod">
+          <ac:chgData name="Zoghaib, Jad" userId="4b197848-b2d3-4296-8b9e-c2ff8ab49a21" providerId="ADAL" clId="{B933D1F9-BD17-4F58-B525-49B5C068FF7F}" dt="2026-10-11T22:58:23.875" v="18" actId="1036"/>
+          <ac:spMkLst>
+            <pc:docMk/>
+            <pc:sldMk cId="0" sldId="259"/>
+            <ac:spMk id="17" creationId="{00000000-0000-0000-0000-000000000000}"/>
+          </ac:spMkLst>
+        </pc:spChg>
+        <pc:spChg chg="mod">
+          <ac:chgData name="Zoghaib, Jad" userId="4b197848-b2d3-4296-8b9e-c2ff8ab49a21" providerId="ADAL" clId="{B933D1F9-BD17-4F58-B525-49B5C068FF7F}" dt="2026-10-11T22:58:23.875" v="18" actId="1036"/>
+          <ac:spMkLst>
+            <pc:docMk/>
+            <pc:sldMk cId="0" sldId="259"/>
+            <ac:spMk id="18" creationId="{00000000-0000-0000-0000-000000000000}"/>
+          </ac:spMkLst>
+        </pc:spChg>
+      </pc:sldChg>
+      <pc:sldChg chg="addSp delSp modSp mod">
+        <pc:chgData name="Zoghaib, Jad" userId="4b197848-b2d3-4296-8b9e-c2ff8ab49a21" providerId="ADAL" clId="{B933D1F9-BD17-4F58-B525-49B5C068FF7F}" dt="2026-10-11T23:09:10.514" v="156" actId="14100"/>
+        <pc:sldMkLst>
+          <pc:docMk/>
+          <pc:sldMk cId="0" sldId="263"/>
+        </pc:sldMkLst>
+        <pc:picChg chg="del mod">
+          <ac:chgData name="Zoghaib, Jad" userId="4b197848-b2d3-4296-8b9e-c2ff8ab49a21" providerId="ADAL" clId="{B933D1F9-BD17-4F58-B525-49B5C068FF7F}" dt="2026-10-11T23:09:04.727" v="142" actId="478"/>
+          <ac:picMkLst>
+            <pc:docMk/>
+            <pc:sldMk cId="0" sldId="263"/>
+            <ac:picMk id="17" creationId="{00000000-0000-0000-0000-000000000000}"/>
+          </ac:picMkLst>
+        </pc:picChg>
+        <pc:picChg chg="add mod">
+          <ac:chgData name="Zoghaib, Jad" userId="4b197848-b2d3-4296-8b9e-c2ff8ab49a21" providerId="ADAL" clId="{B933D1F9-BD17-4F58-B525-49B5C068FF7F}" dt="2026-10-11T23:09:10.514" v="156" actId="14100"/>
+          <ac:picMkLst>
+            <pc:docMk/>
+            <pc:sldMk cId="0" sldId="263"/>
+            <ac:picMk id="20" creationId="{AFD7C2E5-68B8-18D0-4B41-0133556E7EF6}"/>
+          </ac:picMkLst>
+        </pc:picChg>
+      </pc:sldChg>
+      <pc:sldChg chg="delSp modSp mod">
+        <pc:chgData name="Zoghaib, Jad" userId="4b197848-b2d3-4296-8b9e-c2ff8ab49a21" providerId="ADAL" clId="{B933D1F9-BD17-4F58-B525-49B5C068FF7F}" dt="2026-10-11T22:59:17.854" v="30" actId="478"/>
+        <pc:sldMkLst>
+          <pc:docMk/>
+          <pc:sldMk cId="0" sldId="266"/>
+        </pc:sldMkLst>
+        <pc:spChg chg="mod">
+          <ac:chgData name="Zoghaib, Jad" userId="4b197848-b2d3-4296-8b9e-c2ff8ab49a21" providerId="ADAL" clId="{B933D1F9-BD17-4F58-B525-49B5C068FF7F}" dt="2026-10-11T22:59:14.278" v="29" actId="1036"/>
+          <ac:spMkLst>
+            <pc:docMk/>
+            <pc:sldMk cId="0" sldId="266"/>
+            <ac:spMk id="5" creationId="{00000000-0000-0000-0000-000000000000}"/>
+          </ac:spMkLst>
+        </pc:spChg>
+        <pc:spChg chg="mod">
+          <ac:chgData name="Zoghaib, Jad" userId="4b197848-b2d3-4296-8b9e-c2ff8ab49a21" providerId="ADAL" clId="{B933D1F9-BD17-4F58-B525-49B5C068FF7F}" dt="2026-10-11T22:59:14.278" v="29" actId="1036"/>
+          <ac:spMkLst>
+            <pc:docMk/>
+            <pc:sldMk cId="0" sldId="266"/>
+            <ac:spMk id="8" creationId="{00000000-0000-0000-0000-000000000000}"/>
+          </ac:spMkLst>
+        </pc:spChg>
+        <pc:spChg chg="mod">
+          <ac:chgData name="Zoghaib, Jad" userId="4b197848-b2d3-4296-8b9e-c2ff8ab49a21" providerId="ADAL" clId="{B933D1F9-BD17-4F58-B525-49B5C068FF7F}" dt="2026-10-11T22:59:14.278" v="29" actId="1036"/>
+          <ac:spMkLst>
+            <pc:docMk/>
+            <pc:sldMk cId="0" sldId="266"/>
+            <ac:spMk id="11" creationId="{00000000-0000-0000-0000-000000000000}"/>
+          </ac:spMkLst>
+        </pc:spChg>
+        <pc:spChg chg="mod">
+          <ac:chgData name="Zoghaib, Jad" userId="4b197848-b2d3-4296-8b9e-c2ff8ab49a21" providerId="ADAL" clId="{B933D1F9-BD17-4F58-B525-49B5C068FF7F}" dt="2026-10-11T22:59:14.278" v="29" actId="1036"/>
+          <ac:spMkLst>
+            <pc:docMk/>
+            <pc:sldMk cId="0" sldId="266"/>
+            <ac:spMk id="14" creationId="{00000000-0000-0000-0000-000000000000}"/>
+          </ac:spMkLst>
+        </pc:spChg>
+        <pc:spChg chg="mod">
+          <ac:chgData name="Zoghaib, Jad" userId="4b197848-b2d3-4296-8b9e-c2ff8ab49a21" providerId="ADAL" clId="{B933D1F9-BD17-4F58-B525-49B5C068FF7F}" dt="2026-10-11T22:59:14.278" v="29" actId="1036"/>
+          <ac:spMkLst>
+            <pc:docMk/>
+            <pc:sldMk cId="0" sldId="266"/>
+            <ac:spMk id="17" creationId="{00000000-0000-0000-0000-000000000000}"/>
+          </ac:spMkLst>
+        </pc:spChg>
+        <pc:spChg chg="del">
+          <ac:chgData name="Zoghaib, Jad" userId="4b197848-b2d3-4296-8b9e-c2ff8ab49a21" providerId="ADAL" clId="{B933D1F9-BD17-4F58-B525-49B5C068FF7F}" dt="2026-10-11T22:59:17.854" v="30" actId="478"/>
+          <ac:spMkLst>
+            <pc:docMk/>
+            <pc:sldMk cId="0" sldId="266"/>
+            <ac:spMk id="28" creationId="{00000000-0000-0000-0000-000000000000}"/>
+          </ac:spMkLst>
+        </pc:spChg>
+      </pc:sldChg>
+      <pc:sldChg chg="delSp modSp mod">
+        <pc:chgData name="Zoghaib, Jad" userId="4b197848-b2d3-4296-8b9e-c2ff8ab49a21" providerId="ADAL" clId="{B933D1F9-BD17-4F58-B525-49B5C068FF7F}" dt="2026-10-11T23:00:55.632" v="43" actId="27918"/>
+        <pc:sldMkLst>
+          <pc:docMk/>
+          <pc:sldMk cId="0" sldId="269"/>
+        </pc:sldMkLst>
+        <pc:spChg chg="del">
+          <ac:chgData name="Zoghaib, Jad" userId="4b197848-b2d3-4296-8b9e-c2ff8ab49a21" providerId="ADAL" clId="{B933D1F9-BD17-4F58-B525-49B5C068FF7F}" dt="2026-10-11T22:59:35.715" v="32" actId="478"/>
+          <ac:spMkLst>
+            <pc:docMk/>
+            <pc:sldMk cId="0" sldId="269"/>
+            <ac:spMk id="15" creationId="{00000000-0000-0000-0000-000000000000}"/>
+          </ac:spMkLst>
+        </pc:spChg>
+        <pc:graphicFrameChg chg="mod">
+          <ac:chgData name="Zoghaib, Jad" userId="4b197848-b2d3-4296-8b9e-c2ff8ab49a21" providerId="ADAL" clId="{B933D1F9-BD17-4F58-B525-49B5C068FF7F}" dt="2026-10-11T23:00:51.166" v="40"/>
+          <ac:graphicFrameMkLst>
+            <pc:docMk/>
+            <pc:sldMk cId="0" sldId="269"/>
+            <ac:graphicFrameMk id="4" creationId="{00000000-0000-0000-0000-000000000000}"/>
+          </ac:graphicFrameMkLst>
+        </pc:graphicFrameChg>
+      </pc:sldChg>
+      <pc:sldChg chg="addSp delSp modSp mod">
+        <pc:chgData name="Zoghaib, Jad" userId="4b197848-b2d3-4296-8b9e-c2ff8ab49a21" providerId="ADAL" clId="{B933D1F9-BD17-4F58-B525-49B5C068FF7F}" dt="2026-10-11T23:02:00.756" v="85" actId="1036"/>
+        <pc:sldMkLst>
+          <pc:docMk/>
+          <pc:sldMk cId="0" sldId="271"/>
+        </pc:sldMkLst>
+        <pc:spChg chg="mod">
+          <ac:chgData name="Zoghaib, Jad" userId="4b197848-b2d3-4296-8b9e-c2ff8ab49a21" providerId="ADAL" clId="{B933D1F9-BD17-4F58-B525-49B5C068FF7F}" dt="2026-10-11T23:01:54.306" v="65" actId="164"/>
+          <ac:spMkLst>
+            <pc:docMk/>
+            <pc:sldMk cId="0" sldId="271"/>
+            <ac:spMk id="5" creationId="{00000000-0000-0000-0000-000000000000}"/>
+          </ac:spMkLst>
+        </pc:spChg>
+        <pc:spChg chg="mod">
+          <ac:chgData name="Zoghaib, Jad" userId="4b197848-b2d3-4296-8b9e-c2ff8ab49a21" providerId="ADAL" clId="{B933D1F9-BD17-4F58-B525-49B5C068FF7F}" dt="2026-10-11T23:01:54.306" v="65" actId="164"/>
+          <ac:spMkLst>
+            <pc:docMk/>
+            <pc:sldMk cId="0" sldId="271"/>
+            <ac:spMk id="6" creationId="{00000000-0000-0000-0000-000000000000}"/>
+          </ac:spMkLst>
+        </pc:spChg>
+        <pc:spChg chg="mod">
+          <ac:chgData name="Zoghaib, Jad" userId="4b197848-b2d3-4296-8b9e-c2ff8ab49a21" providerId="ADAL" clId="{B933D1F9-BD17-4F58-B525-49B5C068FF7F}" dt="2026-10-11T23:01:54.306" v="65" actId="164"/>
+          <ac:spMkLst>
+            <pc:docMk/>
+            <pc:sldMk cId="0" sldId="271"/>
+            <ac:spMk id="8" creationId="{00000000-0000-0000-0000-000000000000}"/>
+          </ac:spMkLst>
+        </pc:spChg>
+        <pc:spChg chg="mod">
+          <ac:chgData name="Zoghaib, Jad" userId="4b197848-b2d3-4296-8b9e-c2ff8ab49a21" providerId="ADAL" clId="{B933D1F9-BD17-4F58-B525-49B5C068FF7F}" dt="2026-10-11T23:01:54.306" v="65" actId="164"/>
+          <ac:spMkLst>
+            <pc:docMk/>
+            <pc:sldMk cId="0" sldId="271"/>
+            <ac:spMk id="10" creationId="{00000000-0000-0000-0000-000000000000}"/>
+          </ac:spMkLst>
+        </pc:spChg>
+        <pc:spChg chg="mod">
+          <ac:chgData name="Zoghaib, Jad" userId="4b197848-b2d3-4296-8b9e-c2ff8ab49a21" providerId="ADAL" clId="{B933D1F9-BD17-4F58-B525-49B5C068FF7F}" dt="2026-10-11T23:01:54.306" v="65" actId="164"/>
+          <ac:spMkLst>
+            <pc:docMk/>
+            <pc:sldMk cId="0" sldId="271"/>
+            <ac:spMk id="12" creationId="{00000000-0000-0000-0000-000000000000}"/>
+          </ac:spMkLst>
+        </pc:spChg>
+        <pc:spChg chg="mod">
+          <ac:chgData name="Zoghaib, Jad" userId="4b197848-b2d3-4296-8b9e-c2ff8ab49a21" providerId="ADAL" clId="{B933D1F9-BD17-4F58-B525-49B5C068FF7F}" dt="2026-10-11T23:01:54.306" v="65" actId="164"/>
+          <ac:spMkLst>
+            <pc:docMk/>
+            <pc:sldMk cId="0" sldId="271"/>
+            <ac:spMk id="14" creationId="{00000000-0000-0000-0000-000000000000}"/>
+          </ac:spMkLst>
+        </pc:spChg>
+        <pc:spChg chg="mod">
+          <ac:chgData name="Zoghaib, Jad" userId="4b197848-b2d3-4296-8b9e-c2ff8ab49a21" providerId="ADAL" clId="{B933D1F9-BD17-4F58-B525-49B5C068FF7F}" dt="2026-10-11T23:01:54.306" v="65" actId="164"/>
+          <ac:spMkLst>
+            <pc:docMk/>
+            <pc:sldMk cId="0" sldId="271"/>
+            <ac:spMk id="15" creationId="{00000000-0000-0000-0000-000000000000}"/>
+          </ac:spMkLst>
+        </pc:spChg>
+        <pc:spChg chg="mod">
+          <ac:chgData name="Zoghaib, Jad" userId="4b197848-b2d3-4296-8b9e-c2ff8ab49a21" providerId="ADAL" clId="{B933D1F9-BD17-4F58-B525-49B5C068FF7F}" dt="2026-10-11T23:01:54.306" v="65" actId="164"/>
+          <ac:spMkLst>
+            <pc:docMk/>
+            <pc:sldMk cId="0" sldId="271"/>
+            <ac:spMk id="16" creationId="{00000000-0000-0000-0000-000000000000}"/>
+          </ac:spMkLst>
+        </pc:spChg>
+        <pc:spChg chg="mod">
+          <ac:chgData name="Zoghaib, Jad" userId="4b197848-b2d3-4296-8b9e-c2ff8ab49a21" providerId="ADAL" clId="{B933D1F9-BD17-4F58-B525-49B5C068FF7F}" dt="2026-10-11T23:01:54.306" v="65" actId="164"/>
+          <ac:spMkLst>
+            <pc:docMk/>
+            <pc:sldMk cId="0" sldId="271"/>
+            <ac:spMk id="19" creationId="{00000000-0000-0000-0000-000000000000}"/>
+          </ac:spMkLst>
+        </pc:spChg>
+        <pc:spChg chg="mod">
+          <ac:chgData name="Zoghaib, Jad" userId="4b197848-b2d3-4296-8b9e-c2ff8ab49a21" providerId="ADAL" clId="{B933D1F9-BD17-4F58-B525-49B5C068FF7F}" dt="2026-10-11T23:01:54.306" v="65" actId="164"/>
+          <ac:spMkLst>
+            <pc:docMk/>
+            <pc:sldMk cId="0" sldId="271"/>
+            <ac:spMk id="23" creationId="{00000000-0000-0000-0000-000000000000}"/>
+          </ac:spMkLst>
+        </pc:spChg>
+        <pc:spChg chg="mod">
+          <ac:chgData name="Zoghaib, Jad" userId="4b197848-b2d3-4296-8b9e-c2ff8ab49a21" providerId="ADAL" clId="{B933D1F9-BD17-4F58-B525-49B5C068FF7F}" dt="2026-10-11T23:02:00.756" v="85" actId="1036"/>
+          <ac:spMkLst>
+            <pc:docMk/>
+            <pc:sldMk cId="0" sldId="271"/>
+            <ac:spMk id="26" creationId="{00000000-0000-0000-0000-000000000000}"/>
+          </ac:spMkLst>
+        </pc:spChg>
+        <pc:spChg chg="del">
+          <ac:chgData name="Zoghaib, Jad" userId="4b197848-b2d3-4296-8b9e-c2ff8ab49a21" providerId="ADAL" clId="{B933D1F9-BD17-4F58-B525-49B5C068FF7F}" dt="2026-10-11T23:01:45.623" v="44" actId="478"/>
+          <ac:spMkLst>
+            <pc:docMk/>
+            <pc:sldMk cId="0" sldId="271"/>
+            <ac:spMk id="27" creationId="{00000000-0000-0000-0000-000000000000}"/>
+          </ac:spMkLst>
+        </pc:spChg>
+        <pc:spChg chg="del">
+          <ac:chgData name="Zoghaib, Jad" userId="4b197848-b2d3-4296-8b9e-c2ff8ab49a21" providerId="ADAL" clId="{B933D1F9-BD17-4F58-B525-49B5C068FF7F}" dt="2026-10-11T23:01:45.623" v="44" actId="478"/>
+          <ac:spMkLst>
+            <pc:docMk/>
+            <pc:sldMk cId="0" sldId="271"/>
+            <ac:spMk id="28" creationId="{00000000-0000-0000-0000-000000000000}"/>
+          </ac:spMkLst>
+        </pc:spChg>
+        <pc:spChg chg="del">
+          <ac:chgData name="Zoghaib, Jad" userId="4b197848-b2d3-4296-8b9e-c2ff8ab49a21" providerId="ADAL" clId="{B933D1F9-BD17-4F58-B525-49B5C068FF7F}" dt="2026-10-11T23:01:45.623" v="44" actId="478"/>
+          <ac:spMkLst>
+            <pc:docMk/>
+            <pc:sldMk cId="0" sldId="271"/>
+            <ac:spMk id="29" creationId="{00000000-0000-0000-0000-000000000000}"/>
+          </ac:spMkLst>
+        </pc:spChg>
+        <pc:grpChg chg="mod">
+          <ac:chgData name="Zoghaib, Jad" userId="4b197848-b2d3-4296-8b9e-c2ff8ab49a21" providerId="ADAL" clId="{B933D1F9-BD17-4F58-B525-49B5C068FF7F}" dt="2026-10-11T23:01:57.696" v="66" actId="14100"/>
+          <ac:grpSpMkLst>
+            <pc:docMk/>
+            <pc:sldMk cId="0" sldId="271"/>
+            <ac:grpSpMk id="31" creationId="{294DF88F-7EF9-089C-888E-4CE131B19302}"/>
+          </ac:grpSpMkLst>
+        </pc:grpChg>
+      </pc:sldChg>
+      <pc:sldChg chg="modSp mod">
+        <pc:chgData name="Zoghaib, Jad" userId="4b197848-b2d3-4296-8b9e-c2ff8ab49a21" providerId="ADAL" clId="{B933D1F9-BD17-4F58-B525-49B5C068FF7F}" dt="2026-10-11T23:02:09.604" v="101" actId="1036"/>
+        <pc:sldMkLst>
+          <pc:docMk/>
+          <pc:sldMk cId="0" sldId="272"/>
+        </pc:sldMkLst>
+        <pc:spChg chg="mod">
+          <ac:chgData name="Zoghaib, Jad" userId="4b197848-b2d3-4296-8b9e-c2ff8ab49a21" providerId="ADAL" clId="{B933D1F9-BD17-4F58-B525-49B5C068FF7F}" dt="2026-10-11T23:02:09.604" v="101" actId="1036"/>
+          <ac:spMkLst>
+            <pc:docMk/>
+            <pc:sldMk cId="0" sldId="272"/>
+            <ac:spMk id="13" creationId="{00000000-0000-0000-0000-000000000000}"/>
+          </ac:spMkLst>
+        </pc:spChg>
+      </pc:sldChg>
+      <pc:sldChg chg="modSp mod">
+        <pc:chgData name="Zoghaib, Jad" userId="4b197848-b2d3-4296-8b9e-c2ff8ab49a21" providerId="ADAL" clId="{B933D1F9-BD17-4F58-B525-49B5C068FF7F}" dt="2026-10-11T23:02:16.801" v="117" actId="1036"/>
+        <pc:sldMkLst>
+          <pc:docMk/>
+          <pc:sldMk cId="0" sldId="273"/>
+        </pc:sldMkLst>
+        <pc:spChg chg="mod">
+          <ac:chgData name="Zoghaib, Jad" userId="4b197848-b2d3-4296-8b9e-c2ff8ab49a21" providerId="ADAL" clId="{B933D1F9-BD17-4F58-B525-49B5C068FF7F}" dt="2026-10-11T23:02:16.801" v="117" actId="1036"/>
+          <ac:spMkLst>
+            <pc:docMk/>
+            <pc:sldMk cId="0" sldId="273"/>
+            <ac:spMk id="19" creationId="{00000000-0000-0000-0000-000000000000}"/>
+          </ac:spMkLst>
+        </pc:spChg>
+      </pc:sldChg>
+      <pc:sldChg chg="delSp modSp mod">
+        <pc:chgData name="Zoghaib, Jad" userId="4b197848-b2d3-4296-8b9e-c2ff8ab49a21" providerId="ADAL" clId="{B933D1F9-BD17-4F58-B525-49B5C068FF7F}" dt="2026-10-11T23:03:41.720" v="133" actId="403"/>
+        <pc:sldMkLst>
+          <pc:docMk/>
+          <pc:sldMk cId="0" sldId="275"/>
+        </pc:sldMkLst>
+        <pc:spChg chg="mod">
+          <ac:chgData name="Zoghaib, Jad" userId="4b197848-b2d3-4296-8b9e-c2ff8ab49a21" providerId="ADAL" clId="{B933D1F9-BD17-4F58-B525-49B5C068FF7F}" dt="2026-10-11T23:03:41.720" v="133" actId="403"/>
+          <ac:spMkLst>
+            <pc:docMk/>
+            <pc:sldMk cId="0" sldId="275"/>
+            <ac:spMk id="2" creationId="{00000000-0000-0000-0000-000000000000}"/>
+          </ac:spMkLst>
+        </pc:spChg>
+        <pc:spChg chg="del">
+          <ac:chgData name="Zoghaib, Jad" userId="4b197848-b2d3-4296-8b9e-c2ff8ab49a21" providerId="ADAL" clId="{B933D1F9-BD17-4F58-B525-49B5C068FF7F}" dt="2026-10-11T23:03:31.150" v="118" actId="478"/>
+          <ac:spMkLst>
+            <pc:docMk/>
+            <pc:sldMk cId="0" sldId="275"/>
+            <ac:spMk id="3" creationId="{00000000-0000-0000-0000-000000000000}"/>
+          </ac:spMkLst>
+        </pc:spChg>
+        <pc:spChg chg="del">
+          <ac:chgData name="Zoghaib, Jad" userId="4b197848-b2d3-4296-8b9e-c2ff8ab49a21" providerId="ADAL" clId="{B933D1F9-BD17-4F58-B525-49B5C068FF7F}" dt="2026-10-11T23:03:31.150" v="118" actId="478"/>
+          <ac:spMkLst>
+            <pc:docMk/>
+            <pc:sldMk cId="0" sldId="275"/>
+            <ac:spMk id="4" creationId="{00000000-0000-0000-0000-000000000000}"/>
+          </ac:spMkLst>
+        </pc:spChg>
+      </pc:sldChg>
+    </pc:docChg>
+  </pc:docChgLst>
+</pc:chgInfo>
+</file>
+
 <file path=ppt/charts/chart1.xml><?xml version="1.0" encoding="utf-8"?>
 <c:chartSpace xmlns:c="http://schemas.openxmlformats.org/drawingml/2006/chart" xmlns:a="http://schemas.openxmlformats.org/drawingml/2006/main" xmlns:r="http://schemas.openxmlformats.org/officeDocument/2006/relationships" xmlns:c16r2="http://schemas.microsoft.com/office/drawing/2015/06/chart">
   <c:date1904 val="0"/>
@@ -218,7 +592,17 @@
   <c:chart>
     <c:autoTitleDeleted val="1"/>
     <c:plotArea>
-      <c:layout/>
+      <c:layout>
+        <c:manualLayout>
+          <c:layoutTarget val="inner"/>
+          <c:xMode val="edge"/>
+          <c:yMode val="edge"/>
+          <c:x val="9.2229943395629774E-2"/>
+          <c:y val="2.7210884353741503E-2"/>
+          <c:w val="0.90274997628308506"/>
+          <c:h val="0.84495130073026581"/>
+        </c:manualLayout>
+      </c:layout>
       <c:barChart>
         <c:barDir val="col"/>
         <c:grouping val="stacked"/>
@@ -3981,7 +4365,7 @@
           </a:prstGeom>
           <a:extLst>
             <a:ext uri="{C572A759-6A51-4108-AA02-DFA0A04FC94B}">
-              <ma14:wrappingTextBoxFlag xmlns:ma14="http://schemas.microsoft.com/office/mac/drawingml/2011/main" xmlns="" val="0"/>
+              <ma14:wrappingTextBoxFlag xmlns="" xmlns:ma14="http://schemas.microsoft.com/office/mac/drawingml/2011/main" val="0"/>
             </a:ext>
           </a:extLst>
         </p:spPr>
@@ -4062,7 +4446,7 @@
           </a:prstGeom>
           <a:extLst>
             <a:ext uri="{C572A759-6A51-4108-AA02-DFA0A04FC94B}">
-              <ma14:wrappingTextBoxFlag xmlns:ma14="http://schemas.microsoft.com/office/mac/drawingml/2011/main" xmlns="" val="0"/>
+              <ma14:wrappingTextBoxFlag xmlns="" xmlns:ma14="http://schemas.microsoft.com/office/mac/drawingml/2011/main" val="0"/>
             </a:ext>
           </a:extLst>
         </p:spPr>
@@ -4140,7 +4524,7 @@
           </a:prstGeom>
           <a:extLst>
             <a:ext uri="{C572A759-6A51-4108-AA02-DFA0A04FC94B}">
-              <ma14:wrappingTextBoxFlag xmlns:ma14="http://schemas.microsoft.com/office/mac/drawingml/2011/main" xmlns="" val="0"/>
+              <ma14:wrappingTextBoxFlag xmlns="" xmlns:ma14="http://schemas.microsoft.com/office/mac/drawingml/2011/main" val="0"/>
             </a:ext>
           </a:extLst>
         </p:spPr>
@@ -5235,7 +5619,7 @@
           </a:prstGeom>
           <a:extLst>
             <a:ext uri="{C572A759-6A51-4108-AA02-DFA0A04FC94B}">
-              <ma14:wrappingTextBoxFlag xmlns:ma14="http://schemas.microsoft.com/office/mac/drawingml/2011/main" xmlns="" val="0"/>
+              <ma14:wrappingTextBoxFlag xmlns="" xmlns:ma14="http://schemas.microsoft.com/office/mac/drawingml/2011/main" val="0"/>
             </a:ext>
           </a:extLst>
         </p:spPr>
@@ -5402,7 +5786,7 @@
         </p:nvSpPr>
         <p:spPr>
           <a:xfrm>
-            <a:off x="877824" y="2020824"/>
+            <a:off x="782935" y="2038076"/>
             <a:ext cx="2011680" cy="365760"/>
           </a:xfrm>
           <a:prstGeom prst="rect">
@@ -5508,7 +5892,7 @@
         </p:nvSpPr>
         <p:spPr>
           <a:xfrm>
-            <a:off x="877824" y="2624328"/>
+            <a:off x="782935" y="2641580"/>
             <a:ext cx="2011680" cy="365760"/>
           </a:xfrm>
           <a:prstGeom prst="rect">
@@ -5614,7 +5998,7 @@
         </p:nvSpPr>
         <p:spPr>
           <a:xfrm>
-            <a:off x="877824" y="3227832"/>
+            <a:off x="782935" y="3245084"/>
             <a:ext cx="2011680" cy="365760"/>
           </a:xfrm>
           <a:prstGeom prst="rect">
@@ -5720,7 +6104,7 @@
         </p:nvSpPr>
         <p:spPr>
           <a:xfrm>
-            <a:off x="877824" y="3831336"/>
+            <a:off x="782935" y="3848588"/>
             <a:ext cx="2011680" cy="365760"/>
           </a:xfrm>
           <a:prstGeom prst="rect">
@@ -5826,7 +6210,7 @@
         </p:nvSpPr>
         <p:spPr>
           <a:xfrm>
-            <a:off x="877824" y="4434840"/>
+            <a:off x="782935" y="4452092"/>
             <a:ext cx="2011680" cy="365760"/>
           </a:xfrm>
           <a:prstGeom prst="rect">
@@ -6247,45 +6631,6 @@
       </p:sp>
       <p:sp>
         <p:nvSpPr>
-          <p:cNvPr id="28" name="Text 26"/>
-          <p:cNvSpPr txBox="1"/>
-          <p:nvPr/>
-        </p:nvSpPr>
-        <p:spPr>
-          <a:xfrm>
-            <a:off x="713232" y="6382512"/>
-            <a:ext cx="9667951" cy="274320"/>
-          </a:xfrm>
-          <a:prstGeom prst="rect">
-            <a:avLst/>
-          </a:prstGeom>
-          <a:noFill/>
-          <a:ln/>
-        </p:spPr>
-        <p:txBody>
-          <a:bodyPr wrap="square" lIns="0" tIns="0" rIns="0" bIns="0" rtlCol="0" anchor="t"/>
-          <a:lstStyle/>
-          <a:p>
-            <a:pPr marL="0" indent="0">
-              <a:buNone/>
-            </a:pPr>
-            <a:r>
-              <a:rPr lang="en-US" sz="950" dirty="0">
-                <a:solidFill>
-                  <a:srgbClr val="828C9A"/>
-                </a:solidFill>
-                <a:latin typeface="Barlow" pitchFamily="34" charset="0"/>
-                <a:ea typeface="Barlow" pitchFamily="34" charset="-122"/>
-                <a:cs typeface="Barlow" pitchFamily="34" charset="-120"/>
-              </a:rPr>
-              <a:t>European Sponsorship Association, 2025, via Statista. Funnel: Eurostat, Eurobarometer 525, and the plan's own Sport Opportunity Index.</a:t>
-            </a:r>
-            <a:endParaRPr lang="en-US" sz="950" dirty="0"/>
-          </a:p>
-        </p:txBody>
-      </p:sp>
-      <p:sp>
-        <p:nvSpPr>
           <p:cNvPr id="29" name="Slide Number Placeholder 0"/>
           <p:cNvSpPr>
             <a:spLocks noGrp="1"/>
@@ -6304,7 +6649,7 @@
           </a:prstGeom>
           <a:extLst>
             <a:ext uri="{C572A759-6A51-4108-AA02-DFA0A04FC94B}">
-              <ma14:wrappingTextBoxFlag xmlns:ma14="http://schemas.microsoft.com/office/mac/drawingml/2011/main" xmlns="" val="0"/>
+              <ma14:wrappingTextBoxFlag xmlns="" xmlns:ma14="http://schemas.microsoft.com/office/mac/drawingml/2011/main" val="0"/>
             </a:ext>
           </a:extLst>
         </p:spPr>
@@ -7235,7 +7580,7 @@
           </a:prstGeom>
           <a:extLst>
             <a:ext uri="{C572A759-6A51-4108-AA02-DFA0A04FC94B}">
-              <ma14:wrappingTextBoxFlag xmlns:ma14="http://schemas.microsoft.com/office/mac/drawingml/2011/main" xmlns="" val="0"/>
+              <ma14:wrappingTextBoxFlag xmlns="" xmlns:ma14="http://schemas.microsoft.com/office/mac/drawingml/2011/main" val="0"/>
             </a:ext>
           </a:extLst>
         </p:spPr>
@@ -8798,7 +9143,7 @@
           </a:prstGeom>
           <a:extLst>
             <a:ext uri="{C572A759-6A51-4108-AA02-DFA0A04FC94B}">
-              <ma14:wrappingTextBoxFlag xmlns:ma14="http://schemas.microsoft.com/office/mac/drawingml/2011/main" xmlns="" val="0"/>
+              <ma14:wrappingTextBoxFlag xmlns="" xmlns:ma14="http://schemas.microsoft.com/office/mac/drawingml/2011/main" val="0"/>
             </a:ext>
           </a:extLst>
         </p:spPr>
@@ -8936,11 +9281,17 @@
         <p:nvGraphicFramePr>
           <p:cNvPr id="4" name="Chart 0"/>
           <p:cNvGraphicFramePr/>
-          <p:nvPr/>
+          <p:nvPr>
+            <p:extLst>
+              <p:ext uri="{D42A27DB-BD31-4B8C-83A1-F6EECF244321}">
+                <p14:modId xmlns:p14="http://schemas.microsoft.com/office/powerpoint/2010/main" val="4121323416"/>
+              </p:ext>
+            </p:extLst>
+          </p:nvPr>
         </p:nvGraphicFramePr>
         <p:xfrm>
-          <a:off x="713232" y="1901952"/>
-          <a:ext cx="7589520" cy="3200400"/>
+          <a:off x="713232" y="1509623"/>
+          <a:ext cx="7589520" cy="4986068"/>
         </p:xfrm>
         <a:graphic>
           <a:graphicData uri="http://schemas.openxmlformats.org/drawingml/2006/chart">
@@ -9316,45 +9667,6 @@
       </p:sp>
       <p:sp>
         <p:nvSpPr>
-          <p:cNvPr id="15" name="Text 12"/>
-          <p:cNvSpPr txBox="1"/>
-          <p:nvPr/>
-        </p:nvSpPr>
-        <p:spPr>
-          <a:xfrm>
-            <a:off x="713232" y="6382512"/>
-            <a:ext cx="9667951" cy="274320"/>
-          </a:xfrm>
-          <a:prstGeom prst="rect">
-            <a:avLst/>
-          </a:prstGeom>
-          <a:noFill/>
-          <a:ln/>
-        </p:spPr>
-        <p:txBody>
-          <a:bodyPr wrap="square" lIns="0" tIns="0" rIns="0" bIns="0" rtlCol="0" anchor="t"/>
-          <a:lstStyle/>
-          <a:p>
-            <a:pPr marL="0" indent="0">
-              <a:buNone/>
-            </a:pPr>
-            <a:r>
-              <a:rPr lang="en-US" sz="950" dirty="0">
-                <a:solidFill>
-                  <a:srgbClr val="828C9A"/>
-                </a:solidFill>
-                <a:latin typeface="Barlow" pitchFamily="34" charset="0"/>
-                <a:ea typeface="Barlow" pitchFamily="34" charset="-122"/>
-                <a:cs typeface="Barlow" pitchFamily="34" charset="-120"/>
-              </a:rPr>
-              <a:t>Stride financial model. Y1 to Y7, net revenue after the athlete's share.</a:t>
-            </a:r>
-            <a:endParaRPr lang="en-US" sz="950" dirty="0"/>
-          </a:p>
-        </p:txBody>
-      </p:sp>
-      <p:sp>
-        <p:nvSpPr>
           <p:cNvPr id="25" name="Slide Number Placeholder 0"/>
           <p:cNvSpPr>
             <a:spLocks noGrp="1"/>
@@ -9373,7 +9685,7 @@
           </a:prstGeom>
           <a:extLst>
             <a:ext uri="{C572A759-6A51-4108-AA02-DFA0A04FC94B}">
-              <ma14:wrappingTextBoxFlag xmlns:ma14="http://schemas.microsoft.com/office/mac/drawingml/2011/main" xmlns="" val="0"/>
+              <ma14:wrappingTextBoxFlag xmlns="" xmlns:ma14="http://schemas.microsoft.com/office/mac/drawingml/2011/main" val="0"/>
             </a:ext>
           </a:extLst>
         </p:spPr>
@@ -10502,7 +10814,7 @@
           </a:prstGeom>
           <a:extLst>
             <a:ext uri="{C572A759-6A51-4108-AA02-DFA0A04FC94B}">
-              <ma14:wrappingTextBoxFlag xmlns:ma14="http://schemas.microsoft.com/office/mac/drawingml/2011/main" xmlns="" val="0"/>
+              <ma14:wrappingTextBoxFlag xmlns="" xmlns:ma14="http://schemas.microsoft.com/office/mac/drawingml/2011/main" val="0"/>
             </a:ext>
           </a:extLst>
         </p:spPr>
@@ -10636,121 +10948,824 @@
           </a:p>
         </p:txBody>
       </p:sp>
-      <p:sp>
-        <p:nvSpPr>
-          <p:cNvPr id="4" name="Shape 2"/>
-          <p:cNvSpPr/>
-          <p:nvPr/>
-        </p:nvSpPr>
-        <p:spPr>
-          <a:xfrm>
-            <a:off x="713232" y="1938528"/>
-            <a:ext cx="5120640" cy="2103120"/>
-          </a:xfrm>
-          <a:prstGeom prst="roundRect">
-            <a:avLst>
-              <a:gd name="adj" fmla="val 1739"/>
-            </a:avLst>
-          </a:prstGeom>
-          <a:solidFill>
-            <a:srgbClr val="171A20"/>
-          </a:solidFill>
-          <a:ln w="9525">
+      <p:grpSp>
+        <p:nvGrpSpPr>
+          <p:cNvPr id="31" name="Group 30">
+            <a:extLst>
+              <a:ext uri="{FF2B5EF4-FFF2-40B4-BE49-F238E27FC236}">
+                <a16:creationId xmlns:a16="http://schemas.microsoft.com/office/drawing/2014/main" id="{294DF88F-7EF9-089C-888E-4CE131B19302}"/>
+              </a:ext>
+            </a:extLst>
+          </p:cNvPr>
+          <p:cNvGrpSpPr/>
+          <p:nvPr/>
+        </p:nvGrpSpPr>
+        <p:grpSpPr>
+          <a:xfrm>
+            <a:off x="713232" y="1938527"/>
+            <a:ext cx="10765231" cy="3189653"/>
+            <a:chOff x="713232" y="1938528"/>
+            <a:chExt cx="10765231" cy="2103120"/>
+          </a:xfrm>
+        </p:grpSpPr>
+        <p:sp>
+          <p:nvSpPr>
+            <p:cNvPr id="4" name="Shape 2"/>
+            <p:cNvSpPr/>
+            <p:nvPr/>
+          </p:nvSpPr>
+          <p:spPr>
+            <a:xfrm>
+              <a:off x="713232" y="1938528"/>
+              <a:ext cx="5120640" cy="2103120"/>
+            </a:xfrm>
+            <a:prstGeom prst="roundRect">
+              <a:avLst>
+                <a:gd name="adj" fmla="val 1739"/>
+              </a:avLst>
+            </a:prstGeom>
+            <a:solidFill>
+              <a:srgbClr val="171A20"/>
+            </a:solidFill>
+            <a:ln w="9525">
+              <a:solidFill>
+                <a:srgbClr val="262C35"/>
+              </a:solidFill>
+              <a:prstDash val="solid"/>
+            </a:ln>
+          </p:spPr>
+        </p:sp>
+        <p:sp>
+          <p:nvSpPr>
+            <p:cNvPr id="5" name="Text 3"/>
+            <p:cNvSpPr txBox="1"/>
+            <p:nvPr/>
+          </p:nvSpPr>
+          <p:spPr>
+            <a:xfrm>
+              <a:off x="987552" y="2139696"/>
+              <a:ext cx="4572000" cy="237744"/>
+            </a:xfrm>
+            <a:prstGeom prst="rect">
+              <a:avLst/>
+            </a:prstGeom>
+            <a:noFill/>
+            <a:ln/>
+          </p:spPr>
+          <p:txBody>
+            <a:bodyPr wrap="square" lIns="0" tIns="0" rIns="0" bIns="0" rtlCol="0" anchor="t"/>
+            <a:lstStyle/>
+            <a:p>
+              <a:pPr marL="0" indent="0">
+                <a:buNone/>
+              </a:pPr>
+              <a:r>
+                <a:rPr lang="en-US" sz="1200" kern="0" spc="240" dirty="0">
+                  <a:solidFill>
+                    <a:srgbClr val="828C9A"/>
+                  </a:solidFill>
+                  <a:latin typeface="Barlow Condensed" pitchFamily="34" charset="0"/>
+                  <a:ea typeface="Barlow Condensed" pitchFamily="34" charset="-122"/>
+                  <a:cs typeface="Barlow Condensed" pitchFamily="34" charset="-120"/>
+                </a:rPr>
+                <a:t>WHAT IS SUBCONTRACTED</a:t>
+              </a:r>
+              <a:endParaRPr lang="en-US" sz="1200" dirty="0"/>
+            </a:p>
+          </p:txBody>
+        </p:sp>
+        <p:sp>
+          <p:nvSpPr>
+            <p:cNvPr id="6" name="Text 4"/>
+            <p:cNvSpPr txBox="1"/>
+            <p:nvPr/>
+          </p:nvSpPr>
+          <p:spPr>
+            <a:xfrm>
+              <a:off x="987552" y="2450592"/>
+              <a:ext cx="1828800" cy="274320"/>
+            </a:xfrm>
+            <a:prstGeom prst="rect">
+              <a:avLst/>
+            </a:prstGeom>
+            <a:noFill/>
+            <a:ln/>
+          </p:spPr>
+          <p:txBody>
+            <a:bodyPr wrap="square" lIns="0" tIns="0" rIns="0" bIns="0" rtlCol="0" anchor="t"/>
+            <a:lstStyle/>
+            <a:p>
+              <a:pPr marL="0" indent="0">
+                <a:buNone/>
+              </a:pPr>
+              <a:r>
+                <a:rPr lang="en-US" sz="1500" dirty="0">
+                  <a:solidFill>
+                    <a:srgbClr val="F2F4F7"/>
+                  </a:solidFill>
+                  <a:latin typeface="Barlow Condensed" pitchFamily="34" charset="0"/>
+                  <a:ea typeface="Barlow Condensed" pitchFamily="34" charset="-122"/>
+                  <a:cs typeface="Barlow Condensed" pitchFamily="34" charset="-120"/>
+                </a:rPr>
+                <a:t>Stripe Connect</a:t>
+              </a:r>
+              <a:endParaRPr lang="en-US" sz="1500" dirty="0"/>
+            </a:p>
+          </p:txBody>
+        </p:sp>
+        <p:sp>
+          <p:nvSpPr>
+            <p:cNvPr id="7" name="Text 5"/>
+            <p:cNvSpPr txBox="1"/>
+            <p:nvPr/>
+          </p:nvSpPr>
+          <p:spPr>
+            <a:xfrm>
+              <a:off x="2907792" y="2487168"/>
+              <a:ext cx="2834640" cy="365760"/>
+            </a:xfrm>
+            <a:prstGeom prst="rect">
+              <a:avLst/>
+            </a:prstGeom>
+            <a:noFill/>
+            <a:ln/>
+          </p:spPr>
+          <p:txBody>
+            <a:bodyPr wrap="square" lIns="0" tIns="0" rIns="0" bIns="0" rtlCol="0" anchor="t"/>
+            <a:lstStyle/>
+            <a:p>
+              <a:pPr marL="0" indent="0">
+                <a:lnSpc>
+                  <a:spcPts val="1500"/>
+                </a:lnSpc>
+                <a:buNone/>
+              </a:pPr>
+              <a:r>
+                <a:rPr lang="en-US" sz="1150" dirty="0">
+                  <a:solidFill>
+                    <a:srgbClr val="828C9A"/>
+                  </a:solidFill>
+                  <a:latin typeface="Barlow" pitchFamily="34" charset="0"/>
+                  <a:ea typeface="Barlow" pitchFamily="34" charset="-122"/>
+                  <a:cs typeface="Barlow" pitchFamily="34" charset="-120"/>
+                </a:rPr>
+                <a:t>Payments, KYC and payouts in 30+ countries</a:t>
+              </a:r>
+              <a:endParaRPr lang="en-US" sz="1150" dirty="0"/>
+            </a:p>
+          </p:txBody>
+        </p:sp>
+        <p:sp>
+          <p:nvSpPr>
+            <p:cNvPr id="8" name="Text 6"/>
+            <p:cNvSpPr txBox="1"/>
+            <p:nvPr/>
+          </p:nvSpPr>
+          <p:spPr>
+            <a:xfrm>
+              <a:off x="987552" y="2926080"/>
+              <a:ext cx="1828800" cy="274320"/>
+            </a:xfrm>
+            <a:prstGeom prst="rect">
+              <a:avLst/>
+            </a:prstGeom>
+            <a:noFill/>
+            <a:ln/>
+          </p:spPr>
+          <p:txBody>
+            <a:bodyPr wrap="square" lIns="0" tIns="0" rIns="0" bIns="0" rtlCol="0" anchor="t"/>
+            <a:lstStyle/>
+            <a:p>
+              <a:pPr marL="0" indent="0">
+                <a:buNone/>
+              </a:pPr>
+              <a:r>
+                <a:rPr lang="en-US" sz="1500" dirty="0">
+                  <a:solidFill>
+                    <a:srgbClr val="F2F4F7"/>
+                  </a:solidFill>
+                  <a:latin typeface="Barlow Condensed" pitchFamily="34" charset="0"/>
+                  <a:ea typeface="Barlow Condensed" pitchFamily="34" charset="-122"/>
+                  <a:cs typeface="Barlow Condensed" pitchFamily="34" charset="-120"/>
+                </a:rPr>
+                <a:t>AWS</a:t>
+              </a:r>
+              <a:endParaRPr lang="en-US" sz="1500" dirty="0"/>
+            </a:p>
+          </p:txBody>
+        </p:sp>
+        <p:sp>
+          <p:nvSpPr>
+            <p:cNvPr id="9" name="Text 7"/>
+            <p:cNvSpPr txBox="1"/>
+            <p:nvPr/>
+          </p:nvSpPr>
+          <p:spPr>
+            <a:xfrm>
+              <a:off x="2907792" y="2962656"/>
+              <a:ext cx="2834640" cy="365760"/>
+            </a:xfrm>
+            <a:prstGeom prst="rect">
+              <a:avLst/>
+            </a:prstGeom>
+            <a:noFill/>
+            <a:ln/>
+          </p:spPr>
+          <p:txBody>
+            <a:bodyPr wrap="square" lIns="0" tIns="0" rIns="0" bIns="0" rtlCol="0" anchor="t"/>
+            <a:lstStyle/>
+            <a:p>
+              <a:pPr marL="0" indent="0">
+                <a:lnSpc>
+                  <a:spcPts val="1500"/>
+                </a:lnSpc>
+                <a:buNone/>
+              </a:pPr>
+              <a:r>
+                <a:rPr lang="en-US" sz="1150" dirty="0">
+                  <a:solidFill>
+                    <a:srgbClr val="828C9A"/>
+                  </a:solidFill>
+                  <a:latin typeface="Barlow" pitchFamily="34" charset="0"/>
+                  <a:ea typeface="Barlow" pitchFamily="34" charset="-122"/>
+                  <a:cs typeface="Barlow" pitchFamily="34" charset="-120"/>
+                </a:rPr>
+                <a:t>Compute, database and media processing</a:t>
+              </a:r>
+              <a:endParaRPr lang="en-US" sz="1150" dirty="0"/>
+            </a:p>
+          </p:txBody>
+        </p:sp>
+        <p:sp>
+          <p:nvSpPr>
+            <p:cNvPr id="10" name="Text 8"/>
+            <p:cNvSpPr txBox="1"/>
+            <p:nvPr/>
+          </p:nvSpPr>
+          <p:spPr>
+            <a:xfrm>
+              <a:off x="987552" y="3401568"/>
+              <a:ext cx="1828800" cy="274320"/>
+            </a:xfrm>
+            <a:prstGeom prst="rect">
+              <a:avLst/>
+            </a:prstGeom>
+            <a:noFill/>
+            <a:ln/>
+          </p:spPr>
+          <p:txBody>
+            <a:bodyPr wrap="square" lIns="0" tIns="0" rIns="0" bIns="0" rtlCol="0" anchor="t"/>
+            <a:lstStyle/>
+            <a:p>
+              <a:pPr marL="0" indent="0">
+                <a:buNone/>
+              </a:pPr>
+              <a:r>
+                <a:rPr lang="en-US" sz="1500" dirty="0">
+                  <a:solidFill>
+                    <a:srgbClr val="F2F4F7"/>
+                  </a:solidFill>
+                  <a:latin typeface="Barlow Condensed" pitchFamily="34" charset="0"/>
+                  <a:ea typeface="Barlow Condensed" pitchFamily="34" charset="-122"/>
+                  <a:cs typeface="Barlow Condensed" pitchFamily="34" charset="-120"/>
+                </a:rPr>
+                <a:t>Zero-egress CDN</a:t>
+              </a:r>
+              <a:endParaRPr lang="en-US" sz="1500" dirty="0"/>
+            </a:p>
+          </p:txBody>
+        </p:sp>
+        <p:sp>
+          <p:nvSpPr>
+            <p:cNvPr id="11" name="Text 9"/>
+            <p:cNvSpPr txBox="1"/>
+            <p:nvPr/>
+          </p:nvSpPr>
+          <p:spPr>
+            <a:xfrm>
+              <a:off x="2907792" y="3438144"/>
+              <a:ext cx="2834640" cy="365760"/>
+            </a:xfrm>
+            <a:prstGeom prst="rect">
+              <a:avLst/>
+            </a:prstGeom>
+            <a:noFill/>
+            <a:ln/>
+          </p:spPr>
+          <p:txBody>
+            <a:bodyPr wrap="square" lIns="0" tIns="0" rIns="0" bIns="0" rtlCol="0" anchor="t"/>
+            <a:lstStyle/>
+            <a:p>
+              <a:pPr marL="0" indent="0">
+                <a:lnSpc>
+                  <a:spcPts val="1500"/>
+                </a:lnSpc>
+                <a:buNone/>
+              </a:pPr>
+              <a:r>
+                <a:rPr lang="en-US" sz="1150" dirty="0">
+                  <a:solidFill>
+                    <a:srgbClr val="828C9A"/>
+                  </a:solidFill>
+                  <a:latin typeface="Barlow" pitchFamily="34" charset="0"/>
+                  <a:ea typeface="Barlow" pitchFamily="34" charset="-122"/>
+                  <a:cs typeface="Barlow" pitchFamily="34" charset="-120"/>
+                </a:rPr>
+                <a:t>Media delivery, the cost that decides viability</a:t>
+              </a:r>
+              <a:endParaRPr lang="en-US" sz="1150" dirty="0"/>
+            </a:p>
+          </p:txBody>
+        </p:sp>
+        <p:sp>
+          <p:nvSpPr>
+            <p:cNvPr id="12" name="Shape 10"/>
+            <p:cNvSpPr/>
+            <p:nvPr/>
+          </p:nvSpPr>
+          <p:spPr>
+            <a:xfrm>
+              <a:off x="6108192" y="1938528"/>
+              <a:ext cx="5370271" cy="2103120"/>
+            </a:xfrm>
+            <a:prstGeom prst="roundRect">
+              <a:avLst>
+                <a:gd name="adj" fmla="val 1739"/>
+              </a:avLst>
+            </a:prstGeom>
+            <a:solidFill>
+              <a:srgbClr val="171A20"/>
+            </a:solidFill>
+            <a:ln w="9525">
+              <a:solidFill>
+                <a:srgbClr val="262C35"/>
+              </a:solidFill>
+              <a:prstDash val="solid"/>
+            </a:ln>
+          </p:spPr>
+        </p:sp>
+        <p:sp>
+          <p:nvSpPr>
+            <p:cNvPr id="13" name="Text 11"/>
+            <p:cNvSpPr txBox="1"/>
+            <p:nvPr/>
+          </p:nvSpPr>
+          <p:spPr>
+            <a:xfrm>
+              <a:off x="6382512" y="2139696"/>
+              <a:ext cx="3657600" cy="237744"/>
+            </a:xfrm>
+            <a:prstGeom prst="rect">
+              <a:avLst/>
+            </a:prstGeom>
+            <a:noFill/>
+            <a:ln/>
+          </p:spPr>
+          <p:txBody>
+            <a:bodyPr wrap="square" lIns="0" tIns="0" rIns="0" bIns="0" rtlCol="0" anchor="t"/>
+            <a:lstStyle/>
+            <a:p>
+              <a:pPr marL="0" indent="0">
+                <a:buNone/>
+              </a:pPr>
+              <a:r>
+                <a:rPr lang="en-US" sz="1200" kern="0" spc="240" dirty="0">
+                  <a:solidFill>
+                    <a:srgbClr val="828C9A"/>
+                  </a:solidFill>
+                  <a:latin typeface="Barlow Condensed" pitchFamily="34" charset="0"/>
+                  <a:ea typeface="Barlow Condensed" pitchFamily="34" charset="-122"/>
+                  <a:cs typeface="Barlow Condensed" pitchFamily="34" charset="-120"/>
+                </a:rPr>
+                <a:t>HEADCOUNT</a:t>
+              </a:r>
+              <a:endParaRPr lang="en-US" sz="1200" dirty="0"/>
+            </a:p>
+          </p:txBody>
+        </p:sp>
+        <p:sp>
+          <p:nvSpPr>
+            <p:cNvPr id="14" name="Shape 12"/>
+            <p:cNvSpPr/>
+            <p:nvPr/>
+          </p:nvSpPr>
+          <p:spPr>
+            <a:xfrm>
+              <a:off x="6382512" y="3509010"/>
+              <a:ext cx="566928" cy="57150"/>
+            </a:xfrm>
+            <a:prstGeom prst="rect">
+              <a:avLst/>
+            </a:prstGeom>
             <a:solidFill>
               <a:srgbClr val="262C35"/>
             </a:solidFill>
-            <a:prstDash val="solid"/>
-          </a:ln>
-        </p:spPr>
-      </p:sp>
-      <p:sp>
-        <p:nvSpPr>
-          <p:cNvPr id="5" name="Text 3"/>
-          <p:cNvSpPr txBox="1"/>
-          <p:nvPr/>
-        </p:nvSpPr>
-        <p:spPr>
-          <a:xfrm>
-            <a:off x="987552" y="2139696"/>
-            <a:ext cx="4572000" cy="237744"/>
-          </a:xfrm>
-          <a:prstGeom prst="rect">
-            <a:avLst/>
-          </a:prstGeom>
-          <a:noFill/>
-          <a:ln/>
-        </p:spPr>
-        <p:txBody>
-          <a:bodyPr wrap="square" lIns="0" tIns="0" rIns="0" bIns="0" rtlCol="0" anchor="t"/>
-          <a:lstStyle/>
-          <a:p>
-            <a:pPr marL="0" indent="0">
-              <a:buNone/>
-            </a:pPr>
-            <a:r>
-              <a:rPr lang="en-US" sz="1200" kern="0" spc="240" dirty="0">
-                <a:solidFill>
-                  <a:srgbClr val="828C9A"/>
-                </a:solidFill>
-                <a:latin typeface="Barlow Condensed" pitchFamily="34" charset="0"/>
-                <a:ea typeface="Barlow Condensed" pitchFamily="34" charset="-122"/>
-                <a:cs typeface="Barlow Condensed" pitchFamily="34" charset="-120"/>
-              </a:rPr>
-              <a:t>WHAT IS SUBCONTRACTED</a:t>
-            </a:r>
-            <a:endParaRPr lang="en-US" sz="1200" dirty="0"/>
-          </a:p>
-        </p:txBody>
-      </p:sp>
-      <p:sp>
-        <p:nvSpPr>
-          <p:cNvPr id="6" name="Text 4"/>
-          <p:cNvSpPr txBox="1"/>
-          <p:nvPr/>
-        </p:nvSpPr>
-        <p:spPr>
-          <a:xfrm>
-            <a:off x="987552" y="2450592"/>
-            <a:ext cx="1828800" cy="274320"/>
-          </a:xfrm>
-          <a:prstGeom prst="rect">
-            <a:avLst/>
-          </a:prstGeom>
-          <a:noFill/>
-          <a:ln/>
-        </p:spPr>
-        <p:txBody>
-          <a:bodyPr wrap="square" lIns="0" tIns="0" rIns="0" bIns="0" rtlCol="0" anchor="t"/>
-          <a:lstStyle/>
-          <a:p>
-            <a:pPr marL="0" indent="0">
-              <a:buNone/>
-            </a:pPr>
-            <a:r>
-              <a:rPr lang="en-US" sz="1500" dirty="0">
-                <a:solidFill>
-                  <a:srgbClr val="F2F4F7"/>
-                </a:solidFill>
-                <a:latin typeface="Barlow Condensed" pitchFamily="34" charset="0"/>
-                <a:ea typeface="Barlow Condensed" pitchFamily="34" charset="-122"/>
-                <a:cs typeface="Barlow Condensed" pitchFamily="34" charset="-120"/>
-              </a:rPr>
-              <a:t>Stripe Connect</a:t>
-            </a:r>
-            <a:endParaRPr lang="en-US" sz="1500" dirty="0"/>
-          </a:p>
-        </p:txBody>
-      </p:sp>
-      <p:sp>
-        <p:nvSpPr>
-          <p:cNvPr id="7" name="Text 5"/>
-          <p:cNvSpPr txBox="1"/>
-          <p:nvPr/>
-        </p:nvSpPr>
-        <p:spPr>
-          <a:xfrm>
-            <a:off x="2907792" y="2487168"/>
-            <a:ext cx="2834640" cy="365760"/>
+            <a:ln w="12700">
+              <a:solidFill>
+                <a:srgbClr val="333333"/>
+              </a:solidFill>
+              <a:prstDash val="solid"/>
+            </a:ln>
+          </p:spPr>
+        </p:sp>
+        <p:sp>
+          <p:nvSpPr>
+            <p:cNvPr id="15" name="Text 13"/>
+            <p:cNvSpPr txBox="1"/>
+            <p:nvPr/>
+          </p:nvSpPr>
+          <p:spPr>
+            <a:xfrm>
+              <a:off x="6272784" y="3584448"/>
+              <a:ext cx="786384" cy="274320"/>
+            </a:xfrm>
+            <a:prstGeom prst="rect">
+              <a:avLst/>
+            </a:prstGeom>
+            <a:noFill/>
+            <a:ln/>
+          </p:spPr>
+          <p:txBody>
+            <a:bodyPr wrap="square" lIns="0" tIns="0" rIns="0" bIns="0" rtlCol="0" anchor="t"/>
+            <a:lstStyle/>
+            <a:p>
+              <a:pPr marL="0" indent="0" algn="ctr">
+                <a:buNone/>
+              </a:pPr>
+              <a:r>
+                <a:rPr lang="en-US" sz="1700" dirty="0">
+                  <a:solidFill>
+                    <a:srgbClr val="F2F4F7"/>
+                  </a:solidFill>
+                  <a:latin typeface="Barlow Condensed" pitchFamily="34" charset="0"/>
+                  <a:ea typeface="Barlow Condensed" pitchFamily="34" charset="-122"/>
+                  <a:cs typeface="Barlow Condensed" pitchFamily="34" charset="-120"/>
+                </a:rPr>
+                <a:t>1</a:t>
+              </a:r>
+              <a:endParaRPr lang="en-US" sz="1700" dirty="0"/>
+            </a:p>
+          </p:txBody>
+        </p:sp>
+        <p:sp>
+          <p:nvSpPr>
+            <p:cNvPr id="16" name="Text 14"/>
+            <p:cNvSpPr txBox="1"/>
+            <p:nvPr/>
+          </p:nvSpPr>
+          <p:spPr>
+            <a:xfrm>
+              <a:off x="6272784" y="3822192"/>
+              <a:ext cx="786384" cy="201168"/>
+            </a:xfrm>
+            <a:prstGeom prst="rect">
+              <a:avLst/>
+            </a:prstGeom>
+            <a:noFill/>
+            <a:ln/>
+          </p:spPr>
+          <p:txBody>
+            <a:bodyPr wrap="square" lIns="0" tIns="0" rIns="0" bIns="0" rtlCol="0" anchor="t"/>
+            <a:lstStyle/>
+            <a:p>
+              <a:pPr marL="0" indent="0" algn="ctr">
+                <a:buNone/>
+              </a:pPr>
+              <a:r>
+                <a:rPr lang="en-US" sz="1100" kern="0" spc="160" dirty="0">
+                  <a:solidFill>
+                    <a:srgbClr val="828C9A"/>
+                  </a:solidFill>
+                  <a:latin typeface="Barlow Condensed" pitchFamily="34" charset="0"/>
+                  <a:ea typeface="Barlow Condensed" pitchFamily="34" charset="-122"/>
+                  <a:cs typeface="Barlow Condensed" pitchFamily="34" charset="-120"/>
+                </a:rPr>
+                <a:t>Y1</a:t>
+              </a:r>
+              <a:endParaRPr lang="en-US" sz="1100" dirty="0"/>
+            </a:p>
+          </p:txBody>
+        </p:sp>
+        <p:sp>
+          <p:nvSpPr>
+            <p:cNvPr id="17" name="Shape 15"/>
+            <p:cNvSpPr/>
+            <p:nvPr/>
+          </p:nvSpPr>
+          <p:spPr>
+            <a:xfrm>
+              <a:off x="7616952" y="3451860"/>
+              <a:ext cx="566928" cy="114300"/>
+            </a:xfrm>
+            <a:prstGeom prst="rect">
+              <a:avLst/>
+            </a:prstGeom>
+            <a:solidFill>
+              <a:srgbClr val="262C35"/>
+            </a:solidFill>
+            <a:ln w="12700">
+              <a:solidFill>
+                <a:srgbClr val="333333"/>
+              </a:solidFill>
+              <a:prstDash val="solid"/>
+            </a:ln>
+          </p:spPr>
+        </p:sp>
+        <p:sp>
+          <p:nvSpPr>
+            <p:cNvPr id="18" name="Text 16"/>
+            <p:cNvSpPr txBox="1"/>
+            <p:nvPr/>
+          </p:nvSpPr>
+          <p:spPr>
+            <a:xfrm>
+              <a:off x="7507224" y="3584448"/>
+              <a:ext cx="786384" cy="274320"/>
+            </a:xfrm>
+            <a:prstGeom prst="rect">
+              <a:avLst/>
+            </a:prstGeom>
+            <a:noFill/>
+            <a:ln/>
+          </p:spPr>
+          <p:txBody>
+            <a:bodyPr wrap="square" lIns="0" tIns="0" rIns="0" bIns="0" rtlCol="0" anchor="t"/>
+            <a:lstStyle/>
+            <a:p>
+              <a:pPr marL="0" indent="0" algn="ctr">
+                <a:buNone/>
+              </a:pPr>
+              <a:r>
+                <a:rPr lang="en-US" sz="1700" dirty="0">
+                  <a:solidFill>
+                    <a:srgbClr val="F2F4F7"/>
+                  </a:solidFill>
+                  <a:latin typeface="Barlow Condensed" pitchFamily="34" charset="0"/>
+                  <a:ea typeface="Barlow Condensed" pitchFamily="34" charset="-122"/>
+                  <a:cs typeface="Barlow Condensed" pitchFamily="34" charset="-120"/>
+                </a:rPr>
+                <a:t>2</a:t>
+              </a:r>
+              <a:endParaRPr lang="en-US" sz="1700" dirty="0"/>
+            </a:p>
+          </p:txBody>
+        </p:sp>
+        <p:sp>
+          <p:nvSpPr>
+            <p:cNvPr id="19" name="Text 17"/>
+            <p:cNvSpPr txBox="1"/>
+            <p:nvPr/>
+          </p:nvSpPr>
+          <p:spPr>
+            <a:xfrm>
+              <a:off x="7507224" y="3822192"/>
+              <a:ext cx="786384" cy="201168"/>
+            </a:xfrm>
+            <a:prstGeom prst="rect">
+              <a:avLst/>
+            </a:prstGeom>
+            <a:noFill/>
+            <a:ln/>
+          </p:spPr>
+          <p:txBody>
+            <a:bodyPr wrap="square" lIns="0" tIns="0" rIns="0" bIns="0" rtlCol="0" anchor="t"/>
+            <a:lstStyle/>
+            <a:p>
+              <a:pPr marL="0" indent="0" algn="ctr">
+                <a:buNone/>
+              </a:pPr>
+              <a:r>
+                <a:rPr lang="en-US" sz="1100" kern="0" spc="160" dirty="0">
+                  <a:solidFill>
+                    <a:srgbClr val="828C9A"/>
+                  </a:solidFill>
+                  <a:latin typeface="Barlow Condensed" pitchFamily="34" charset="0"/>
+                  <a:ea typeface="Barlow Condensed" pitchFamily="34" charset="-122"/>
+                  <a:cs typeface="Barlow Condensed" pitchFamily="34" charset="-120"/>
+                </a:rPr>
+                <a:t>Y4</a:t>
+              </a:r>
+              <a:endParaRPr lang="en-US" sz="1100" dirty="0"/>
+            </a:p>
+          </p:txBody>
+        </p:sp>
+        <p:sp>
+          <p:nvSpPr>
+            <p:cNvPr id="20" name="Shape 18"/>
+            <p:cNvSpPr/>
+            <p:nvPr/>
+          </p:nvSpPr>
+          <p:spPr>
+            <a:xfrm>
+              <a:off x="8851392" y="2994660"/>
+              <a:ext cx="566928" cy="571500"/>
+            </a:xfrm>
+            <a:prstGeom prst="rect">
+              <a:avLst/>
+            </a:prstGeom>
+            <a:solidFill>
+              <a:srgbClr val="262C35"/>
+            </a:solidFill>
+            <a:ln w="12700">
+              <a:solidFill>
+                <a:srgbClr val="333333"/>
+              </a:solidFill>
+              <a:prstDash val="solid"/>
+            </a:ln>
+          </p:spPr>
+        </p:sp>
+        <p:sp>
+          <p:nvSpPr>
+            <p:cNvPr id="21" name="Text 19"/>
+            <p:cNvSpPr txBox="1"/>
+            <p:nvPr/>
+          </p:nvSpPr>
+          <p:spPr>
+            <a:xfrm>
+              <a:off x="8741664" y="3584448"/>
+              <a:ext cx="786384" cy="274320"/>
+            </a:xfrm>
+            <a:prstGeom prst="rect">
+              <a:avLst/>
+            </a:prstGeom>
+            <a:noFill/>
+            <a:ln/>
+          </p:spPr>
+          <p:txBody>
+            <a:bodyPr wrap="square" lIns="0" tIns="0" rIns="0" bIns="0" rtlCol="0" anchor="t"/>
+            <a:lstStyle/>
+            <a:p>
+              <a:pPr marL="0" indent="0" algn="ctr">
+                <a:buNone/>
+              </a:pPr>
+              <a:r>
+                <a:rPr lang="en-US" sz="1700" dirty="0">
+                  <a:solidFill>
+                    <a:srgbClr val="F2F4F7"/>
+                  </a:solidFill>
+                  <a:latin typeface="Barlow Condensed" pitchFamily="34" charset="0"/>
+                  <a:ea typeface="Barlow Condensed" pitchFamily="34" charset="-122"/>
+                  <a:cs typeface="Barlow Condensed" pitchFamily="34" charset="-120"/>
+                </a:rPr>
+                <a:t>10</a:t>
+              </a:r>
+              <a:endParaRPr lang="en-US" sz="1700" dirty="0"/>
+            </a:p>
+          </p:txBody>
+        </p:sp>
+        <p:sp>
+          <p:nvSpPr>
+            <p:cNvPr id="22" name="Text 20"/>
+            <p:cNvSpPr txBox="1"/>
+            <p:nvPr/>
+          </p:nvSpPr>
+          <p:spPr>
+            <a:xfrm>
+              <a:off x="8741664" y="3822192"/>
+              <a:ext cx="786384" cy="201168"/>
+            </a:xfrm>
+            <a:prstGeom prst="rect">
+              <a:avLst/>
+            </a:prstGeom>
+            <a:noFill/>
+            <a:ln/>
+          </p:spPr>
+          <p:txBody>
+            <a:bodyPr wrap="square" lIns="0" tIns="0" rIns="0" bIns="0" rtlCol="0" anchor="t"/>
+            <a:lstStyle/>
+            <a:p>
+              <a:pPr marL="0" indent="0" algn="ctr">
+                <a:buNone/>
+              </a:pPr>
+              <a:r>
+                <a:rPr lang="en-US" sz="1100" kern="0" spc="160" dirty="0">
+                  <a:solidFill>
+                    <a:srgbClr val="828C9A"/>
+                  </a:solidFill>
+                  <a:latin typeface="Barlow Condensed" pitchFamily="34" charset="0"/>
+                  <a:ea typeface="Barlow Condensed" pitchFamily="34" charset="-122"/>
+                  <a:cs typeface="Barlow Condensed" pitchFamily="34" charset="-120"/>
+                </a:rPr>
+                <a:t>Y7</a:t>
+              </a:r>
+              <a:endParaRPr lang="en-US" sz="1100" dirty="0"/>
+            </a:p>
+          </p:txBody>
+        </p:sp>
+        <p:sp>
+          <p:nvSpPr>
+            <p:cNvPr id="23" name="Shape 21"/>
+            <p:cNvSpPr/>
+            <p:nvPr/>
+          </p:nvSpPr>
+          <p:spPr>
+            <a:xfrm>
+              <a:off x="10085832" y="2651760"/>
+              <a:ext cx="566928" cy="914400"/>
+            </a:xfrm>
+            <a:prstGeom prst="rect">
+              <a:avLst/>
+            </a:prstGeom>
+            <a:solidFill>
+              <a:srgbClr val="FFB020"/>
+            </a:solidFill>
+            <a:ln w="12700">
+              <a:solidFill>
+                <a:srgbClr val="333333"/>
+              </a:solidFill>
+              <a:prstDash val="solid"/>
+            </a:ln>
+          </p:spPr>
+        </p:sp>
+        <p:sp>
+          <p:nvSpPr>
+            <p:cNvPr id="24" name="Text 22"/>
+            <p:cNvSpPr txBox="1"/>
+            <p:nvPr/>
+          </p:nvSpPr>
+          <p:spPr>
+            <a:xfrm>
+              <a:off x="9976104" y="3584448"/>
+              <a:ext cx="786384" cy="274320"/>
+            </a:xfrm>
+            <a:prstGeom prst="rect">
+              <a:avLst/>
+            </a:prstGeom>
+            <a:noFill/>
+            <a:ln/>
+          </p:spPr>
+          <p:txBody>
+            <a:bodyPr wrap="square" lIns="0" tIns="0" rIns="0" bIns="0" rtlCol="0" anchor="t"/>
+            <a:lstStyle/>
+            <a:p>
+              <a:pPr marL="0" indent="0" algn="ctr">
+                <a:buNone/>
+              </a:pPr>
+              <a:r>
+                <a:rPr lang="en-US" sz="1700" dirty="0">
+                  <a:solidFill>
+                    <a:srgbClr val="F2F4F7"/>
+                  </a:solidFill>
+                  <a:latin typeface="Barlow Condensed" pitchFamily="34" charset="0"/>
+                  <a:ea typeface="Barlow Condensed" pitchFamily="34" charset="-122"/>
+                  <a:cs typeface="Barlow Condensed" pitchFamily="34" charset="-120"/>
+                </a:rPr>
+                <a:t>16</a:t>
+              </a:r>
+              <a:endParaRPr lang="en-US" sz="1700" dirty="0"/>
+            </a:p>
+          </p:txBody>
+        </p:sp>
+        <p:sp>
+          <p:nvSpPr>
+            <p:cNvPr id="25" name="Text 23"/>
+            <p:cNvSpPr txBox="1"/>
+            <p:nvPr/>
+          </p:nvSpPr>
+          <p:spPr>
+            <a:xfrm>
+              <a:off x="9976104" y="3822192"/>
+              <a:ext cx="786384" cy="201168"/>
+            </a:xfrm>
+            <a:prstGeom prst="rect">
+              <a:avLst/>
+            </a:prstGeom>
+            <a:noFill/>
+            <a:ln/>
+          </p:spPr>
+          <p:txBody>
+            <a:bodyPr wrap="square" lIns="0" tIns="0" rIns="0" bIns="0" rtlCol="0" anchor="t"/>
+            <a:lstStyle/>
+            <a:p>
+              <a:pPr marL="0" indent="0" algn="ctr">
+                <a:buNone/>
+              </a:pPr>
+              <a:r>
+                <a:rPr lang="en-US" sz="1100" kern="0" spc="160" dirty="0">
+                  <a:solidFill>
+                    <a:srgbClr val="828C9A"/>
+                  </a:solidFill>
+                  <a:latin typeface="Barlow Condensed" pitchFamily="34" charset="0"/>
+                  <a:ea typeface="Barlow Condensed" pitchFamily="34" charset="-122"/>
+                  <a:cs typeface="Barlow Condensed" pitchFamily="34" charset="-120"/>
+                </a:rPr>
+                <a:t>Y10</a:t>
+              </a:r>
+              <a:endParaRPr lang="en-US" sz="1100" dirty="0"/>
+            </a:p>
+          </p:txBody>
+        </p:sp>
+      </p:grpSp>
+      <p:sp>
+        <p:nvSpPr>
+          <p:cNvPr id="26" name="Text 24"/>
+          <p:cNvSpPr txBox="1"/>
+          <p:nvPr/>
+        </p:nvSpPr>
+        <p:spPr>
+          <a:xfrm>
+            <a:off x="713232" y="5460572"/>
+            <a:ext cx="10765231" cy="640080"/>
           </a:xfrm>
           <a:prstGeom prst="rect">
             <a:avLst/>
@@ -10764,812 +11779,22 @@
           <a:p>
             <a:pPr marL="0" indent="0">
               <a:lnSpc>
-                <a:spcPts val="1500"/>
+                <a:spcPts val="1900"/>
               </a:lnSpc>
               <a:buNone/>
             </a:pPr>
             <a:r>
-              <a:rPr lang="en-US" sz="1150" dirty="0">
-                <a:solidFill>
-                  <a:srgbClr val="828C9A"/>
+              <a:rPr lang="en-US" sz="1400" dirty="0">
+                <a:solidFill>
+                  <a:srgbClr val="AEB6C2"/>
                 </a:solidFill>
                 <a:latin typeface="Barlow" pitchFamily="34" charset="0"/>
                 <a:ea typeface="Barlow" pitchFamily="34" charset="-122"/>
                 <a:cs typeface="Barlow" pitchFamily="34" charset="-120"/>
               </a:rPr>
-              <a:t>Payments, KYC and payouts in 30+ countries</a:t>
-            </a:r>
-            <a:endParaRPr lang="en-US" sz="1150" dirty="0"/>
-          </a:p>
-        </p:txBody>
-      </p:sp>
-      <p:sp>
-        <p:nvSpPr>
-          <p:cNvPr id="8" name="Text 6"/>
-          <p:cNvSpPr txBox="1"/>
-          <p:nvPr/>
-        </p:nvSpPr>
-        <p:spPr>
-          <a:xfrm>
-            <a:off x="987552" y="2926080"/>
-            <a:ext cx="1828800" cy="274320"/>
-          </a:xfrm>
-          <a:prstGeom prst="rect">
-            <a:avLst/>
-          </a:prstGeom>
-          <a:noFill/>
-          <a:ln/>
-        </p:spPr>
-        <p:txBody>
-          <a:bodyPr wrap="square" lIns="0" tIns="0" rIns="0" bIns="0" rtlCol="0" anchor="t"/>
-          <a:lstStyle/>
-          <a:p>
-            <a:pPr marL="0" indent="0">
-              <a:buNone/>
-            </a:pPr>
-            <a:r>
-              <a:rPr lang="en-US" sz="1500" dirty="0">
-                <a:solidFill>
-                  <a:srgbClr val="F2F4F7"/>
-                </a:solidFill>
-                <a:latin typeface="Barlow Condensed" pitchFamily="34" charset="0"/>
-                <a:ea typeface="Barlow Condensed" pitchFamily="34" charset="-122"/>
-                <a:cs typeface="Barlow Condensed" pitchFamily="34" charset="-120"/>
-              </a:rPr>
-              <a:t>AWS</a:t>
-            </a:r>
-            <a:endParaRPr lang="en-US" sz="1500" dirty="0"/>
-          </a:p>
-        </p:txBody>
-      </p:sp>
-      <p:sp>
-        <p:nvSpPr>
-          <p:cNvPr id="9" name="Text 7"/>
-          <p:cNvSpPr txBox="1"/>
-          <p:nvPr/>
-        </p:nvSpPr>
-        <p:spPr>
-          <a:xfrm>
-            <a:off x="2907792" y="2962656"/>
-            <a:ext cx="2834640" cy="365760"/>
-          </a:xfrm>
-          <a:prstGeom prst="rect">
-            <a:avLst/>
-          </a:prstGeom>
-          <a:noFill/>
-          <a:ln/>
-        </p:spPr>
-        <p:txBody>
-          <a:bodyPr wrap="square" lIns="0" tIns="0" rIns="0" bIns="0" rtlCol="0" anchor="t"/>
-          <a:lstStyle/>
-          <a:p>
-            <a:pPr marL="0" indent="0">
-              <a:lnSpc>
-                <a:spcPts val="1500"/>
-              </a:lnSpc>
-              <a:buNone/>
-            </a:pPr>
-            <a:r>
-              <a:rPr lang="en-US" sz="1150" dirty="0">
-                <a:solidFill>
-                  <a:srgbClr val="828C9A"/>
-                </a:solidFill>
-                <a:latin typeface="Barlow" pitchFamily="34" charset="0"/>
-                <a:ea typeface="Barlow" pitchFamily="34" charset="-122"/>
-                <a:cs typeface="Barlow" pitchFamily="34" charset="-120"/>
-              </a:rPr>
-              <a:t>Compute, database and media processing</a:t>
-            </a:r>
-            <a:endParaRPr lang="en-US" sz="1150" dirty="0"/>
-          </a:p>
-        </p:txBody>
-      </p:sp>
-      <p:sp>
-        <p:nvSpPr>
-          <p:cNvPr id="10" name="Text 8"/>
-          <p:cNvSpPr txBox="1"/>
-          <p:nvPr/>
-        </p:nvSpPr>
-        <p:spPr>
-          <a:xfrm>
-            <a:off x="987552" y="3401568"/>
-            <a:ext cx="1828800" cy="274320"/>
-          </a:xfrm>
-          <a:prstGeom prst="rect">
-            <a:avLst/>
-          </a:prstGeom>
-          <a:noFill/>
-          <a:ln/>
-        </p:spPr>
-        <p:txBody>
-          <a:bodyPr wrap="square" lIns="0" tIns="0" rIns="0" bIns="0" rtlCol="0" anchor="t"/>
-          <a:lstStyle/>
-          <a:p>
-            <a:pPr marL="0" indent="0">
-              <a:buNone/>
-            </a:pPr>
-            <a:r>
-              <a:rPr lang="en-US" sz="1500" dirty="0">
-                <a:solidFill>
-                  <a:srgbClr val="F2F4F7"/>
-                </a:solidFill>
-                <a:latin typeface="Barlow Condensed" pitchFamily="34" charset="0"/>
-                <a:ea typeface="Barlow Condensed" pitchFamily="34" charset="-122"/>
-                <a:cs typeface="Barlow Condensed" pitchFamily="34" charset="-120"/>
-              </a:rPr>
-              <a:t>Zero-egress CDN</a:t>
-            </a:r>
-            <a:endParaRPr lang="en-US" sz="1500" dirty="0"/>
-          </a:p>
-        </p:txBody>
-      </p:sp>
-      <p:sp>
-        <p:nvSpPr>
-          <p:cNvPr id="11" name="Text 9"/>
-          <p:cNvSpPr txBox="1"/>
-          <p:nvPr/>
-        </p:nvSpPr>
-        <p:spPr>
-          <a:xfrm>
-            <a:off x="2907792" y="3438144"/>
-            <a:ext cx="2834640" cy="365760"/>
-          </a:xfrm>
-          <a:prstGeom prst="rect">
-            <a:avLst/>
-          </a:prstGeom>
-          <a:noFill/>
-          <a:ln/>
-        </p:spPr>
-        <p:txBody>
-          <a:bodyPr wrap="square" lIns="0" tIns="0" rIns="0" bIns="0" rtlCol="0" anchor="t"/>
-          <a:lstStyle/>
-          <a:p>
-            <a:pPr marL="0" indent="0">
-              <a:lnSpc>
-                <a:spcPts val="1500"/>
-              </a:lnSpc>
-              <a:buNone/>
-            </a:pPr>
-            <a:r>
-              <a:rPr lang="en-US" sz="1150" dirty="0">
-                <a:solidFill>
-                  <a:srgbClr val="828C9A"/>
-                </a:solidFill>
-                <a:latin typeface="Barlow" pitchFamily="34" charset="0"/>
-                <a:ea typeface="Barlow" pitchFamily="34" charset="-122"/>
-                <a:cs typeface="Barlow" pitchFamily="34" charset="-120"/>
-              </a:rPr>
-              <a:t>Media delivery, the cost that decides viability</a:t>
-            </a:r>
-            <a:endParaRPr lang="en-US" sz="1150" dirty="0"/>
-          </a:p>
-        </p:txBody>
-      </p:sp>
-      <p:sp>
-        <p:nvSpPr>
-          <p:cNvPr id="12" name="Shape 10"/>
-          <p:cNvSpPr/>
-          <p:nvPr/>
-        </p:nvSpPr>
-        <p:spPr>
-          <a:xfrm>
-            <a:off x="6108192" y="1938528"/>
-            <a:ext cx="5370271" cy="2103120"/>
-          </a:xfrm>
-          <a:prstGeom prst="roundRect">
-            <a:avLst>
-              <a:gd name="adj" fmla="val 1739"/>
-            </a:avLst>
-          </a:prstGeom>
-          <a:solidFill>
-            <a:srgbClr val="171A20"/>
-          </a:solidFill>
-          <a:ln w="9525">
-            <a:solidFill>
-              <a:srgbClr val="262C35"/>
-            </a:solidFill>
-            <a:prstDash val="solid"/>
-          </a:ln>
-        </p:spPr>
-      </p:sp>
-      <p:sp>
-        <p:nvSpPr>
-          <p:cNvPr id="13" name="Text 11"/>
-          <p:cNvSpPr txBox="1"/>
-          <p:nvPr/>
-        </p:nvSpPr>
-        <p:spPr>
-          <a:xfrm>
-            <a:off x="6382512" y="2139696"/>
-            <a:ext cx="3657600" cy="237744"/>
-          </a:xfrm>
-          <a:prstGeom prst="rect">
-            <a:avLst/>
-          </a:prstGeom>
-          <a:noFill/>
-          <a:ln/>
-        </p:spPr>
-        <p:txBody>
-          <a:bodyPr wrap="square" lIns="0" tIns="0" rIns="0" bIns="0" rtlCol="0" anchor="t"/>
-          <a:lstStyle/>
-          <a:p>
-            <a:pPr marL="0" indent="0">
-              <a:buNone/>
-            </a:pPr>
-            <a:r>
-              <a:rPr lang="en-US" sz="1200" kern="0" spc="240" dirty="0">
-                <a:solidFill>
-                  <a:srgbClr val="828C9A"/>
-                </a:solidFill>
-                <a:latin typeface="Barlow Condensed" pitchFamily="34" charset="0"/>
-                <a:ea typeface="Barlow Condensed" pitchFamily="34" charset="-122"/>
-                <a:cs typeface="Barlow Condensed" pitchFamily="34" charset="-120"/>
-              </a:rPr>
-              <a:t>HEADCOUNT</a:t>
-            </a:r>
-            <a:endParaRPr lang="en-US" sz="1200" dirty="0"/>
-          </a:p>
-        </p:txBody>
-      </p:sp>
-      <p:sp>
-        <p:nvSpPr>
-          <p:cNvPr id="14" name="Shape 12"/>
-          <p:cNvSpPr/>
-          <p:nvPr/>
-        </p:nvSpPr>
-        <p:spPr>
-          <a:xfrm>
-            <a:off x="6382512" y="3509010"/>
-            <a:ext cx="566928" cy="57150"/>
-          </a:xfrm>
-          <a:prstGeom prst="rect">
-            <a:avLst/>
-          </a:prstGeom>
-          <a:solidFill>
-            <a:srgbClr val="262C35"/>
-          </a:solidFill>
-          <a:ln w="12700">
-            <a:solidFill>
-              <a:srgbClr val="333333"/>
-            </a:solidFill>
-            <a:prstDash val="solid"/>
-          </a:ln>
-        </p:spPr>
-      </p:sp>
-      <p:sp>
-        <p:nvSpPr>
-          <p:cNvPr id="15" name="Text 13"/>
-          <p:cNvSpPr txBox="1"/>
-          <p:nvPr/>
-        </p:nvSpPr>
-        <p:spPr>
-          <a:xfrm>
-            <a:off x="6272784" y="3584448"/>
-            <a:ext cx="786384" cy="274320"/>
-          </a:xfrm>
-          <a:prstGeom prst="rect">
-            <a:avLst/>
-          </a:prstGeom>
-          <a:noFill/>
-          <a:ln/>
-        </p:spPr>
-        <p:txBody>
-          <a:bodyPr wrap="square" lIns="0" tIns="0" rIns="0" bIns="0" rtlCol="0" anchor="t"/>
-          <a:lstStyle/>
-          <a:p>
-            <a:pPr marL="0" indent="0" algn="ctr">
-              <a:buNone/>
-            </a:pPr>
-            <a:r>
-              <a:rPr lang="en-US" sz="1700" dirty="0">
-                <a:solidFill>
-                  <a:srgbClr val="F2F4F7"/>
-                </a:solidFill>
-                <a:latin typeface="Barlow Condensed" pitchFamily="34" charset="0"/>
-                <a:ea typeface="Barlow Condensed" pitchFamily="34" charset="-122"/>
-                <a:cs typeface="Barlow Condensed" pitchFamily="34" charset="-120"/>
-              </a:rPr>
-              <a:t>1</a:t>
-            </a:r>
-            <a:endParaRPr lang="en-US" sz="1700" dirty="0"/>
-          </a:p>
-        </p:txBody>
-      </p:sp>
-      <p:sp>
-        <p:nvSpPr>
-          <p:cNvPr id="16" name="Text 14"/>
-          <p:cNvSpPr txBox="1"/>
-          <p:nvPr/>
-        </p:nvSpPr>
-        <p:spPr>
-          <a:xfrm>
-            <a:off x="6272784" y="3822192"/>
-            <a:ext cx="786384" cy="201168"/>
-          </a:xfrm>
-          <a:prstGeom prst="rect">
-            <a:avLst/>
-          </a:prstGeom>
-          <a:noFill/>
-          <a:ln/>
-        </p:spPr>
-        <p:txBody>
-          <a:bodyPr wrap="square" lIns="0" tIns="0" rIns="0" bIns="0" rtlCol="0" anchor="t"/>
-          <a:lstStyle/>
-          <a:p>
-            <a:pPr marL="0" indent="0" algn="ctr">
-              <a:buNone/>
-            </a:pPr>
-            <a:r>
-              <a:rPr lang="en-US" sz="1100" kern="0" spc="160" dirty="0">
-                <a:solidFill>
-                  <a:srgbClr val="828C9A"/>
-                </a:solidFill>
-                <a:latin typeface="Barlow Condensed" pitchFamily="34" charset="0"/>
-                <a:ea typeface="Barlow Condensed" pitchFamily="34" charset="-122"/>
-                <a:cs typeface="Barlow Condensed" pitchFamily="34" charset="-120"/>
-              </a:rPr>
-              <a:t>Y1</a:t>
-            </a:r>
-            <a:endParaRPr lang="en-US" sz="1100" dirty="0"/>
-          </a:p>
-        </p:txBody>
-      </p:sp>
-      <p:sp>
-        <p:nvSpPr>
-          <p:cNvPr id="17" name="Shape 15"/>
-          <p:cNvSpPr/>
-          <p:nvPr/>
-        </p:nvSpPr>
-        <p:spPr>
-          <a:xfrm>
-            <a:off x="7616952" y="3451860"/>
-            <a:ext cx="566928" cy="114300"/>
-          </a:xfrm>
-          <a:prstGeom prst="rect">
-            <a:avLst/>
-          </a:prstGeom>
-          <a:solidFill>
-            <a:srgbClr val="262C35"/>
-          </a:solidFill>
-          <a:ln w="12700">
-            <a:solidFill>
-              <a:srgbClr val="333333"/>
-            </a:solidFill>
-            <a:prstDash val="solid"/>
-          </a:ln>
-        </p:spPr>
-      </p:sp>
-      <p:sp>
-        <p:nvSpPr>
-          <p:cNvPr id="18" name="Text 16"/>
-          <p:cNvSpPr txBox="1"/>
-          <p:nvPr/>
-        </p:nvSpPr>
-        <p:spPr>
-          <a:xfrm>
-            <a:off x="7507224" y="3584448"/>
-            <a:ext cx="786384" cy="274320"/>
-          </a:xfrm>
-          <a:prstGeom prst="rect">
-            <a:avLst/>
-          </a:prstGeom>
-          <a:noFill/>
-          <a:ln/>
-        </p:spPr>
-        <p:txBody>
-          <a:bodyPr wrap="square" lIns="0" tIns="0" rIns="0" bIns="0" rtlCol="0" anchor="t"/>
-          <a:lstStyle/>
-          <a:p>
-            <a:pPr marL="0" indent="0" algn="ctr">
-              <a:buNone/>
-            </a:pPr>
-            <a:r>
-              <a:rPr lang="en-US" sz="1700" dirty="0">
-                <a:solidFill>
-                  <a:srgbClr val="F2F4F7"/>
-                </a:solidFill>
-                <a:latin typeface="Barlow Condensed" pitchFamily="34" charset="0"/>
-                <a:ea typeface="Barlow Condensed" pitchFamily="34" charset="-122"/>
-                <a:cs typeface="Barlow Condensed" pitchFamily="34" charset="-120"/>
-              </a:rPr>
-              <a:t>2</a:t>
-            </a:r>
-            <a:endParaRPr lang="en-US" sz="1700" dirty="0"/>
-          </a:p>
-        </p:txBody>
-      </p:sp>
-      <p:sp>
-        <p:nvSpPr>
-          <p:cNvPr id="19" name="Text 17"/>
-          <p:cNvSpPr txBox="1"/>
-          <p:nvPr/>
-        </p:nvSpPr>
-        <p:spPr>
-          <a:xfrm>
-            <a:off x="7507224" y="3822192"/>
-            <a:ext cx="786384" cy="201168"/>
-          </a:xfrm>
-          <a:prstGeom prst="rect">
-            <a:avLst/>
-          </a:prstGeom>
-          <a:noFill/>
-          <a:ln/>
-        </p:spPr>
-        <p:txBody>
-          <a:bodyPr wrap="square" lIns="0" tIns="0" rIns="0" bIns="0" rtlCol="0" anchor="t"/>
-          <a:lstStyle/>
-          <a:p>
-            <a:pPr marL="0" indent="0" algn="ctr">
-              <a:buNone/>
-            </a:pPr>
-            <a:r>
-              <a:rPr lang="en-US" sz="1100" kern="0" spc="160" dirty="0">
-                <a:solidFill>
-                  <a:srgbClr val="828C9A"/>
-                </a:solidFill>
-                <a:latin typeface="Barlow Condensed" pitchFamily="34" charset="0"/>
-                <a:ea typeface="Barlow Condensed" pitchFamily="34" charset="-122"/>
-                <a:cs typeface="Barlow Condensed" pitchFamily="34" charset="-120"/>
-              </a:rPr>
-              <a:t>Y4</a:t>
-            </a:r>
-            <a:endParaRPr lang="en-US" sz="1100" dirty="0"/>
-          </a:p>
-        </p:txBody>
-      </p:sp>
-      <p:sp>
-        <p:nvSpPr>
-          <p:cNvPr id="20" name="Shape 18"/>
-          <p:cNvSpPr/>
-          <p:nvPr/>
-        </p:nvSpPr>
-        <p:spPr>
-          <a:xfrm>
-            <a:off x="8851392" y="2994660"/>
-            <a:ext cx="566928" cy="571500"/>
-          </a:xfrm>
-          <a:prstGeom prst="rect">
-            <a:avLst/>
-          </a:prstGeom>
-          <a:solidFill>
-            <a:srgbClr val="262C35"/>
-          </a:solidFill>
-          <a:ln w="12700">
-            <a:solidFill>
-              <a:srgbClr val="333333"/>
-            </a:solidFill>
-            <a:prstDash val="solid"/>
-          </a:ln>
-        </p:spPr>
-      </p:sp>
-      <p:sp>
-        <p:nvSpPr>
-          <p:cNvPr id="21" name="Text 19"/>
-          <p:cNvSpPr txBox="1"/>
-          <p:nvPr/>
-        </p:nvSpPr>
-        <p:spPr>
-          <a:xfrm>
-            <a:off x="8741664" y="3584448"/>
-            <a:ext cx="786384" cy="274320"/>
-          </a:xfrm>
-          <a:prstGeom prst="rect">
-            <a:avLst/>
-          </a:prstGeom>
-          <a:noFill/>
-          <a:ln/>
-        </p:spPr>
-        <p:txBody>
-          <a:bodyPr wrap="square" lIns="0" tIns="0" rIns="0" bIns="0" rtlCol="0" anchor="t"/>
-          <a:lstStyle/>
-          <a:p>
-            <a:pPr marL="0" indent="0" algn="ctr">
-              <a:buNone/>
-            </a:pPr>
-            <a:r>
-              <a:rPr lang="en-US" sz="1700" dirty="0">
-                <a:solidFill>
-                  <a:srgbClr val="F2F4F7"/>
-                </a:solidFill>
-                <a:latin typeface="Barlow Condensed" pitchFamily="34" charset="0"/>
-                <a:ea typeface="Barlow Condensed" pitchFamily="34" charset="-122"/>
-                <a:cs typeface="Barlow Condensed" pitchFamily="34" charset="-120"/>
-              </a:rPr>
-              <a:t>10</a:t>
-            </a:r>
-            <a:endParaRPr lang="en-US" sz="1700" dirty="0"/>
-          </a:p>
-        </p:txBody>
-      </p:sp>
-      <p:sp>
-        <p:nvSpPr>
-          <p:cNvPr id="22" name="Text 20"/>
-          <p:cNvSpPr txBox="1"/>
-          <p:nvPr/>
-        </p:nvSpPr>
-        <p:spPr>
-          <a:xfrm>
-            <a:off x="8741664" y="3822192"/>
-            <a:ext cx="786384" cy="201168"/>
-          </a:xfrm>
-          <a:prstGeom prst="rect">
-            <a:avLst/>
-          </a:prstGeom>
-          <a:noFill/>
-          <a:ln/>
-        </p:spPr>
-        <p:txBody>
-          <a:bodyPr wrap="square" lIns="0" tIns="0" rIns="0" bIns="0" rtlCol="0" anchor="t"/>
-          <a:lstStyle/>
-          <a:p>
-            <a:pPr marL="0" indent="0" algn="ctr">
-              <a:buNone/>
-            </a:pPr>
-            <a:r>
-              <a:rPr lang="en-US" sz="1100" kern="0" spc="160" dirty="0">
-                <a:solidFill>
-                  <a:srgbClr val="828C9A"/>
-                </a:solidFill>
-                <a:latin typeface="Barlow Condensed" pitchFamily="34" charset="0"/>
-                <a:ea typeface="Barlow Condensed" pitchFamily="34" charset="-122"/>
-                <a:cs typeface="Barlow Condensed" pitchFamily="34" charset="-120"/>
-              </a:rPr>
-              <a:t>Y7</a:t>
-            </a:r>
-            <a:endParaRPr lang="en-US" sz="1100" dirty="0"/>
-          </a:p>
-        </p:txBody>
-      </p:sp>
-      <p:sp>
-        <p:nvSpPr>
-          <p:cNvPr id="23" name="Shape 21"/>
-          <p:cNvSpPr/>
-          <p:nvPr/>
-        </p:nvSpPr>
-        <p:spPr>
-          <a:xfrm>
-            <a:off x="10085832" y="2651760"/>
-            <a:ext cx="566928" cy="914400"/>
-          </a:xfrm>
-          <a:prstGeom prst="rect">
-            <a:avLst/>
-          </a:prstGeom>
-          <a:solidFill>
-            <a:srgbClr val="FFB020"/>
-          </a:solidFill>
-          <a:ln w="12700">
-            <a:solidFill>
-              <a:srgbClr val="333333"/>
-            </a:solidFill>
-            <a:prstDash val="solid"/>
-          </a:ln>
-        </p:spPr>
-      </p:sp>
-      <p:sp>
-        <p:nvSpPr>
-          <p:cNvPr id="24" name="Text 22"/>
-          <p:cNvSpPr txBox="1"/>
-          <p:nvPr/>
-        </p:nvSpPr>
-        <p:spPr>
-          <a:xfrm>
-            <a:off x="9976104" y="3584448"/>
-            <a:ext cx="786384" cy="274320"/>
-          </a:xfrm>
-          <a:prstGeom prst="rect">
-            <a:avLst/>
-          </a:prstGeom>
-          <a:noFill/>
-          <a:ln/>
-        </p:spPr>
-        <p:txBody>
-          <a:bodyPr wrap="square" lIns="0" tIns="0" rIns="0" bIns="0" rtlCol="0" anchor="t"/>
-          <a:lstStyle/>
-          <a:p>
-            <a:pPr marL="0" indent="0" algn="ctr">
-              <a:buNone/>
-            </a:pPr>
-            <a:r>
-              <a:rPr lang="en-US" sz="1700" dirty="0">
-                <a:solidFill>
-                  <a:srgbClr val="F2F4F7"/>
-                </a:solidFill>
-                <a:latin typeface="Barlow Condensed" pitchFamily="34" charset="0"/>
-                <a:ea typeface="Barlow Condensed" pitchFamily="34" charset="-122"/>
-                <a:cs typeface="Barlow Condensed" pitchFamily="34" charset="-120"/>
-              </a:rPr>
-              <a:t>16</a:t>
-            </a:r>
-            <a:endParaRPr lang="en-US" sz="1700" dirty="0"/>
-          </a:p>
-        </p:txBody>
-      </p:sp>
-      <p:sp>
-        <p:nvSpPr>
-          <p:cNvPr id="25" name="Text 23"/>
-          <p:cNvSpPr txBox="1"/>
-          <p:nvPr/>
-        </p:nvSpPr>
-        <p:spPr>
-          <a:xfrm>
-            <a:off x="9976104" y="3822192"/>
-            <a:ext cx="786384" cy="201168"/>
-          </a:xfrm>
-          <a:prstGeom prst="rect">
-            <a:avLst/>
-          </a:prstGeom>
-          <a:noFill/>
-          <a:ln/>
-        </p:spPr>
-        <p:txBody>
-          <a:bodyPr wrap="square" lIns="0" tIns="0" rIns="0" bIns="0" rtlCol="0" anchor="t"/>
-          <a:lstStyle/>
-          <a:p>
-            <a:pPr marL="0" indent="0" algn="ctr">
-              <a:buNone/>
-            </a:pPr>
-            <a:r>
-              <a:rPr lang="en-US" sz="1100" kern="0" spc="160" dirty="0">
-                <a:solidFill>
-                  <a:srgbClr val="828C9A"/>
-                </a:solidFill>
-                <a:latin typeface="Barlow Condensed" pitchFamily="34" charset="0"/>
-                <a:ea typeface="Barlow Condensed" pitchFamily="34" charset="-122"/>
-                <a:cs typeface="Barlow Condensed" pitchFamily="34" charset="-120"/>
-              </a:rPr>
-              <a:t>Y10</a:t>
-            </a:r>
-            <a:endParaRPr lang="en-US" sz="1100" dirty="0"/>
-          </a:p>
-        </p:txBody>
-      </p:sp>
-      <p:sp>
-        <p:nvSpPr>
-          <p:cNvPr id="26" name="Text 24"/>
-          <p:cNvSpPr txBox="1"/>
-          <p:nvPr/>
-        </p:nvSpPr>
-        <p:spPr>
-          <a:xfrm>
-            <a:off x="713232" y="4187952"/>
-            <a:ext cx="10765231" cy="640080"/>
-          </a:xfrm>
-          <a:prstGeom prst="rect">
-            <a:avLst/>
-          </a:prstGeom>
-          <a:noFill/>
-          <a:ln/>
-        </p:spPr>
-        <p:txBody>
-          <a:bodyPr wrap="square" lIns="0" tIns="0" rIns="0" bIns="0" rtlCol="0" anchor="t"/>
-          <a:lstStyle/>
-          <a:p>
-            <a:pPr marL="0" indent="0">
-              <a:lnSpc>
-                <a:spcPts val="1900"/>
-              </a:lnSpc>
-              <a:buNone/>
-            </a:pPr>
-            <a:r>
-              <a:rPr lang="en-US" sz="1400" dirty="0">
-                <a:solidFill>
-                  <a:srgbClr val="AEB6C2"/>
-                </a:solidFill>
-                <a:latin typeface="Barlow" pitchFamily="34" charset="0"/>
-                <a:ea typeface="Barlow" pitchFamily="34" charset="-122"/>
-                <a:cs typeface="Barlow" pitchFamily="34" charset="-120"/>
-              </a:rPr>
               <a:t>The only human step in the value chain is admission review, and it scales with applications rather than with transactions. That is why sixteen people can run this. Sponsoo took eleven years to reach thirteen, so the comparison is deliberate rather than optimistic.</a:t>
             </a:r>
             <a:endParaRPr lang="en-US" sz="1400" dirty="0"/>
-          </a:p>
-        </p:txBody>
-      </p:sp>
-      <p:sp>
-        <p:nvSpPr>
-          <p:cNvPr id="27" name="Shape 25"/>
-          <p:cNvSpPr/>
-          <p:nvPr/>
-        </p:nvSpPr>
-        <p:spPr>
-          <a:xfrm>
-            <a:off x="713232" y="4828032"/>
-            <a:ext cx="10765231" cy="859536"/>
-          </a:xfrm>
-          <a:prstGeom prst="roundRect">
-            <a:avLst>
-              <a:gd name="adj" fmla="val 4255"/>
-            </a:avLst>
-          </a:prstGeom>
-          <a:solidFill>
-            <a:srgbClr val="1F242C"/>
-          </a:solidFill>
-          <a:ln w="9525">
-            <a:solidFill>
-              <a:srgbClr val="262C35"/>
-            </a:solidFill>
-            <a:prstDash val="solid"/>
-          </a:ln>
-        </p:spPr>
-      </p:sp>
-      <p:sp>
-        <p:nvSpPr>
-          <p:cNvPr id="28" name="Text 26"/>
-          <p:cNvSpPr txBox="1"/>
-          <p:nvPr/>
-        </p:nvSpPr>
-        <p:spPr>
-          <a:xfrm>
-            <a:off x="987552" y="5029200"/>
-            <a:ext cx="3840480" cy="237744"/>
-          </a:xfrm>
-          <a:prstGeom prst="rect">
-            <a:avLst/>
-          </a:prstGeom>
-          <a:noFill/>
-          <a:ln/>
-        </p:spPr>
-        <p:txBody>
-          <a:bodyPr wrap="square" lIns="0" tIns="0" rIns="0" bIns="0" rtlCol="0" anchor="t"/>
-          <a:lstStyle/>
-          <a:p>
-            <a:pPr marL="0" indent="0">
-              <a:buNone/>
-            </a:pPr>
-            <a:r>
-              <a:rPr lang="en-US" sz="1250" kern="0" spc="220" dirty="0">
-                <a:solidFill>
-                  <a:srgbClr val="FF8A3D"/>
-                </a:solidFill>
-                <a:latin typeface="Barlow Condensed" pitchFamily="34" charset="0"/>
-                <a:ea typeface="Barlow Condensed" pitchFamily="34" charset="-122"/>
-                <a:cs typeface="Barlow Condensed" pitchFamily="34" charset="-120"/>
-              </a:rPr>
-              <a:t>THE ASSUMPTION I AM MOST EXPOSED ON</a:t>
-            </a:r>
-            <a:endParaRPr lang="en-US" sz="1250" dirty="0"/>
-          </a:p>
-        </p:txBody>
-      </p:sp>
-      <p:sp>
-        <p:nvSpPr>
-          <p:cNvPr id="29" name="Text 27"/>
-          <p:cNvSpPr txBox="1"/>
-          <p:nvPr/>
-        </p:nvSpPr>
-        <p:spPr>
-          <a:xfrm>
-            <a:off x="5010912" y="4992624"/>
-            <a:ext cx="6284671" cy="603504"/>
-          </a:xfrm>
-          <a:prstGeom prst="rect">
-            <a:avLst/>
-          </a:prstGeom>
-          <a:noFill/>
-          <a:ln/>
-        </p:spPr>
-        <p:txBody>
-          <a:bodyPr wrap="square" lIns="0" tIns="0" rIns="0" bIns="0" rtlCol="0" anchor="t"/>
-          <a:lstStyle/>
-          <a:p>
-            <a:pPr marL="0" indent="0">
-              <a:lnSpc>
-                <a:spcPts val="1700"/>
-              </a:lnSpc>
-              <a:buNone/>
-            </a:pPr>
-            <a:r>
-              <a:rPr lang="en-US" sz="1250" dirty="0">
-                <a:solidFill>
-                  <a:srgbClr val="AEB6C2"/>
-                </a:solidFill>
-                <a:latin typeface="Barlow" pitchFamily="34" charset="0"/>
-                <a:ea typeface="Barlow" pitchFamily="34" charset="-122"/>
-                <a:cs typeface="Barlow" pitchFamily="34" charset="-120"/>
-              </a:rPr>
-              <a:t>€301k of revenue per employee at Y7, against a private B2B SaaS median of €135k. If I am wrong, the first thing to give is headcount, which means slower growth rather than a cash crisis.</a:t>
-            </a:r>
-            <a:endParaRPr lang="en-US" sz="1250" dirty="0"/>
           </a:p>
         </p:txBody>
       </p:sp>
@@ -11593,7 +11818,7 @@
           </a:prstGeom>
           <a:extLst>
             <a:ext uri="{C572A759-6A51-4108-AA02-DFA0A04FC94B}">
-              <ma14:wrappingTextBoxFlag xmlns:ma14="http://schemas.microsoft.com/office/mac/drawingml/2011/main" xmlns="" val="0"/>
+              <ma14:wrappingTextBoxFlag xmlns="" xmlns:ma14="http://schemas.microsoft.com/office/mac/drawingml/2011/main" val="0"/>
             </a:ext>
           </a:extLst>
         </p:spPr>
@@ -12075,7 +12300,7 @@
         </p:nvSpPr>
         <p:spPr>
           <a:xfrm>
-            <a:off x="713232" y="5193792"/>
+            <a:off x="713232" y="5627425"/>
             <a:ext cx="10765231" cy="457200"/>
           </a:xfrm>
           <a:prstGeom prst="rect">
@@ -12129,7 +12354,7 @@
           </a:prstGeom>
           <a:extLst>
             <a:ext uri="{C572A759-6A51-4108-AA02-DFA0A04FC94B}">
-              <ma14:wrappingTextBoxFlag xmlns:ma14="http://schemas.microsoft.com/office/mac/drawingml/2011/main" xmlns="" val="0"/>
+              <ma14:wrappingTextBoxFlag xmlns="" xmlns:ma14="http://schemas.microsoft.com/office/mac/drawingml/2011/main" val="0"/>
             </a:ext>
           </a:extLst>
         </p:spPr>
@@ -12815,7 +13040,7 @@
         </p:nvSpPr>
         <p:spPr>
           <a:xfrm>
-            <a:off x="713232" y="5102352"/>
+            <a:off x="713232" y="5535985"/>
             <a:ext cx="10765231" cy="548640"/>
           </a:xfrm>
           <a:prstGeom prst="rect">
@@ -12869,7 +13094,7 @@
           </a:prstGeom>
           <a:extLst>
             <a:ext uri="{C572A759-6A51-4108-AA02-DFA0A04FC94B}">
-              <ma14:wrappingTextBoxFlag xmlns:ma14="http://schemas.microsoft.com/office/mac/drawingml/2011/main" xmlns="" val="0"/>
+              <ma14:wrappingTextBoxFlag xmlns="" xmlns:ma14="http://schemas.microsoft.com/office/mac/drawingml/2011/main" val="0"/>
             </a:ext>
           </a:extLst>
         </p:spPr>
@@ -14301,7 +14526,7 @@
           </a:prstGeom>
           <a:extLst>
             <a:ext uri="{C572A759-6A51-4108-AA02-DFA0A04FC94B}">
-              <ma14:wrappingTextBoxFlag xmlns:ma14="http://schemas.microsoft.com/office/mac/drawingml/2011/main" xmlns="" val="0"/>
+              <ma14:wrappingTextBoxFlag xmlns="" xmlns:ma14="http://schemas.microsoft.com/office/mac/drawingml/2011/main" val="0"/>
             </a:ext>
           </a:extLst>
         </p:spPr>
@@ -14379,7 +14604,7 @@
               <a:buNone/>
             </a:pPr>
             <a:r>
-              <a:rPr lang="en-US" sz="1500" kern="0" spc="340" dirty="0">
+              <a:rPr lang="en-US" sz="3600" kern="0" spc="340" dirty="0">
                 <a:solidFill>
                   <a:srgbClr val="FFB020"/>
                 </a:solidFill>
@@ -14387,90 +14612,9 @@
                 <a:ea typeface="Barlow Condensed" pitchFamily="34" charset="-122"/>
                 <a:cs typeface="Barlow Condensed" pitchFamily="34" charset="-120"/>
               </a:rPr>
-              <a:t>BACKUP</a:t>
-            </a:r>
-            <a:endParaRPr lang="en-US" sz="1500" dirty="0"/>
-          </a:p>
-        </p:txBody>
-      </p:sp>
-      <p:sp>
-        <p:nvSpPr>
-          <p:cNvPr id="3" name="Text 1"/>
-          <p:cNvSpPr txBox="1"/>
-          <p:nvPr/>
-        </p:nvSpPr>
-        <p:spPr>
-          <a:xfrm>
-            <a:off x="713232" y="3218688"/>
-            <a:ext cx="10765231" cy="731520"/>
-          </a:xfrm>
-          <a:prstGeom prst="rect">
-            <a:avLst/>
-          </a:prstGeom>
-          <a:noFill/>
-          <a:ln/>
-        </p:spPr>
-        <p:txBody>
-          <a:bodyPr wrap="square" lIns="0" tIns="0" rIns="0" bIns="0" rtlCol="0" anchor="t"/>
-          <a:lstStyle/>
-          <a:p>
-            <a:pPr marL="0" indent="0">
-              <a:buNone/>
-            </a:pPr>
-            <a:r>
-              <a:rPr lang="en-US" sz="4000" dirty="0">
-                <a:solidFill>
-                  <a:srgbClr val="F2F4F7"/>
-                </a:solidFill>
-                <a:latin typeface="Barlow Condensed" pitchFamily="34" charset="0"/>
-                <a:ea typeface="Barlow Condensed" pitchFamily="34" charset="-122"/>
-                <a:cs typeface="Barlow Condensed" pitchFamily="34" charset="-120"/>
-              </a:rPr>
-              <a:t>Held for questions</a:t>
-            </a:r>
-            <a:endParaRPr lang="en-US" sz="4000" dirty="0"/>
-          </a:p>
-        </p:txBody>
-      </p:sp>
-      <p:sp>
-        <p:nvSpPr>
-          <p:cNvPr id="4" name="Text 2"/>
-          <p:cNvSpPr txBox="1"/>
-          <p:nvPr/>
-        </p:nvSpPr>
-        <p:spPr>
-          <a:xfrm>
-            <a:off x="713232" y="3977640"/>
-            <a:ext cx="9509760" cy="640080"/>
-          </a:xfrm>
-          <a:prstGeom prst="rect">
-            <a:avLst/>
-          </a:prstGeom>
-          <a:noFill/>
-          <a:ln/>
-        </p:spPr>
-        <p:txBody>
-          <a:bodyPr wrap="square" lIns="0" tIns="0" rIns="0" bIns="0" rtlCol="0" anchor="t"/>
-          <a:lstStyle/>
-          <a:p>
-            <a:pPr marL="0" indent="0">
-              <a:lnSpc>
-                <a:spcPts val="2200"/>
-              </a:lnSpc>
-              <a:buNone/>
-            </a:pPr>
-            <a:r>
-              <a:rPr lang="en-US" sz="1400" dirty="0">
-                <a:solidFill>
-                  <a:srgbClr val="828C9A"/>
-                </a:solidFill>
-                <a:latin typeface="Barlow" pitchFamily="34" charset="0"/>
-                <a:ea typeface="Barlow" pitchFamily="34" charset="-122"/>
-                <a:cs typeface="Barlow" pitchFamily="34" charset="-120"/>
-              </a:rPr>
-              <a:t>The four steps, the matching arithmetic, how we differ from the data companies, pricing, scenarios, risk, valuation and the admission gate.</a:t>
-            </a:r>
-            <a:endParaRPr lang="en-US" sz="1400" dirty="0"/>
+              <a:t>APPENDIX</a:t>
+            </a:r>
+            <a:endParaRPr lang="en-US" sz="3600" dirty="0"/>
           </a:p>
         </p:txBody>
       </p:sp>
@@ -15338,7 +15482,7 @@
           </a:prstGeom>
           <a:extLst>
             <a:ext uri="{C572A759-6A51-4108-AA02-DFA0A04FC94B}">
-              <ma14:wrappingTextBoxFlag xmlns:ma14="http://schemas.microsoft.com/office/mac/drawingml/2011/main" xmlns="" val="0"/>
+              <ma14:wrappingTextBoxFlag xmlns="" xmlns:ma14="http://schemas.microsoft.com/office/mac/drawingml/2011/main" val="0"/>
             </a:ext>
           </a:extLst>
         </p:spPr>
@@ -15840,7 +15984,7 @@
           </a:prstGeom>
           <a:extLst>
             <a:ext uri="{C572A759-6A51-4108-AA02-DFA0A04FC94B}">
-              <ma14:wrappingTextBoxFlag xmlns:ma14="http://schemas.microsoft.com/office/mac/drawingml/2011/main" xmlns="" val="0"/>
+              <ma14:wrappingTextBoxFlag xmlns="" xmlns:ma14="http://schemas.microsoft.com/office/mac/drawingml/2011/main" val="0"/>
             </a:ext>
           </a:extLst>
         </p:spPr>
@@ -17343,7 +17487,7 @@
           </a:prstGeom>
           <a:extLst>
             <a:ext uri="{C572A759-6A51-4108-AA02-DFA0A04FC94B}">
-              <ma14:wrappingTextBoxFlag xmlns:ma14="http://schemas.microsoft.com/office/mac/drawingml/2011/main" xmlns="" val="0"/>
+              <ma14:wrappingTextBoxFlag xmlns="" xmlns:ma14="http://schemas.microsoft.com/office/mac/drawingml/2011/main" val="0"/>
             </a:ext>
           </a:extLst>
         </p:spPr>
@@ -18070,7 +18214,7 @@
           </a:prstGeom>
           <a:extLst>
             <a:ext uri="{C572A759-6A51-4108-AA02-DFA0A04FC94B}">
-              <ma14:wrappingTextBoxFlag xmlns:ma14="http://schemas.microsoft.com/office/mac/drawingml/2011/main" xmlns="" val="0"/>
+              <ma14:wrappingTextBoxFlag xmlns="" xmlns:ma14="http://schemas.microsoft.com/office/mac/drawingml/2011/main" val="0"/>
             </a:ext>
           </a:extLst>
         </p:spPr>
@@ -19333,7 +19477,7 @@
           </a:prstGeom>
           <a:extLst>
             <a:ext uri="{C572A759-6A51-4108-AA02-DFA0A04FC94B}">
-              <ma14:wrappingTextBoxFlag xmlns:ma14="http://schemas.microsoft.com/office/mac/drawingml/2011/main" xmlns="" val="0"/>
+              <ma14:wrappingTextBoxFlag xmlns="" xmlns:ma14="http://schemas.microsoft.com/office/mac/drawingml/2011/main" val="0"/>
             </a:ext>
           </a:extLst>
         </p:spPr>
@@ -20138,7 +20282,7 @@
           </a:prstGeom>
           <a:extLst>
             <a:ext uri="{C572A759-6A51-4108-AA02-DFA0A04FC94B}">
-              <ma14:wrappingTextBoxFlag xmlns:ma14="http://schemas.microsoft.com/office/mac/drawingml/2011/main" xmlns="" val="0"/>
+              <ma14:wrappingTextBoxFlag xmlns="" xmlns:ma14="http://schemas.microsoft.com/office/mac/drawingml/2011/main" val="0"/>
             </a:ext>
           </a:extLst>
         </p:spPr>
@@ -21298,7 +21442,7 @@
           </a:prstGeom>
           <a:extLst>
             <a:ext uri="{C572A759-6A51-4108-AA02-DFA0A04FC94B}">
-              <ma14:wrappingTextBoxFlag xmlns:ma14="http://schemas.microsoft.com/office/mac/drawingml/2011/main" xmlns="" val="0"/>
+              <ma14:wrappingTextBoxFlag xmlns="" xmlns:ma14="http://schemas.microsoft.com/office/mac/drawingml/2011/main" val="0"/>
             </a:ext>
           </a:extLst>
         </p:spPr>
@@ -22136,7 +22280,7 @@
           </a:prstGeom>
           <a:extLst>
             <a:ext uri="{C572A759-6A51-4108-AA02-DFA0A04FC94B}">
-              <ma14:wrappingTextBoxFlag xmlns:ma14="http://schemas.microsoft.com/office/mac/drawingml/2011/main" xmlns="" val="0"/>
+              <ma14:wrappingTextBoxFlag xmlns="" xmlns:ma14="http://schemas.microsoft.com/office/mac/drawingml/2011/main" val="0"/>
             </a:ext>
           </a:extLst>
         </p:spPr>
@@ -22942,7 +23086,7 @@
           </a:prstGeom>
           <a:extLst>
             <a:ext uri="{C572A759-6A51-4108-AA02-DFA0A04FC94B}">
-              <ma14:wrappingTextBoxFlag xmlns:ma14="http://schemas.microsoft.com/office/mac/drawingml/2011/main" xmlns="" val="0"/>
+              <ma14:wrappingTextBoxFlag xmlns="" xmlns:ma14="http://schemas.microsoft.com/office/mac/drawingml/2011/main" val="0"/>
             </a:ext>
           </a:extLst>
         </p:spPr>
@@ -23321,7 +23465,7 @@
         </p:nvSpPr>
         <p:spPr>
           <a:xfrm>
-            <a:off x="713232" y="3913632"/>
+            <a:off x="713232" y="4465720"/>
             <a:ext cx="3405530" cy="1188720"/>
           </a:xfrm>
           <a:prstGeom prst="roundRect">
@@ -23348,7 +23492,7 @@
         </p:nvSpPr>
         <p:spPr>
           <a:xfrm>
-            <a:off x="950976" y="4096512"/>
+            <a:off x="950976" y="4648600"/>
             <a:ext cx="2930042" cy="256032"/>
           </a:xfrm>
           <a:prstGeom prst="rect">
@@ -23387,7 +23531,7 @@
         </p:nvSpPr>
         <p:spPr>
           <a:xfrm>
-            <a:off x="950976" y="4407408"/>
+            <a:off x="950976" y="4959496"/>
             <a:ext cx="2930042" cy="713232"/>
           </a:xfrm>
           <a:prstGeom prst="rect">
@@ -23429,7 +23573,7 @@
         </p:nvSpPr>
         <p:spPr>
           <a:xfrm>
-            <a:off x="4393082" y="3913632"/>
+            <a:off x="4393082" y="4465720"/>
             <a:ext cx="3405530" cy="1188720"/>
           </a:xfrm>
           <a:prstGeom prst="roundRect">
@@ -23456,7 +23600,7 @@
         </p:nvSpPr>
         <p:spPr>
           <a:xfrm>
-            <a:off x="4630826" y="4096512"/>
+            <a:off x="4630826" y="4648600"/>
             <a:ext cx="2930042" cy="256032"/>
           </a:xfrm>
           <a:prstGeom prst="rect">
@@ -23495,7 +23639,7 @@
         </p:nvSpPr>
         <p:spPr>
           <a:xfrm>
-            <a:off x="4630826" y="4407408"/>
+            <a:off x="4630826" y="4959496"/>
             <a:ext cx="2930042" cy="713232"/>
           </a:xfrm>
           <a:prstGeom prst="rect">
@@ -23564,7 +23708,7 @@
         </p:nvSpPr>
         <p:spPr>
           <a:xfrm>
-            <a:off x="8310677" y="4096512"/>
+            <a:off x="8310677" y="4648600"/>
             <a:ext cx="2930042" cy="256032"/>
           </a:xfrm>
           <a:prstGeom prst="rect">
@@ -23603,7 +23747,7 @@
         </p:nvSpPr>
         <p:spPr>
           <a:xfrm>
-            <a:off x="8310677" y="4407408"/>
+            <a:off x="8310677" y="4959496"/>
             <a:ext cx="2930042" cy="713232"/>
           </a:xfrm>
           <a:prstGeom prst="rect">
@@ -23657,7 +23801,7 @@
           </a:prstGeom>
           <a:extLst>
             <a:ext uri="{C572A759-6A51-4108-AA02-DFA0A04FC94B}">
-              <ma14:wrappingTextBoxFlag xmlns:ma14="http://schemas.microsoft.com/office/mac/drawingml/2011/main" xmlns="" val="0"/>
+              <ma14:wrappingTextBoxFlag xmlns="" xmlns:ma14="http://schemas.microsoft.com/office/mac/drawingml/2011/main" val="0"/>
             </a:ext>
           </a:extLst>
         </p:spPr>
@@ -24510,7 +24654,7 @@
           </a:prstGeom>
           <a:extLst>
             <a:ext uri="{C572A759-6A51-4108-AA02-DFA0A04FC94B}">
-              <ma14:wrappingTextBoxFlag xmlns:ma14="http://schemas.microsoft.com/office/mac/drawingml/2011/main" xmlns="" val="0"/>
+              <ma14:wrappingTextBoxFlag xmlns="" xmlns:ma14="http://schemas.microsoft.com/office/mac/drawingml/2011/main" val="0"/>
             </a:ext>
           </a:extLst>
         </p:spPr>
@@ -25278,7 +25422,7 @@
           </a:prstGeom>
           <a:extLst>
             <a:ext uri="{C572A759-6A51-4108-AA02-DFA0A04FC94B}">
-              <ma14:wrappingTextBoxFlag xmlns:ma14="http://schemas.microsoft.com/office/mac/drawingml/2011/main" xmlns="" val="0"/>
+              <ma14:wrappingTextBoxFlag xmlns="" xmlns:ma14="http://schemas.microsoft.com/office/mac/drawingml/2011/main" val="0"/>
             </a:ext>
           </a:extLst>
         </p:spPr>
@@ -26468,7 +26612,7 @@
           </a:prstGeom>
           <a:extLst>
             <a:ext uri="{C572A759-6A51-4108-AA02-DFA0A04FC94B}">
-              <ma14:wrappingTextBoxFlag xmlns:ma14="http://schemas.microsoft.com/office/mac/drawingml/2011/main" xmlns="" val="0"/>
+              <ma14:wrappingTextBoxFlag xmlns="" xmlns:ma14="http://schemas.microsoft.com/office/mac/drawingml/2011/main" val="0"/>
             </a:ext>
           </a:extLst>
         </p:spPr>
@@ -27065,7 +27209,7 @@
       </p:sp>
       <p:pic>
         <p:nvPicPr>
-          <p:cNvPr id="17" name="Image 0" descr="C:\Users\User\OneDrive - Universitat Ramón Llull\Desktop\stride\deck\qr-demo.png"/>
+          <p:cNvPr id="18" name="Image 1" descr="C:\Users\User\OneDrive - Universitat Ramón Llull\Desktop\stride\business-plan\attachments\ui\02-athlete-dashboard.png"/>
           <p:cNvPicPr>
             <a:picLocks noChangeAspect="1"/>
           </p:cNvPicPr>
@@ -27079,30 +27223,6 @@
         </p:blipFill>
         <p:spPr>
           <a:xfrm>
-            <a:off x="713232" y="4956048"/>
-            <a:ext cx="1490472" cy="1508760"/>
-          </a:xfrm>
-          <a:prstGeom prst="rect">
-            <a:avLst/>
-          </a:prstGeom>
-        </p:spPr>
-      </p:pic>
-      <p:pic>
-        <p:nvPicPr>
-          <p:cNvPr id="18" name="Image 1" descr="C:\Users\User\OneDrive - Universitat Ramón Llull\Desktop\stride\business-plan\attachments\ui\02-athlete-dashboard.png"/>
-          <p:cNvPicPr>
-            <a:picLocks noChangeAspect="1"/>
-          </p:cNvPicPr>
-          <p:nvPr/>
-        </p:nvPicPr>
-        <p:blipFill>
-          <a:blip r:embed="rId4"/>
-          <a:stretch>
-            <a:fillRect/>
-          </a:stretch>
-        </p:blipFill>
-        <p:spPr>
-          <a:xfrm>
             <a:off x="4617720" y="685800"/>
             <a:ext cx="7178040" cy="4983480"/>
           </a:xfrm>
@@ -27131,7 +27251,7 @@
           </a:prstGeom>
           <a:extLst>
             <a:ext uri="{C572A759-6A51-4108-AA02-DFA0A04FC94B}">
-              <ma14:wrappingTextBoxFlag xmlns:ma14="http://schemas.microsoft.com/office/mac/drawingml/2011/main" xmlns="" val="0"/>
+              <ma14:wrappingTextBoxFlag xmlns="" xmlns:ma14="http://schemas.microsoft.com/office/mac/drawingml/2011/main" val="0"/>
             </a:ext>
           </a:extLst>
         </p:spPr>
@@ -27159,6 +27279,54 @@
           </a:p>
         </p:txBody>
       </p:sp>
+      <p:pic>
+        <p:nvPicPr>
+          <p:cNvPr id="20" name="Picture 19">
+            <a:extLst>
+              <a:ext uri="{FF2B5EF4-FFF2-40B4-BE49-F238E27FC236}">
+                <a16:creationId xmlns:a16="http://schemas.microsoft.com/office/drawing/2014/main" id="{AFD7C2E5-68B8-18D0-4B41-0133556E7EF6}"/>
+              </a:ext>
+            </a:extLst>
+          </p:cNvPr>
+          <p:cNvPicPr>
+            <a:picLocks noChangeAspect="1"/>
+          </p:cNvPicPr>
+          <p:nvPr/>
+        </p:nvPicPr>
+        <p:blipFill>
+          <a:blip r:embed="rId4">
+            <a:clrChange>
+              <a:clrFrom>
+                <a:srgbClr val="FFFFFF"/>
+              </a:clrFrom>
+              <a:clrTo>
+                <a:srgbClr val="FFFFFF">
+                  <a:alpha val="0"/>
+                </a:srgbClr>
+              </a:clrTo>
+            </a:clrChange>
+            <a:duotone>
+              <a:schemeClr val="accent4">
+                <a:shade val="45000"/>
+                <a:satMod val="135000"/>
+              </a:schemeClr>
+              <a:prstClr val="white"/>
+            </a:duotone>
+          </a:blip>
+          <a:stretch>
+            <a:fillRect/>
+          </a:stretch>
+        </p:blipFill>
+        <p:spPr>
+          <a:xfrm>
+            <a:off x="713232" y="4883616"/>
+            <a:ext cx="1636056" cy="1636056"/>
+          </a:xfrm>
+          <a:prstGeom prst="rect">
+            <a:avLst/>
+          </a:prstGeom>
+        </p:spPr>
+      </p:pic>
     </p:spTree>
   </p:cSld>
   <p:clrMapOvr>
@@ -27773,7 +27941,7 @@
           </a:prstGeom>
           <a:extLst>
             <a:ext uri="{C572A759-6A51-4108-AA02-DFA0A04FC94B}">
-              <ma14:wrappingTextBoxFlag xmlns:ma14="http://schemas.microsoft.com/office/mac/drawingml/2011/main" xmlns="" val="0"/>
+              <ma14:wrappingTextBoxFlag xmlns="" xmlns:ma14="http://schemas.microsoft.com/office/mac/drawingml/2011/main" val="0"/>
             </a:ext>
           </a:extLst>
         </p:spPr>
